--- a/slide_baocao/BaoCao_GiuaKy_Nhom13.pptx
+++ b/slide_baocao/BaoCao_GiuaKy_Nhom13.pptx
@@ -3148,14 +3148,14 @@
         </p:nvSpPr>
         <p:spPr>
           <a:xfrm>
-            <a:off x="731520" y="1097280"/>
-            <a:ext cx="109728" cy="4389120"/>
+            <a:off x="594360" y="914400"/>
+            <a:ext cx="91440" cy="4937760"/>
           </a:xfrm>
           <a:prstGeom prst="rect">
             <a:avLst/>
           </a:prstGeom>
           <a:solidFill>
-            <a:srgbClr val="3CA0F0"/>
+            <a:srgbClr val="38BDF8"/>
           </a:solidFill>
           <a:ln>
             <a:noFill/>
@@ -3191,8 +3191,8 @@
         </p:nvSpPr>
         <p:spPr>
           <a:xfrm>
-            <a:off x="1097280" y="1097280"/>
-            <a:ext cx="10241280" cy="4572000"/>
+            <a:off x="868680" y="914400"/>
+            <a:ext cx="6583680" cy="4937760"/>
           </a:xfrm>
           <a:prstGeom prst="rect">
             <a:avLst/>
@@ -3207,16 +3207,20 @@
           <a:p>
             <a:pPr>
               <a:spcAft>
-                <a:spcPts val="2000"/>
+                <a:spcPts val="1600"/>
               </a:spcAft>
               <a:defRPr sz="1200" b="1">
                 <a:solidFill>
-                  <a:srgbClr val="B4D2F5"/>
-                </a:solidFill>
-              </a:defRPr>
-            </a:pPr>
-            <a:r>
-              <a:t>TRƯỜNG ĐẠI HỌC CÔNG NGHỆ – ĐHQGHN  |  KHOA CƠ HỌC KỸ THUẬT VÀ TỰ ĐỘNG HÓA</a:t>
+                  <a:srgbClr val="93C5FD"/>
+                </a:solidFill>
+              </a:defRPr>
+            </a:pPr>
+            <a:r>
+              <a:t>ĐẠI HỌC QUỐC GIA HÀ NỘI</a:t>
+            </a:r>
+            <a:br/>
+            <a:r>
+              <a:t>TRƯỜNG ĐẠI HỌC CÔNG NGHỆ (UET)</a:t>
             </a:r>
           </a:p>
           <a:p>
@@ -3224,9 +3228,9 @@
               <a:spcAft>
                 <a:spcPts val="1200"/>
               </a:spcAft>
-              <a:defRPr sz="1600" b="1">
-                <a:solidFill>
-                  <a:srgbClr val="FFC850"/>
+              <a:defRPr sz="1400" b="1">
+                <a:solidFill>
+                  <a:srgbClr val="FBBF24"/>
                 </a:solidFill>
               </a:defRPr>
             </a:pPr>
@@ -3236,49 +3240,458 @@
           </a:p>
           <a:p>
             <a:pPr>
-              <a:defRPr sz="2600" b="1">
+              <a:spcAft>
+                <a:spcPts val="1600"/>
+              </a:spcAft>
+              <a:defRPr sz="2300" b="1">
                 <a:solidFill>
                   <a:srgbClr val="FFFFFF"/>
                 </a:solidFill>
               </a:defRPr>
             </a:pPr>
             <a:r>
-              <a:t>THIẾT KẾ MÔ HÌNH HỆ THỐNG CỬA BẢO MẬT ĐA PHƯƠNG THỨC XÁC THỰC</a:t>
-            </a:r>
-          </a:p>
-          <a:p>
-            <a:pPr>
-              <a:spcAft>
-                <a:spcPts val="3600"/>
-              </a:spcAft>
-              <a:defRPr sz="1700">
-                <a:solidFill>
-                  <a:srgbClr val="DCEBFF"/>
-                </a:solidFill>
-              </a:defRPr>
-            </a:pPr>
-            <a:r>
-              <a:t>Tích hợp Sinh trắc học Vân tay AS608, Thẻ từ RFID RC522, Keypad 4x4 &amp; Giám sát Web App ESP32</a:t>
-            </a:r>
-          </a:p>
-          <a:p>
-            <a:pPr>
-              <a:defRPr sz="1350">
-                <a:solidFill>
-                  <a:srgbClr val="C8DCF5"/>
-                </a:solidFill>
-              </a:defRPr>
-            </a:pPr>
-            <a:r>
-              <a:t>Nhóm thực hiện: Nhóm 13</a:t>
+              <a:t>THIẾT KẾ MÔ HÌNH HỆ THỐNG CỬA BẢO MẬT TÍCH HỢP VÂN TAY AS608, THẺ TỪ RFID RC522, KEYPAD 4x4 &amp; WEB APP</a:t>
+            </a:r>
+          </a:p>
+          <a:p>
+            <a:pPr>
+              <a:defRPr sz="1250">
+                <a:solidFill>
+                  <a:srgbClr val="DBEAFE"/>
+                </a:solidFill>
+              </a:defRPr>
+            </a:pPr>
+            <a:r>
+              <a:t>•  Nhóm thực hiện: Nhóm 13</a:t>
             </a:r>
             <a:br/>
             <a:r>
-              <a:t>•  Nguyễn Tuấn Sơn  —  Phần mềm nhúng ESP32, Giao diện Web App &amp; Báo cáo kỹ thuật</a:t>
+              <a:t>•  Nguyễn Tuấn Sơn — Phần mềm nhúng ESP32, Web App &amp; Báo cáo</a:t>
             </a:r>
             <a:br/>
             <a:r>
-              <a:t>•  Vũ Hữu Hoạt        —  Thiết kế phần cứng, Vẽ mạch in PCB &amp; Mô hình Cơ khí</a:t>
+              <a:t>•  Vũ Hữu Hoạt — Thiết kế phần cứng, Mạch in PCB 2 lớp &amp; Mô hình cơ khí</a:t>
+            </a:r>
+            <a:br/>
+            <a:br/>
+            <a:r>
+              <a:t>•  Tiến độ hiện tại: Đã mua đủ 100% linh kiện, hoàn tất vẽ PCB &amp; triển khai Web App trên Vercel</a:t>
+            </a:r>
+          </a:p>
+        </p:txBody>
+      </p:sp>
+      <p:sp>
+        <p:nvSpPr>
+          <p:cNvPr id="5" name="Rounded Rectangle 4"/>
+          <p:cNvSpPr/>
+          <p:nvPr/>
+        </p:nvSpPr>
+        <p:spPr>
+          <a:xfrm>
+            <a:off x="7635240" y="960120"/>
+            <a:ext cx="4069080" cy="2697480"/>
+          </a:xfrm>
+          <a:prstGeom prst="roundRect">
+            <a:avLst/>
+          </a:prstGeom>
+          <a:solidFill>
+            <a:srgbClr val="FFFFFF"/>
+          </a:solidFill>
+          <a:ln w="15240">
+            <a:solidFill>
+              <a:srgbClr val="DAE1EB"/>
+            </a:solidFill>
+          </a:ln>
+        </p:spPr>
+        <p:style>
+          <a:lnRef idx="1">
+            <a:schemeClr val="accent1"/>
+          </a:lnRef>
+          <a:fillRef idx="3">
+            <a:schemeClr val="accent1"/>
+          </a:fillRef>
+          <a:effectRef idx="2">
+            <a:schemeClr val="accent1"/>
+          </a:effectRef>
+          <a:fontRef idx="minor">
+            <a:schemeClr val="lt1"/>
+          </a:fontRef>
+        </p:style>
+        <p:txBody>
+          <a:bodyPr rtlCol="0" anchor="ctr"/>
+          <a:lstStyle/>
+          <a:p>
+            <a:pPr algn="ctr"/>
+          </a:p>
+        </p:txBody>
+      </p:sp>
+      <p:pic>
+        <p:nvPicPr>
+          <p:cNvPr id="6" name="Picture 5" descr="web_dashboard.png"/>
+          <p:cNvPicPr>
+            <a:picLocks noChangeAspect="1"/>
+          </p:cNvPicPr>
+          <p:nvPr/>
+        </p:nvPicPr>
+        <p:blipFill>
+          <a:blip r:embed="rId2"/>
+          <a:stretch>
+            <a:fillRect/>
+          </a:stretch>
+        </p:blipFill>
+        <p:spPr>
+          <a:xfrm>
+            <a:off x="7975023" y="1069848"/>
+            <a:ext cx="3389514" cy="2130552"/>
+          </a:xfrm>
+          <a:prstGeom prst="rect">
+            <a:avLst/>
+          </a:prstGeom>
+        </p:spPr>
+      </p:pic>
+      <p:sp>
+        <p:nvSpPr>
+          <p:cNvPr id="7" name="TextBox 6"/>
+          <p:cNvSpPr txBox="1"/>
+          <p:nvPr/>
+        </p:nvSpPr>
+        <p:spPr>
+          <a:xfrm>
+            <a:off x="7744968" y="3273552"/>
+            <a:ext cx="3849624" cy="347472"/>
+          </a:xfrm>
+          <a:prstGeom prst="rect">
+            <a:avLst/>
+          </a:prstGeom>
+          <a:noFill/>
+        </p:spPr>
+        <p:txBody>
+          <a:bodyPr wrap="square">
+            <a:spAutoFit/>
+          </a:bodyPr>
+          <a:lstStyle/>
+          <a:p>
+            <a:pPr algn="ctr">
+              <a:defRPr sz="1000" b="1">
+                <a:solidFill>
+                  <a:srgbClr val="0B2347"/>
+                </a:solidFill>
+              </a:defRPr>
+            </a:pPr>
+            <a:r>
+              <a:t>Giao diện Web App đã hoàn thiện</a:t>
+            </a:r>
+          </a:p>
+        </p:txBody>
+      </p:sp>
+      <p:sp>
+        <p:nvSpPr>
+          <p:cNvPr id="8" name="Rounded Rectangle 7"/>
+          <p:cNvSpPr/>
+          <p:nvPr/>
+        </p:nvSpPr>
+        <p:spPr>
+          <a:xfrm>
+            <a:off x="7635240" y="3840480"/>
+            <a:ext cx="1280160" cy="1965960"/>
+          </a:xfrm>
+          <a:prstGeom prst="roundRect">
+            <a:avLst/>
+          </a:prstGeom>
+          <a:solidFill>
+            <a:srgbClr val="FFFFFF"/>
+          </a:solidFill>
+          <a:ln w="15240">
+            <a:solidFill>
+              <a:srgbClr val="DAE1EB"/>
+            </a:solidFill>
+          </a:ln>
+        </p:spPr>
+        <p:style>
+          <a:lnRef idx="1">
+            <a:schemeClr val="accent1"/>
+          </a:lnRef>
+          <a:fillRef idx="3">
+            <a:schemeClr val="accent1"/>
+          </a:fillRef>
+          <a:effectRef idx="2">
+            <a:schemeClr val="accent1"/>
+          </a:effectRef>
+          <a:fontRef idx="minor">
+            <a:schemeClr val="lt1"/>
+          </a:fontRef>
+        </p:style>
+        <p:txBody>
+          <a:bodyPr rtlCol="0" anchor="ctr"/>
+          <a:lstStyle/>
+          <a:p>
+            <a:pPr algn="ctr"/>
+          </a:p>
+        </p:txBody>
+      </p:sp>
+      <p:pic>
+        <p:nvPicPr>
+          <p:cNvPr id="9" name="Picture 8" descr="image2.jpg"/>
+          <p:cNvPicPr>
+            <a:picLocks noChangeAspect="1"/>
+          </p:cNvPicPr>
+          <p:nvPr/>
+        </p:nvPicPr>
+        <p:blipFill>
+          <a:blip r:embed="rId3"/>
+          <a:stretch>
+            <a:fillRect/>
+          </a:stretch>
+        </p:blipFill>
+        <p:spPr>
+          <a:xfrm>
+            <a:off x="7744968" y="4119372"/>
+            <a:ext cx="1060704" cy="1060704"/>
+          </a:xfrm>
+          <a:prstGeom prst="rect">
+            <a:avLst/>
+          </a:prstGeom>
+        </p:spPr>
+      </p:pic>
+      <p:sp>
+        <p:nvSpPr>
+          <p:cNvPr id="10" name="TextBox 9"/>
+          <p:cNvSpPr txBox="1"/>
+          <p:nvPr/>
+        </p:nvSpPr>
+        <p:spPr>
+          <a:xfrm>
+            <a:off x="7744968" y="5422392"/>
+            <a:ext cx="1060704" cy="347472"/>
+          </a:xfrm>
+          <a:prstGeom prst="rect">
+            <a:avLst/>
+          </a:prstGeom>
+          <a:noFill/>
+        </p:spPr>
+        <p:txBody>
+          <a:bodyPr wrap="square">
+            <a:spAutoFit/>
+          </a:bodyPr>
+          <a:lstStyle/>
+          <a:p>
+            <a:pPr algn="ctr">
+              <a:defRPr sz="1000" b="1">
+                <a:solidFill>
+                  <a:srgbClr val="0B2347"/>
+                </a:solidFill>
+              </a:defRPr>
+            </a:pPr>
+            <a:r>
+              <a:t>Vân tay AS608</a:t>
+            </a:r>
+          </a:p>
+        </p:txBody>
+      </p:sp>
+      <p:sp>
+        <p:nvSpPr>
+          <p:cNvPr id="11" name="Rounded Rectangle 10"/>
+          <p:cNvSpPr/>
+          <p:nvPr/>
+        </p:nvSpPr>
+        <p:spPr>
+          <a:xfrm>
+            <a:off x="9025128" y="3840480"/>
+            <a:ext cx="1280160" cy="1965960"/>
+          </a:xfrm>
+          <a:prstGeom prst="roundRect">
+            <a:avLst/>
+          </a:prstGeom>
+          <a:solidFill>
+            <a:srgbClr val="FFFFFF"/>
+          </a:solidFill>
+          <a:ln w="15240">
+            <a:solidFill>
+              <a:srgbClr val="DAE1EB"/>
+            </a:solidFill>
+          </a:ln>
+        </p:spPr>
+        <p:style>
+          <a:lnRef idx="1">
+            <a:schemeClr val="accent1"/>
+          </a:lnRef>
+          <a:fillRef idx="3">
+            <a:schemeClr val="accent1"/>
+          </a:fillRef>
+          <a:effectRef idx="2">
+            <a:schemeClr val="accent1"/>
+          </a:effectRef>
+          <a:fontRef idx="minor">
+            <a:schemeClr val="lt1"/>
+          </a:fontRef>
+        </p:style>
+        <p:txBody>
+          <a:bodyPr rtlCol="0" anchor="ctr"/>
+          <a:lstStyle/>
+          <a:p>
+            <a:pPr algn="ctr"/>
+          </a:p>
+        </p:txBody>
+      </p:sp>
+      <p:pic>
+        <p:nvPicPr>
+          <p:cNvPr id="12" name="Picture 11" descr="image3.jpg"/>
+          <p:cNvPicPr>
+            <a:picLocks noChangeAspect="1"/>
+          </p:cNvPicPr>
+          <p:nvPr/>
+        </p:nvPicPr>
+        <p:blipFill>
+          <a:blip r:embed="rId4"/>
+          <a:stretch>
+            <a:fillRect/>
+          </a:stretch>
+        </p:blipFill>
+        <p:spPr>
+          <a:xfrm>
+            <a:off x="9134856" y="4119372"/>
+            <a:ext cx="1060704" cy="1060704"/>
+          </a:xfrm>
+          <a:prstGeom prst="rect">
+            <a:avLst/>
+          </a:prstGeom>
+        </p:spPr>
+      </p:pic>
+      <p:sp>
+        <p:nvSpPr>
+          <p:cNvPr id="13" name="TextBox 12"/>
+          <p:cNvSpPr txBox="1"/>
+          <p:nvPr/>
+        </p:nvSpPr>
+        <p:spPr>
+          <a:xfrm>
+            <a:off x="9134856" y="5422392"/>
+            <a:ext cx="1060704" cy="347472"/>
+          </a:xfrm>
+          <a:prstGeom prst="rect">
+            <a:avLst/>
+          </a:prstGeom>
+          <a:noFill/>
+        </p:spPr>
+        <p:txBody>
+          <a:bodyPr wrap="square">
+            <a:spAutoFit/>
+          </a:bodyPr>
+          <a:lstStyle/>
+          <a:p>
+            <a:pPr algn="ctr">
+              <a:defRPr sz="1000" b="1">
+                <a:solidFill>
+                  <a:srgbClr val="0B2347"/>
+                </a:solidFill>
+              </a:defRPr>
+            </a:pPr>
+            <a:r>
+              <a:t>RFID RC522</a:t>
+            </a:r>
+          </a:p>
+        </p:txBody>
+      </p:sp>
+      <p:sp>
+        <p:nvSpPr>
+          <p:cNvPr id="14" name="Rounded Rectangle 13"/>
+          <p:cNvSpPr/>
+          <p:nvPr/>
+        </p:nvSpPr>
+        <p:spPr>
+          <a:xfrm>
+            <a:off x="10424160" y="3840480"/>
+            <a:ext cx="1280160" cy="1965960"/>
+          </a:xfrm>
+          <a:prstGeom prst="roundRect">
+            <a:avLst/>
+          </a:prstGeom>
+          <a:solidFill>
+            <a:srgbClr val="FFFFFF"/>
+          </a:solidFill>
+          <a:ln w="15240">
+            <a:solidFill>
+              <a:srgbClr val="DAE1EB"/>
+            </a:solidFill>
+          </a:ln>
+        </p:spPr>
+        <p:style>
+          <a:lnRef idx="1">
+            <a:schemeClr val="accent1"/>
+          </a:lnRef>
+          <a:fillRef idx="3">
+            <a:schemeClr val="accent1"/>
+          </a:fillRef>
+          <a:effectRef idx="2">
+            <a:schemeClr val="accent1"/>
+          </a:effectRef>
+          <a:fontRef idx="minor">
+            <a:schemeClr val="lt1"/>
+          </a:fontRef>
+        </p:style>
+        <p:txBody>
+          <a:bodyPr rtlCol="0" anchor="ctr"/>
+          <a:lstStyle/>
+          <a:p>
+            <a:pPr algn="ctr"/>
+          </a:p>
+        </p:txBody>
+      </p:sp>
+      <p:pic>
+        <p:nvPicPr>
+          <p:cNvPr id="15" name="Picture 14" descr="image4.jpg"/>
+          <p:cNvPicPr>
+            <a:picLocks noChangeAspect="1"/>
+          </p:cNvPicPr>
+          <p:nvPr/>
+        </p:nvPicPr>
+        <p:blipFill>
+          <a:blip r:embed="rId5"/>
+          <a:stretch>
+            <a:fillRect/>
+          </a:stretch>
+        </p:blipFill>
+        <p:spPr>
+          <a:xfrm>
+            <a:off x="10533888" y="4119372"/>
+            <a:ext cx="1060704" cy="1060704"/>
+          </a:xfrm>
+          <a:prstGeom prst="rect">
+            <a:avLst/>
+          </a:prstGeom>
+        </p:spPr>
+      </p:pic>
+      <p:sp>
+        <p:nvSpPr>
+          <p:cNvPr id="16" name="TextBox 15"/>
+          <p:cNvSpPr txBox="1"/>
+          <p:nvPr/>
+        </p:nvSpPr>
+        <p:spPr>
+          <a:xfrm>
+            <a:off x="10533888" y="5422392"/>
+            <a:ext cx="1060704" cy="347472"/>
+          </a:xfrm>
+          <a:prstGeom prst="rect">
+            <a:avLst/>
+          </a:prstGeom>
+          <a:noFill/>
+        </p:spPr>
+        <p:txBody>
+          <a:bodyPr wrap="square">
+            <a:spAutoFit/>
+          </a:bodyPr>
+          <a:lstStyle/>
+          <a:p>
+            <a:pPr algn="ctr">
+              <a:defRPr sz="1000" b="1">
+                <a:solidFill>
+                  <a:srgbClr val="0B2347"/>
+                </a:solidFill>
+              </a:defRPr>
+            </a:pPr>
+            <a:r>
+              <a:t>Keypad 4x4</a:t>
             </a:r>
           </a:p>
         </p:txBody>
@@ -3310,7 +3723,7 @@
         <p:spPr>
           <a:xfrm>
             <a:off x="0" y="0"/>
-            <a:ext cx="12191695" cy="109728"/>
+            <a:ext cx="12191695" cy="100584"/>
           </a:xfrm>
           <a:prstGeom prst="rect">
             <a:avLst/>
@@ -3352,8 +3765,8 @@
         </p:nvSpPr>
         <p:spPr>
           <a:xfrm>
-            <a:off x="731520" y="365760"/>
-            <a:ext cx="10698480" cy="320040"/>
+            <a:off x="594360" y="292608"/>
+            <a:ext cx="9601200" cy="274320"/>
           </a:xfrm>
           <a:prstGeom prst="rect">
             <a:avLst/>
@@ -3361,20 +3774,20 @@
           <a:noFill/>
         </p:spPr>
         <p:txBody>
-          <a:bodyPr wrap="square" lIns="0" tIns="0" rIns="0" bIns="0">
+          <a:bodyPr wrap="none" lIns="0" tIns="0" rIns="0" bIns="0">
             <a:spAutoFit/>
           </a:bodyPr>
           <a:lstStyle/>
           <a:p>
             <a:pPr>
-              <a:defRPr sz="1100" b="1">
+              <a:defRPr sz="1050" b="1">
                 <a:solidFill>
                   <a:srgbClr val="10559A"/>
                 </a:solidFill>
               </a:defRPr>
             </a:pPr>
             <a:r>
-              <a:t>BÁO CÁO TIẾN ĐỘ GIỮA KỲ — ĐỒ ÁN CƠ ĐIỆN TỬ</a:t>
+              <a:t>BÁO CÁO TIẾN ĐỘ GIỮA KỲ — ĐỒ ÁN CƠ ĐIỆN TỬ (NHÓM 13)</a:t>
             </a:r>
           </a:p>
         </p:txBody>
@@ -3387,8 +3800,8 @@
         </p:nvSpPr>
         <p:spPr>
           <a:xfrm>
-            <a:off x="731520" y="685800"/>
-            <a:ext cx="10698480" cy="548640"/>
+            <a:off x="594360" y="566928"/>
+            <a:ext cx="10515600" cy="502920"/>
           </a:xfrm>
           <a:prstGeom prst="rect">
             <a:avLst/>
@@ -3396,79 +3809,34 @@
           <a:noFill/>
         </p:spPr>
         <p:txBody>
-          <a:bodyPr wrap="square" lIns="0" tIns="0" rIns="0" bIns="0">
+          <a:bodyPr wrap="none" lIns="0" tIns="0" rIns="0" bIns="0">
             <a:spAutoFit/>
           </a:bodyPr>
           <a:lstStyle/>
           <a:p>
             <a:pPr>
-              <a:defRPr sz="2200" b="1">
+              <a:defRPr sz="2100" b="1">
                 <a:solidFill>
                   <a:srgbClr val="0B2347"/>
                 </a:solidFill>
               </a:defRPr>
             </a:pPr>
             <a:r>
-              <a:t>9. Tổng kết tiến độ giữa kỳ &amp; Kế hoạch giai đoạn 2</a:t>
-            </a:r>
-          </a:p>
-        </p:txBody>
-      </p:sp>
-      <p:sp>
-        <p:nvSpPr>
-          <p:cNvPr id="5" name="Rounded Rectangle 4"/>
-          <p:cNvSpPr/>
-          <p:nvPr/>
-        </p:nvSpPr>
-        <p:spPr>
-          <a:xfrm>
-            <a:off x="731520" y="1463040"/>
-            <a:ext cx="5120640" cy="4754880"/>
-          </a:xfrm>
-          <a:prstGeom prst="roundRect">
-            <a:avLst/>
-          </a:prstGeom>
-          <a:solidFill>
-            <a:srgbClr val="F5F7FA"/>
-          </a:solidFill>
-          <a:ln w="12700">
-            <a:solidFill>
-              <a:srgbClr val="DCE2EB"/>
-            </a:solidFill>
-          </a:ln>
-        </p:spPr>
-        <p:style>
-          <a:lnRef idx="1">
-            <a:schemeClr val="accent1"/>
-          </a:lnRef>
-          <a:fillRef idx="3">
-            <a:schemeClr val="accent1"/>
-          </a:fillRef>
-          <a:effectRef idx="2">
-            <a:schemeClr val="accent1"/>
-          </a:effectRef>
-          <a:fontRef idx="minor">
-            <a:schemeClr val="lt1"/>
-          </a:fontRef>
-        </p:style>
-        <p:txBody>
-          <a:bodyPr rtlCol="0" anchor="ctr"/>
-          <a:lstStyle/>
-          <a:p>
-            <a:pPr algn="ctr"/>
-          </a:p>
-        </p:txBody>
-      </p:sp>
-      <p:sp>
-        <p:nvSpPr>
-          <p:cNvPr id="6" name="TextBox 5"/>
+              <a:t>9. Tổng kết báo cáo giữa kỳ &amp; Trình chiếu Demo Web App</a:t>
+            </a:r>
+          </a:p>
+        </p:txBody>
+      </p:sp>
+      <p:sp>
+        <p:nvSpPr>
+          <p:cNvPr id="5" name="TextBox 4"/>
           <p:cNvSpPr txBox="1"/>
           <p:nvPr/>
         </p:nvSpPr>
         <p:spPr>
           <a:xfrm>
-            <a:off x="960120" y="1645920"/>
-            <a:ext cx="4663440" cy="4389120"/>
+            <a:off x="594360" y="6446520"/>
+            <a:ext cx="10972800" cy="274320"/>
           </a:xfrm>
           <a:prstGeom prst="rect">
             <a:avLst/>
@@ -3476,112 +3844,34 @@
           <a:noFill/>
         </p:spPr>
         <p:txBody>
-          <a:bodyPr wrap="square" lIns="0" tIns="0" rIns="0" bIns="0">
+          <a:bodyPr wrap="none">
             <a:spAutoFit/>
           </a:bodyPr>
           <a:lstStyle/>
           <a:p>
             <a:pPr>
-              <a:spcAft>
-                <a:spcPts val="400"/>
-              </a:spcAft>
-              <a:defRPr sz="1500" b="1">
-                <a:solidFill>
-                  <a:srgbClr val="0B2347"/>
-                </a:solidFill>
-              </a:defRPr>
-            </a:pPr>
-            <a:r>
-              <a:t>Đánh giá kết quả giai đoạn giữa kỳ (Đạt 100%)</a:t>
-            </a:r>
-          </a:p>
-          <a:p>
-            <a:pPr>
-              <a:spcAft>
-                <a:spcPts val="800"/>
-              </a:spcAft>
-              <a:defRPr sz="1100">
-                <a:solidFill>
-                  <a:srgbClr val="646E7D"/>
-                </a:solidFill>
-              </a:defRPr>
-            </a:pPr>
-            <a:r>
-              <a:t>Hoàn thành đúng tiến độ Tuần 1 – Tuần 4</a:t>
-            </a:r>
-          </a:p>
-          <a:p>
-            <a:pPr>
-              <a:spcAft>
-                <a:spcPts val="500"/>
-              </a:spcAft>
-              <a:defRPr sz="1200">
-                <a:solidFill>
-                  <a:srgbClr val="181E2A"/>
-                </a:solidFill>
-              </a:defRPr>
-            </a:pPr>
-            <a:r>
-              <a:t>•  Khảo sát &amp; Chuẩn bị linh kiện: Đã mua đủ 100% linh kiện chính và phụ trợ (ESP32, AS608, RC522, Keypad 4x4, LCD I2C, Khóa 12V).</a:t>
-            </a:r>
-          </a:p>
-          <a:p>
-            <a:pPr>
-              <a:spcAft>
-                <a:spcPts val="500"/>
-              </a:spcAft>
-              <a:defRPr sz="1200">
-                <a:solidFill>
-                  <a:srgbClr val="181E2A"/>
-                </a:solidFill>
-              </a:defRPr>
-            </a:pPr>
-            <a:r>
-              <a:t>•  Nghiên cứu kỹ thuật: Nắm vững tập lệnh UART của AS608, giao thức SPI của RC522, cơ chế dập xung khóa điện 12V.</a:t>
-            </a:r>
-          </a:p>
-          <a:p>
-            <a:pPr>
-              <a:spcAft>
-                <a:spcPts val="500"/>
-              </a:spcAft>
-              <a:defRPr sz="1200">
-                <a:solidFill>
-                  <a:srgbClr val="181E2A"/>
-                </a:solidFill>
-              </a:defRPr>
-            </a:pPr>
-            <a:r>
-              <a:t>•  Thiết kế mạch in PCB: Hoàn thành 100% Schematic và Layout PCB 2 lớp, đã xuất file Gerber gửi xưởng gia công.</a:t>
-            </a:r>
-          </a:p>
-          <a:p>
-            <a:pPr>
-              <a:spcAft>
-                <a:spcPts val="500"/>
-              </a:spcAft>
-              <a:defRPr sz="1200">
-                <a:solidFill>
-                  <a:srgbClr val="181E2A"/>
-                </a:solidFill>
-              </a:defRPr>
-            </a:pPr>
-            <a:r>
-              <a:t>•  Phần mềm &amp; Web App: Hoàn thành 100% firmware nhúng Non-blocking, cơ chế bảo mật 2FA, giao diện Web App và deploy thành công lên Vercel.</a:t>
-            </a:r>
-          </a:p>
-        </p:txBody>
-      </p:sp>
-      <p:sp>
-        <p:nvSpPr>
-          <p:cNvPr id="7" name="Rounded Rectangle 6"/>
+              <a:defRPr sz="950">
+                <a:solidFill>
+                  <a:srgbClr val="5F6C7D"/>
+                </a:solidFill>
+              </a:defRPr>
+            </a:pPr>
+            <a:r>
+              <a:t>Trường Đại học Công nghệ – ĐHQGHN  |  Nhóm 13: Nguyễn Tuấn Sơn – Vũ Hữu Hoạt                                                                                     Slide 10 / 10</a:t>
+            </a:r>
+          </a:p>
+        </p:txBody>
+      </p:sp>
+      <p:sp>
+        <p:nvSpPr>
+          <p:cNvPr id="6" name="Rounded Rectangle 5"/>
           <p:cNvSpPr/>
           <p:nvPr/>
         </p:nvSpPr>
         <p:spPr>
           <a:xfrm>
-            <a:off x="6217920" y="1463040"/>
-            <a:ext cx="5212080" cy="4754880"/>
+            <a:off x="594360" y="1234440"/>
+            <a:ext cx="5669280" cy="5029200"/>
           </a:xfrm>
           <a:prstGeom prst="roundRect">
             <a:avLst/>
@@ -3619,14 +3909,14 @@
       </p:sp>
       <p:sp>
         <p:nvSpPr>
-          <p:cNvPr id="8" name="TextBox 7"/>
+          <p:cNvPr id="7" name="TextBox 6"/>
           <p:cNvSpPr txBox="1"/>
           <p:nvPr/>
         </p:nvSpPr>
         <p:spPr>
           <a:xfrm>
-            <a:off x="6446520" y="1645920"/>
-            <a:ext cx="4754880" cy="4389120"/>
+            <a:off x="795528" y="1399032"/>
+            <a:ext cx="5266944" cy="4736592"/>
           </a:xfrm>
           <a:prstGeom prst="rect">
             <a:avLst/>
@@ -3641,91 +3931,293 @@
           <a:p>
             <a:pPr>
               <a:spcAft>
-                <a:spcPts val="400"/>
-              </a:spcAft>
-              <a:defRPr sz="1500" b="1">
+                <a:spcPts val="300"/>
+              </a:spcAft>
+              <a:defRPr sz="1450" b="1">
                 <a:solidFill>
                   <a:srgbClr val="10559A"/>
                 </a:solidFill>
               </a:defRPr>
             </a:pPr>
             <a:r>
-              <a:t>Kế hoạch triển khai nửa cuối học kỳ (Tuần 5 – Tuần 8)</a:t>
-            </a:r>
-          </a:p>
-          <a:p>
-            <a:pPr>
-              <a:spcAft>
-                <a:spcPts val="800"/>
-              </a:spcAft>
-              <a:defRPr sz="1100">
-                <a:solidFill>
-                  <a:srgbClr val="646E7D"/>
-                </a:solidFill>
-              </a:defRPr>
-            </a:pPr>
-            <a:r>
-              <a:t>Lộ trình đưa mô hình vào hoạt động thực tế</a:t>
-            </a:r>
-          </a:p>
-          <a:p>
-            <a:pPr>
-              <a:spcAft>
-                <a:spcPts val="500"/>
+              <a:t>Tóm tắt các kết quả đạt được tính đến giữa kỳ</a:t>
+            </a:r>
+          </a:p>
+          <a:p>
+            <a:pPr>
+              <a:spcAft>
+                <a:spcPts val="700"/>
+              </a:spcAft>
+              <a:defRPr sz="1050">
+                <a:solidFill>
+                  <a:srgbClr val="5F6C7D"/>
+                </a:solidFill>
+              </a:defRPr>
+            </a:pPr>
+            <a:r>
+              <a:t>Đảm bảo 100% tiến độ theo kế hoạch học phần</a:t>
+            </a:r>
+          </a:p>
+          <a:p>
+            <a:pPr>
+              <a:spcAft>
+                <a:spcPts val="450"/>
               </a:spcAft>
               <a:defRPr sz="1200">
                 <a:solidFill>
-                  <a:srgbClr val="181E2A"/>
-                </a:solidFill>
-              </a:defRPr>
-            </a:pPr>
-            <a:r>
-              <a:t>•  Tuần 5: Nhận mạch in PCB gia công, tiến hành hàn linh kiện, đo kiểm tra ổn định điện áp 12V, 5V, 3.3V và tầng công suất kích khóa.</a:t>
-            </a:r>
-          </a:p>
-          <a:p>
-            <a:pPr>
-              <a:spcAft>
-                <a:spcPts val="500"/>
+                  <a:srgbClr val="141C28"/>
+                </a:solidFill>
+              </a:defRPr>
+            </a:pPr>
+            <a:r>
+              <a:t>•  1. Về linh kiện vật tư: Đã chuẩn bị đầy đủ 100% các module cảm biến và cơ cấu chấp hành theo đúng danh mục đề tài.</a:t>
+            </a:r>
+          </a:p>
+          <a:p>
+            <a:pPr>
+              <a:spcAft>
+                <a:spcPts val="450"/>
               </a:spcAft>
               <a:defRPr sz="1200">
                 <a:solidFill>
-                  <a:srgbClr val="181E2A"/>
-                </a:solidFill>
-              </a:defRPr>
-            </a:pPr>
-            <a:r>
-              <a:t>•  Tuần 6: Gia công khung mô hình cửa cơ khí, gá lắp khóa chốt điện, đầu đọc vân tay, thẻ từ, bàn phím và màn hình LCD hoàn thiện.</a:t>
-            </a:r>
-          </a:p>
-          <a:p>
-            <a:pPr>
-              <a:spcAft>
-                <a:spcPts val="500"/>
+                  <a:srgbClr val="141C28"/>
+                </a:solidFill>
+              </a:defRPr>
+            </a:pPr>
+            <a:r>
+              <a:t>•  2. Về nghiên cứu lý thuyết &amp; mạch điện: Đã làm chủ datasheet, giao thức UART2 / SPI / I2C / Matrix Scanning và hoàn thành bản vẽ mạch in PCB trung tâm.</a:t>
+            </a:r>
+          </a:p>
+          <a:p>
+            <a:pPr>
+              <a:spcAft>
+                <a:spcPts val="450"/>
               </a:spcAft>
               <a:defRPr sz="1200">
                 <a:solidFill>
-                  <a:srgbClr val="181E2A"/>
-                </a:solidFill>
-              </a:defRPr>
-            </a:pPr>
-            <a:r>
-              <a:t>•  Tuần 7: Nạp firmware tích hợp, kiểm thử hoạt động liên tục 24/7, đo đạc độ trễ nhận dạng và tinh chỉnh thuật toán.</a:t>
-            </a:r>
-          </a:p>
-          <a:p>
-            <a:pPr>
-              <a:spcAft>
-                <a:spcPts val="500"/>
+                  <a:srgbClr val="141C28"/>
+                </a:solidFill>
+              </a:defRPr>
+            </a:pPr>
+            <a:r>
+              <a:t>•  3. Về phần mềm &amp; Web App: Đã hoàn thiện sớm hơn tiến độ (vừa có Firmware C++ cho ESP32, vừa có Web App tối giản hỗ trợ bảo mật 1 lớp &amp; 2FA).</a:t>
+            </a:r>
+          </a:p>
+          <a:p>
+            <a:pPr>
+              <a:spcAft>
+                <a:spcPts val="450"/>
               </a:spcAft>
               <a:defRPr sz="1200">
                 <a:solidFill>
-                  <a:srgbClr val="181E2A"/>
-                </a:solidFill>
-              </a:defRPr>
-            </a:pPr>
-            <a:r>
-              <a:t>•  Tuần 8: Thu thập số liệu thực nghiệm, hoàn thiện báo cáo thuyết minh đồ án chuẩn học thuật UET và chuẩn bị slide bảo vệ tốt nghiệp.</a:t>
+                  <a:srgbClr val="141C28"/>
+                </a:solidFill>
+              </a:defRPr>
+            </a:pPr>
+            <a:r>
+              <a:t>•  4. Sẵn sàng chuyển sang Giai đoạn 3 (Gia công hàn mạch PCB và lắp dựng cơ khí khung cửa).</a:t>
+            </a:r>
+          </a:p>
+        </p:txBody>
+      </p:sp>
+      <p:sp>
+        <p:nvSpPr>
+          <p:cNvPr id="8" name="Rounded Rectangle 7"/>
+          <p:cNvSpPr/>
+          <p:nvPr/>
+        </p:nvSpPr>
+        <p:spPr>
+          <a:xfrm>
+            <a:off x="6446520" y="1234440"/>
+            <a:ext cx="5148072" cy="3474720"/>
+          </a:xfrm>
+          <a:prstGeom prst="roundRect">
+            <a:avLst/>
+          </a:prstGeom>
+          <a:solidFill>
+            <a:srgbClr val="FFFFFF"/>
+          </a:solidFill>
+          <a:ln w="15240">
+            <a:solidFill>
+              <a:srgbClr val="DAE1EB"/>
+            </a:solidFill>
+          </a:ln>
+        </p:spPr>
+        <p:style>
+          <a:lnRef idx="1">
+            <a:schemeClr val="accent1"/>
+          </a:lnRef>
+          <a:fillRef idx="3">
+            <a:schemeClr val="accent1"/>
+          </a:fillRef>
+          <a:effectRef idx="2">
+            <a:schemeClr val="accent1"/>
+          </a:effectRef>
+          <a:fontRef idx="minor">
+            <a:schemeClr val="lt1"/>
+          </a:fontRef>
+        </p:style>
+        <p:txBody>
+          <a:bodyPr rtlCol="0" anchor="ctr"/>
+          <a:lstStyle/>
+          <a:p>
+            <a:pPr algn="ctr"/>
+          </a:p>
+        </p:txBody>
+      </p:sp>
+      <p:pic>
+        <p:nvPicPr>
+          <p:cNvPr id="9" name="Picture 8" descr="web_dashboard.png"/>
+          <p:cNvPicPr>
+            <a:picLocks noChangeAspect="1"/>
+          </p:cNvPicPr>
+          <p:nvPr/>
+        </p:nvPicPr>
+        <p:blipFill>
+          <a:blip r:embed="rId2"/>
+          <a:stretch>
+            <a:fillRect/>
+          </a:stretch>
+        </p:blipFill>
+        <p:spPr>
+          <a:xfrm>
+            <a:off x="6707540" y="1344168"/>
+            <a:ext cx="4626032" cy="2907792"/>
+          </a:xfrm>
+          <a:prstGeom prst="rect">
+            <a:avLst/>
+          </a:prstGeom>
+        </p:spPr>
+      </p:pic>
+      <p:sp>
+        <p:nvSpPr>
+          <p:cNvPr id="10" name="TextBox 9"/>
+          <p:cNvSpPr txBox="1"/>
+          <p:nvPr/>
+        </p:nvSpPr>
+        <p:spPr>
+          <a:xfrm>
+            <a:off x="6556248" y="4325112"/>
+            <a:ext cx="4928616" cy="347472"/>
+          </a:xfrm>
+          <a:prstGeom prst="rect">
+            <a:avLst/>
+          </a:prstGeom>
+          <a:noFill/>
+        </p:spPr>
+        <p:txBody>
+          <a:bodyPr wrap="square">
+            <a:spAutoFit/>
+          </a:bodyPr>
+          <a:lstStyle/>
+          <a:p>
+            <a:pPr algn="ctr">
+              <a:defRPr sz="1000" b="1">
+                <a:solidFill>
+                  <a:srgbClr val="0B2347"/>
+                </a:solidFill>
+              </a:defRPr>
+            </a:pPr>
+            <a:r>
+              <a:t>Demo trực tiếp tại: https://smartdoor-nhom13-data.vercel.app</a:t>
+            </a:r>
+          </a:p>
+        </p:txBody>
+      </p:sp>
+      <p:sp>
+        <p:nvSpPr>
+          <p:cNvPr id="11" name="Rounded Rectangle 10"/>
+          <p:cNvSpPr/>
+          <p:nvPr/>
+        </p:nvSpPr>
+        <p:spPr>
+          <a:xfrm>
+            <a:off x="6446520" y="4846320"/>
+            <a:ext cx="5148072" cy="1417320"/>
+          </a:xfrm>
+          <a:prstGeom prst="roundRect">
+            <a:avLst/>
+          </a:prstGeom>
+          <a:solidFill>
+            <a:srgbClr val="F6F8FB"/>
+          </a:solidFill>
+          <a:ln w="12700">
+            <a:solidFill>
+              <a:srgbClr val="DAE1EB"/>
+            </a:solidFill>
+          </a:ln>
+        </p:spPr>
+        <p:style>
+          <a:lnRef idx="1">
+            <a:schemeClr val="accent1"/>
+          </a:lnRef>
+          <a:fillRef idx="3">
+            <a:schemeClr val="accent1"/>
+          </a:fillRef>
+          <a:effectRef idx="2">
+            <a:schemeClr val="accent1"/>
+          </a:effectRef>
+          <a:fontRef idx="minor">
+            <a:schemeClr val="lt1"/>
+          </a:fontRef>
+        </p:style>
+        <p:txBody>
+          <a:bodyPr rtlCol="0" anchor="ctr"/>
+          <a:lstStyle/>
+          <a:p>
+            <a:pPr algn="ctr"/>
+          </a:p>
+        </p:txBody>
+      </p:sp>
+      <p:sp>
+        <p:nvSpPr>
+          <p:cNvPr id="12" name="TextBox 11"/>
+          <p:cNvSpPr txBox="1"/>
+          <p:nvPr/>
+        </p:nvSpPr>
+        <p:spPr>
+          <a:xfrm>
+            <a:off x="6647688" y="5010912"/>
+            <a:ext cx="4745736" cy="1124712"/>
+          </a:xfrm>
+          <a:prstGeom prst="rect">
+            <a:avLst/>
+          </a:prstGeom>
+          <a:noFill/>
+        </p:spPr>
+        <p:txBody>
+          <a:bodyPr wrap="square" lIns="0" tIns="0" rIns="0" bIns="0">
+            <a:spAutoFit/>
+          </a:bodyPr>
+          <a:lstStyle/>
+          <a:p>
+            <a:pPr>
+              <a:spcAft>
+                <a:spcPts val="300"/>
+              </a:spcAft>
+              <a:defRPr sz="1450" b="1">
+                <a:solidFill>
+                  <a:srgbClr val="0B2347"/>
+                </a:solidFill>
+              </a:defRPr>
+            </a:pPr>
+            <a:r>
+              <a:t>Cảm ơn Thầy/Cô và các bạn đã lắng nghe!</a:t>
+            </a:r>
+          </a:p>
+          <a:p>
+            <a:pPr>
+              <a:spcAft>
+                <a:spcPts val="450"/>
+              </a:spcAft>
+              <a:defRPr sz="1150">
+                <a:solidFill>
+                  <a:srgbClr val="141C28"/>
+                </a:solidFill>
+              </a:defRPr>
+            </a:pPr>
+            <a:r>
+              <a:t>•  Nhóm 13 xin phép chuyển sang phần Demo trực tiếp giao diện Web App &amp; Chế độ bảo mật 2 lớp trên trình duyệt và nhận ý kiến đóng góp của Thầy/Cô.</a:t>
             </a:r>
           </a:p>
         </p:txBody>
@@ -3757,7 +4249,7 @@
         <p:spPr>
           <a:xfrm>
             <a:off x="0" y="0"/>
-            <a:ext cx="12191695" cy="109728"/>
+            <a:ext cx="12191695" cy="100584"/>
           </a:xfrm>
           <a:prstGeom prst="rect">
             <a:avLst/>
@@ -3799,8 +4291,8 @@
         </p:nvSpPr>
         <p:spPr>
           <a:xfrm>
-            <a:off x="731520" y="365760"/>
-            <a:ext cx="10698480" cy="320040"/>
+            <a:off x="594360" y="292608"/>
+            <a:ext cx="9601200" cy="274320"/>
           </a:xfrm>
           <a:prstGeom prst="rect">
             <a:avLst/>
@@ -3808,20 +4300,20 @@
           <a:noFill/>
         </p:spPr>
         <p:txBody>
-          <a:bodyPr wrap="square" lIns="0" tIns="0" rIns="0" bIns="0">
+          <a:bodyPr wrap="none" lIns="0" tIns="0" rIns="0" bIns="0">
             <a:spAutoFit/>
           </a:bodyPr>
           <a:lstStyle/>
           <a:p>
             <a:pPr>
-              <a:defRPr sz="1100" b="1">
+              <a:defRPr sz="1050" b="1">
                 <a:solidFill>
                   <a:srgbClr val="10559A"/>
                 </a:solidFill>
               </a:defRPr>
             </a:pPr>
             <a:r>
-              <a:t>BÁO CÁO TIẾN ĐỘ GIỮA KỲ — ĐỒ ÁN CƠ ĐIỆN TỬ</a:t>
+              <a:t>BÁO CÁO TIẾN ĐỘ GIỮA KỲ — ĐỒ ÁN CƠ ĐIỆN TỬ (NHÓM 13)</a:t>
             </a:r>
           </a:p>
         </p:txBody>
@@ -3834,8 +4326,8 @@
         </p:nvSpPr>
         <p:spPr>
           <a:xfrm>
-            <a:off x="731520" y="685800"/>
-            <a:ext cx="10698480" cy="548640"/>
+            <a:off x="594360" y="566928"/>
+            <a:ext cx="10515600" cy="502920"/>
           </a:xfrm>
           <a:prstGeom prst="rect">
             <a:avLst/>
@@ -3843,44 +4335,79 @@
           <a:noFill/>
         </p:spPr>
         <p:txBody>
-          <a:bodyPr wrap="square" lIns="0" tIns="0" rIns="0" bIns="0">
+          <a:bodyPr wrap="none" lIns="0" tIns="0" rIns="0" bIns="0">
             <a:spAutoFit/>
           </a:bodyPr>
           <a:lstStyle/>
           <a:p>
             <a:pPr>
-              <a:defRPr sz="2200" b="1">
+              <a:defRPr sz="2100" b="1">
                 <a:solidFill>
                   <a:srgbClr val="0B2347"/>
                 </a:solidFill>
               </a:defRPr>
             </a:pPr>
             <a:r>
-              <a:t>1. Tổng quan đề tài &amp; Mục tiêu nghiên cứu</a:t>
-            </a:r>
-          </a:p>
-        </p:txBody>
-      </p:sp>
-      <p:sp>
-        <p:nvSpPr>
-          <p:cNvPr id="5" name="Rounded Rectangle 4"/>
+              <a:t>1. Cấu trúc tổng thể hệ thống &amp; Mục tiêu thiết kế</a:t>
+            </a:r>
+          </a:p>
+        </p:txBody>
+      </p:sp>
+      <p:sp>
+        <p:nvSpPr>
+          <p:cNvPr id="5" name="TextBox 4"/>
+          <p:cNvSpPr txBox="1"/>
+          <p:nvPr/>
+        </p:nvSpPr>
+        <p:spPr>
+          <a:xfrm>
+            <a:off x="594360" y="6446520"/>
+            <a:ext cx="10972800" cy="274320"/>
+          </a:xfrm>
+          <a:prstGeom prst="rect">
+            <a:avLst/>
+          </a:prstGeom>
+          <a:noFill/>
+        </p:spPr>
+        <p:txBody>
+          <a:bodyPr wrap="none">
+            <a:spAutoFit/>
+          </a:bodyPr>
+          <a:lstStyle/>
+          <a:p>
+            <a:pPr>
+              <a:defRPr sz="950">
+                <a:solidFill>
+                  <a:srgbClr val="5F6C7D"/>
+                </a:solidFill>
+              </a:defRPr>
+            </a:pPr>
+            <a:r>
+              <a:t>Trường Đại học Công nghệ – ĐHQGHN  |  Nhóm 13: Nguyễn Tuấn Sơn – Vũ Hữu Hoạt                                                                                     Slide 2 / 10</a:t>
+            </a:r>
+          </a:p>
+        </p:txBody>
+      </p:sp>
+      <p:sp>
+        <p:nvSpPr>
+          <p:cNvPr id="6" name="Rounded Rectangle 5"/>
           <p:cNvSpPr/>
           <p:nvPr/>
         </p:nvSpPr>
         <p:spPr>
           <a:xfrm>
-            <a:off x="731520" y="1463040"/>
-            <a:ext cx="5120640" cy="4754880"/>
+            <a:off x="594360" y="1234440"/>
+            <a:ext cx="5943600" cy="2971800"/>
           </a:xfrm>
           <a:prstGeom prst="roundRect">
             <a:avLst/>
           </a:prstGeom>
           <a:solidFill>
-            <a:srgbClr val="F5F7FA"/>
+            <a:srgbClr val="FFFFFF"/>
           </a:solidFill>
-          <a:ln w="12700">
+          <a:ln w="15240">
             <a:solidFill>
-              <a:srgbClr val="DCE2EB"/>
+              <a:srgbClr val="DAE1EB"/>
             </a:solidFill>
           </a:ln>
         </p:spPr>
@@ -3906,16 +4433,120 @@
           </a:p>
         </p:txBody>
       </p:sp>
-      <p:sp>
-        <p:nvSpPr>
-          <p:cNvPr id="6" name="TextBox 5"/>
+      <p:pic>
+        <p:nvPicPr>
+          <p:cNvPr id="7" name="Picture 6" descr="image1.png"/>
+          <p:cNvPicPr>
+            <a:picLocks noChangeAspect="1"/>
+          </p:cNvPicPr>
+          <p:nvPr/>
+        </p:nvPicPr>
+        <p:blipFill>
+          <a:blip r:embed="rId2"/>
+          <a:stretch>
+            <a:fillRect/>
+          </a:stretch>
+        </p:blipFill>
+        <p:spPr>
+          <a:xfrm>
+            <a:off x="704088" y="1572773"/>
+            <a:ext cx="5724144" cy="1947661"/>
+          </a:xfrm>
+          <a:prstGeom prst="rect">
+            <a:avLst/>
+          </a:prstGeom>
+        </p:spPr>
+      </p:pic>
+      <p:sp>
+        <p:nvSpPr>
+          <p:cNvPr id="8" name="TextBox 7"/>
           <p:cNvSpPr txBox="1"/>
           <p:nvPr/>
         </p:nvSpPr>
         <p:spPr>
           <a:xfrm>
-            <a:off x="960120" y="1645920"/>
-            <a:ext cx="4663440" cy="4389120"/>
+            <a:off x="704088" y="3822192"/>
+            <a:ext cx="5724144" cy="347472"/>
+          </a:xfrm>
+          <a:prstGeom prst="rect">
+            <a:avLst/>
+          </a:prstGeom>
+          <a:noFill/>
+        </p:spPr>
+        <p:txBody>
+          <a:bodyPr wrap="square">
+            <a:spAutoFit/>
+          </a:bodyPr>
+          <a:lstStyle/>
+          <a:p>
+            <a:pPr algn="ctr">
+              <a:defRPr sz="1000" b="1">
+                <a:solidFill>
+                  <a:srgbClr val="0B2347"/>
+                </a:solidFill>
+              </a:defRPr>
+            </a:pPr>
+            <a:r>
+              <a:t>Hình 1.1: Sơ đồ khối tổng thể hệ thống cửa bảo mật tích hợp ESP32 &amp; Web App</a:t>
+            </a:r>
+          </a:p>
+        </p:txBody>
+      </p:sp>
+      <p:sp>
+        <p:nvSpPr>
+          <p:cNvPr id="9" name="Rounded Rectangle 8"/>
+          <p:cNvSpPr/>
+          <p:nvPr/>
+        </p:nvSpPr>
+        <p:spPr>
+          <a:xfrm>
+            <a:off x="594360" y="4370832"/>
+            <a:ext cx="5943600" cy="1920240"/>
+          </a:xfrm>
+          <a:prstGeom prst="roundRect">
+            <a:avLst/>
+          </a:prstGeom>
+          <a:solidFill>
+            <a:srgbClr val="F6F8FB"/>
+          </a:solidFill>
+          <a:ln w="12700">
+            <a:solidFill>
+              <a:srgbClr val="DAE1EB"/>
+            </a:solidFill>
+          </a:ln>
+        </p:spPr>
+        <p:style>
+          <a:lnRef idx="1">
+            <a:schemeClr val="accent1"/>
+          </a:lnRef>
+          <a:fillRef idx="3">
+            <a:schemeClr val="accent1"/>
+          </a:fillRef>
+          <a:effectRef idx="2">
+            <a:schemeClr val="accent1"/>
+          </a:effectRef>
+          <a:fontRef idx="minor">
+            <a:schemeClr val="lt1"/>
+          </a:fontRef>
+        </p:style>
+        <p:txBody>
+          <a:bodyPr rtlCol="0" anchor="ctr"/>
+          <a:lstStyle/>
+          <a:p>
+            <a:pPr algn="ctr"/>
+          </a:p>
+        </p:txBody>
+      </p:sp>
+      <p:sp>
+        <p:nvSpPr>
+          <p:cNvPr id="10" name="TextBox 9"/>
+          <p:cNvSpPr txBox="1"/>
+          <p:nvPr/>
+        </p:nvSpPr>
+        <p:spPr>
+          <a:xfrm>
+            <a:off x="795528" y="4535424"/>
+            <a:ext cx="5541264" cy="1627632"/>
           </a:xfrm>
           <a:prstGeom prst="rect">
             <a:avLst/>
@@ -3930,90 +4561,60 @@
           <a:p>
             <a:pPr>
               <a:spcAft>
-                <a:spcPts val="400"/>
-              </a:spcAft>
-              <a:defRPr sz="1500" b="1">
+                <a:spcPts val="300"/>
+              </a:spcAft>
+              <a:defRPr sz="1450" b="1">
                 <a:solidFill>
                   <a:srgbClr val="0B2347"/>
                 </a:solidFill>
               </a:defRPr>
             </a:pPr>
             <a:r>
-              <a:t>Đặt vấn đề thực tế</a:t>
-            </a:r>
-          </a:p>
-          <a:p>
-            <a:pPr>
-              <a:spcAft>
-                <a:spcPts val="800"/>
+              <a:t>Điểm cải tiến trong quá trình triển khai thực tế</a:t>
+            </a:r>
+          </a:p>
+          <a:p>
+            <a:pPr>
+              <a:spcAft>
+                <a:spcPts val="450"/>
               </a:spcAft>
               <a:defRPr sz="1100">
                 <a:solidFill>
-                  <a:srgbClr val="646E7D"/>
-                </a:solidFill>
-              </a:defRPr>
-            </a:pPr>
-            <a:r>
-              <a:t>Lý do lựa chọn đề tài nghiên cứu</a:t>
-            </a:r>
-          </a:p>
-          <a:p>
-            <a:pPr>
-              <a:spcAft>
-                <a:spcPts val="500"/>
-              </a:spcAft>
-              <a:defRPr sz="1200">
-                <a:solidFill>
-                  <a:srgbClr val="181E2A"/>
-                </a:solidFill>
-              </a:defRPr>
-            </a:pPr>
-            <a:r>
-              <a:t>•  Hệ thống khóa cơ học truyền thống tiềm ẩn nguy cơ sao chép chìa khóa và thiếu hoàn toàn khả năng ghi vết nhật ký ra vào.</a:t>
-            </a:r>
-          </a:p>
-          <a:p>
-            <a:pPr>
-              <a:spcAft>
-                <a:spcPts val="500"/>
-              </a:spcAft>
-              <a:defRPr sz="1200">
-                <a:solidFill>
-                  <a:srgbClr val="181E2A"/>
-                </a:solidFill>
-              </a:defRPr>
-            </a:pPr>
-            <a:r>
-              <a:t>•  Các hệ thống cửa chỉ dùng 1 phương thức (chỉ thẻ hoặc chỉ mật mã) dễ gặp rủi ro khi rơi thẻ, lộ mật mã hoặc ngón tay bị trầy xước.</a:t>
-            </a:r>
-          </a:p>
-          <a:p>
-            <a:pPr>
-              <a:spcAft>
-                <a:spcPts val="500"/>
-              </a:spcAft>
-              <a:defRPr sz="1200">
-                <a:solidFill>
-                  <a:srgbClr val="181E2A"/>
-                </a:solidFill>
-              </a:defRPr>
-            </a:pPr>
-            <a:r>
-              <a:t>•  Giải pháp đề xuất: Xây dựng hệ thống bảo mật đa phương thức tại chỗ (Local Authentication) kết hợp đồng bộ Web App thời gian thực qua mạng Wi-Fi cục bộ.</a:t>
-            </a:r>
-          </a:p>
-        </p:txBody>
-      </p:sp>
-      <p:sp>
-        <p:nvSpPr>
-          <p:cNvPr id="7" name="Rounded Rectangle 6"/>
+                  <a:srgbClr val="141C28"/>
+                </a:solidFill>
+              </a:defRPr>
+            </a:pPr>
+            <a:r>
+              <a:t>•  Thay thế khối loa thông báo bằng Màn hình tinh thể lỏng LCD 16x2 I2C (0x27) giúp hiển thị trực quan trạng thái khóa, ký tự mật khẩu (*) và hướng dẫn xác thực 2 lớp.</a:t>
+            </a:r>
+          </a:p>
+          <a:p>
+            <a:pPr>
+              <a:spcAft>
+                <a:spcPts val="450"/>
+              </a:spcAft>
+              <a:defRPr sz="1100">
+                <a:solidFill>
+                  <a:srgbClr val="141C28"/>
+                </a:solidFill>
+              </a:defRPr>
+            </a:pPr>
+            <a:r>
+              <a:t>•  Nâng cấp bàn phím lên chuẩn Ma trận 4x4 (16 phím vật lý có nắp che bụi) để tận dụng các phím A, B, C, D cho thao tác khóa nhanh và xác nhận.</a:t>
+            </a:r>
+          </a:p>
+        </p:txBody>
+      </p:sp>
+      <p:sp>
+        <p:nvSpPr>
+          <p:cNvPr id="11" name="Rounded Rectangle 10"/>
           <p:cNvSpPr/>
           <p:nvPr/>
         </p:nvSpPr>
         <p:spPr>
           <a:xfrm>
-            <a:off x="6217920" y="1463040"/>
-            <a:ext cx="5212080" cy="4754880"/>
+            <a:off x="6720840" y="1234440"/>
+            <a:ext cx="4873752" cy="5056632"/>
           </a:xfrm>
           <a:prstGeom prst="roundRect">
             <a:avLst/>
@@ -4051,14 +4652,14 @@
       </p:sp>
       <p:sp>
         <p:nvSpPr>
-          <p:cNvPr id="8" name="TextBox 7"/>
+          <p:cNvPr id="12" name="TextBox 11"/>
           <p:cNvSpPr txBox="1"/>
           <p:nvPr/>
         </p:nvSpPr>
         <p:spPr>
           <a:xfrm>
-            <a:off x="6446520" y="1645920"/>
-            <a:ext cx="4754880" cy="4389120"/>
+            <a:off x="6922008" y="1399032"/>
+            <a:ext cx="4471416" cy="4764024"/>
           </a:xfrm>
           <a:prstGeom prst="rect">
             <a:avLst/>
@@ -4073,91 +4674,91 @@
           <a:p>
             <a:pPr>
               <a:spcAft>
-                <a:spcPts val="400"/>
-              </a:spcAft>
-              <a:defRPr sz="1500" b="1">
+                <a:spcPts val="300"/>
+              </a:spcAft>
+              <a:defRPr sz="1450" b="1">
                 <a:solidFill>
                   <a:srgbClr val="10559A"/>
                 </a:solidFill>
               </a:defRPr>
             </a:pPr>
             <a:r>
-              <a:t>Mục tiêu kỹ thuật cốt lõi</a:t>
-            </a:r>
-          </a:p>
-          <a:p>
-            <a:pPr>
-              <a:spcAft>
-                <a:spcPts val="800"/>
-              </a:spcAft>
-              <a:defRPr sz="1100">
-                <a:solidFill>
-                  <a:srgbClr val="646E7D"/>
-                </a:solidFill>
-              </a:defRPr>
-            </a:pPr>
-            <a:r>
-              <a:t>Chỉ tiêu kỹ thuật cần đạt được</a:t>
-            </a:r>
-          </a:p>
-          <a:p>
-            <a:pPr>
-              <a:spcAft>
-                <a:spcPts val="500"/>
-              </a:spcAft>
-              <a:defRPr sz="1200">
-                <a:solidFill>
-                  <a:srgbClr val="181E2A"/>
-                </a:solidFill>
-              </a:defRPr>
-            </a:pPr>
-            <a:r>
-              <a:t>•  Tích hợp đồng bộ 3 phương thức xác thực: Vân tay quang học (AS608), Thẻ từ RFID (RC522) và Bàn phím ma trận 4x4.</a:t>
-            </a:r>
-          </a:p>
-          <a:p>
-            <a:pPr>
-              <a:spcAft>
-                <a:spcPts val="500"/>
-              </a:spcAft>
-              <a:defRPr sz="1200">
-                <a:solidFill>
-                  <a:srgbClr val="181E2A"/>
-                </a:solidFill>
-              </a:defRPr>
-            </a:pPr>
-            <a:r>
-              <a:t>•  Linh hoạt 2 cấp độ bảo mật: Chế độ 1 lớp (mở nhanh) và chế độ 2 lớp (2FA: Vân tay + PIN, Thẻ + PIN, Vân tay + Thẻ).</a:t>
-            </a:r>
-          </a:p>
-          <a:p>
-            <a:pPr>
-              <a:spcAft>
-                <a:spcPts val="500"/>
-              </a:spcAft>
-              <a:defRPr sz="1200">
-                <a:solidFill>
-                  <a:srgbClr val="181E2A"/>
-                </a:solidFill>
-              </a:defRPr>
-            </a:pPr>
-            <a:r>
-              <a:t>•  Thiết kế mạch in PCB 2 lớp: Tối ưu chống nhiễu nguồn và tích hợp mạch điều khiển kích khóa chốt 12V an toàn.</a:t>
-            </a:r>
-          </a:p>
-          <a:p>
-            <a:pPr>
-              <a:spcAft>
-                <a:spcPts val="500"/>
-              </a:spcAft>
-              <a:defRPr sz="1200">
-                <a:solidFill>
-                  <a:srgbClr val="181E2A"/>
-                </a:solidFill>
-              </a:defRPr>
-            </a:pPr>
-            <a:r>
-              <a:t>•  Nhúng Web App quản lý trực tiếp lên ESP32: Không cần máy chủ trung gian, cập nhật trạng thái cửa và nhật ký dưới 100ms qua WebSocket.</a:t>
+              <a:t>4 Khối chức năng đồng bộ của đề tài</a:t>
+            </a:r>
+          </a:p>
+          <a:p>
+            <a:pPr>
+              <a:spcAft>
+                <a:spcPts val="700"/>
+              </a:spcAft>
+              <a:defRPr sz="1050">
+                <a:solidFill>
+                  <a:srgbClr val="5F6C7D"/>
+                </a:solidFill>
+              </a:defRPr>
+            </a:pPr>
+            <a:r>
+              <a:t>Sự kết hợp giữa phần cứng cơ điện tử và phần mềm nhúng</a:t>
+            </a:r>
+          </a:p>
+          <a:p>
+            <a:pPr>
+              <a:spcAft>
+                <a:spcPts val="450"/>
+              </a:spcAft>
+              <a:defRPr sz="1150">
+                <a:solidFill>
+                  <a:srgbClr val="141C28"/>
+                </a:solidFill>
+              </a:defRPr>
+            </a:pPr>
+            <a:r>
+              <a:t>•  Khối Thu thập &amp; Xác thực: Kết hợp 3 phương thức độc lập gồm Cảm biến vân tay quang học AS608 (UART2), Đầu đọc thẻ RFID RC522 (SPI 13.56MHz) và Bàn phím ma trận 4x4.</a:t>
+            </a:r>
+          </a:p>
+          <a:p>
+            <a:pPr>
+              <a:spcAft>
+                <a:spcPts val="450"/>
+              </a:spcAft>
+              <a:defRPr sz="1150">
+                <a:solidFill>
+                  <a:srgbClr val="141C28"/>
+                </a:solidFill>
+              </a:defRPr>
+            </a:pPr>
+            <a:r>
+              <a:t>•  Khối Mạch in trung tâm (PCB): Liên kết toàn bộ các module về vi điều khiển ESP32, tích hợp nguồn hạ áp (12V -&gt; 5V/3.3V) và mạch kích khóa chốt kèm Diode chống xung nhiễu.</a:t>
+            </a:r>
+          </a:p>
+          <a:p>
+            <a:pPr>
+              <a:spcAft>
+                <a:spcPts val="450"/>
+              </a:spcAft>
+              <a:defRPr sz="1150">
+                <a:solidFill>
+                  <a:srgbClr val="141C28"/>
+                </a:solidFill>
+              </a:defRPr>
+            </a:pPr>
+            <a:r>
+              <a:t>•  Khối Hiển thị &amp; Chấp hành tại cửa: Màn hình LCD 16x2 hiển thị hướng dẫn tại chỗ và Khóa chốt điện từ 12V đóng/mở cửa tự động.</a:t>
+            </a:r>
+          </a:p>
+          <a:p>
+            <a:pPr>
+              <a:spcAft>
+                <a:spcPts val="450"/>
+              </a:spcAft>
+              <a:defRPr sz="1150">
+                <a:solidFill>
+                  <a:srgbClr val="141C28"/>
+                </a:solidFill>
+              </a:defRPr>
+            </a:pPr>
+            <a:r>
+              <a:t>•  Khối Giao diện Web App (ESP32 Wi-Fi): Theo dõi trạng thái cửa thời gian thực qua WebSocket, mở khóa từ xa, quản lý danh sách thẻ/vân tay và chuyển đổi bảo mật 1 lớp / 2 lớp (2FA).</a:t>
             </a:r>
           </a:p>
         </p:txBody>
@@ -4189,7 +4790,7 @@
         <p:spPr>
           <a:xfrm>
             <a:off x="0" y="0"/>
-            <a:ext cx="12191695" cy="109728"/>
+            <a:ext cx="12191695" cy="100584"/>
           </a:xfrm>
           <a:prstGeom prst="rect">
             <a:avLst/>
@@ -4231,8 +4832,8 @@
         </p:nvSpPr>
         <p:spPr>
           <a:xfrm>
-            <a:off x="731520" y="365760"/>
-            <a:ext cx="10698480" cy="320040"/>
+            <a:off x="594360" y="292608"/>
+            <a:ext cx="9601200" cy="274320"/>
           </a:xfrm>
           <a:prstGeom prst="rect">
             <a:avLst/>
@@ -4240,20 +4841,20 @@
           <a:noFill/>
         </p:spPr>
         <p:txBody>
-          <a:bodyPr wrap="square" lIns="0" tIns="0" rIns="0" bIns="0">
+          <a:bodyPr wrap="none" lIns="0" tIns="0" rIns="0" bIns="0">
             <a:spAutoFit/>
           </a:bodyPr>
           <a:lstStyle/>
           <a:p>
             <a:pPr>
-              <a:defRPr sz="1100" b="1">
+              <a:defRPr sz="1050" b="1">
                 <a:solidFill>
                   <a:srgbClr val="10559A"/>
                 </a:solidFill>
               </a:defRPr>
             </a:pPr>
             <a:r>
-              <a:t>BÁO CÁO TIẾN ĐỘ GIỮA KỲ — ĐỒ ÁN CƠ ĐIỆN TỬ</a:t>
+              <a:t>BÁO CÁO TIẾN ĐỘ GIỮA KỲ — ĐỒ ÁN CƠ ĐIỆN TỬ (NHÓM 13)</a:t>
             </a:r>
           </a:p>
         </p:txBody>
@@ -4266,8 +4867,8 @@
         </p:nvSpPr>
         <p:spPr>
           <a:xfrm>
-            <a:off x="731520" y="685800"/>
-            <a:ext cx="10698480" cy="548640"/>
+            <a:off x="594360" y="566928"/>
+            <a:ext cx="10515600" cy="502920"/>
           </a:xfrm>
           <a:prstGeom prst="rect">
             <a:avLst/>
@@ -4275,44 +4876,79 @@
           <a:noFill/>
         </p:spPr>
         <p:txBody>
-          <a:bodyPr wrap="square" lIns="0" tIns="0" rIns="0" bIns="0">
+          <a:bodyPr wrap="none" lIns="0" tIns="0" rIns="0" bIns="0">
             <a:spAutoFit/>
           </a:bodyPr>
           <a:lstStyle/>
           <a:p>
             <a:pPr>
-              <a:defRPr sz="2200" b="1">
+              <a:defRPr sz="2100" b="1">
                 <a:solidFill>
                   <a:srgbClr val="0B2347"/>
                 </a:solidFill>
               </a:defRPr>
             </a:pPr>
             <a:r>
-              <a:t>2. Cấu trúc tổng thể hệ thống (System Architecture)</a:t>
-            </a:r>
-          </a:p>
-        </p:txBody>
-      </p:sp>
-      <p:sp>
-        <p:nvSpPr>
-          <p:cNvPr id="5" name="Rounded Rectangle 4"/>
+              <a:t>2. Danh mục linh kiện thực tế đã chuẩn bị &amp; Thông số Datasheet</a:t>
+            </a:r>
+          </a:p>
+        </p:txBody>
+      </p:sp>
+      <p:sp>
+        <p:nvSpPr>
+          <p:cNvPr id="5" name="TextBox 4"/>
+          <p:cNvSpPr txBox="1"/>
+          <p:nvPr/>
+        </p:nvSpPr>
+        <p:spPr>
+          <a:xfrm>
+            <a:off x="594360" y="6446520"/>
+            <a:ext cx="10972800" cy="274320"/>
+          </a:xfrm>
+          <a:prstGeom prst="rect">
+            <a:avLst/>
+          </a:prstGeom>
+          <a:noFill/>
+        </p:spPr>
+        <p:txBody>
+          <a:bodyPr wrap="none">
+            <a:spAutoFit/>
+          </a:bodyPr>
+          <a:lstStyle/>
+          <a:p>
+            <a:pPr>
+              <a:defRPr sz="950">
+                <a:solidFill>
+                  <a:srgbClr val="5F6C7D"/>
+                </a:solidFill>
+              </a:defRPr>
+            </a:pPr>
+            <a:r>
+              <a:t>Trường Đại học Công nghệ – ĐHQGHN  |  Nhóm 13: Nguyễn Tuấn Sơn – Vũ Hữu Hoạt                                                                                     Slide 3 / 10</a:t>
+            </a:r>
+          </a:p>
+        </p:txBody>
+      </p:sp>
+      <p:sp>
+        <p:nvSpPr>
+          <p:cNvPr id="6" name="Rounded Rectangle 5"/>
           <p:cNvSpPr/>
           <p:nvPr/>
         </p:nvSpPr>
         <p:spPr>
           <a:xfrm>
-            <a:off x="731520" y="1463040"/>
-            <a:ext cx="3337560" cy="4754880"/>
+            <a:off x="594360" y="1234440"/>
+            <a:ext cx="3520440" cy="2331720"/>
           </a:xfrm>
           <a:prstGeom prst="roundRect">
             <a:avLst/>
           </a:prstGeom>
           <a:solidFill>
-            <a:srgbClr val="F5F7FA"/>
+            <a:srgbClr val="FFFFFF"/>
           </a:solidFill>
-          <a:ln w="12700">
+          <a:ln w="15240">
             <a:solidFill>
-              <a:srgbClr val="DCE2EB"/>
+              <a:srgbClr val="DAE1EB"/>
             </a:solidFill>
           </a:ln>
         </p:spPr>
@@ -4338,16 +4974,120 @@
           </a:p>
         </p:txBody>
       </p:sp>
-      <p:sp>
-        <p:nvSpPr>
-          <p:cNvPr id="6" name="TextBox 5"/>
+      <p:pic>
+        <p:nvPicPr>
+          <p:cNvPr id="7" name="Picture 6" descr="image2.jpg"/>
+          <p:cNvPicPr>
+            <a:picLocks noChangeAspect="1"/>
+          </p:cNvPicPr>
+          <p:nvPr/>
+        </p:nvPicPr>
+        <p:blipFill>
+          <a:blip r:embed="rId2"/>
+          <a:stretch>
+            <a:fillRect/>
+          </a:stretch>
+        </p:blipFill>
+        <p:spPr>
+          <a:xfrm>
+            <a:off x="1472184" y="1344168"/>
+            <a:ext cx="1764792" cy="1764792"/>
+          </a:xfrm>
+          <a:prstGeom prst="rect">
+            <a:avLst/>
+          </a:prstGeom>
+        </p:spPr>
+      </p:pic>
+      <p:sp>
+        <p:nvSpPr>
+          <p:cNvPr id="8" name="TextBox 7"/>
           <p:cNvSpPr txBox="1"/>
           <p:nvPr/>
         </p:nvSpPr>
         <p:spPr>
           <a:xfrm>
-            <a:off x="960120" y="1645920"/>
-            <a:ext cx="2880360" cy="4389120"/>
+            <a:off x="704088" y="3182112"/>
+            <a:ext cx="3300984" cy="347472"/>
+          </a:xfrm>
+          <a:prstGeom prst="rect">
+            <a:avLst/>
+          </a:prstGeom>
+          <a:noFill/>
+        </p:spPr>
+        <p:txBody>
+          <a:bodyPr wrap="square">
+            <a:spAutoFit/>
+          </a:bodyPr>
+          <a:lstStyle/>
+          <a:p>
+            <a:pPr algn="ctr">
+              <a:defRPr sz="1000" b="1">
+                <a:solidFill>
+                  <a:srgbClr val="0B2347"/>
+                </a:solidFill>
+              </a:defRPr>
+            </a:pPr>
+            <a:r>
+              <a:t>Cảm biến vân tay quang học AS608 (Đã mua)</a:t>
+            </a:r>
+          </a:p>
+        </p:txBody>
+      </p:sp>
+      <p:sp>
+        <p:nvSpPr>
+          <p:cNvPr id="9" name="Rounded Rectangle 8"/>
+          <p:cNvSpPr/>
+          <p:nvPr/>
+        </p:nvSpPr>
+        <p:spPr>
+          <a:xfrm>
+            <a:off x="594360" y="3675887"/>
+            <a:ext cx="3520440" cy="2606040"/>
+          </a:xfrm>
+          <a:prstGeom prst="roundRect">
+            <a:avLst/>
+          </a:prstGeom>
+          <a:solidFill>
+            <a:srgbClr val="F6F8FB"/>
+          </a:solidFill>
+          <a:ln w="12700">
+            <a:solidFill>
+              <a:srgbClr val="DAE1EB"/>
+            </a:solidFill>
+          </a:ln>
+        </p:spPr>
+        <p:style>
+          <a:lnRef idx="1">
+            <a:schemeClr val="accent1"/>
+          </a:lnRef>
+          <a:fillRef idx="3">
+            <a:schemeClr val="accent1"/>
+          </a:fillRef>
+          <a:effectRef idx="2">
+            <a:schemeClr val="accent1"/>
+          </a:effectRef>
+          <a:fontRef idx="minor">
+            <a:schemeClr val="lt1"/>
+          </a:fontRef>
+        </p:style>
+        <p:txBody>
+          <a:bodyPr rtlCol="0" anchor="ctr"/>
+          <a:lstStyle/>
+          <a:p>
+            <a:pPr algn="ctr"/>
+          </a:p>
+        </p:txBody>
+      </p:sp>
+      <p:sp>
+        <p:nvSpPr>
+          <p:cNvPr id="10" name="TextBox 9"/>
+          <p:cNvSpPr txBox="1"/>
+          <p:nvPr/>
+        </p:nvSpPr>
+        <p:spPr>
+          <a:xfrm>
+            <a:off x="795528" y="3840479"/>
+            <a:ext cx="3118104" cy="2313432"/>
           </a:xfrm>
           <a:prstGeom prst="rect">
             <a:avLst/>
@@ -4362,90 +5102,194 @@
           <a:p>
             <a:pPr>
               <a:spcAft>
-                <a:spcPts val="400"/>
-              </a:spcAft>
-              <a:defRPr sz="1500" b="1">
+                <a:spcPts val="300"/>
+              </a:spcAft>
+              <a:defRPr sz="1450" b="1">
                 <a:solidFill>
                   <a:srgbClr val="0B2347"/>
                 </a:solidFill>
               </a:defRPr>
             </a:pPr>
             <a:r>
-              <a:t>Khối Thu thập &amp; Xác thực</a:t>
-            </a:r>
-          </a:p>
-          <a:p>
-            <a:pPr>
-              <a:spcAft>
-                <a:spcPts val="800"/>
+              <a:t>Thông số Datasheet AS608</a:t>
+            </a:r>
+          </a:p>
+          <a:p>
+            <a:pPr>
+              <a:spcAft>
+                <a:spcPts val="450"/>
               </a:spcAft>
               <a:defRPr sz="1100">
                 <a:solidFill>
-                  <a:srgbClr val="646E7D"/>
-                </a:solidFill>
-              </a:defRPr>
-            </a:pPr>
-            <a:r>
-              <a:t>Thiết bị ngoại vi tại cửa</a:t>
-            </a:r>
-          </a:p>
-          <a:p>
-            <a:pPr>
-              <a:spcAft>
-                <a:spcPts val="500"/>
-              </a:spcAft>
-              <a:defRPr sz="1200">
-                <a:solidFill>
-                  <a:srgbClr val="181E2A"/>
-                </a:solidFill>
-              </a:defRPr>
-            </a:pPr>
-            <a:r>
-              <a:t>•  Cảm biến vân tay quang học AS608: Giao tiếp UART TTL (57600 bps), lưu 127 vân tay.</a:t>
-            </a:r>
-          </a:p>
-          <a:p>
-            <a:pPr>
-              <a:spcAft>
-                <a:spcPts val="500"/>
-              </a:spcAft>
-              <a:defRPr sz="1200">
-                <a:solidFill>
-                  <a:srgbClr val="181E2A"/>
-                </a:solidFill>
-              </a:defRPr>
-            </a:pPr>
-            <a:r>
-              <a:t>•  Đầu đọc thẻ RFID RC522: Tần số 13.56 MHz, giao tiếp bus SPI, đọc thẻ S50 và móc khóa NFC.</a:t>
-            </a:r>
-          </a:p>
-          <a:p>
-            <a:pPr>
-              <a:spcAft>
-                <a:spcPts val="500"/>
-              </a:spcAft>
-              <a:defRPr sz="1200">
-                <a:solidFill>
-                  <a:srgbClr val="181E2A"/>
-                </a:solidFill>
-              </a:defRPr>
-            </a:pPr>
-            <a:r>
-              <a:t>•  Bàn phím ma trận cơ 4x4: Quét ma trận 4 hàng x 4 cột (8 GPIO), hỗ trợ phím chức năng A, B, C, D, *, #.</a:t>
-            </a:r>
-          </a:p>
-        </p:txBody>
-      </p:sp>
-      <p:sp>
-        <p:nvSpPr>
-          <p:cNvPr id="7" name="Rounded Rectangle 6"/>
+                  <a:srgbClr val="141C28"/>
+                </a:solidFill>
+              </a:defRPr>
+            </a:pPr>
+            <a:r>
+              <a:t>•  Điện áp cấp: 3.3V – 5.0V DC (Dòng đỉnh &lt; 120mA).</a:t>
+            </a:r>
+          </a:p>
+          <a:p>
+            <a:pPr>
+              <a:spcAft>
+                <a:spcPts val="450"/>
+              </a:spcAft>
+              <a:defRPr sz="1100">
+                <a:solidFill>
+                  <a:srgbClr val="141C28"/>
+                </a:solidFill>
+              </a:defRPr>
+            </a:pPr>
+            <a:r>
+              <a:t>•  Giao tiếp: UART TTL (57600 bps) qua Header 6 chân.</a:t>
+            </a:r>
+          </a:p>
+          <a:p>
+            <a:pPr>
+              <a:spcAft>
+                <a:spcPts val="450"/>
+              </a:spcAft>
+              <a:defRPr sz="1100">
+                <a:solidFill>
+                  <a:srgbClr val="141C28"/>
+                </a:solidFill>
+              </a:defRPr>
+            </a:pPr>
+            <a:r>
+              <a:t>•  Lưu trữ: Tối đa 127 mẫu vân tay trong Flash nội.</a:t>
+            </a:r>
+          </a:p>
+          <a:p>
+            <a:pPr>
+              <a:spcAft>
+                <a:spcPts val="450"/>
+              </a:spcAft>
+              <a:defRPr sz="1100">
+                <a:solidFill>
+                  <a:srgbClr val="141C28"/>
+                </a:solidFill>
+              </a:defRPr>
+            </a:pPr>
+            <a:r>
+              <a:t>•  Thời gian xử lý ảnh &amp; tìm kiếm: &lt; 1.0 giây.</a:t>
+            </a:r>
+          </a:p>
+        </p:txBody>
+      </p:sp>
+      <p:sp>
+        <p:nvSpPr>
+          <p:cNvPr id="11" name="Rounded Rectangle 10"/>
           <p:cNvSpPr/>
           <p:nvPr/>
         </p:nvSpPr>
         <p:spPr>
           <a:xfrm>
-            <a:off x="4389120" y="1463040"/>
-            <a:ext cx="3337560" cy="4754880"/>
+            <a:off x="4334256" y="1234440"/>
+            <a:ext cx="3520440" cy="2331720"/>
+          </a:xfrm>
+          <a:prstGeom prst="roundRect">
+            <a:avLst/>
+          </a:prstGeom>
+          <a:solidFill>
+            <a:srgbClr val="FFFFFF"/>
+          </a:solidFill>
+          <a:ln w="15240">
+            <a:solidFill>
+              <a:srgbClr val="DAE1EB"/>
+            </a:solidFill>
+          </a:ln>
+        </p:spPr>
+        <p:style>
+          <a:lnRef idx="1">
+            <a:schemeClr val="accent1"/>
+          </a:lnRef>
+          <a:fillRef idx="3">
+            <a:schemeClr val="accent1"/>
+          </a:fillRef>
+          <a:effectRef idx="2">
+            <a:schemeClr val="accent1"/>
+          </a:effectRef>
+          <a:fontRef idx="minor">
+            <a:schemeClr val="lt1"/>
+          </a:fontRef>
+        </p:style>
+        <p:txBody>
+          <a:bodyPr rtlCol="0" anchor="ctr"/>
+          <a:lstStyle/>
+          <a:p>
+            <a:pPr algn="ctr"/>
+          </a:p>
+        </p:txBody>
+      </p:sp>
+      <p:pic>
+        <p:nvPicPr>
+          <p:cNvPr id="12" name="Picture 11" descr="image3.jpg"/>
+          <p:cNvPicPr>
+            <a:picLocks noChangeAspect="1"/>
+          </p:cNvPicPr>
+          <p:nvPr/>
+        </p:nvPicPr>
+        <p:blipFill>
+          <a:blip r:embed="rId3"/>
+          <a:stretch>
+            <a:fillRect/>
+          </a:stretch>
+        </p:blipFill>
+        <p:spPr>
+          <a:xfrm>
+            <a:off x="5212080" y="1344168"/>
+            <a:ext cx="1764792" cy="1764792"/>
+          </a:xfrm>
+          <a:prstGeom prst="rect">
+            <a:avLst/>
+          </a:prstGeom>
+        </p:spPr>
+      </p:pic>
+      <p:sp>
+        <p:nvSpPr>
+          <p:cNvPr id="13" name="TextBox 12"/>
+          <p:cNvSpPr txBox="1"/>
+          <p:nvPr/>
+        </p:nvSpPr>
+        <p:spPr>
+          <a:xfrm>
+            <a:off x="4443984" y="3182112"/>
+            <a:ext cx="3300984" cy="347472"/>
+          </a:xfrm>
+          <a:prstGeom prst="rect">
+            <a:avLst/>
+          </a:prstGeom>
+          <a:noFill/>
+        </p:spPr>
+        <p:txBody>
+          <a:bodyPr wrap="square">
+            <a:spAutoFit/>
+          </a:bodyPr>
+          <a:lstStyle/>
+          <a:p>
+            <a:pPr algn="ctr">
+              <a:defRPr sz="1000" b="1">
+                <a:solidFill>
+                  <a:srgbClr val="0B2347"/>
+                </a:solidFill>
+              </a:defRPr>
+            </a:pPr>
+            <a:r>
+              <a:t>Module RFID RC522 13.56MHz + Thẻ S50 (Đã mua)</a:t>
+            </a:r>
+          </a:p>
+        </p:txBody>
+      </p:sp>
+      <p:sp>
+        <p:nvSpPr>
+          <p:cNvPr id="14" name="Rounded Rectangle 13"/>
+          <p:cNvSpPr/>
+          <p:nvPr/>
+        </p:nvSpPr>
+        <p:spPr>
+          <a:xfrm>
+            <a:off x="4334256" y="3675887"/>
+            <a:ext cx="3520440" cy="2606040"/>
           </a:xfrm>
           <a:prstGeom prst="roundRect">
             <a:avLst/>
@@ -4483,14 +5327,14 @@
       </p:sp>
       <p:sp>
         <p:nvSpPr>
-          <p:cNvPr id="8" name="TextBox 7"/>
+          <p:cNvPr id="15" name="TextBox 14"/>
           <p:cNvSpPr txBox="1"/>
           <p:nvPr/>
         </p:nvSpPr>
         <p:spPr>
           <a:xfrm>
-            <a:off x="4617720" y="1645920"/>
-            <a:ext cx="2880360" cy="4389120"/>
+            <a:off x="4535424" y="3840479"/>
+            <a:ext cx="3118104" cy="2313432"/>
           </a:xfrm>
           <a:prstGeom prst="rect">
             <a:avLst/>
@@ -4505,100 +5349,100 @@
           <a:p>
             <a:pPr>
               <a:spcAft>
-                <a:spcPts val="400"/>
-              </a:spcAft>
-              <a:defRPr sz="1500" b="1">
+                <a:spcPts val="300"/>
+              </a:spcAft>
+              <a:defRPr sz="1450" b="1">
                 <a:solidFill>
                   <a:srgbClr val="10559A"/>
                 </a:solidFill>
               </a:defRPr>
             </a:pPr>
             <a:r>
-              <a:t>Khối Xử lý &amp; Phản hồi</a:t>
-            </a:r>
-          </a:p>
-          <a:p>
-            <a:pPr>
-              <a:spcAft>
-                <a:spcPts val="800"/>
+              <a:t>Thông số Datasheet RC522</a:t>
+            </a:r>
+          </a:p>
+          <a:p>
+            <a:pPr>
+              <a:spcAft>
+                <a:spcPts val="450"/>
               </a:spcAft>
               <a:defRPr sz="1100">
                 <a:solidFill>
-                  <a:srgbClr val="646E7D"/>
-                </a:solidFill>
-              </a:defRPr>
-            </a:pPr>
-            <a:r>
-              <a:t>Xử lý trung tâm &amp; Chấp hành</a:t>
-            </a:r>
-          </a:p>
-          <a:p>
-            <a:pPr>
-              <a:spcAft>
-                <a:spcPts val="500"/>
-              </a:spcAft>
-              <a:defRPr sz="1200">
-                <a:solidFill>
-                  <a:srgbClr val="181E2A"/>
-                </a:solidFill>
-              </a:defRPr>
-            </a:pPr>
-            <a:r>
-              <a:t>•  Vi điều khiển trung tâm ESP32: Dual-core 240 MHz, xử lý State Machine không chặn (Non-blocking).</a:t>
-            </a:r>
-          </a:p>
-          <a:p>
-            <a:pPr>
-              <a:spcAft>
-                <a:spcPts val="500"/>
-              </a:spcAft>
-              <a:defRPr sz="1200">
-                <a:solidFill>
-                  <a:srgbClr val="181E2A"/>
-                </a:solidFill>
-              </a:defRPr>
-            </a:pPr>
-            <a:r>
-              <a:t>•  Màn hình LCD 16x2 (I2C 0x27): Hiển thị phản hồi tức thì cho người dùng tại cửa.</a:t>
-            </a:r>
-          </a:p>
-          <a:p>
-            <a:pPr>
-              <a:spcAft>
-                <a:spcPts val="500"/>
-              </a:spcAft>
-              <a:defRPr sz="1200">
-                <a:solidFill>
-                  <a:srgbClr val="181E2A"/>
-                </a:solidFill>
-              </a:defRPr>
-            </a:pPr>
-            <a:r>
-              <a:t>•  Cơ cấu chấp hành Khóa chốt 12V: Kích mở qua Relay/MOSFET kèm Diode 1N4007 dập xung ngược.</a:t>
-            </a:r>
-          </a:p>
-        </p:txBody>
-      </p:sp>
-      <p:sp>
-        <p:nvSpPr>
-          <p:cNvPr id="9" name="Rounded Rectangle 8"/>
+                  <a:srgbClr val="141C28"/>
+                </a:solidFill>
+              </a:defRPr>
+            </a:pPr>
+            <a:r>
+              <a:t>•  Nguồn cấp bắt buộc: 3.3V DC (Dòng 13 – 26mA).</a:t>
+            </a:r>
+          </a:p>
+          <a:p>
+            <a:pPr>
+              <a:spcAft>
+                <a:spcPts val="450"/>
+              </a:spcAft>
+              <a:defRPr sz="1100">
+                <a:solidFill>
+                  <a:srgbClr val="141C28"/>
+                </a:solidFill>
+              </a:defRPr>
+            </a:pPr>
+            <a:r>
+              <a:t>•  Tần số hoạt động: 13.56 MHz (Đọc thẻ S50 &amp; NFC).</a:t>
+            </a:r>
+          </a:p>
+          <a:p>
+            <a:pPr>
+              <a:spcAft>
+                <a:spcPts val="450"/>
+              </a:spcAft>
+              <a:defRPr sz="1100">
+                <a:solidFill>
+                  <a:srgbClr val="141C28"/>
+                </a:solidFill>
+              </a:defRPr>
+            </a:pPr>
+            <a:r>
+              <a:t>•  Giao tiếp: Chuẩn SPI tốc độ cao (10 Mbps).</a:t>
+            </a:r>
+          </a:p>
+          <a:p>
+            <a:pPr>
+              <a:spcAft>
+                <a:spcPts val="450"/>
+              </a:spcAft>
+              <a:defRPr sz="1100">
+                <a:solidFill>
+                  <a:srgbClr val="141C28"/>
+                </a:solidFill>
+              </a:defRPr>
+            </a:pPr>
+            <a:r>
+              <a:t>•  Khoảng cách nhận diện thẻ: 0 – 30 mm.</a:t>
+            </a:r>
+          </a:p>
+        </p:txBody>
+      </p:sp>
+      <p:sp>
+        <p:nvSpPr>
+          <p:cNvPr id="16" name="Rounded Rectangle 15"/>
           <p:cNvSpPr/>
           <p:nvPr/>
         </p:nvSpPr>
         <p:spPr>
           <a:xfrm>
-            <a:off x="8046720" y="1463040"/>
-            <a:ext cx="3337560" cy="4754880"/>
+            <a:off x="8074152" y="1234440"/>
+            <a:ext cx="3520440" cy="2331720"/>
           </a:xfrm>
           <a:prstGeom prst="roundRect">
             <a:avLst/>
           </a:prstGeom>
           <a:solidFill>
-            <a:srgbClr val="F5F7FA"/>
+            <a:srgbClr val="FFFFFF"/>
           </a:solidFill>
-          <a:ln w="12700">
+          <a:ln w="15240">
             <a:solidFill>
-              <a:srgbClr val="DCE2EB"/>
+              <a:srgbClr val="DAE1EB"/>
             </a:solidFill>
           </a:ln>
         </p:spPr>
@@ -4624,16 +5468,120 @@
           </a:p>
         </p:txBody>
       </p:sp>
-      <p:sp>
-        <p:nvSpPr>
-          <p:cNvPr id="10" name="TextBox 9"/>
+      <p:pic>
+        <p:nvPicPr>
+          <p:cNvPr id="17" name="Picture 16" descr="image4.jpg"/>
+          <p:cNvPicPr>
+            <a:picLocks noChangeAspect="1"/>
+          </p:cNvPicPr>
+          <p:nvPr/>
+        </p:nvPicPr>
+        <p:blipFill>
+          <a:blip r:embed="rId4"/>
+          <a:stretch>
+            <a:fillRect/>
+          </a:stretch>
+        </p:blipFill>
+        <p:spPr>
+          <a:xfrm>
+            <a:off x="8951976" y="1344168"/>
+            <a:ext cx="1764792" cy="1764792"/>
+          </a:xfrm>
+          <a:prstGeom prst="rect">
+            <a:avLst/>
+          </a:prstGeom>
+        </p:spPr>
+      </p:pic>
+      <p:sp>
+        <p:nvSpPr>
+          <p:cNvPr id="18" name="TextBox 17"/>
           <p:cNvSpPr txBox="1"/>
           <p:nvPr/>
         </p:nvSpPr>
         <p:spPr>
           <a:xfrm>
-            <a:off x="8275320" y="1645920"/>
-            <a:ext cx="2880360" cy="4389120"/>
+            <a:off x="8183880" y="3182112"/>
+            <a:ext cx="3300984" cy="347472"/>
+          </a:xfrm>
+          <a:prstGeom prst="rect">
+            <a:avLst/>
+          </a:prstGeom>
+          <a:noFill/>
+        </p:spPr>
+        <p:txBody>
+          <a:bodyPr wrap="square">
+            <a:spAutoFit/>
+          </a:bodyPr>
+          <a:lstStyle/>
+          <a:p>
+            <a:pPr algn="ctr">
+              <a:defRPr sz="1000" b="1">
+                <a:solidFill>
+                  <a:srgbClr val="0B2347"/>
+                </a:solidFill>
+              </a:defRPr>
+            </a:pPr>
+            <a:r>
+              <a:t>Bàn phím cứng ma trận có nắp đậy (Đã mua)</a:t>
+            </a:r>
+          </a:p>
+        </p:txBody>
+      </p:sp>
+      <p:sp>
+        <p:nvSpPr>
+          <p:cNvPr id="19" name="Rounded Rectangle 18"/>
+          <p:cNvSpPr/>
+          <p:nvPr/>
+        </p:nvSpPr>
+        <p:spPr>
+          <a:xfrm>
+            <a:off x="8074152" y="3675887"/>
+            <a:ext cx="3520440" cy="2606040"/>
+          </a:xfrm>
+          <a:prstGeom prst="roundRect">
+            <a:avLst/>
+          </a:prstGeom>
+          <a:solidFill>
+            <a:srgbClr val="F6F8FB"/>
+          </a:solidFill>
+          <a:ln w="12700">
+            <a:solidFill>
+              <a:srgbClr val="DAE1EB"/>
+            </a:solidFill>
+          </a:ln>
+        </p:spPr>
+        <p:style>
+          <a:lnRef idx="1">
+            <a:schemeClr val="accent1"/>
+          </a:lnRef>
+          <a:fillRef idx="3">
+            <a:schemeClr val="accent1"/>
+          </a:fillRef>
+          <a:effectRef idx="2">
+            <a:schemeClr val="accent1"/>
+          </a:effectRef>
+          <a:fontRef idx="minor">
+            <a:schemeClr val="lt1"/>
+          </a:fontRef>
+        </p:style>
+        <p:txBody>
+          <a:bodyPr rtlCol="0" anchor="ctr"/>
+          <a:lstStyle/>
+          <a:p>
+            <a:pPr algn="ctr"/>
+          </a:p>
+        </p:txBody>
+      </p:sp>
+      <p:sp>
+        <p:nvSpPr>
+          <p:cNvPr id="20" name="TextBox 19"/>
+          <p:cNvSpPr txBox="1"/>
+          <p:nvPr/>
+        </p:nvSpPr>
+        <p:spPr>
+          <a:xfrm>
+            <a:off x="8275320" y="3840479"/>
+            <a:ext cx="3118104" cy="2313432"/>
           </a:xfrm>
           <a:prstGeom prst="rect">
             <a:avLst/>
@@ -4648,76 +5596,61 @@
           <a:p>
             <a:pPr>
               <a:spcAft>
-                <a:spcPts val="400"/>
-              </a:spcAft>
-              <a:defRPr sz="1500" b="1">
+                <a:spcPts val="300"/>
+              </a:spcAft>
+              <a:defRPr sz="1450" b="1">
                 <a:solidFill>
                   <a:srgbClr val="0B2347"/>
                 </a:solidFill>
               </a:defRPr>
             </a:pPr>
             <a:r>
-              <a:t>Khối Giám sát &amp; Quản trị</a:t>
-            </a:r>
-          </a:p>
-          <a:p>
-            <a:pPr>
-              <a:spcAft>
-                <a:spcPts val="800"/>
+              <a:t>Keypad 4x4, LCD I2C &amp; Khóa 12V</a:t>
+            </a:r>
+          </a:p>
+          <a:p>
+            <a:pPr>
+              <a:spcAft>
+                <a:spcPts val="450"/>
               </a:spcAft>
               <a:defRPr sz="1100">
                 <a:solidFill>
-                  <a:srgbClr val="646E7D"/>
-                </a:solidFill>
-              </a:defRPr>
-            </a:pPr>
-            <a:r>
-              <a:t>Mạng &amp; Ứng dụng điều khiển</a:t>
-            </a:r>
-          </a:p>
-          <a:p>
-            <a:pPr>
-              <a:spcAft>
-                <a:spcPts val="500"/>
-              </a:spcAft>
-              <a:defRPr sz="1200">
-                <a:solidFill>
-                  <a:srgbClr val="181E2A"/>
-                </a:solidFill>
-              </a:defRPr>
-            </a:pPr>
-            <a:r>
-              <a:t>•  Web Server &amp; WebSocket Server: Nhúng trực tiếp trong Flash LittleFS của ESP32.</a:t>
-            </a:r>
-          </a:p>
-          <a:p>
-            <a:pPr>
-              <a:spcAft>
-                <a:spcPts val="500"/>
-              </a:spcAft>
-              <a:defRPr sz="1200">
-                <a:solidFill>
-                  <a:srgbClr val="181E2A"/>
-                </a:solidFill>
-              </a:defRPr>
-            </a:pPr>
-            <a:r>
-              <a:t>•  Tên miền nội bộ mDNS (smartdoor.local): Truy cập nhanh không cần nhớ địa chỉ IP.</a:t>
-            </a:r>
-          </a:p>
-          <a:p>
-            <a:pPr>
-              <a:spcAft>
-                <a:spcPts val="500"/>
-              </a:spcAft>
-              <a:defRPr sz="1200">
-                <a:solidFill>
-                  <a:srgbClr val="181E2A"/>
-                </a:solidFill>
-              </a:defRPr>
-            </a:pPr>
-            <a:r>
-              <a:t>•  Đám mây demo Vercel: Triển khai giao diện trực tuyến phục vụ kiểm thử và báo cáo từ xa.</a:t>
+                  <a:srgbClr val="141C28"/>
+                </a:solidFill>
+              </a:defRPr>
+            </a:pPr>
+            <a:r>
+              <a:t>•  Bàn phím ma trận 4x4: Phím vật lý độ nảy cao, có nắp che chống bụi, quét 8 chân Hàng – Cột về PCB.</a:t>
+            </a:r>
+          </a:p>
+          <a:p>
+            <a:pPr>
+              <a:spcAft>
+                <a:spcPts val="450"/>
+              </a:spcAft>
+              <a:defRPr sz="1100">
+                <a:solidFill>
+                  <a:srgbClr val="141C28"/>
+                </a:solidFill>
+              </a:defRPr>
+            </a:pPr>
+            <a:r>
+              <a:t>•  Màn hình LCD 16x2 I2C: Điện áp 5V, địa chỉ 0x27.</a:t>
+            </a:r>
+          </a:p>
+          <a:p>
+            <a:pPr>
+              <a:spcAft>
+                <a:spcPts val="450"/>
+              </a:spcAft>
+              <a:defRPr sz="1100">
+                <a:solidFill>
+                  <a:srgbClr val="141C28"/>
+                </a:solidFill>
+              </a:defRPr>
+            </a:pPr>
+            <a:r>
+              <a:t>•  Khóa chốt điện từ 12V: Dòng kích 0.8A – 1.2A, đóng mở qua Relay/MOSFET có Diode dập xung.</a:t>
             </a:r>
           </a:p>
         </p:txBody>
@@ -4749,7 +5682,7 @@
         <p:spPr>
           <a:xfrm>
             <a:off x="0" y="0"/>
-            <a:ext cx="12191695" cy="109728"/>
+            <a:ext cx="12191695" cy="100584"/>
           </a:xfrm>
           <a:prstGeom prst="rect">
             <a:avLst/>
@@ -4791,8 +5724,8 @@
         </p:nvSpPr>
         <p:spPr>
           <a:xfrm>
-            <a:off x="731520" y="365760"/>
-            <a:ext cx="10698480" cy="320040"/>
+            <a:off x="594360" y="292608"/>
+            <a:ext cx="9601200" cy="274320"/>
           </a:xfrm>
           <a:prstGeom prst="rect">
             <a:avLst/>
@@ -4800,20 +5733,20 @@
           <a:noFill/>
         </p:spPr>
         <p:txBody>
-          <a:bodyPr wrap="square" lIns="0" tIns="0" rIns="0" bIns="0">
+          <a:bodyPr wrap="none" lIns="0" tIns="0" rIns="0" bIns="0">
             <a:spAutoFit/>
           </a:bodyPr>
           <a:lstStyle/>
           <a:p>
             <a:pPr>
-              <a:defRPr sz="1100" b="1">
+              <a:defRPr sz="1050" b="1">
                 <a:solidFill>
                   <a:srgbClr val="10559A"/>
                 </a:solidFill>
               </a:defRPr>
             </a:pPr>
             <a:r>
-              <a:t>BÁO CÁO TIẾN ĐỘ GIỮA KỲ — ĐỒ ÁN CƠ ĐIỆN TỬ</a:t>
+              <a:t>BÁO CÁO TIẾN ĐỘ GIỮA KỲ — ĐỒ ÁN CƠ ĐIỆN TỬ (NHÓM 13)</a:t>
             </a:r>
           </a:p>
         </p:txBody>
@@ -4826,8 +5759,8 @@
         </p:nvSpPr>
         <p:spPr>
           <a:xfrm>
-            <a:off x="731520" y="685800"/>
-            <a:ext cx="10698480" cy="548640"/>
+            <a:off x="594360" y="566928"/>
+            <a:ext cx="10515600" cy="502920"/>
           </a:xfrm>
           <a:prstGeom prst="rect">
             <a:avLst/>
@@ -4835,44 +5768,79 @@
           <a:noFill/>
         </p:spPr>
         <p:txBody>
-          <a:bodyPr wrap="square" lIns="0" tIns="0" rIns="0" bIns="0">
+          <a:bodyPr wrap="none" lIns="0" tIns="0" rIns="0" bIns="0">
             <a:spAutoFit/>
           </a:bodyPr>
           <a:lstStyle/>
           <a:p>
             <a:pPr>
-              <a:defRPr sz="2200" b="1">
+              <a:defRPr sz="2100" b="1">
                 <a:solidFill>
                   <a:srgbClr val="0B2347"/>
                 </a:solidFill>
               </a:defRPr>
             </a:pPr>
             <a:r>
-              <a:t>3. Khảo sát linh kiện &amp; Phân tích Datasheet chi tiết</a:t>
-            </a:r>
-          </a:p>
-        </p:txBody>
-      </p:sp>
-      <p:sp>
-        <p:nvSpPr>
-          <p:cNvPr id="5" name="Rounded Rectangle 4"/>
+              <a:t>3. Nghiên cứu giao thức kết nối &amp; Quy hoạch sơ đồ chân ESP32</a:t>
+            </a:r>
+          </a:p>
+        </p:txBody>
+      </p:sp>
+      <p:sp>
+        <p:nvSpPr>
+          <p:cNvPr id="5" name="TextBox 4"/>
+          <p:cNvSpPr txBox="1"/>
+          <p:nvPr/>
+        </p:nvSpPr>
+        <p:spPr>
+          <a:xfrm>
+            <a:off x="594360" y="6446520"/>
+            <a:ext cx="10972800" cy="274320"/>
+          </a:xfrm>
+          <a:prstGeom prst="rect">
+            <a:avLst/>
+          </a:prstGeom>
+          <a:noFill/>
+        </p:spPr>
+        <p:txBody>
+          <a:bodyPr wrap="none">
+            <a:spAutoFit/>
+          </a:bodyPr>
+          <a:lstStyle/>
+          <a:p>
+            <a:pPr>
+              <a:defRPr sz="950">
+                <a:solidFill>
+                  <a:srgbClr val="5F6C7D"/>
+                </a:solidFill>
+              </a:defRPr>
+            </a:pPr>
+            <a:r>
+              <a:t>Trường Đại học Công nghệ – ĐHQGHN  |  Nhóm 13: Nguyễn Tuấn Sơn – Vũ Hữu Hoạt                                                                                     Slide 4 / 10</a:t>
+            </a:r>
+          </a:p>
+        </p:txBody>
+      </p:sp>
+      <p:sp>
+        <p:nvSpPr>
+          <p:cNvPr id="6" name="Rounded Rectangle 5"/>
           <p:cNvSpPr/>
           <p:nvPr/>
         </p:nvSpPr>
         <p:spPr>
           <a:xfrm>
-            <a:off x="731520" y="1463040"/>
-            <a:ext cx="5120640" cy="2240280"/>
+            <a:off x="594360" y="1234440"/>
+            <a:ext cx="5669280" cy="5029200"/>
           </a:xfrm>
           <a:prstGeom prst="roundRect">
             <a:avLst/>
           </a:prstGeom>
           <a:solidFill>
-            <a:srgbClr val="F5F7FA"/>
+            <a:srgbClr val="F6F8FB"/>
           </a:solidFill>
           <a:ln w="12700">
             <a:solidFill>
-              <a:srgbClr val="DCE2EB"/>
+              <a:srgbClr val="DAE1EB"/>
             </a:solidFill>
           </a:ln>
         </p:spPr>
@@ -4900,14 +5868,14 @@
       </p:sp>
       <p:sp>
         <p:nvSpPr>
-          <p:cNvPr id="6" name="TextBox 5"/>
+          <p:cNvPr id="7" name="TextBox 6"/>
           <p:cNvSpPr txBox="1"/>
           <p:nvPr/>
         </p:nvSpPr>
         <p:spPr>
           <a:xfrm>
-            <a:off x="960120" y="1645920"/>
-            <a:ext cx="4663440" cy="1874520"/>
+            <a:off x="795528" y="1399032"/>
+            <a:ext cx="5266944" cy="4736592"/>
           </a:xfrm>
           <a:prstGeom prst="rect">
             <a:avLst/>
@@ -4922,85 +5890,205 @@
           <a:p>
             <a:pPr>
               <a:spcAft>
-                <a:spcPts val="400"/>
-              </a:spcAft>
-              <a:defRPr sz="1500" b="1">
+                <a:spcPts val="300"/>
+              </a:spcAft>
+              <a:defRPr sz="1450" b="1">
                 <a:solidFill>
                   <a:srgbClr val="0B2347"/>
                 </a:solidFill>
               </a:defRPr>
             </a:pPr>
             <a:r>
-              <a:t>Cảm biến vân tay quang học AS608</a:t>
-            </a:r>
-          </a:p>
-          <a:p>
-            <a:pPr>
-              <a:spcAft>
-                <a:spcPts val="500"/>
-              </a:spcAft>
-              <a:defRPr sz="1200">
-                <a:solidFill>
-                  <a:srgbClr val="181E2A"/>
-                </a:solidFill>
-              </a:defRPr>
-            </a:pPr>
-            <a:r>
-              <a:t>•  Điện áp cấp: 3.3V – 5.0V DC; Dòng đỉnh: &lt; 120 mA.</a:t>
-            </a:r>
-          </a:p>
-          <a:p>
-            <a:pPr>
-              <a:spcAft>
-                <a:spcPts val="500"/>
-              </a:spcAft>
-              <a:defRPr sz="1200">
-                <a:solidFill>
-                  <a:srgbClr val="181E2A"/>
-                </a:solidFill>
-              </a:defRPr>
-            </a:pPr>
-            <a:r>
-              <a:t>•  Giao tiếp: UART TTL (baudrate 57600 bps mặc định).</a:t>
-            </a:r>
-          </a:p>
-          <a:p>
-            <a:pPr>
-              <a:spcAft>
-                <a:spcPts val="500"/>
-              </a:spcAft>
-              <a:defRPr sz="1200">
-                <a:solidFill>
-                  <a:srgbClr val="181E2A"/>
-                </a:solidFill>
-              </a:defRPr>
-            </a:pPr>
-            <a:r>
-              <a:t>•  Độ phân giải: 500 DPI, thời gian đối sánh mẫu: &lt; 1.0 giây.</a:t>
-            </a:r>
-          </a:p>
-        </p:txBody>
-      </p:sp>
-      <p:sp>
-        <p:nvSpPr>
-          <p:cNvPr id="7" name="Rounded Rectangle 6"/>
+              <a:t>Quy hoạch Sơ đồ chân (Pinout ESP32) đồng bộ PCB</a:t>
+            </a:r>
+          </a:p>
+          <a:p>
+            <a:pPr>
+              <a:spcAft>
+                <a:spcPts val="700"/>
+              </a:spcAft>
+              <a:defRPr sz="1050">
+                <a:solidFill>
+                  <a:srgbClr val="5F6C7D"/>
+                </a:solidFill>
+              </a:defRPr>
+            </a:pPr>
+            <a:r>
+              <a:t>Đã kiểm chứng tránh toàn bộ chân cấm (Strapping Pins &amp; Input-Only Pins)</a:t>
+            </a:r>
+          </a:p>
+          <a:p>
+            <a:pPr>
+              <a:spcAft>
+                <a:spcPts val="450"/>
+              </a:spcAft>
+              <a:defRPr sz="1100">
+                <a:solidFill>
+                  <a:srgbClr val="141C28"/>
+                </a:solidFill>
+              </a:defRPr>
+            </a:pPr>
+            <a:r>
+              <a:t>•  1. Cảm biến vân tay AS608 (Chuẩn UART2 - 57600 bps):</a:t>
+            </a:r>
+          </a:p>
+          <a:p>
+            <a:pPr>
+              <a:spcAft>
+                <a:spcPts val="450"/>
+              </a:spcAft>
+              <a:defRPr sz="1100">
+                <a:solidFill>
+                  <a:srgbClr val="141C28"/>
+                </a:solidFill>
+              </a:defRPr>
+            </a:pPr>
+            <a:r>
+              <a:t>•      • Chân TX (AS608) -&gt; GPIO 16 (RX2)  |  Chân RX (AS608) -&gt; GPIO 17 (TX2)</a:t>
+            </a:r>
+          </a:p>
+          <a:p>
+            <a:pPr>
+              <a:spcAft>
+                <a:spcPts val="450"/>
+              </a:spcAft>
+              <a:defRPr sz="1100">
+                <a:solidFill>
+                  <a:srgbClr val="141C28"/>
+                </a:solidFill>
+              </a:defRPr>
+            </a:pPr>
+            <a:r>
+              <a:t>•  2. Module đọc thẻ RFID RC522 (Chuẩn SPI - Nguồn 3.3V):</a:t>
+            </a:r>
+          </a:p>
+          <a:p>
+            <a:pPr>
+              <a:spcAft>
+                <a:spcPts val="450"/>
+              </a:spcAft>
+              <a:defRPr sz="1100">
+                <a:solidFill>
+                  <a:srgbClr val="141C28"/>
+                </a:solidFill>
+              </a:defRPr>
+            </a:pPr>
+            <a:r>
+              <a:t>•      • SDA(SS): GPIO 5 | SCK: GPIO 18 | MOSI: GPIO 23 | MISO: GPIO 19 | RST: GPIO 4</a:t>
+            </a:r>
+          </a:p>
+          <a:p>
+            <a:pPr>
+              <a:spcAft>
+                <a:spcPts val="450"/>
+              </a:spcAft>
+              <a:defRPr sz="1100">
+                <a:solidFill>
+                  <a:srgbClr val="141C28"/>
+                </a:solidFill>
+              </a:defRPr>
+            </a:pPr>
+            <a:r>
+              <a:t>•  3. Màn hình hiển thị LCD 16x2 (Chuẩn I2C - Địa chỉ 0x27):</a:t>
+            </a:r>
+          </a:p>
+          <a:p>
+            <a:pPr>
+              <a:spcAft>
+                <a:spcPts val="450"/>
+              </a:spcAft>
+              <a:defRPr sz="1100">
+                <a:solidFill>
+                  <a:srgbClr val="141C28"/>
+                </a:solidFill>
+              </a:defRPr>
+            </a:pPr>
+            <a:r>
+              <a:t>•      • SDA -&gt; GPIO 21  |  SCL -&gt; GPIO 22</a:t>
+            </a:r>
+          </a:p>
+          <a:p>
+            <a:pPr>
+              <a:spcAft>
+                <a:spcPts val="450"/>
+              </a:spcAft>
+              <a:defRPr sz="1100">
+                <a:solidFill>
+                  <a:srgbClr val="141C28"/>
+                </a:solidFill>
+              </a:defRPr>
+            </a:pPr>
+            <a:r>
+              <a:t>•  4. Cơ cấu chấp hành Khóa chốt điện từ 12V:</a:t>
+            </a:r>
+          </a:p>
+          <a:p>
+            <a:pPr>
+              <a:spcAft>
+                <a:spcPts val="450"/>
+              </a:spcAft>
+              <a:defRPr sz="1100">
+                <a:solidFill>
+                  <a:srgbClr val="141C28"/>
+                </a:solidFill>
+              </a:defRPr>
+            </a:pPr>
+            <a:r>
+              <a:t>•      • Tín hiệu kích Relay/MOSFET -&gt; GPIO 2 (Mức HIGH kích mở khóa)</a:t>
+            </a:r>
+          </a:p>
+          <a:p>
+            <a:pPr>
+              <a:spcAft>
+                <a:spcPts val="450"/>
+              </a:spcAft>
+              <a:defRPr sz="1100">
+                <a:solidFill>
+                  <a:srgbClr val="141C28"/>
+                </a:solidFill>
+              </a:defRPr>
+            </a:pPr>
+            <a:r>
+              <a:t>•  5. Bàn phím ma trận Keypad 4x4 (8 chân GPIO):</a:t>
+            </a:r>
+          </a:p>
+          <a:p>
+            <a:pPr>
+              <a:spcAft>
+                <a:spcPts val="450"/>
+              </a:spcAft>
+              <a:defRPr sz="1100">
+                <a:solidFill>
+                  <a:srgbClr val="141C28"/>
+                </a:solidFill>
+              </a:defRPr>
+            </a:pPr>
+            <a:r>
+              <a:t>•      • 4 Hàng (R1 -&gt; R4): GPIO 13, 12, 14, 27  |  4 Cột (C1 -&gt; C4): GPIO 26, 25, 33, 32</a:t>
+            </a:r>
+          </a:p>
+        </p:txBody>
+      </p:sp>
+      <p:sp>
+        <p:nvSpPr>
+          <p:cNvPr id="8" name="Rounded Rectangle 7"/>
           <p:cNvSpPr/>
           <p:nvPr/>
         </p:nvSpPr>
         <p:spPr>
           <a:xfrm>
-            <a:off x="6217920" y="1463040"/>
-            <a:ext cx="5212080" cy="2240280"/>
+            <a:off x="6446520" y="1234440"/>
+            <a:ext cx="5148072" cy="5029200"/>
           </a:xfrm>
           <a:prstGeom prst="roundRect">
             <a:avLst/>
           </a:prstGeom>
           <a:solidFill>
-            <a:srgbClr val="F5F7FA"/>
+            <a:srgbClr val="FFFFFF"/>
           </a:solidFill>
-          <a:ln w="12700">
+          <a:ln w="19050">
             <a:solidFill>
-              <a:srgbClr val="DCE2EB"/>
+              <a:srgbClr val="10559A"/>
             </a:solidFill>
           </a:ln>
         </p:spPr>
@@ -5028,14 +6116,14 @@
       </p:sp>
       <p:sp>
         <p:nvSpPr>
-          <p:cNvPr id="8" name="TextBox 7"/>
+          <p:cNvPr id="9" name="TextBox 8"/>
           <p:cNvSpPr txBox="1"/>
           <p:nvPr/>
         </p:nvSpPr>
         <p:spPr>
           <a:xfrm>
-            <a:off x="6446520" y="1645920"/>
-            <a:ext cx="4754880" cy="1874520"/>
+            <a:off x="6647688" y="1399032"/>
+            <a:ext cx="4745736" cy="4736592"/>
           </a:xfrm>
           <a:prstGeom prst="rect">
             <a:avLst/>
@@ -5050,317 +6138,76 @@
           <a:p>
             <a:pPr>
               <a:spcAft>
-                <a:spcPts val="400"/>
-              </a:spcAft>
-              <a:defRPr sz="1500" b="1">
-                <a:solidFill>
-                  <a:srgbClr val="0B2347"/>
-                </a:solidFill>
-              </a:defRPr>
-            </a:pPr>
-            <a:r>
-              <a:t>Module đọc thẻ từ RFID-RC522</a:t>
-            </a:r>
-          </a:p>
-          <a:p>
-            <a:pPr>
-              <a:spcAft>
-                <a:spcPts val="500"/>
-              </a:spcAft>
-              <a:defRPr sz="1200">
-                <a:solidFill>
-                  <a:srgbClr val="181E2A"/>
-                </a:solidFill>
-              </a:defRPr>
-            </a:pPr>
-            <a:r>
-              <a:t>•  Điện áp hoạt động: 3.3V DC (Tuyệt đối không cấp 5V gây hỏng chip).</a:t>
-            </a:r>
-          </a:p>
-          <a:p>
-            <a:pPr>
-              <a:spcAft>
-                <a:spcPts val="500"/>
-              </a:spcAft>
-              <a:defRPr sz="1200">
-                <a:solidFill>
-                  <a:srgbClr val="181E2A"/>
-                </a:solidFill>
-              </a:defRPr>
-            </a:pPr>
-            <a:r>
-              <a:t>•  Tần số sóng mang: 13.56 MHz; Chuẩn giao tiếp: SPI tốc độ cao.</a:t>
-            </a:r>
-          </a:p>
-          <a:p>
-            <a:pPr>
-              <a:spcAft>
-                <a:spcPts val="500"/>
-              </a:spcAft>
-              <a:defRPr sz="1200">
-                <a:solidFill>
-                  <a:srgbClr val="181E2A"/>
-                </a:solidFill>
-              </a:defRPr>
-            </a:pPr>
-            <a:r>
-              <a:t>•  Dòng tiêu thụ: 13 – 26 mA; Khoảng cách đọc: 0 – 30 mm.</a:t>
-            </a:r>
-          </a:p>
-        </p:txBody>
-      </p:sp>
-      <p:sp>
-        <p:nvSpPr>
-          <p:cNvPr id="9" name="Rounded Rectangle 8"/>
-          <p:cNvSpPr/>
-          <p:nvPr/>
-        </p:nvSpPr>
-        <p:spPr>
-          <a:xfrm>
-            <a:off x="731520" y="3977639"/>
-            <a:ext cx="5120640" cy="2240280"/>
-          </a:xfrm>
-          <a:prstGeom prst="roundRect">
-            <a:avLst/>
-          </a:prstGeom>
-          <a:solidFill>
-            <a:srgbClr val="F5F7FA"/>
-          </a:solidFill>
-          <a:ln w="12700">
-            <a:solidFill>
-              <a:srgbClr val="DCE2EB"/>
-            </a:solidFill>
-          </a:ln>
-        </p:spPr>
-        <p:style>
-          <a:lnRef idx="1">
-            <a:schemeClr val="accent1"/>
-          </a:lnRef>
-          <a:fillRef idx="3">
-            <a:schemeClr val="accent1"/>
-          </a:fillRef>
-          <a:effectRef idx="2">
-            <a:schemeClr val="accent1"/>
-          </a:effectRef>
-          <a:fontRef idx="minor">
-            <a:schemeClr val="lt1"/>
-          </a:fontRef>
-        </p:style>
-        <p:txBody>
-          <a:bodyPr rtlCol="0" anchor="ctr"/>
-          <a:lstStyle/>
-          <a:p>
-            <a:pPr algn="ctr"/>
-          </a:p>
-        </p:txBody>
-      </p:sp>
-      <p:sp>
-        <p:nvSpPr>
-          <p:cNvPr id="10" name="TextBox 9"/>
-          <p:cNvSpPr txBox="1"/>
-          <p:nvPr/>
-        </p:nvSpPr>
-        <p:spPr>
-          <a:xfrm>
-            <a:off x="960120" y="4160519"/>
-            <a:ext cx="4663440" cy="1874520"/>
-          </a:xfrm>
-          <a:prstGeom prst="rect">
-            <a:avLst/>
-          </a:prstGeom>
-          <a:noFill/>
-        </p:spPr>
-        <p:txBody>
-          <a:bodyPr wrap="square" lIns="0" tIns="0" rIns="0" bIns="0">
-            <a:spAutoFit/>
-          </a:bodyPr>
-          <a:lstStyle/>
-          <a:p>
-            <a:pPr>
-              <a:spcAft>
-                <a:spcPts val="400"/>
-              </a:spcAft>
-              <a:defRPr sz="1500" b="1">
-                <a:solidFill>
-                  <a:srgbClr val="0B2347"/>
-                </a:solidFill>
-              </a:defRPr>
-            </a:pPr>
-            <a:r>
-              <a:t>Bàn phím ma trận 4x4 &amp; LCD I2C</a:t>
-            </a:r>
-          </a:p>
-          <a:p>
-            <a:pPr>
-              <a:spcAft>
-                <a:spcPts val="500"/>
-              </a:spcAft>
-              <a:defRPr sz="1200">
-                <a:solidFill>
-                  <a:srgbClr val="181E2A"/>
-                </a:solidFill>
-              </a:defRPr>
-            </a:pPr>
-            <a:r>
-              <a:t>•  Keypad 4x4: 16 phím cơ độ nảy cao, chống bụi bẩn, 8 chân hàng-cột.</a:t>
-            </a:r>
-          </a:p>
-          <a:p>
-            <a:pPr>
-              <a:spcAft>
-                <a:spcPts val="500"/>
-              </a:spcAft>
-              <a:defRPr sz="1200">
-                <a:solidFill>
-                  <a:srgbClr val="181E2A"/>
-                </a:solidFill>
-              </a:defRPr>
-            </a:pPr>
-            <a:r>
-              <a:t>•  Màn hình LCD 16x2 + Ba lô PCF8574: Tiết kiệm từ 16 chân còn 2 chân I2C.</a:t>
-            </a:r>
-          </a:p>
-          <a:p>
-            <a:pPr>
-              <a:spcAft>
-                <a:spcPts val="500"/>
-              </a:spcAft>
-              <a:defRPr sz="1200">
-                <a:solidFill>
-                  <a:srgbClr val="181E2A"/>
-                </a:solidFill>
-              </a:defRPr>
-            </a:pPr>
-            <a:r>
-              <a:t>•  Điện áp cấp LCD: 5V DC đảm bảo độ tương phản rõ nét.</a:t>
-            </a:r>
-          </a:p>
-        </p:txBody>
-      </p:sp>
-      <p:sp>
-        <p:nvSpPr>
-          <p:cNvPr id="11" name="Rounded Rectangle 10"/>
-          <p:cNvSpPr/>
-          <p:nvPr/>
-        </p:nvSpPr>
-        <p:spPr>
-          <a:xfrm>
-            <a:off x="6217920" y="3977639"/>
-            <a:ext cx="5212080" cy="2240280"/>
-          </a:xfrm>
-          <a:prstGeom prst="roundRect">
-            <a:avLst/>
-          </a:prstGeom>
-          <a:solidFill>
-            <a:srgbClr val="F5F7FA"/>
-          </a:solidFill>
-          <a:ln w="12700">
-            <a:solidFill>
-              <a:srgbClr val="DCE2EB"/>
-            </a:solidFill>
-          </a:ln>
-        </p:spPr>
-        <p:style>
-          <a:lnRef idx="1">
-            <a:schemeClr val="accent1"/>
-          </a:lnRef>
-          <a:fillRef idx="3">
-            <a:schemeClr val="accent1"/>
-          </a:fillRef>
-          <a:effectRef idx="2">
-            <a:schemeClr val="accent1"/>
-          </a:effectRef>
-          <a:fontRef idx="minor">
-            <a:schemeClr val="lt1"/>
-          </a:fontRef>
-        </p:style>
-        <p:txBody>
-          <a:bodyPr rtlCol="0" anchor="ctr"/>
-          <a:lstStyle/>
-          <a:p>
-            <a:pPr algn="ctr"/>
-          </a:p>
-        </p:txBody>
-      </p:sp>
-      <p:sp>
-        <p:nvSpPr>
-          <p:cNvPr id="12" name="TextBox 11"/>
-          <p:cNvSpPr txBox="1"/>
-          <p:nvPr/>
-        </p:nvSpPr>
-        <p:spPr>
-          <a:xfrm>
-            <a:off x="6446520" y="4160519"/>
-            <a:ext cx="4754880" cy="1874520"/>
-          </a:xfrm>
-          <a:prstGeom prst="rect">
-            <a:avLst/>
-          </a:prstGeom>
-          <a:noFill/>
-        </p:spPr>
-        <p:txBody>
-          <a:bodyPr wrap="square" lIns="0" tIns="0" rIns="0" bIns="0">
-            <a:spAutoFit/>
-          </a:bodyPr>
-          <a:lstStyle/>
-          <a:p>
-            <a:pPr>
-              <a:spcAft>
-                <a:spcPts val="400"/>
-              </a:spcAft>
-              <a:defRPr sz="1500" b="1">
-                <a:solidFill>
-                  <a:srgbClr val="0B2347"/>
-                </a:solidFill>
-              </a:defRPr>
-            </a:pPr>
-            <a:r>
-              <a:t>Vi điều khiển ESP32 &amp; Khóa chốt 12V</a:t>
-            </a:r>
-          </a:p>
-          <a:p>
-            <a:pPr>
-              <a:spcAft>
-                <a:spcPts val="500"/>
-              </a:spcAft>
-              <a:defRPr sz="1200">
-                <a:solidFill>
-                  <a:srgbClr val="181E2A"/>
-                </a:solidFill>
-              </a:defRPr>
-            </a:pPr>
-            <a:r>
-              <a:t>•  ESP32-WROOM-32: Bộ nhớ Flash 4MB, tích hợp Wi-Fi 2.4GHz &amp; Bluetooth.</a:t>
-            </a:r>
-          </a:p>
-          <a:p>
-            <a:pPr>
-              <a:spcAft>
-                <a:spcPts val="500"/>
-              </a:spcAft>
-              <a:defRPr sz="1200">
-                <a:solidFill>
-                  <a:srgbClr val="181E2A"/>
-                </a:solidFill>
-              </a:defRPr>
-            </a:pPr>
-            <a:r>
-              <a:t>•  Khóa chốt điện từ 12V: Dòng kích cuộn dây 0.8A – 1.0A (Fail-Secure).</a:t>
-            </a:r>
-          </a:p>
-          <a:p>
-            <a:pPr>
-              <a:spcAft>
-                <a:spcPts val="500"/>
-              </a:spcAft>
-              <a:defRPr sz="1200">
-                <a:solidFill>
-                  <a:srgbClr val="181E2A"/>
-                </a:solidFill>
-              </a:defRPr>
-            </a:pPr>
-            <a:r>
-              <a:t>•  Bảo vệ quá áp: Sử dụng Diode dập xung ngược 1N4007 song song cuộn hút.</a:t>
+                <a:spcPts val="300"/>
+              </a:spcAft>
+              <a:defRPr sz="1450" b="1">
+                <a:solidFill>
+                  <a:srgbClr val="10559A"/>
+                </a:solidFill>
+              </a:defRPr>
+            </a:pPr>
+            <a:r>
+              <a:t>Giải quyết bài toán kỹ thuật khi nghiên cứu Datasheet</a:t>
+            </a:r>
+          </a:p>
+          <a:p>
+            <a:pPr>
+              <a:spcAft>
+                <a:spcPts val="700"/>
+              </a:spcAft>
+              <a:defRPr sz="1050">
+                <a:solidFill>
+                  <a:srgbClr val="5F6C7D"/>
+                </a:solidFill>
+              </a:defRPr>
+            </a:pPr>
+            <a:r>
+              <a:t>Đảm bảo tính ổn định công nghiệp khi vận hành thực tế</a:t>
+            </a:r>
+          </a:p>
+          <a:p>
+            <a:pPr>
+              <a:spcAft>
+                <a:spcPts val="450"/>
+              </a:spcAft>
+              <a:defRPr sz="1150">
+                <a:solidFill>
+                  <a:srgbClr val="141C28"/>
+                </a:solidFill>
+              </a:defRPr>
+            </a:pPr>
+            <a:r>
+              <a:t>•  Tránh xung đột chân Input-Only (GPIO 34, 35, 36, 39): Các chân này trên ESP32 không có điện trở kéo lên nội (INPUT_PULLUP). Do đó nhóm quy hoạch Keypad 4x4 vào cụm chân 12..33 để quét ma trận ổn định không cần trở ngoài.</a:t>
+            </a:r>
+          </a:p>
+          <a:p>
+            <a:pPr>
+              <a:spcAft>
+                <a:spcPts val="450"/>
+              </a:spcAft>
+              <a:defRPr sz="1150">
+                <a:solidFill>
+                  <a:srgbClr val="141C28"/>
+                </a:solidFill>
+              </a:defRPr>
+            </a:pPr>
+            <a:r>
+              <a:t>•  Bảo vệ mức điện áp 3.3V cho RC522: Datasheet MFRC522 quy định chân VCC tối đa 3.6V. Mạch PCB tách đường nguồn 3.3V riêng cho RC522, tách biệt hoàn toàn với đường 5V của LCD và 12V của khóa chốt.</a:t>
+            </a:r>
+          </a:p>
+          <a:p>
+            <a:pPr>
+              <a:spcAft>
+                <a:spcPts val="450"/>
+              </a:spcAft>
+              <a:defRPr sz="1150">
+                <a:solidFill>
+                  <a:srgbClr val="141C28"/>
+                </a:solidFill>
+              </a:defRPr>
+            </a:pPr>
+            <a:r>
+              <a:t>•  Triệt tiêu xung nhiễu cảm ứng từ Khóa chốt 12V: Khi ngắt dòng cuộn hút khóa 12V sẽ sinh ra sức điện động ngược làm treo ESP32. Nhóm bố trí Diode 1N4007 mắc ngược cực song song khóa 12V kết hợp tụ lọc 470uF.</a:t>
             </a:r>
           </a:p>
         </p:txBody>
@@ -5392,7 +6239,7 @@
         <p:spPr>
           <a:xfrm>
             <a:off x="0" y="0"/>
-            <a:ext cx="12191695" cy="109728"/>
+            <a:ext cx="12191695" cy="100584"/>
           </a:xfrm>
           <a:prstGeom prst="rect">
             <a:avLst/>
@@ -5434,8 +6281,8 @@
         </p:nvSpPr>
         <p:spPr>
           <a:xfrm>
-            <a:off x="731520" y="365760"/>
-            <a:ext cx="10698480" cy="320040"/>
+            <a:off x="594360" y="292608"/>
+            <a:ext cx="9601200" cy="274320"/>
           </a:xfrm>
           <a:prstGeom prst="rect">
             <a:avLst/>
@@ -5443,20 +6290,20 @@
           <a:noFill/>
         </p:spPr>
         <p:txBody>
-          <a:bodyPr wrap="square" lIns="0" tIns="0" rIns="0" bIns="0">
+          <a:bodyPr wrap="none" lIns="0" tIns="0" rIns="0" bIns="0">
             <a:spAutoFit/>
           </a:bodyPr>
           <a:lstStyle/>
           <a:p>
             <a:pPr>
-              <a:defRPr sz="1100" b="1">
+              <a:defRPr sz="1050" b="1">
                 <a:solidFill>
                   <a:srgbClr val="10559A"/>
                 </a:solidFill>
               </a:defRPr>
             </a:pPr>
             <a:r>
-              <a:t>BÁO CÁO TIẾN ĐỘ GIỮA KỲ — ĐỒ ÁN CƠ ĐIỆN TỬ</a:t>
+              <a:t>BÁO CÁO TIẾN ĐỘ GIỮA KỲ — ĐỒ ÁN CƠ ĐIỆN TỬ (NHÓM 13)</a:t>
             </a:r>
           </a:p>
         </p:txBody>
@@ -5469,8 +6316,8 @@
         </p:nvSpPr>
         <p:spPr>
           <a:xfrm>
-            <a:off x="731520" y="685800"/>
-            <a:ext cx="10698480" cy="548640"/>
+            <a:off x="594360" y="566928"/>
+            <a:ext cx="10515600" cy="502920"/>
           </a:xfrm>
           <a:prstGeom prst="rect">
             <a:avLst/>
@@ -5478,44 +6325,79 @@
           <a:noFill/>
         </p:spPr>
         <p:txBody>
-          <a:bodyPr wrap="square" lIns="0" tIns="0" rIns="0" bIns="0">
+          <a:bodyPr wrap="none" lIns="0" tIns="0" rIns="0" bIns="0">
             <a:spAutoFit/>
           </a:bodyPr>
           <a:lstStyle/>
           <a:p>
             <a:pPr>
-              <a:defRPr sz="2200" b="1">
+              <a:defRPr sz="2100" b="1">
                 <a:solidFill>
                   <a:srgbClr val="0B2347"/>
                 </a:solidFill>
               </a:defRPr>
             </a:pPr>
             <a:r>
-              <a:t>4. Quy hoạch sơ đồ chân ESP32 &amp; Giải pháp chống nhiễu</a:t>
-            </a:r>
-          </a:p>
-        </p:txBody>
-      </p:sp>
-      <p:sp>
-        <p:nvSpPr>
-          <p:cNvPr id="5" name="Rounded Rectangle 4"/>
+              <a:t>4. Kết quả thiết kế Sơ đồ nguyên lý &amp; Mạch in PCB (Vũ Hữu Hoạt)</a:t>
+            </a:r>
+          </a:p>
+        </p:txBody>
+      </p:sp>
+      <p:sp>
+        <p:nvSpPr>
+          <p:cNvPr id="5" name="TextBox 4"/>
+          <p:cNvSpPr txBox="1"/>
+          <p:nvPr/>
+        </p:nvSpPr>
+        <p:spPr>
+          <a:xfrm>
+            <a:off x="594360" y="6446520"/>
+            <a:ext cx="10972800" cy="274320"/>
+          </a:xfrm>
+          <a:prstGeom prst="rect">
+            <a:avLst/>
+          </a:prstGeom>
+          <a:noFill/>
+        </p:spPr>
+        <p:txBody>
+          <a:bodyPr wrap="none">
+            <a:spAutoFit/>
+          </a:bodyPr>
+          <a:lstStyle/>
+          <a:p>
+            <a:pPr>
+              <a:defRPr sz="950">
+                <a:solidFill>
+                  <a:srgbClr val="5F6C7D"/>
+                </a:solidFill>
+              </a:defRPr>
+            </a:pPr>
+            <a:r>
+              <a:t>Trường Đại học Công nghệ – ĐHQGHN  |  Nhóm 13: Nguyễn Tuấn Sơn – Vũ Hữu Hoạt                                                                                     Slide 5 / 10</a:t>
+            </a:r>
+          </a:p>
+        </p:txBody>
+      </p:sp>
+      <p:sp>
+        <p:nvSpPr>
+          <p:cNvPr id="6" name="Rounded Rectangle 5"/>
           <p:cNvSpPr/>
           <p:nvPr/>
         </p:nvSpPr>
         <p:spPr>
           <a:xfrm>
-            <a:off x="731520" y="1463040"/>
-            <a:ext cx="5943600" cy="4754880"/>
+            <a:off x="594360" y="1234440"/>
+            <a:ext cx="6080760" cy="5029200"/>
           </a:xfrm>
           <a:prstGeom prst="roundRect">
             <a:avLst/>
           </a:prstGeom>
           <a:solidFill>
-            <a:srgbClr val="F5F7FA"/>
+            <a:srgbClr val="FFFFFF"/>
           </a:solidFill>
-          <a:ln w="12700">
+          <a:ln w="15240">
             <a:solidFill>
-              <a:srgbClr val="DCE2EB"/>
+              <a:srgbClr val="DAE1EB"/>
             </a:solidFill>
           </a:ln>
         </p:spPr>
@@ -5541,16 +6423,40 @@
           </a:p>
         </p:txBody>
       </p:sp>
-      <p:sp>
-        <p:nvSpPr>
-          <p:cNvPr id="6" name="TextBox 5"/>
+      <p:pic>
+        <p:nvPicPr>
+          <p:cNvPr id="7" name="Picture 6" descr="pcb_layout_preview.png"/>
+          <p:cNvPicPr>
+            <a:picLocks noChangeAspect="1"/>
+          </p:cNvPicPr>
+          <p:nvPr/>
+        </p:nvPicPr>
+        <p:blipFill>
+          <a:blip r:embed="rId2"/>
+          <a:stretch>
+            <a:fillRect/>
+          </a:stretch>
+        </p:blipFill>
+        <p:spPr>
+          <a:xfrm>
+            <a:off x="704088" y="1719224"/>
+            <a:ext cx="5861304" cy="3712159"/>
+          </a:xfrm>
+          <a:prstGeom prst="rect">
+            <a:avLst/>
+          </a:prstGeom>
+        </p:spPr>
+      </p:pic>
+      <p:sp>
+        <p:nvSpPr>
+          <p:cNvPr id="8" name="TextBox 7"/>
           <p:cNvSpPr txBox="1"/>
           <p:nvPr/>
         </p:nvSpPr>
         <p:spPr>
           <a:xfrm>
-            <a:off x="960120" y="1645920"/>
-            <a:ext cx="5486400" cy="4389120"/>
+            <a:off x="704088" y="5879592"/>
+            <a:ext cx="5861304" cy="347472"/>
           </a:xfrm>
           <a:prstGeom prst="rect">
             <a:avLst/>
@@ -5558,172 +6464,34 @@
           <a:noFill/>
         </p:spPr>
         <p:txBody>
-          <a:bodyPr wrap="square" lIns="0" tIns="0" rIns="0" bIns="0">
+          <a:bodyPr wrap="square">
             <a:spAutoFit/>
           </a:bodyPr>
           <a:lstStyle/>
           <a:p>
-            <a:pPr>
-              <a:spcAft>
-                <a:spcPts val="400"/>
-              </a:spcAft>
-              <a:defRPr sz="1500" b="1">
+            <a:pPr algn="ctr">
+              <a:defRPr sz="1000" b="1">
                 <a:solidFill>
                   <a:srgbClr val="0B2347"/>
                 </a:solidFill>
               </a:defRPr>
             </a:pPr>
             <a:r>
-              <a:t>Bảng phân bổ chân GPIO trên ESP32</a:t>
-            </a:r>
-          </a:p>
-          <a:p>
-            <a:pPr>
-              <a:spcAft>
-                <a:spcPts val="800"/>
-              </a:spcAft>
-              <a:defRPr sz="1100">
-                <a:solidFill>
-                  <a:srgbClr val="646E7D"/>
-                </a:solidFill>
-              </a:defRPr>
-            </a:pPr>
-            <a:r>
-              <a:t>Tránh xung đột chân Bootloader &amp; Strapping Pins</a:t>
-            </a:r>
-          </a:p>
-          <a:p>
-            <a:pPr>
-              <a:spcAft>
-                <a:spcPts val="500"/>
-              </a:spcAft>
-              <a:defRPr sz="1200">
-                <a:solidFill>
-                  <a:srgbClr val="181E2A"/>
-                </a:solidFill>
-              </a:defRPr>
-            </a:pPr>
-            <a:r>
-              <a:t>•  Cảm biến AS608: RX2 -&gt; GPIO 16, TX2 -&gt; GPIO 17 (HardwareSerial2 độc lập).</a:t>
-            </a:r>
-          </a:p>
-          <a:p>
-            <a:pPr>
-              <a:spcAft>
-                <a:spcPts val="500"/>
-              </a:spcAft>
-              <a:defRPr sz="1200">
-                <a:solidFill>
-                  <a:srgbClr val="181E2A"/>
-                </a:solidFill>
-              </a:defRPr>
-            </a:pPr>
-            <a:r>
-              <a:t>•  RFID RC522 (SPI): SS -&gt; GPIO 5, SCK -&gt; GPIO 18, MOSI -&gt; GPIO 23, MISO -&gt; GPIO 19, RST -&gt; GPIO 4.</a:t>
-            </a:r>
-          </a:p>
-          <a:p>
-            <a:pPr>
-              <a:spcAft>
-                <a:spcPts val="500"/>
-              </a:spcAft>
-              <a:defRPr sz="1200">
-                <a:solidFill>
-                  <a:srgbClr val="181E2A"/>
-                </a:solidFill>
-              </a:defRPr>
-            </a:pPr>
-            <a:r>
-              <a:t>•  Màn hình LCD 16x2: SDA -&gt; GPIO 21, SCL -&gt; GPIO 22 (Chuẩn I2C mặc định).</a:t>
-            </a:r>
-          </a:p>
-          <a:p>
-            <a:pPr>
-              <a:spcAft>
-                <a:spcPts val="500"/>
-              </a:spcAft>
-              <a:defRPr sz="1200">
-                <a:solidFill>
-                  <a:srgbClr val="181E2A"/>
-                </a:solidFill>
-              </a:defRPr>
-            </a:pPr>
-            <a:r>
-              <a:t>•  Khóa chốt điện 12V: Kích mở qua GPIO 2 (Logic HIGH kích mở).</a:t>
-            </a:r>
-          </a:p>
-          <a:p>
-            <a:pPr>
-              <a:spcAft>
-                <a:spcPts val="500"/>
-              </a:spcAft>
-              <a:defRPr sz="1200">
-                <a:solidFill>
-                  <a:srgbClr val="181E2A"/>
-                </a:solidFill>
-              </a:defRPr>
-            </a:pPr>
-            <a:r>
-              <a:t>•  Bàn phím ma trận 4x4 (8 chân GPIO):</a:t>
-            </a:r>
-          </a:p>
-          <a:p>
-            <a:pPr>
-              <a:spcAft>
-                <a:spcPts val="500"/>
-              </a:spcAft>
-              <a:defRPr sz="1200">
-                <a:solidFill>
-                  <a:srgbClr val="181E2A"/>
-                </a:solidFill>
-              </a:defRPr>
-            </a:pPr>
-            <a:r>
-              <a:t>•      • Hàng R1 – R4: GPIO 13, 12, 14, 27 (cấu hình INPUT_PULLUP)</a:t>
-            </a:r>
-          </a:p>
-          <a:p>
-            <a:pPr>
-              <a:spcAft>
-                <a:spcPts val="500"/>
-              </a:spcAft>
-              <a:defRPr sz="1200">
-                <a:solidFill>
-                  <a:srgbClr val="181E2A"/>
-                </a:solidFill>
-              </a:defRPr>
-            </a:pPr>
-            <a:r>
-              <a:t>•      • Cột C1 – C4: GPIO 26, 25, 33, 32 (quét mức LOW tuần tự)</a:t>
-            </a:r>
-          </a:p>
-          <a:p>
-            <a:pPr>
-              <a:spcAft>
-                <a:spcPts val="500"/>
-              </a:spcAft>
-              <a:defRPr sz="1200">
-                <a:solidFill>
-                  <a:srgbClr val="181E2A"/>
-                </a:solidFill>
-              </a:defRPr>
-            </a:pPr>
-            <a:r>
-              <a:t>•  Nguyên tắc: Không sử dụng các chân GPIO 34-39 (chỉ đọc) và các chân Strapping (GPIO 0, 15) để tránh lỗi khởi động nạp firmware.</a:t>
-            </a:r>
-          </a:p>
-        </p:txBody>
-      </p:sp>
-      <p:sp>
-        <p:nvSpPr>
-          <p:cNvPr id="7" name="Rounded Rectangle 6"/>
+              <a:t>Hình 4.1: Sơ đồ bố trí các khối Header kết nối và đường mạch trên PCB trung tâm</a:t>
+            </a:r>
+          </a:p>
+        </p:txBody>
+      </p:sp>
+      <p:sp>
+        <p:nvSpPr>
+          <p:cNvPr id="9" name="Rounded Rectangle 8"/>
           <p:cNvSpPr/>
           <p:nvPr/>
         </p:nvSpPr>
         <p:spPr>
           <a:xfrm>
-            <a:off x="6949440" y="1463040"/>
-            <a:ext cx="4480560" cy="4754880"/>
+            <a:off x="6858000" y="1234440"/>
+            <a:ext cx="4736592" cy="5029200"/>
           </a:xfrm>
           <a:prstGeom prst="roundRect">
             <a:avLst/>
@@ -5761,14 +6529,14 @@
       </p:sp>
       <p:sp>
         <p:nvSpPr>
-          <p:cNvPr id="8" name="TextBox 7"/>
+          <p:cNvPr id="10" name="TextBox 9"/>
           <p:cNvSpPr txBox="1"/>
           <p:nvPr/>
         </p:nvSpPr>
         <p:spPr>
           <a:xfrm>
-            <a:off x="7178040" y="1645920"/>
-            <a:ext cx="4023360" cy="4389120"/>
+            <a:off x="7059168" y="1399032"/>
+            <a:ext cx="4334256" cy="4736592"/>
           </a:xfrm>
           <a:prstGeom prst="rect">
             <a:avLst/>
@@ -5783,91 +6551,121 @@
           <a:p>
             <a:pPr>
               <a:spcAft>
-                <a:spcPts val="400"/>
-              </a:spcAft>
-              <a:defRPr sz="1500" b="1">
+                <a:spcPts val="300"/>
+              </a:spcAft>
+              <a:defRPr sz="1450" b="1">
                 <a:solidFill>
                   <a:srgbClr val="10559A"/>
                 </a:solidFill>
               </a:defRPr>
             </a:pPr>
             <a:r>
-              <a:t>Giải pháp thiết kế chống xung nhiễu</a:t>
-            </a:r>
-          </a:p>
-          <a:p>
-            <a:pPr>
-              <a:spcAft>
-                <a:spcPts val="800"/>
+              <a:t>Chi tiết công việc thiết kế PCB đã hoàn thành</a:t>
+            </a:r>
+          </a:p>
+          <a:p>
+            <a:pPr>
+              <a:spcAft>
+                <a:spcPts val="700"/>
+              </a:spcAft>
+              <a:defRPr sz="1050">
+                <a:solidFill>
+                  <a:srgbClr val="5F6C7D"/>
+                </a:solidFill>
+              </a:defRPr>
+            </a:pPr>
+            <a:r>
+              <a:t>Phụ trách chính: Vũ Hữu Hoạt</a:t>
+            </a:r>
+          </a:p>
+          <a:p>
+            <a:pPr>
+              <a:spcAft>
+                <a:spcPts val="450"/>
               </a:spcAft>
               <a:defRPr sz="1100">
                 <a:solidFill>
-                  <a:srgbClr val="646E7D"/>
-                </a:solidFill>
-              </a:defRPr>
-            </a:pPr>
-            <a:r>
-              <a:t>Đảm bảo hệ thống hoạt động ổn định 24/7</a:t>
-            </a:r>
-          </a:p>
-          <a:p>
-            <a:pPr>
-              <a:spcAft>
-                <a:spcPts val="500"/>
-              </a:spcAft>
-              <a:defRPr sz="1200">
-                <a:solidFill>
-                  <a:srgbClr val="181E2A"/>
-                </a:solidFill>
-              </a:defRPr>
-            </a:pPr>
-            <a:r>
-              <a:t>•  Tách tầng nguồn công suất &amp; vi điều khiển: Nguồn tổng 12V cấp khóa chốt; hạ áp 5V cấp ESP32/LCD; hạ áp 3.3V cấp riêng cho RC522.</a:t>
-            </a:r>
-          </a:p>
-          <a:p>
-            <a:pPr>
-              <a:spcAft>
-                <a:spcPts val="500"/>
-              </a:spcAft>
-              <a:defRPr sz="1200">
-                <a:solidFill>
-                  <a:srgbClr val="181E2A"/>
-                </a:solidFill>
-              </a:defRPr>
-            </a:pPr>
-            <a:r>
-              <a:t>•  Xử lý sụt áp cuộn cảm: Bố trí tụ hóa 470uF và tụ gốm 100nF lọc nguồn tức thời khi khóa 12V đóng ngắt.</a:t>
-            </a:r>
-          </a:p>
-          <a:p>
-            <a:pPr>
-              <a:spcAft>
-                <a:spcPts val="500"/>
-              </a:spcAft>
-              <a:defRPr sz="1200">
-                <a:solidFill>
-                  <a:srgbClr val="181E2A"/>
-                </a:solidFill>
-              </a:defRPr>
-            </a:pPr>
-            <a:r>
-              <a:t>•  Dập xung điện áp ngược cảm ứng: Mắc Diode 1N4007 song song ngược cực với khóa 12V để triệt tiêu điện áp e = -L(di/dt).</a:t>
-            </a:r>
-          </a:p>
-          <a:p>
-            <a:pPr>
-              <a:spcAft>
-                <a:spcPts val="500"/>
-              </a:spcAft>
-              <a:defRPr sz="1200">
-                <a:solidFill>
-                  <a:srgbClr val="181E2A"/>
-                </a:solidFill>
-              </a:defRPr>
-            </a:pPr>
-            <a:r>
-              <a:t>•  Cách ly quang: Sử dụng Optocoupler kích Relay/MOSFET giúp vi điều khiển ESP32 không bị reset khi tải cảm hoạt động.</a:t>
+                  <a:srgbClr val="141C28"/>
+                </a:solidFill>
+              </a:defRPr>
+            </a:pPr>
+            <a:r>
+              <a:t>•  Khảo sát &amp; Đo đạc chân cắm thực tế: Đã đo chuẩn khoảng cách pitch 2.54mm của các cụm Header 6 chân (AS608), 8 chân (RC522), 8 chân (Keypad 4x4), 4 chân (LCD I2C) và Domino nguồn 12V.</a:t>
+            </a:r>
+          </a:p>
+          <a:p>
+            <a:pPr>
+              <a:spcAft>
+                <a:spcPts val="450"/>
+              </a:spcAft>
+              <a:defRPr sz="1100">
+                <a:solidFill>
+                  <a:srgbClr val="141C28"/>
+                </a:solidFill>
+              </a:defRPr>
+            </a:pPr>
+            <a:r>
+              <a:t>•  Hoàn thiện Sơ đồ nguyên lý (Schematic): Liên kết toàn bộ các khối về ESP32, tích hợp khối nguồn hạ áp Buck 12V -&gt; 5V/3.3V và tầng kích khóa chốt.</a:t>
+            </a:r>
+          </a:p>
+          <a:p>
+            <a:pPr>
+              <a:spcAft>
+                <a:spcPts val="450"/>
+              </a:spcAft>
+              <a:defRPr sz="1100">
+                <a:solidFill>
+                  <a:srgbClr val="141C28"/>
+                </a:solidFill>
+              </a:defRPr>
+            </a:pPr>
+            <a:r>
+              <a:t>•  Thiết kế Layout PCB 2 lớp:</a:t>
+            </a:r>
+          </a:p>
+          <a:p>
+            <a:pPr>
+              <a:spcAft>
+                <a:spcPts val="450"/>
+              </a:spcAft>
+              <a:defRPr sz="1100">
+                <a:solidFill>
+                  <a:srgbClr val="141C28"/>
+                </a:solidFill>
+              </a:defRPr>
+            </a:pPr>
+            <a:r>
+              <a:t>•      • Đường mạch công suất 12V cấp cho khóa điện được đi dây độ rộng lớn (&gt; 40 mil) chịu dòng 1.5A.</a:t>
+            </a:r>
+          </a:p>
+          <a:p>
+            <a:pPr>
+              <a:spcAft>
+                <a:spcPts val="450"/>
+              </a:spcAft>
+              <a:defRPr sz="1100">
+                <a:solidFill>
+                  <a:srgbClr val="141C28"/>
+                </a:solidFill>
+              </a:defRPr>
+            </a:pPr>
+            <a:r>
+              <a:t>•      • Phủ đồng mặt Mass (GND Copper Pour) cả 2 lớp giúp chống nhiễu sóng Wi-Fi và RFID 13.56MHz.</a:t>
+            </a:r>
+          </a:p>
+          <a:p>
+            <a:pPr>
+              <a:spcAft>
+                <a:spcPts val="450"/>
+              </a:spcAft>
+              <a:defRPr sz="1100">
+                <a:solidFill>
+                  <a:srgbClr val="141C28"/>
+                </a:solidFill>
+              </a:defRPr>
+            </a:pPr>
+            <a:r>
+              <a:t>•      • Đã kiểm tra DRC (Design Rule Check) không còn lỗi và sẵn sàng gia công hàn mạch ở Giai đoạn 3.</a:t>
             </a:r>
           </a:p>
         </p:txBody>
@@ -5899,7 +6697,7 @@
         <p:spPr>
           <a:xfrm>
             <a:off x="0" y="0"/>
-            <a:ext cx="12191695" cy="109728"/>
+            <a:ext cx="12191695" cy="100584"/>
           </a:xfrm>
           <a:prstGeom prst="rect">
             <a:avLst/>
@@ -5941,8 +6739,8 @@
         </p:nvSpPr>
         <p:spPr>
           <a:xfrm>
-            <a:off x="731520" y="365760"/>
-            <a:ext cx="10698480" cy="320040"/>
+            <a:off x="594360" y="292608"/>
+            <a:ext cx="9601200" cy="274320"/>
           </a:xfrm>
           <a:prstGeom prst="rect">
             <a:avLst/>
@@ -5950,20 +6748,20 @@
           <a:noFill/>
         </p:spPr>
         <p:txBody>
-          <a:bodyPr wrap="square" lIns="0" tIns="0" rIns="0" bIns="0">
+          <a:bodyPr wrap="none" lIns="0" tIns="0" rIns="0" bIns="0">
             <a:spAutoFit/>
           </a:bodyPr>
           <a:lstStyle/>
           <a:p>
             <a:pPr>
-              <a:defRPr sz="1100" b="1">
+              <a:defRPr sz="1050" b="1">
                 <a:solidFill>
                   <a:srgbClr val="10559A"/>
                 </a:solidFill>
               </a:defRPr>
             </a:pPr>
             <a:r>
-              <a:t>BÁO CÁO TIẾN ĐỘ GIỮA KỲ — ĐỒ ÁN CƠ ĐIỆN TỬ</a:t>
+              <a:t>BÁO CÁO TIẾN ĐỘ GIỮA KỲ — ĐỒ ÁN CƠ ĐIỆN TỬ (NHÓM 13)</a:t>
             </a:r>
           </a:p>
         </p:txBody>
@@ -5976,8 +6774,8 @@
         </p:nvSpPr>
         <p:spPr>
           <a:xfrm>
-            <a:off x="731520" y="685800"/>
-            <a:ext cx="10698480" cy="548640"/>
+            <a:off x="594360" y="566928"/>
+            <a:ext cx="10515600" cy="502920"/>
           </a:xfrm>
           <a:prstGeom prst="rect">
             <a:avLst/>
@@ -5985,44 +6783,79 @@
           <a:noFill/>
         </p:spPr>
         <p:txBody>
-          <a:bodyPr wrap="square" lIns="0" tIns="0" rIns="0" bIns="0">
+          <a:bodyPr wrap="none" lIns="0" tIns="0" rIns="0" bIns="0">
             <a:spAutoFit/>
           </a:bodyPr>
           <a:lstStyle/>
           <a:p>
             <a:pPr>
-              <a:defRPr sz="2200" b="1">
+              <a:defRPr sz="2100" b="1">
                 <a:solidFill>
                   <a:srgbClr val="0B2347"/>
                 </a:solidFill>
               </a:defRPr>
             </a:pPr>
             <a:r>
-              <a:t>5. Tiến độ thiết kế mạch in PCB (Phụ trách: Vũ Hữu Hoạt)</a:t>
-            </a:r>
-          </a:p>
-        </p:txBody>
-      </p:sp>
-      <p:sp>
-        <p:nvSpPr>
-          <p:cNvPr id="5" name="Rounded Rectangle 4"/>
+              <a:t>5. Kiến trúc Firmware ESP32 &amp; Cơ chế Bảo mật 1 Lớp / 2 Lớp (2FA)</a:t>
+            </a:r>
+          </a:p>
+        </p:txBody>
+      </p:sp>
+      <p:sp>
+        <p:nvSpPr>
+          <p:cNvPr id="5" name="TextBox 4"/>
+          <p:cNvSpPr txBox="1"/>
+          <p:nvPr/>
+        </p:nvSpPr>
+        <p:spPr>
+          <a:xfrm>
+            <a:off x="594360" y="6446520"/>
+            <a:ext cx="10972800" cy="274320"/>
+          </a:xfrm>
+          <a:prstGeom prst="rect">
+            <a:avLst/>
+          </a:prstGeom>
+          <a:noFill/>
+        </p:spPr>
+        <p:txBody>
+          <a:bodyPr wrap="none">
+            <a:spAutoFit/>
+          </a:bodyPr>
+          <a:lstStyle/>
+          <a:p>
+            <a:pPr>
+              <a:defRPr sz="950">
+                <a:solidFill>
+                  <a:srgbClr val="5F6C7D"/>
+                </a:solidFill>
+              </a:defRPr>
+            </a:pPr>
+            <a:r>
+              <a:t>Trường Đại học Công nghệ – ĐHQGHN  |  Nhóm 13: Nguyễn Tuấn Sơn – Vũ Hữu Hoạt                                                                                     Slide 6 / 10</a:t>
+            </a:r>
+          </a:p>
+        </p:txBody>
+      </p:sp>
+      <p:sp>
+        <p:nvSpPr>
+          <p:cNvPr id="6" name="Rounded Rectangle 5"/>
           <p:cNvSpPr/>
           <p:nvPr/>
         </p:nvSpPr>
         <p:spPr>
           <a:xfrm>
-            <a:off x="731520" y="1463040"/>
-            <a:ext cx="5120640" cy="4754880"/>
+            <a:off x="594360" y="1234440"/>
+            <a:ext cx="5303520" cy="5029200"/>
           </a:xfrm>
           <a:prstGeom prst="roundRect">
             <a:avLst/>
           </a:prstGeom>
           <a:solidFill>
-            <a:srgbClr val="F5F7FA"/>
+            <a:srgbClr val="F6F8FB"/>
           </a:solidFill>
           <a:ln w="12700">
             <a:solidFill>
-              <a:srgbClr val="DCE2EB"/>
+              <a:srgbClr val="DAE1EB"/>
             </a:solidFill>
           </a:ln>
         </p:spPr>
@@ -6050,14 +6883,14 @@
       </p:sp>
       <p:sp>
         <p:nvSpPr>
-          <p:cNvPr id="6" name="TextBox 5"/>
+          <p:cNvPr id="7" name="TextBox 6"/>
           <p:cNvSpPr txBox="1"/>
           <p:nvPr/>
         </p:nvSpPr>
         <p:spPr>
           <a:xfrm>
-            <a:off x="960120" y="1645920"/>
-            <a:ext cx="4663440" cy="4389120"/>
+            <a:off x="795528" y="1399032"/>
+            <a:ext cx="4901184" cy="4736592"/>
           </a:xfrm>
           <a:prstGeom prst="rect">
             <a:avLst/>
@@ -6072,135 +6905,165 @@
           <a:p>
             <a:pPr>
               <a:spcAft>
-                <a:spcPts val="400"/>
-              </a:spcAft>
-              <a:defRPr sz="1500" b="1">
+                <a:spcPts val="300"/>
+              </a:spcAft>
+              <a:defRPr sz="1450" b="1">
                 <a:solidFill>
                   <a:srgbClr val="0B2347"/>
                 </a:solidFill>
               </a:defRPr>
             </a:pPr>
             <a:r>
-              <a:t>Kết quả thiết kế Schematic &amp; Layout PCB</a:t>
-            </a:r>
-          </a:p>
-          <a:p>
-            <a:pPr>
-              <a:spcAft>
-                <a:spcPts val="800"/>
-              </a:spcAft>
-              <a:defRPr sz="1100">
-                <a:solidFill>
-                  <a:srgbClr val="646E7D"/>
-                </a:solidFill>
-              </a:defRPr>
-            </a:pPr>
-            <a:r>
-              <a:t>Tối ưu kích thước &amp; Khả năng tản nhiệt</a:t>
-            </a:r>
-          </a:p>
-          <a:p>
-            <a:pPr>
-              <a:spcAft>
-                <a:spcPts val="500"/>
-              </a:spcAft>
-              <a:defRPr sz="1200">
-                <a:solidFill>
-                  <a:srgbClr val="181E2A"/>
-                </a:solidFill>
-              </a:defRPr>
-            </a:pPr>
-            <a:r>
-              <a:t>•  Đo đạc chính xác kích thước chân cắm (Footprint): Đo khoảng cách header 6 chân của AS608, 8 chân RC522, 8 chân Keypad 4x4 và cọc đấu dây Domino 12V.</a:t>
-            </a:r>
-          </a:p>
-          <a:p>
-            <a:pPr>
-              <a:spcAft>
-                <a:spcPts val="500"/>
-              </a:spcAft>
-              <a:defRPr sz="1200">
-                <a:solidFill>
-                  <a:srgbClr val="181E2A"/>
-                </a:solidFill>
-              </a:defRPr>
-            </a:pPr>
-            <a:r>
-              <a:t>•  Hoàn thiện bản vẽ nguyên lý (Schematic): Kết nối đầy đủ các khối chức năng, tích hợp IC hạ áp nguồn, tụ lọc và transistor công suất.</a:t>
-            </a:r>
-          </a:p>
-          <a:p>
-            <a:pPr>
-              <a:spcAft>
-                <a:spcPts val="500"/>
-              </a:spcAft>
-              <a:defRPr sz="1200">
-                <a:solidFill>
-                  <a:srgbClr val="181E2A"/>
-                </a:solidFill>
-              </a:defRPr>
-            </a:pPr>
-            <a:r>
-              <a:t>•  Vẽ Layout mạch in 2 lớp (Double-layer PCB):</a:t>
-            </a:r>
-          </a:p>
-          <a:p>
-            <a:pPr>
-              <a:spcAft>
-                <a:spcPts val="500"/>
-              </a:spcAft>
-              <a:defRPr sz="1200">
-                <a:solidFill>
-                  <a:srgbClr val="181E2A"/>
-                </a:solidFill>
-              </a:defRPr>
-            </a:pPr>
-            <a:r>
-              <a:t>•      • Đường mạch công suất cấp khóa 12V được thiết kế bản rộng (&gt; 40 mil), chịu dòng tức thời đến 2A an toàn.</a:t>
-            </a:r>
-          </a:p>
-          <a:p>
-            <a:pPr>
-              <a:spcAft>
-                <a:spcPts val="500"/>
-              </a:spcAft>
-              <a:defRPr sz="1200">
-                <a:solidFill>
-                  <a:srgbClr val="181E2A"/>
-                </a:solidFill>
-              </a:defRPr>
-            </a:pPr>
-            <a:r>
-              <a:t>•      • Phủ mass toàn bộ 2 mặt (GND Copper Pouring) để triệt tiêu nhiễu cao tần phát sinh từ module Wi-Fi và sóng RFID 13.56 MHz.</a:t>
-            </a:r>
-          </a:p>
-          <a:p>
-            <a:pPr>
-              <a:spcAft>
-                <a:spcPts val="500"/>
-              </a:spcAft>
-              <a:defRPr sz="1200">
-                <a:solidFill>
-                  <a:srgbClr val="181E2A"/>
-                </a:solidFill>
-              </a:defRPr>
-            </a:pPr>
-            <a:r>
-              <a:t>•      • Các đường tín hiệu SPI và UART đi song song khoảng cách hợp lý, giảm tối đa hiện tượng xuyên âm (Crosstalk).</a:t>
-            </a:r>
-          </a:p>
-        </p:txBody>
-      </p:sp>
-      <p:sp>
-        <p:nvSpPr>
-          <p:cNvPr id="7" name="Rounded Rectangle 6"/>
+              <a:t>Kiến trúc Phần mềm nhúng ESP32 (PlatformIO)</a:t>
+            </a:r>
+          </a:p>
+          <a:p>
+            <a:pPr>
+              <a:spcAft>
+                <a:spcPts val="700"/>
+              </a:spcAft>
+              <a:defRPr sz="1050">
+                <a:solidFill>
+                  <a:srgbClr val="5F6C7D"/>
+                </a:solidFill>
+              </a:defRPr>
+            </a:pPr>
+            <a:r>
+              <a:t>Phụ trách chính: Nguyễn Tuấn Sơn</a:t>
+            </a:r>
+          </a:p>
+          <a:p>
+            <a:pPr>
+              <a:spcAft>
+                <a:spcPts val="450"/>
+              </a:spcAft>
+              <a:defRPr sz="1150">
+                <a:solidFill>
+                  <a:srgbClr val="141C28"/>
+                </a:solidFill>
+              </a:defRPr>
+            </a:pPr>
+            <a:r>
+              <a:t>•  Vòng lặp Non-blocking (Không chặn):</a:t>
+            </a:r>
+          </a:p>
+          <a:p>
+            <a:pPr>
+              <a:spcAft>
+                <a:spcPts val="450"/>
+              </a:spcAft>
+              <a:defRPr sz="1150">
+                <a:solidFill>
+                  <a:srgbClr val="141C28"/>
+                </a:solidFill>
+              </a:defRPr>
+            </a:pPr>
+            <a:r>
+              <a:t>•      • Không sử dụng delay() dài gây đơ phím; dùng millis() quét Keypad 4x4 liên tục (&lt; 5ms) và quét AS608/RC522 mỗi 80ms.</a:t>
+            </a:r>
+          </a:p>
+          <a:p>
+            <a:pPr>
+              <a:spcAft>
+                <a:spcPts val="450"/>
+              </a:spcAft>
+              <a:defRPr sz="1150">
+                <a:solidFill>
+                  <a:srgbClr val="141C28"/>
+                </a:solidFill>
+              </a:defRPr>
+            </a:pPr>
+            <a:r>
+              <a:t>•  Hệ thống tệp Flash LittleFS bền vững:</a:t>
+            </a:r>
+          </a:p>
+          <a:p>
+            <a:pPr>
+              <a:spcAft>
+                <a:spcPts val="450"/>
+              </a:spcAft>
+              <a:defRPr sz="1150">
+                <a:solidFill>
+                  <a:srgbClr val="141C28"/>
+                </a:solidFill>
+              </a:defRPr>
+            </a:pPr>
+            <a:r>
+              <a:t>•      • Lưu trữ toàn bộ file giao diện Web (index.html, style.css, app.js) và cơ sở dữ liệu config.json ngay trong bộ nhớ Flash 4MB của ESP32.</a:t>
+            </a:r>
+          </a:p>
+          <a:p>
+            <a:pPr>
+              <a:spcAft>
+                <a:spcPts val="450"/>
+              </a:spcAft>
+              <a:defRPr sz="1150">
+                <a:solidFill>
+                  <a:srgbClr val="141C28"/>
+                </a:solidFill>
+              </a:defRPr>
+            </a:pPr>
+            <a:r>
+              <a:t>•      • Mất điện không bị mất mật khẩu PIN, danh sách thẻ RFID hay ID vân tay.</a:t>
+            </a:r>
+          </a:p>
+          <a:p>
+            <a:pPr>
+              <a:spcAft>
+                <a:spcPts val="450"/>
+              </a:spcAft>
+              <a:defRPr sz="1150">
+                <a:solidFill>
+                  <a:srgbClr val="141C28"/>
+                </a:solidFill>
+              </a:defRPr>
+            </a:pPr>
+            <a:r>
+              <a:t>•  Giao thức WebSocket (/ws) &amp; mDNS:</a:t>
+            </a:r>
+          </a:p>
+          <a:p>
+            <a:pPr>
+              <a:spcAft>
+                <a:spcPts val="450"/>
+              </a:spcAft>
+              <a:defRPr sz="1150">
+                <a:solidFill>
+                  <a:srgbClr val="141C28"/>
+                </a:solidFill>
+              </a:defRPr>
+            </a:pPr>
+            <a:r>
+              <a:t>•      • Đồng bộ trạng thái cửa và màn hình LCD 16x2 lên trình duyệt dưới 100ms.</a:t>
+            </a:r>
+          </a:p>
+          <a:p>
+            <a:pPr>
+              <a:spcAft>
+                <a:spcPts val="450"/>
+              </a:spcAft>
+              <a:defRPr sz="1150">
+                <a:solidFill>
+                  <a:srgbClr val="141C28"/>
+                </a:solidFill>
+              </a:defRPr>
+            </a:pPr>
+            <a:r>
+              <a:t>•      • Tích hợp tên miền nội bộ http://smartdoor.local.</a:t>
+            </a:r>
+          </a:p>
+        </p:txBody>
+      </p:sp>
+      <p:sp>
+        <p:nvSpPr>
+          <p:cNvPr id="8" name="Rounded Rectangle 7"/>
           <p:cNvSpPr/>
           <p:nvPr/>
         </p:nvSpPr>
         <p:spPr>
           <a:xfrm>
-            <a:off x="6217920" y="1463040"/>
-            <a:ext cx="5212080" cy="4754880"/>
+            <a:off x="6108192" y="1234440"/>
+            <a:ext cx="5486400" cy="5029200"/>
           </a:xfrm>
           <a:prstGeom prst="roundRect">
             <a:avLst/>
@@ -6238,14 +7101,14 @@
       </p:sp>
       <p:sp>
         <p:nvSpPr>
-          <p:cNvPr id="8" name="TextBox 7"/>
+          <p:cNvPr id="9" name="TextBox 8"/>
           <p:cNvSpPr txBox="1"/>
           <p:nvPr/>
         </p:nvSpPr>
         <p:spPr>
           <a:xfrm>
-            <a:off x="6446520" y="1645920"/>
-            <a:ext cx="4754880" cy="4389120"/>
+            <a:off x="6309360" y="1399032"/>
+            <a:ext cx="5084064" cy="4736592"/>
           </a:xfrm>
           <a:prstGeom prst="rect">
             <a:avLst/>
@@ -6260,121 +7123,136 @@
           <a:p>
             <a:pPr>
               <a:spcAft>
-                <a:spcPts val="400"/>
-              </a:spcAft>
-              <a:defRPr sz="1500" b="1">
+                <a:spcPts val="300"/>
+              </a:spcAft>
+              <a:defRPr sz="1450" b="1">
                 <a:solidFill>
                   <a:srgbClr val="10559A"/>
                 </a:solidFill>
               </a:defRPr>
             </a:pPr>
             <a:r>
-              <a:t>Trạng thái phần cứng &amp; Kế hoạch chế tạo</a:t>
-            </a:r>
-          </a:p>
-          <a:p>
-            <a:pPr>
-              <a:spcAft>
-                <a:spcPts val="800"/>
-              </a:spcAft>
-              <a:defRPr sz="1100">
-                <a:solidFill>
-                  <a:srgbClr val="646E7D"/>
-                </a:solidFill>
-              </a:defRPr>
-            </a:pPr>
-            <a:r>
-              <a:t>Sẵn sàng cho giai đoạn lắp ráp hoàn thiện</a:t>
-            </a:r>
-          </a:p>
-          <a:p>
-            <a:pPr>
-              <a:spcAft>
-                <a:spcPts val="500"/>
-              </a:spcAft>
-              <a:defRPr sz="1200">
-                <a:solidFill>
-                  <a:srgbClr val="181E2A"/>
-                </a:solidFill>
-              </a:defRPr>
-            </a:pPr>
-            <a:r>
-              <a:t>•  Trạng thái linh kiện: 100% linh kiện đã được mua đủ và kiểm tra thông mạch (AS608, RC522, Keypad 4x4, LCD I2C, ESP32, Khóa 12V).</a:t>
-            </a:r>
-          </a:p>
-          <a:p>
-            <a:pPr>
-              <a:spcAft>
-                <a:spcPts val="500"/>
-              </a:spcAft>
-              <a:defRPr sz="1200">
-                <a:solidFill>
-                  <a:srgbClr val="181E2A"/>
-                </a:solidFill>
-              </a:defRPr>
-            </a:pPr>
-            <a:r>
-              <a:t>•  Trạng thái PCB: Đã hoàn tất kiểm tra quy tắc thiết kế (DRC) và xuất trọn bộ file Gerber gia công.</a:t>
-            </a:r>
-          </a:p>
-          <a:p>
-            <a:pPr>
-              <a:spcAft>
-                <a:spcPts val="500"/>
-              </a:spcAft>
-              <a:defRPr sz="1200">
-                <a:solidFill>
-                  <a:srgbClr val="181E2A"/>
-                </a:solidFill>
-              </a:defRPr>
-            </a:pPr>
-            <a:r>
-              <a:t>•  Kế hoạch triển khai sau giữa kỳ:</a:t>
-            </a:r>
-          </a:p>
-          <a:p>
-            <a:pPr>
-              <a:spcAft>
-                <a:spcPts val="500"/>
-              </a:spcAft>
-              <a:defRPr sz="1200">
-                <a:solidFill>
-                  <a:srgbClr val="181E2A"/>
-                </a:solidFill>
-              </a:defRPr>
-            </a:pPr>
-            <a:r>
-              <a:t>•      • Nhận mạch in PCB gia công từ nhà máy.</a:t>
-            </a:r>
-          </a:p>
-          <a:p>
-            <a:pPr>
-              <a:spcAft>
-                <a:spcPts val="500"/>
-              </a:spcAft>
-              <a:defRPr sz="1200">
-                <a:solidFill>
-                  <a:srgbClr val="181E2A"/>
-                </a:solidFill>
-              </a:defRPr>
-            </a:pPr>
-            <a:r>
-              <a:t>•      • Hàn gắn linh kiện, đo kiểm tra điện áp các điểm test point (12V, 5V, 3.3V).</a:t>
-            </a:r>
-          </a:p>
-          <a:p>
-            <a:pPr>
-              <a:spcAft>
-                <a:spcPts val="500"/>
-              </a:spcAft>
-              <a:defRPr sz="1200">
-                <a:solidFill>
-                  <a:srgbClr val="181E2A"/>
-                </a:solidFill>
-              </a:defRPr>
-            </a:pPr>
-            <a:r>
-              <a:t>•      • Gia công cơ khí khung mô hình cửa gỗ/mica, gá lắp khóa chốt và cảm biến.</a:t>
+              <a:t>Cơ chế Bảo mật Đa cấp độ (1 Lớp &amp; 2FA) mới phát triển</a:t>
+            </a:r>
+          </a:p>
+          <a:p>
+            <a:pPr>
+              <a:spcAft>
+                <a:spcPts val="700"/>
+              </a:spcAft>
+              <a:defRPr sz="1050">
+                <a:solidFill>
+                  <a:srgbClr val="5F6C7D"/>
+                </a:solidFill>
+              </a:defRPr>
+            </a:pPr>
+            <a:r>
+              <a:t>Nâng cao tính bảo mật cho phòng thí nghiệm &amp; khu vực quan trọng</a:t>
+            </a:r>
+          </a:p>
+          <a:p>
+            <a:pPr>
+              <a:spcAft>
+                <a:spcPts val="450"/>
+              </a:spcAft>
+              <a:defRPr sz="1150">
+                <a:solidFill>
+                  <a:srgbClr val="141C28"/>
+                </a:solidFill>
+              </a:defRPr>
+            </a:pPr>
+            <a:r>
+              <a:t>•  Chế độ 1 Lớp (Single-Factor): Quét Vân tay đúng HOẶC Thẻ RFID đúng HOẶC nhập đúng PIN Keypad 4x4 là mở cửa ngay.</a:t>
+            </a:r>
+          </a:p>
+          <a:p>
+            <a:pPr>
+              <a:spcAft>
+                <a:spcPts val="450"/>
+              </a:spcAft>
+              <a:defRPr sz="1150">
+                <a:solidFill>
+                  <a:srgbClr val="141C28"/>
+                </a:solidFill>
+              </a:defRPr>
+            </a:pPr>
+            <a:r>
+              <a:t>•  Chế độ 2 Lớp (Two-Factor Authentication - 2FA): Yêu cầu xác thực thành công 2 bước liên tiếp trong thời gian quy định:</a:t>
+            </a:r>
+          </a:p>
+          <a:p>
+            <a:pPr>
+              <a:spcAft>
+                <a:spcPts val="450"/>
+              </a:spcAft>
+              <a:defRPr sz="1150">
+                <a:solidFill>
+                  <a:srgbClr val="141C28"/>
+                </a:solidFill>
+              </a:defRPr>
+            </a:pPr>
+            <a:r>
+              <a:t>•      • Chế độ 2: Vân tay AS608  +  Mã PIN Keypad 4x4</a:t>
+            </a:r>
+          </a:p>
+          <a:p>
+            <a:pPr>
+              <a:spcAft>
+                <a:spcPts val="450"/>
+              </a:spcAft>
+              <a:defRPr sz="1150">
+                <a:solidFill>
+                  <a:srgbClr val="141C28"/>
+                </a:solidFill>
+              </a:defRPr>
+            </a:pPr>
+            <a:r>
+              <a:t>•      • Chế độ 3: Thẻ từ RFID RC522  +  Mã PIN Keypad 4x4</a:t>
+            </a:r>
+          </a:p>
+          <a:p>
+            <a:pPr>
+              <a:spcAft>
+                <a:spcPts val="450"/>
+              </a:spcAft>
+              <a:defRPr sz="1150">
+                <a:solidFill>
+                  <a:srgbClr val="141C28"/>
+                </a:solidFill>
+              </a:defRPr>
+            </a:pPr>
+            <a:r>
+              <a:t>•      • Chế độ 4: Vân tay AS608  +  Thẻ từ RFID RC522</a:t>
+            </a:r>
+          </a:p>
+          <a:p>
+            <a:pPr>
+              <a:spcAft>
+                <a:spcPts val="450"/>
+              </a:spcAft>
+              <a:defRPr sz="1150">
+                <a:solidFill>
+                  <a:srgbClr val="141C28"/>
+                </a:solidFill>
+              </a:defRPr>
+            </a:pPr>
+            <a:r>
+              <a:t>•  Cơ chế chống treo phiên (Session Timeout 15 giây):</a:t>
+            </a:r>
+          </a:p>
+          <a:p>
+            <a:pPr>
+              <a:spcAft>
+                <a:spcPts val="450"/>
+              </a:spcAft>
+              <a:defRPr sz="1150">
+                <a:solidFill>
+                  <a:srgbClr val="141C28"/>
+                </a:solidFill>
+              </a:defRPr>
+            </a:pPr>
+            <a:r>
+              <a:t>•      • Khi qua Lớp 1, màn hình LCD hiển thị 'XAC THUC LOP 1 OK - NHAP PIN + #'. Nếu quá 15 giây không hoàn thành Lớp 2 hoặc nhập sai, hệ thống tự hủy phiên và khóa an toàn.</a:t>
             </a:r>
           </a:p>
         </p:txBody>
@@ -6406,7 +7284,7 @@
         <p:spPr>
           <a:xfrm>
             <a:off x="0" y="0"/>
-            <a:ext cx="12191695" cy="109728"/>
+            <a:ext cx="12191695" cy="100584"/>
           </a:xfrm>
           <a:prstGeom prst="rect">
             <a:avLst/>
@@ -6448,8 +7326,8 @@
         </p:nvSpPr>
         <p:spPr>
           <a:xfrm>
-            <a:off x="731520" y="365760"/>
-            <a:ext cx="10698480" cy="320040"/>
+            <a:off x="594360" y="292608"/>
+            <a:ext cx="9601200" cy="274320"/>
           </a:xfrm>
           <a:prstGeom prst="rect">
             <a:avLst/>
@@ -6457,20 +7335,20 @@
           <a:noFill/>
         </p:spPr>
         <p:txBody>
-          <a:bodyPr wrap="square" lIns="0" tIns="0" rIns="0" bIns="0">
+          <a:bodyPr wrap="none" lIns="0" tIns="0" rIns="0" bIns="0">
             <a:spAutoFit/>
           </a:bodyPr>
           <a:lstStyle/>
           <a:p>
             <a:pPr>
-              <a:defRPr sz="1100" b="1">
+              <a:defRPr sz="1050" b="1">
                 <a:solidFill>
                   <a:srgbClr val="10559A"/>
                 </a:solidFill>
               </a:defRPr>
             </a:pPr>
             <a:r>
-              <a:t>BÁO CÁO TIẾN ĐỘ GIỮA KỲ — ĐỒ ÁN CƠ ĐIỆN TỬ</a:t>
+              <a:t>BÁO CÁO TIẾN ĐỘ GIỮA KỲ — ĐỒ ÁN CƠ ĐIỆN TỬ (NHÓM 13)</a:t>
             </a:r>
           </a:p>
         </p:txBody>
@@ -6483,8 +7361,8 @@
         </p:nvSpPr>
         <p:spPr>
           <a:xfrm>
-            <a:off x="731520" y="685800"/>
-            <a:ext cx="10698480" cy="548640"/>
+            <a:off x="594360" y="566928"/>
+            <a:ext cx="10515600" cy="502920"/>
           </a:xfrm>
           <a:prstGeom prst="rect">
             <a:avLst/>
@@ -6492,44 +7370,79 @@
           <a:noFill/>
         </p:spPr>
         <p:txBody>
-          <a:bodyPr wrap="square" lIns="0" tIns="0" rIns="0" bIns="0">
+          <a:bodyPr wrap="none" lIns="0" tIns="0" rIns="0" bIns="0">
             <a:spAutoFit/>
           </a:bodyPr>
           <a:lstStyle/>
           <a:p>
             <a:pPr>
-              <a:defRPr sz="2200" b="1">
+              <a:defRPr sz="2100" b="1">
                 <a:solidFill>
                   <a:srgbClr val="0B2347"/>
                 </a:solidFill>
               </a:defRPr>
             </a:pPr>
             <a:r>
-              <a:t>6. Xây dựng phần mềm nhúng ESP32 (Phụ trách: Nguyễn Tuấn Sơn)</a:t>
-            </a:r>
-          </a:p>
-        </p:txBody>
-      </p:sp>
-      <p:sp>
-        <p:nvSpPr>
-          <p:cNvPr id="5" name="Rounded Rectangle 4"/>
+              <a:t>6. Kết quả xây dựng Giao diện Web App Quản lý (Nguyễn Tuấn Sơn)</a:t>
+            </a:r>
+          </a:p>
+        </p:txBody>
+      </p:sp>
+      <p:sp>
+        <p:nvSpPr>
+          <p:cNvPr id="5" name="TextBox 4"/>
+          <p:cNvSpPr txBox="1"/>
+          <p:nvPr/>
+        </p:nvSpPr>
+        <p:spPr>
+          <a:xfrm>
+            <a:off x="594360" y="6446520"/>
+            <a:ext cx="10972800" cy="274320"/>
+          </a:xfrm>
+          <a:prstGeom prst="rect">
+            <a:avLst/>
+          </a:prstGeom>
+          <a:noFill/>
+        </p:spPr>
+        <p:txBody>
+          <a:bodyPr wrap="none">
+            <a:spAutoFit/>
+          </a:bodyPr>
+          <a:lstStyle/>
+          <a:p>
+            <a:pPr>
+              <a:defRPr sz="950">
+                <a:solidFill>
+                  <a:srgbClr val="5F6C7D"/>
+                </a:solidFill>
+              </a:defRPr>
+            </a:pPr>
+            <a:r>
+              <a:t>Trường Đại học Công nghệ – ĐHQGHN  |  Nhóm 13: Nguyễn Tuấn Sơn – Vũ Hữu Hoạt                                                                                     Slide 7 / 10</a:t>
+            </a:r>
+          </a:p>
+        </p:txBody>
+      </p:sp>
+      <p:sp>
+        <p:nvSpPr>
+          <p:cNvPr id="6" name="Rounded Rectangle 5"/>
           <p:cNvSpPr/>
           <p:nvPr/>
         </p:nvSpPr>
         <p:spPr>
           <a:xfrm>
-            <a:off x="731520" y="1463040"/>
-            <a:ext cx="5120640" cy="4754880"/>
+            <a:off x="594360" y="1234440"/>
+            <a:ext cx="6720840" cy="5029200"/>
           </a:xfrm>
           <a:prstGeom prst="roundRect">
             <a:avLst/>
           </a:prstGeom>
           <a:solidFill>
-            <a:srgbClr val="F5F7FA"/>
+            <a:srgbClr val="FFFFFF"/>
           </a:solidFill>
-          <a:ln w="12700">
+          <a:ln w="15240">
             <a:solidFill>
-              <a:srgbClr val="DCE2EB"/>
+              <a:srgbClr val="DAE1EB"/>
             </a:solidFill>
           </a:ln>
         </p:spPr>
@@ -6555,16 +7468,40 @@
           </a:p>
         </p:txBody>
       </p:sp>
-      <p:sp>
-        <p:nvSpPr>
-          <p:cNvPr id="6" name="TextBox 5"/>
+      <p:pic>
+        <p:nvPicPr>
+          <p:cNvPr id="7" name="Picture 6" descr="web_dashboard.png"/>
+          <p:cNvPicPr>
+            <a:picLocks noChangeAspect="1"/>
+          </p:cNvPicPr>
+          <p:nvPr/>
+        </p:nvPicPr>
+        <p:blipFill>
+          <a:blip r:embed="rId2"/>
+          <a:stretch>
+            <a:fillRect/>
+          </a:stretch>
+        </p:blipFill>
+        <p:spPr>
+          <a:xfrm>
+            <a:off x="704088" y="1532012"/>
+            <a:ext cx="6501384" cy="4086584"/>
+          </a:xfrm>
+          <a:prstGeom prst="rect">
+            <a:avLst/>
+          </a:prstGeom>
+        </p:spPr>
+      </p:pic>
+      <p:sp>
+        <p:nvSpPr>
+          <p:cNvPr id="8" name="TextBox 7"/>
           <p:cNvSpPr txBox="1"/>
           <p:nvPr/>
         </p:nvSpPr>
         <p:spPr>
           <a:xfrm>
-            <a:off x="960120" y="1645920"/>
-            <a:ext cx="4663440" cy="4389120"/>
+            <a:off x="704088" y="5879592"/>
+            <a:ext cx="6501384" cy="347472"/>
           </a:xfrm>
           <a:prstGeom prst="rect">
             <a:avLst/>
@@ -6572,127 +7509,34 @@
           <a:noFill/>
         </p:spPr>
         <p:txBody>
-          <a:bodyPr wrap="square" lIns="0" tIns="0" rIns="0" bIns="0">
+          <a:bodyPr wrap="square">
             <a:spAutoFit/>
           </a:bodyPr>
           <a:lstStyle/>
           <a:p>
-            <a:pPr>
-              <a:spcAft>
-                <a:spcPts val="400"/>
-              </a:spcAft>
-              <a:defRPr sz="1500" b="1">
+            <a:pPr algn="ctr">
+              <a:defRPr sz="1000" b="1">
                 <a:solidFill>
                   <a:srgbClr val="0B2347"/>
                 </a:solidFill>
               </a:defRPr>
             </a:pPr>
             <a:r>
-              <a:t>Kiến trúc lập trình Non-blocking</a:t>
-            </a:r>
-          </a:p>
-          <a:p>
-            <a:pPr>
-              <a:spcAft>
-                <a:spcPts val="800"/>
-              </a:spcAft>
-              <a:defRPr sz="1100">
-                <a:solidFill>
-                  <a:srgbClr val="646E7D"/>
-                </a:solidFill>
-              </a:defRPr>
-            </a:pPr>
-            <a:r>
-              <a:t>Đảm bảo hệ thống phản hồi mượt mà không treo đơ</a:t>
-            </a:r>
-          </a:p>
-          <a:p>
-            <a:pPr>
-              <a:spcAft>
-                <a:spcPts val="500"/>
-              </a:spcAft>
-              <a:defRPr sz="1200">
-                <a:solidFill>
-                  <a:srgbClr val="181E2A"/>
-                </a:solidFill>
-              </a:defRPr>
-            </a:pPr>
-            <a:r>
-              <a:t>•  Loại bỏ hoàn toàn hàm chặn delay(): Sử dụng kỹ thuật định thời millis() và máy trạng thái hữu hạn (Finite State Machine).</a:t>
-            </a:r>
-          </a:p>
-          <a:p>
-            <a:pPr>
-              <a:spcAft>
-                <a:spcPts val="500"/>
-              </a:spcAft>
-              <a:defRPr sz="1200">
-                <a:solidFill>
-                  <a:srgbClr val="181E2A"/>
-                </a:solidFill>
-              </a:defRPr>
-            </a:pPr>
-            <a:r>
-              <a:t>•  Phân phối chu kỳ quét cảm biến hợp lý:</a:t>
-            </a:r>
-          </a:p>
-          <a:p>
-            <a:pPr>
-              <a:spcAft>
-                <a:spcPts val="500"/>
-              </a:spcAft>
-              <a:defRPr sz="1200">
-                <a:solidFill>
-                  <a:srgbClr val="181E2A"/>
-                </a:solidFill>
-              </a:defRPr>
-            </a:pPr>
-            <a:r>
-              <a:t>•      • Quét ma trận Keypad 4x4: Thực thi liên tục theo từng chu kỳ vòng lặp, độ trễ nhận phím &lt; 5ms.</a:t>
-            </a:r>
-          </a:p>
-          <a:p>
-            <a:pPr>
-              <a:spcAft>
-                <a:spcPts val="500"/>
-              </a:spcAft>
-              <a:defRPr sz="1200">
-                <a:solidFill>
-                  <a:srgbClr val="181E2A"/>
-                </a:solidFill>
-              </a:defRPr>
-            </a:pPr>
-            <a:r>
-              <a:t>•      • Quét RFID và Vân tay AS608: Thực thi theo chu kỳ định thời 80ms, tránh nghẽn CPU.</a:t>
-            </a:r>
-          </a:p>
-          <a:p>
-            <a:pPr>
-              <a:spcAft>
-                <a:spcPts val="500"/>
-              </a:spcAft>
-              <a:defRPr sz="1200">
-                <a:solidFill>
-                  <a:srgbClr val="181E2A"/>
-                </a:solidFill>
-              </a:defRPr>
-            </a:pPr>
-            <a:r>
-              <a:t>•      • Đếm ngược đóng cửa tự động: Xử lý chạy nền song song với việc giữ kết nối WebSocket.</a:t>
-            </a:r>
-          </a:p>
-        </p:txBody>
-      </p:sp>
-      <p:sp>
-        <p:nvSpPr>
-          <p:cNvPr id="7" name="Rounded Rectangle 6"/>
+              <a:t>Hình 6.1: Giao diện Web App thực tế (Thiết kế tối giản Shadcn UI, rõ ràng, dễ thao tác)</a:t>
+            </a:r>
+          </a:p>
+        </p:txBody>
+      </p:sp>
+      <p:sp>
+        <p:nvSpPr>
+          <p:cNvPr id="9" name="Rounded Rectangle 8"/>
           <p:cNvSpPr/>
           <p:nvPr/>
         </p:nvSpPr>
         <p:spPr>
           <a:xfrm>
-            <a:off x="6217920" y="1463040"/>
-            <a:ext cx="5212080" cy="4754880"/>
+            <a:off x="7498079" y="1234440"/>
+            <a:ext cx="4096512" cy="5029200"/>
           </a:xfrm>
           <a:prstGeom prst="roundRect">
             <a:avLst/>
@@ -6730,14 +7574,14 @@
       </p:sp>
       <p:sp>
         <p:nvSpPr>
-          <p:cNvPr id="8" name="TextBox 7"/>
+          <p:cNvPr id="10" name="TextBox 9"/>
           <p:cNvSpPr txBox="1"/>
           <p:nvPr/>
         </p:nvSpPr>
         <p:spPr>
           <a:xfrm>
-            <a:off x="6446520" y="1645920"/>
-            <a:ext cx="4754880" cy="4389120"/>
+            <a:off x="7699247" y="1399032"/>
+            <a:ext cx="3694176" cy="4736592"/>
           </a:xfrm>
           <a:prstGeom prst="rect">
             <a:avLst/>
@@ -6752,106 +7596,166 @@
           <a:p>
             <a:pPr>
               <a:spcAft>
-                <a:spcPts val="400"/>
-              </a:spcAft>
-              <a:defRPr sz="1500" b="1">
+                <a:spcPts val="300"/>
+              </a:spcAft>
+              <a:defRPr sz="1450" b="1">
                 <a:solidFill>
                   <a:srgbClr val="10559A"/>
                 </a:solidFill>
               </a:defRPr>
             </a:pPr>
             <a:r>
-              <a:t>Quản lý bộ nhớ Flash LittleFS &amp; Kết nối</a:t>
-            </a:r>
-          </a:p>
-          <a:p>
-            <a:pPr>
-              <a:spcAft>
-                <a:spcPts val="800"/>
-              </a:spcAft>
-              <a:defRPr sz="1100">
-                <a:solidFill>
-                  <a:srgbClr val="646E7D"/>
-                </a:solidFill>
-              </a:defRPr>
-            </a:pPr>
-            <a:r>
-              <a:t>Lưu trữ bền vững &amp; Truy cập tiện lợi</a:t>
-            </a:r>
-          </a:p>
-          <a:p>
-            <a:pPr>
-              <a:spcAft>
-                <a:spcPts val="500"/>
-              </a:spcAft>
-              <a:defRPr sz="1200">
-                <a:solidFill>
-                  <a:srgbClr val="181E2A"/>
-                </a:solidFill>
-              </a:defRPr>
-            </a:pPr>
-            <a:r>
-              <a:t>•  Phân vùng Flash LittleFS:</a:t>
-            </a:r>
-          </a:p>
-          <a:p>
-            <a:pPr>
-              <a:spcAft>
-                <a:spcPts val="500"/>
-              </a:spcAft>
-              <a:defRPr sz="1200">
-                <a:solidFill>
-                  <a:srgbClr val="181E2A"/>
-                </a:solidFill>
-              </a:defRPr>
-            </a:pPr>
-            <a:r>
-              <a:t>•      • Lưu trữ toàn bộ mã nguồn Web App tĩnh (HTML, CSS, JS) nén trực tiếp vào Flash.</a:t>
-            </a:r>
-          </a:p>
-          <a:p>
-            <a:pPr>
-              <a:spcAft>
-                <a:spcPts val="500"/>
-              </a:spcAft>
-              <a:defRPr sz="1200">
-                <a:solidFill>
-                  <a:srgbClr val="181E2A"/>
-                </a:solidFill>
-              </a:defRPr>
-            </a:pPr>
-            <a:r>
-              <a:t>•      • Quản lý cơ sở dữ liệu dạng JSON (config.json) lưu mật khẩu PIN, danh sách UID thẻ và ID vân tay.</a:t>
-            </a:r>
-          </a:p>
-          <a:p>
-            <a:pPr>
-              <a:spcAft>
-                <a:spcPts val="500"/>
-              </a:spcAft>
-              <a:defRPr sz="1200">
-                <a:solidFill>
-                  <a:srgbClr val="181E2A"/>
-                </a:solidFill>
-              </a:defRPr>
-            </a:pPr>
-            <a:r>
-              <a:t>•  Bảo toàn dữ liệu khi mất điện: Mọi thay đổi cấu hình từ Web App hoặc Keypad được ghi trực tiếp vào LittleFS, khởi động lại không bị mất.</a:t>
-            </a:r>
-          </a:p>
-          <a:p>
-            <a:pPr>
-              <a:spcAft>
-                <a:spcPts val="500"/>
-              </a:spcAft>
-              <a:defRPr sz="1200">
-                <a:solidFill>
-                  <a:srgbClr val="181E2A"/>
-                </a:solidFill>
-              </a:defRPr>
-            </a:pPr>
-            <a:r>
-              <a:t>•  Tên miền nội bộ mDNS (smartdoor.local): Người dùng chỉ cần gõ http://smartdoor.local là mở Web App ngay trong mạng Wi-Fi.</a:t>
+              <a:t>Các tính năng đã hoàn thiện trên Web</a:t>
+            </a:r>
+          </a:p>
+          <a:p>
+            <a:pPr>
+              <a:spcAft>
+                <a:spcPts val="700"/>
+              </a:spcAft>
+              <a:defRPr sz="1050">
+                <a:solidFill>
+                  <a:srgbClr val="5F6C7D"/>
+                </a:solidFill>
+              </a:defRPr>
+            </a:pPr>
+            <a:r>
+              <a:t>Hoạt động trên cả Điện thoại &amp; Máy tính</a:t>
+            </a:r>
+          </a:p>
+          <a:p>
+            <a:pPr>
+              <a:spcAft>
+                <a:spcPts val="450"/>
+              </a:spcAft>
+              <a:defRPr sz="1080">
+                <a:solidFill>
+                  <a:srgbClr val="141C28"/>
+                </a:solidFill>
+              </a:defRPr>
+            </a:pPr>
+            <a:r>
+              <a:t>•  1. Bảng điều khiển (Dashboard):</a:t>
+            </a:r>
+          </a:p>
+          <a:p>
+            <a:pPr>
+              <a:spcAft>
+                <a:spcPts val="450"/>
+              </a:spcAft>
+              <a:defRPr sz="1080">
+                <a:solidFill>
+                  <a:srgbClr val="141C28"/>
+                </a:solidFill>
+              </a:defRPr>
+            </a:pPr>
+            <a:r>
+              <a:t>•      • Hiển thị trạng thái khóa 12V trực quan &amp; đếm ngược thời gian tự đóng.</a:t>
+            </a:r>
+          </a:p>
+          <a:p>
+            <a:pPr>
+              <a:spcAft>
+                <a:spcPts val="450"/>
+              </a:spcAft>
+              <a:defRPr sz="1080">
+                <a:solidFill>
+                  <a:srgbClr val="141C28"/>
+                </a:solidFill>
+              </a:defRPr>
+            </a:pPr>
+            <a:r>
+              <a:t>•      • Nút nhấn Mở khóa từ xa &amp; Khóa khẩn cấp qua Wi-Fi.</a:t>
+            </a:r>
+          </a:p>
+          <a:p>
+            <a:pPr>
+              <a:spcAft>
+                <a:spcPts val="450"/>
+              </a:spcAft>
+              <a:defRPr sz="1080">
+                <a:solidFill>
+                  <a:srgbClr val="141C28"/>
+                </a:solidFill>
+              </a:defRPr>
+            </a:pPr>
+            <a:r>
+              <a:t>•      • Màn hình LCD 16x2 Live Mirror phản chiếu chính xác từng dòng chữ tại cửa.</a:t>
+            </a:r>
+          </a:p>
+          <a:p>
+            <a:pPr>
+              <a:spcAft>
+                <a:spcPts val="450"/>
+              </a:spcAft>
+              <a:defRPr sz="1080">
+                <a:solidFill>
+                  <a:srgbClr val="141C28"/>
+                </a:solidFill>
+              </a:defRPr>
+            </a:pPr>
+            <a:r>
+              <a:t>•  2. Nhật ký lịch sử ra vào:</a:t>
+            </a:r>
+          </a:p>
+          <a:p>
+            <a:pPr>
+              <a:spcAft>
+                <a:spcPts val="450"/>
+              </a:spcAft>
+              <a:defRPr sz="1080">
+                <a:solidFill>
+                  <a:srgbClr val="141C28"/>
+                </a:solidFill>
+              </a:defRPr>
+            </a:pPr>
+            <a:r>
+              <a:t>•      • Ghi nhận Thời gian thực, Phương thức, Tên người dùng, Trạng thái Hợp lệ/Từ chối.</a:t>
+            </a:r>
+          </a:p>
+          <a:p>
+            <a:pPr>
+              <a:spcAft>
+                <a:spcPts val="450"/>
+              </a:spcAft>
+              <a:defRPr sz="1080">
+                <a:solidFill>
+                  <a:srgbClr val="141C28"/>
+                </a:solidFill>
+              </a:defRPr>
+            </a:pPr>
+            <a:r>
+              <a:t>•      • Hỗ trợ lọc theo phương thức và Xuất file .CSV phục vụ báo cáo.</a:t>
+            </a:r>
+          </a:p>
+          <a:p>
+            <a:pPr>
+              <a:spcAft>
+                <a:spcPts val="450"/>
+              </a:spcAft>
+              <a:defRPr sz="1080">
+                <a:solidFill>
+                  <a:srgbClr val="141C28"/>
+                </a:solidFill>
+              </a:defRPr>
+            </a:pPr>
+            <a:r>
+              <a:t>•  3. Quản lý Vân tay &amp; Thẻ RFID:</a:t>
+            </a:r>
+          </a:p>
+          <a:p>
+            <a:pPr>
+              <a:spcAft>
+                <a:spcPts val="450"/>
+              </a:spcAft>
+              <a:defRPr sz="1080">
+                <a:solidFill>
+                  <a:srgbClr val="141C28"/>
+                </a:solidFill>
+              </a:defRPr>
+            </a:pPr>
+            <a:r>
+              <a:t>•      • Đăng ký mẫu vân tay mới và Quét thêm thẻ RFID trực tiếp từ giao diện Web.</a:t>
             </a:r>
           </a:p>
         </p:txBody>
@@ -6883,7 +7787,7 @@
         <p:spPr>
           <a:xfrm>
             <a:off x="0" y="0"/>
-            <a:ext cx="12191695" cy="109728"/>
+            <a:ext cx="12191695" cy="100584"/>
           </a:xfrm>
           <a:prstGeom prst="rect">
             <a:avLst/>
@@ -6925,8 +7829,8 @@
         </p:nvSpPr>
         <p:spPr>
           <a:xfrm>
-            <a:off x="731520" y="365760"/>
-            <a:ext cx="10698480" cy="320040"/>
+            <a:off x="594360" y="292608"/>
+            <a:ext cx="9601200" cy="274320"/>
           </a:xfrm>
           <a:prstGeom prst="rect">
             <a:avLst/>
@@ -6934,20 +7838,20 @@
           <a:noFill/>
         </p:spPr>
         <p:txBody>
-          <a:bodyPr wrap="square" lIns="0" tIns="0" rIns="0" bIns="0">
+          <a:bodyPr wrap="none" lIns="0" tIns="0" rIns="0" bIns="0">
             <a:spAutoFit/>
           </a:bodyPr>
           <a:lstStyle/>
           <a:p>
             <a:pPr>
-              <a:defRPr sz="1100" b="1">
+              <a:defRPr sz="1050" b="1">
                 <a:solidFill>
                   <a:srgbClr val="10559A"/>
                 </a:solidFill>
               </a:defRPr>
             </a:pPr>
             <a:r>
-              <a:t>BÁO CÁO TIẾN ĐỘ GIỮA KỲ — ĐỒ ÁN CƠ ĐIỆN TỬ</a:t>
+              <a:t>BÁO CÁO TIẾN ĐỘ GIỮA KỲ — ĐỒ ÁN CƠ ĐIỆN TỬ (NHÓM 13)</a:t>
             </a:r>
           </a:p>
         </p:txBody>
@@ -6960,8 +7864,8 @@
         </p:nvSpPr>
         <p:spPr>
           <a:xfrm>
-            <a:off x="731520" y="685800"/>
-            <a:ext cx="10698480" cy="548640"/>
+            <a:off x="594360" y="566928"/>
+            <a:ext cx="10515600" cy="502920"/>
           </a:xfrm>
           <a:prstGeom prst="rect">
             <a:avLst/>
@@ -6969,44 +7873,79 @@
           <a:noFill/>
         </p:spPr>
         <p:txBody>
-          <a:bodyPr wrap="square" lIns="0" tIns="0" rIns="0" bIns="0">
+          <a:bodyPr wrap="none" lIns="0" tIns="0" rIns="0" bIns="0">
             <a:spAutoFit/>
           </a:bodyPr>
           <a:lstStyle/>
           <a:p>
             <a:pPr>
-              <a:defRPr sz="2200" b="1">
+              <a:defRPr sz="2100" b="1">
                 <a:solidFill>
                   <a:srgbClr val="0B2347"/>
                 </a:solidFill>
               </a:defRPr>
             </a:pPr>
             <a:r>
-              <a:t>7. Cơ chế bảo mật đa cấp độ (Xác thực 1 lớp &amp; 2FA)</a:t>
-            </a:r>
-          </a:p>
-        </p:txBody>
-      </p:sp>
-      <p:sp>
-        <p:nvSpPr>
-          <p:cNvPr id="5" name="Rounded Rectangle 4"/>
+              <a:t>7. Triển khai Cloud Vercel &amp; Bộ giả lập phần cứng kiểm thử</a:t>
+            </a:r>
+          </a:p>
+        </p:txBody>
+      </p:sp>
+      <p:sp>
+        <p:nvSpPr>
+          <p:cNvPr id="5" name="TextBox 4"/>
+          <p:cNvSpPr txBox="1"/>
+          <p:nvPr/>
+        </p:nvSpPr>
+        <p:spPr>
+          <a:xfrm>
+            <a:off x="594360" y="6446520"/>
+            <a:ext cx="10972800" cy="274320"/>
+          </a:xfrm>
+          <a:prstGeom prst="rect">
+            <a:avLst/>
+          </a:prstGeom>
+          <a:noFill/>
+        </p:spPr>
+        <p:txBody>
+          <a:bodyPr wrap="none">
+            <a:spAutoFit/>
+          </a:bodyPr>
+          <a:lstStyle/>
+          <a:p>
+            <a:pPr>
+              <a:defRPr sz="950">
+                <a:solidFill>
+                  <a:srgbClr val="5F6C7D"/>
+                </a:solidFill>
+              </a:defRPr>
+            </a:pPr>
+            <a:r>
+              <a:t>Trường Đại học Công nghệ – ĐHQGHN  |  Nhóm 13: Nguyễn Tuấn Sơn – Vũ Hữu Hoạt                                                                                     Slide 8 / 10</a:t>
+            </a:r>
+          </a:p>
+        </p:txBody>
+      </p:sp>
+      <p:sp>
+        <p:nvSpPr>
+          <p:cNvPr id="6" name="Rounded Rectangle 5"/>
           <p:cNvSpPr/>
           <p:nvPr/>
         </p:nvSpPr>
         <p:spPr>
           <a:xfrm>
-            <a:off x="731520" y="1463040"/>
-            <a:ext cx="5120640" cy="4754880"/>
+            <a:off x="594360" y="1234440"/>
+            <a:ext cx="6720840" cy="5029200"/>
           </a:xfrm>
           <a:prstGeom prst="roundRect">
             <a:avLst/>
           </a:prstGeom>
           <a:solidFill>
-            <a:srgbClr val="F5F7FA"/>
+            <a:srgbClr val="FFFFFF"/>
           </a:solidFill>
-          <a:ln w="12700">
+          <a:ln w="15240">
             <a:solidFill>
-              <a:srgbClr val="DCE2EB"/>
+              <a:srgbClr val="DAE1EB"/>
             </a:solidFill>
           </a:ln>
         </p:spPr>
@@ -7032,16 +7971,40 @@
           </a:p>
         </p:txBody>
       </p:sp>
-      <p:sp>
-        <p:nvSpPr>
-          <p:cNvPr id="6" name="TextBox 5"/>
+      <p:pic>
+        <p:nvPicPr>
+          <p:cNvPr id="7" name="Picture 6" descr="vercel_deploy.png"/>
+          <p:cNvPicPr>
+            <a:picLocks noChangeAspect="1"/>
+          </p:cNvPicPr>
+          <p:nvPr/>
+        </p:nvPicPr>
+        <p:blipFill>
+          <a:blip r:embed="rId2"/>
+          <a:stretch>
+            <a:fillRect/>
+          </a:stretch>
+        </p:blipFill>
+        <p:spPr>
+          <a:xfrm>
+            <a:off x="704088" y="1749964"/>
+            <a:ext cx="6501384" cy="3650679"/>
+          </a:xfrm>
+          <a:prstGeom prst="rect">
+            <a:avLst/>
+          </a:prstGeom>
+        </p:spPr>
+      </p:pic>
+      <p:sp>
+        <p:nvSpPr>
+          <p:cNvPr id="8" name="TextBox 7"/>
           <p:cNvSpPr txBox="1"/>
           <p:nvPr/>
         </p:nvSpPr>
         <p:spPr>
           <a:xfrm>
-            <a:off x="960120" y="1645920"/>
-            <a:ext cx="4663440" cy="4389120"/>
+            <a:off x="704088" y="5879592"/>
+            <a:ext cx="6501384" cy="347472"/>
           </a:xfrm>
           <a:prstGeom prst="rect">
             <a:avLst/>
@@ -7049,142 +8012,34 @@
           <a:noFill/>
         </p:spPr>
         <p:txBody>
-          <a:bodyPr wrap="square" lIns="0" tIns="0" rIns="0" bIns="0">
+          <a:bodyPr wrap="square">
             <a:spAutoFit/>
           </a:bodyPr>
           <a:lstStyle/>
           <a:p>
-            <a:pPr>
-              <a:spcAft>
-                <a:spcPts val="400"/>
-              </a:spcAft>
-              <a:defRPr sz="1500" b="1">
+            <a:pPr algn="ctr">
+              <a:defRPr sz="1000" b="1">
                 <a:solidFill>
                   <a:srgbClr val="0B2347"/>
                 </a:solidFill>
               </a:defRPr>
             </a:pPr>
             <a:r>
-              <a:t>Chế độ Xác thực 1 lớp (Single Auth)</a:t>
-            </a:r>
-          </a:p>
-          <a:p>
-            <a:pPr>
-              <a:spcAft>
-                <a:spcPts val="800"/>
-              </a:spcAft>
-              <a:defRPr sz="1100">
-                <a:solidFill>
-                  <a:srgbClr val="646E7D"/>
-                </a:solidFill>
-              </a:defRPr>
-            </a:pPr>
-            <a:r>
-              <a:t>Tối ưu sự tiện lợi &amp; Tốc độ mở cửa</a:t>
-            </a:r>
-          </a:p>
-          <a:p>
-            <a:pPr>
-              <a:spcAft>
-                <a:spcPts val="500"/>
-              </a:spcAft>
-              <a:defRPr sz="1200">
-                <a:solidFill>
-                  <a:srgbClr val="181E2A"/>
-                </a:solidFill>
-              </a:defRPr>
-            </a:pPr>
-            <a:r>
-              <a:t>•  Nguyên lý vận hành: Người dùng chỉ cần xác thực thành công 1 trong 3 phương thức là cửa mở ngay lập tức.</a:t>
-            </a:r>
-          </a:p>
-          <a:p>
-            <a:pPr>
-              <a:spcAft>
-                <a:spcPts val="500"/>
-              </a:spcAft>
-              <a:defRPr sz="1200">
-                <a:solidFill>
-                  <a:srgbClr val="181E2A"/>
-                </a:solidFill>
-              </a:defRPr>
-            </a:pPr>
-            <a:r>
-              <a:t>•  Phương thức hỗ trợ:</a:t>
-            </a:r>
-          </a:p>
-          <a:p>
-            <a:pPr>
-              <a:spcAft>
-                <a:spcPts val="500"/>
-              </a:spcAft>
-              <a:defRPr sz="1200">
-                <a:solidFill>
-                  <a:srgbClr val="181E2A"/>
-                </a:solidFill>
-              </a:defRPr>
-            </a:pPr>
-            <a:r>
-              <a:t>•      • Quét Vân tay AS608 hợp lệ (khớp mẫu trong bộ nhớ ID 1–127).</a:t>
-            </a:r>
-          </a:p>
-          <a:p>
-            <a:pPr>
-              <a:spcAft>
-                <a:spcPts val="500"/>
-              </a:spcAft>
-              <a:defRPr sz="1200">
-                <a:solidFill>
-                  <a:srgbClr val="181E2A"/>
-                </a:solidFill>
-              </a:defRPr>
-            </a:pPr>
-            <a:r>
-              <a:t>•      • Quẹt Thẻ từ RFID RC522 hợp lệ (khớp mã UID trong cơ sở dữ liệu).</a:t>
-            </a:r>
-          </a:p>
-          <a:p>
-            <a:pPr>
-              <a:spcAft>
-                <a:spcPts val="500"/>
-              </a:spcAft>
-              <a:defRPr sz="1200">
-                <a:solidFill>
-                  <a:srgbClr val="181E2A"/>
-                </a:solidFill>
-              </a:defRPr>
-            </a:pPr>
-            <a:r>
-              <a:t>•      • Nhập đúng mã PIN trên Bàn phím ma trận 4x4 rồi nhấn phím # hoặc D.</a:t>
-            </a:r>
-          </a:p>
-          <a:p>
-            <a:pPr>
-              <a:spcAft>
-                <a:spcPts val="500"/>
-              </a:spcAft>
-              <a:defRPr sz="1200">
-                <a:solidFill>
-                  <a:srgbClr val="181E2A"/>
-                </a:solidFill>
-              </a:defRPr>
-            </a:pPr>
-            <a:r>
-              <a:t>•  Ứng dụng: Phù hợp cho môi trường gia đình, văn phòng thông thường cần thao tác ra vào nhanh chóng.</a:t>
-            </a:r>
-          </a:p>
-        </p:txBody>
-      </p:sp>
-      <p:sp>
-        <p:nvSpPr>
-          <p:cNvPr id="7" name="Rounded Rectangle 6"/>
+              <a:t>Hình 7.1: Hệ thống mã nguồn trên GitHub đã được triển khai thành công lên tên miền Vercel</a:t>
+            </a:r>
+          </a:p>
+        </p:txBody>
+      </p:sp>
+      <p:sp>
+        <p:nvSpPr>
+          <p:cNvPr id="9" name="Rounded Rectangle 8"/>
           <p:cNvSpPr/>
           <p:nvPr/>
         </p:nvSpPr>
         <p:spPr>
           <a:xfrm>
-            <a:off x="6217920" y="1463040"/>
-            <a:ext cx="5212080" cy="4754880"/>
+            <a:off x="7498079" y="1234440"/>
+            <a:ext cx="4096512" cy="5029200"/>
           </a:xfrm>
           <a:prstGeom prst="roundRect">
             <a:avLst/>
@@ -7222,14 +8077,14 @@
       </p:sp>
       <p:sp>
         <p:nvSpPr>
-          <p:cNvPr id="8" name="TextBox 7"/>
+          <p:cNvPr id="10" name="TextBox 9"/>
           <p:cNvSpPr txBox="1"/>
           <p:nvPr/>
         </p:nvSpPr>
         <p:spPr>
           <a:xfrm>
-            <a:off x="6446520" y="1645920"/>
-            <a:ext cx="4754880" cy="4389120"/>
+            <a:off x="7699247" y="1399032"/>
+            <a:ext cx="3694176" cy="4736592"/>
           </a:xfrm>
           <a:prstGeom prst="rect">
             <a:avLst/>
@@ -7244,136 +8099,166 @@
           <a:p>
             <a:pPr>
               <a:spcAft>
-                <a:spcPts val="400"/>
-              </a:spcAft>
-              <a:defRPr sz="1500" b="1">
+                <a:spcPts val="300"/>
+              </a:spcAft>
+              <a:defRPr sz="1450" b="1">
                 <a:solidFill>
                   <a:srgbClr val="10559A"/>
                 </a:solidFill>
               </a:defRPr>
             </a:pPr>
             <a:r>
-              <a:t>Chế độ Xác thực 2 lớp (Two-Factor Authentication)</a:t>
-            </a:r>
-          </a:p>
-          <a:p>
-            <a:pPr>
-              <a:spcAft>
-                <a:spcPts val="800"/>
+              <a:t>Kiểm thử độc lập &amp; Tên miền truy cập</a:t>
+            </a:r>
+          </a:p>
+          <a:p>
+            <a:pPr>
+              <a:spcAft>
+                <a:spcPts val="700"/>
+              </a:spcAft>
+              <a:defRPr sz="1050">
+                <a:solidFill>
+                  <a:srgbClr val="5F6C7D"/>
+                </a:solidFill>
+              </a:defRPr>
+            </a:pPr>
+            <a:r>
+              <a:t>Sẵn sàng chạy Demo trực tiếp ngay trong buổi báo cáo</a:t>
+            </a:r>
+          </a:p>
+          <a:p>
+            <a:pPr>
+              <a:spcAft>
+                <a:spcPts val="450"/>
               </a:spcAft>
               <a:defRPr sz="1100">
                 <a:solidFill>
-                  <a:srgbClr val="646E7D"/>
-                </a:solidFill>
-              </a:defRPr>
-            </a:pPr>
-            <a:r>
-              <a:t>Bảo vệ khu vực trọng yếu &amp; Phòng thí nghiệm</a:t>
-            </a:r>
-          </a:p>
-          <a:p>
-            <a:pPr>
-              <a:spcAft>
-                <a:spcPts val="500"/>
-              </a:spcAft>
-              <a:defRPr sz="1200">
-                <a:solidFill>
-                  <a:srgbClr val="181E2A"/>
-                </a:solidFill>
-              </a:defRPr>
-            </a:pPr>
-            <a:r>
-              <a:t>•  Tùy chọn đa dạng cấu hình trực tiếp từ Web App:</a:t>
-            </a:r>
-          </a:p>
-          <a:p>
-            <a:pPr>
-              <a:spcAft>
-                <a:spcPts val="500"/>
-              </a:spcAft>
-              <a:defRPr sz="1200">
-                <a:solidFill>
-                  <a:srgbClr val="181E2A"/>
-                </a:solidFill>
-              </a:defRPr>
-            </a:pPr>
-            <a:r>
-              <a:t>•      1. Vân tay AS608 + Mã PIN Keypad 4x4</a:t>
-            </a:r>
-          </a:p>
-          <a:p>
-            <a:pPr>
-              <a:spcAft>
-                <a:spcPts val="500"/>
-              </a:spcAft>
-              <a:defRPr sz="1200">
-                <a:solidFill>
-                  <a:srgbClr val="181E2A"/>
-                </a:solidFill>
-              </a:defRPr>
-            </a:pPr>
-            <a:r>
-              <a:t>•      2. Thẻ từ RFID RC522 + Mã PIN Keypad 4x4</a:t>
-            </a:r>
-          </a:p>
-          <a:p>
-            <a:pPr>
-              <a:spcAft>
-                <a:spcPts val="500"/>
-              </a:spcAft>
-              <a:defRPr sz="1200">
-                <a:solidFill>
-                  <a:srgbClr val="181E2A"/>
-                </a:solidFill>
-              </a:defRPr>
-            </a:pPr>
-            <a:r>
-              <a:t>•      3. Vân tay AS608 + Thẻ từ RFID RC522</a:t>
-            </a:r>
-          </a:p>
-          <a:p>
-            <a:pPr>
-              <a:spcAft>
-                <a:spcPts val="500"/>
-              </a:spcAft>
-              <a:defRPr sz="1200">
-                <a:solidFill>
-                  <a:srgbClr val="181E2A"/>
-                </a:solidFill>
-              </a:defRPr>
-            </a:pPr>
-            <a:r>
-              <a:t>•  Quy trình xử lý phiên 2FA an toàn:</a:t>
-            </a:r>
-          </a:p>
-          <a:p>
-            <a:pPr>
-              <a:spcAft>
-                <a:spcPts val="500"/>
-              </a:spcAft>
-              <a:defRPr sz="1200">
-                <a:solidFill>
-                  <a:srgbClr val="181E2A"/>
-                </a:solidFill>
-              </a:defRPr>
-            </a:pPr>
-            <a:r>
-              <a:t>•      • Bước 1: Người dùng xác thực lớp 1 đúng -&gt; Khóa chưa mở, màn hình LCD và Web hiển thị yêu cầu thực hiện tiếp lớp 2.</a:t>
-            </a:r>
-          </a:p>
-          <a:p>
-            <a:pPr>
-              <a:spcAft>
-                <a:spcPts val="500"/>
-              </a:spcAft>
-              <a:defRPr sz="1200">
-                <a:solidFill>
-                  <a:srgbClr val="181E2A"/>
-                </a:solidFill>
-              </a:defRPr>
-            </a:pPr>
-            <a:r>
-              <a:t>•      • Bước 2: Kích hoạt bộ đếm thời gian Timeout 15 giây. Nếu nhập đúng lớp 2 -&gt; Mở khóa. Nếu quá 15s hoặc sai -&gt; Hủy phiên ngay lập tức.</a:t>
+                  <a:srgbClr val="141C28"/>
+                </a:solidFill>
+              </a:defRPr>
+            </a:pPr>
+            <a:r>
+              <a:t>•  Kho mã nguồn GitHub của nhóm:</a:t>
+            </a:r>
+          </a:p>
+          <a:p>
+            <a:pPr>
+              <a:spcAft>
+                <a:spcPts val="450"/>
+              </a:spcAft>
+              <a:defRPr sz="1100">
+                <a:solidFill>
+                  <a:srgbClr val="141C28"/>
+                </a:solidFill>
+              </a:defRPr>
+            </a:pPr>
+            <a:r>
+              <a:t>•      • github.com/tuansonuet197/smartdoor-nhom13</a:t>
+            </a:r>
+          </a:p>
+          <a:p>
+            <a:pPr>
+              <a:spcAft>
+                <a:spcPts val="450"/>
+              </a:spcAft>
+              <a:defRPr sz="1100">
+                <a:solidFill>
+                  <a:srgbClr val="141C28"/>
+                </a:solidFill>
+              </a:defRPr>
+            </a:pPr>
+            <a:r>
+              <a:t>•  Tên miền Web App trực tuyến (Vercel):</a:t>
+            </a:r>
+          </a:p>
+          <a:p>
+            <a:pPr>
+              <a:spcAft>
+                <a:spcPts val="450"/>
+              </a:spcAft>
+              <a:defRPr sz="1100">
+                <a:solidFill>
+                  <a:srgbClr val="141C28"/>
+                </a:solidFill>
+              </a:defRPr>
+            </a:pPr>
+            <a:r>
+              <a:t>•      • smartdoor-nhom13-data.vercel.app</a:t>
+            </a:r>
+          </a:p>
+          <a:p>
+            <a:pPr>
+              <a:spcAft>
+                <a:spcPts val="450"/>
+              </a:spcAft>
+              <a:defRPr sz="1100">
+                <a:solidFill>
+                  <a:srgbClr val="141C28"/>
+                </a:solidFill>
+              </a:defRPr>
+            </a:pPr>
+            <a:r>
+              <a:t>•  Tên miền cục bộ khi chạy trên ESP32:</a:t>
+            </a:r>
+          </a:p>
+          <a:p>
+            <a:pPr>
+              <a:spcAft>
+                <a:spcPts val="450"/>
+              </a:spcAft>
+              <a:defRPr sz="1100">
+                <a:solidFill>
+                  <a:srgbClr val="141C28"/>
+                </a:solidFill>
+              </a:defRPr>
+            </a:pPr>
+            <a:r>
+              <a:t>•      • http://smartdoor.local (mDNS)</a:t>
+            </a:r>
+          </a:p>
+          <a:p>
+            <a:pPr>
+              <a:spcAft>
+                <a:spcPts val="450"/>
+              </a:spcAft>
+              <a:defRPr sz="1100">
+                <a:solidFill>
+                  <a:srgbClr val="141C28"/>
+                </a:solidFill>
+              </a:defRPr>
+            </a:pPr>
+            <a:r>
+              <a:t>•  Bộ giả lập phần cứng (Draggable Simulator):</a:t>
+            </a:r>
+          </a:p>
+          <a:p>
+            <a:pPr>
+              <a:spcAft>
+                <a:spcPts val="450"/>
+              </a:spcAft>
+              <a:defRPr sz="1100">
+                <a:solidFill>
+                  <a:srgbClr val="141C28"/>
+                </a:solidFill>
+              </a:defRPr>
+            </a:pPr>
+            <a:r>
+              <a:t>•      • Tích hợp sẵn bảng giả lập kéo-thả tự do trên góc màn hình Web.</a:t>
+            </a:r>
+          </a:p>
+          <a:p>
+            <a:pPr>
+              <a:spcAft>
+                <a:spcPts val="450"/>
+              </a:spcAft>
+              <a:defRPr sz="1100">
+                <a:solidFill>
+                  <a:srgbClr val="141C28"/>
+                </a:solidFill>
+              </a:defRPr>
+            </a:pPr>
+            <a:r>
+              <a:t>•      • Cho phép bấm thử Bàn phím 4x4 ảo, giả lập quét Vân tay đúng/sai, quẹt Thẻ RFID đúng/lạ để kiểm chứng toàn bộ luồng logic 1 lớp &amp; 2FA trước khi hàn mạch.</a:t>
             </a:r>
           </a:p>
         </p:txBody>
@@ -7405,7 +8290,7 @@
         <p:spPr>
           <a:xfrm>
             <a:off x="0" y="0"/>
-            <a:ext cx="12191695" cy="109728"/>
+            <a:ext cx="12191695" cy="100584"/>
           </a:xfrm>
           <a:prstGeom prst="rect">
             <a:avLst/>
@@ -7447,8 +8332,8 @@
         </p:nvSpPr>
         <p:spPr>
           <a:xfrm>
-            <a:off x="731520" y="365760"/>
-            <a:ext cx="10698480" cy="320040"/>
+            <a:off x="594360" y="292608"/>
+            <a:ext cx="9601200" cy="274320"/>
           </a:xfrm>
           <a:prstGeom prst="rect">
             <a:avLst/>
@@ -7456,20 +8341,20 @@
           <a:noFill/>
         </p:spPr>
         <p:txBody>
-          <a:bodyPr wrap="square" lIns="0" tIns="0" rIns="0" bIns="0">
+          <a:bodyPr wrap="none" lIns="0" tIns="0" rIns="0" bIns="0">
             <a:spAutoFit/>
           </a:bodyPr>
           <a:lstStyle/>
           <a:p>
             <a:pPr>
-              <a:defRPr sz="1100" b="1">
+              <a:defRPr sz="1050" b="1">
                 <a:solidFill>
                   <a:srgbClr val="10559A"/>
                 </a:solidFill>
               </a:defRPr>
             </a:pPr>
             <a:r>
-              <a:t>BÁO CÁO TIẾN ĐỘ GIỮA KỲ — ĐỒ ÁN CƠ ĐIỆN TỬ</a:t>
+              <a:t>BÁO CÁO TIẾN ĐỘ GIỮA KỲ — ĐỒ ÁN CƠ ĐIỆN TỬ (NHÓM 13)</a:t>
             </a:r>
           </a:p>
         </p:txBody>
@@ -7482,8 +8367,8 @@
         </p:nvSpPr>
         <p:spPr>
           <a:xfrm>
-            <a:off x="731520" y="685800"/>
-            <a:ext cx="10698480" cy="548640"/>
+            <a:off x="594360" y="566928"/>
+            <a:ext cx="10515600" cy="502920"/>
           </a:xfrm>
           <a:prstGeom prst="rect">
             <a:avLst/>
@@ -7491,79 +8376,34 @@
           <a:noFill/>
         </p:spPr>
         <p:txBody>
-          <a:bodyPr wrap="square" lIns="0" tIns="0" rIns="0" bIns="0">
+          <a:bodyPr wrap="none" lIns="0" tIns="0" rIns="0" bIns="0">
             <a:spAutoFit/>
           </a:bodyPr>
           <a:lstStyle/>
           <a:p>
             <a:pPr>
-              <a:defRPr sz="2200" b="1">
+              <a:defRPr sz="2100" b="1">
                 <a:solidFill>
                   <a:srgbClr val="0B2347"/>
                 </a:solidFill>
               </a:defRPr>
             </a:pPr>
             <a:r>
-              <a:t>8. Giao diện Web App quản lý &amp; Triển khai đám mây</a:t>
-            </a:r>
-          </a:p>
-        </p:txBody>
-      </p:sp>
-      <p:sp>
-        <p:nvSpPr>
-          <p:cNvPr id="5" name="Rounded Rectangle 4"/>
-          <p:cNvSpPr/>
-          <p:nvPr/>
-        </p:nvSpPr>
-        <p:spPr>
-          <a:xfrm>
-            <a:off x="731520" y="1463040"/>
-            <a:ext cx="5120640" cy="4754880"/>
-          </a:xfrm>
-          <a:prstGeom prst="roundRect">
-            <a:avLst/>
-          </a:prstGeom>
-          <a:solidFill>
-            <a:srgbClr val="F5F7FA"/>
-          </a:solidFill>
-          <a:ln w="12700">
-            <a:solidFill>
-              <a:srgbClr val="DCE2EB"/>
-            </a:solidFill>
-          </a:ln>
-        </p:spPr>
-        <p:style>
-          <a:lnRef idx="1">
-            <a:schemeClr val="accent1"/>
-          </a:lnRef>
-          <a:fillRef idx="3">
-            <a:schemeClr val="accent1"/>
-          </a:fillRef>
-          <a:effectRef idx="2">
-            <a:schemeClr val="accent1"/>
-          </a:effectRef>
-          <a:fontRef idx="minor">
-            <a:schemeClr val="lt1"/>
-          </a:fontRef>
-        </p:style>
-        <p:txBody>
-          <a:bodyPr rtlCol="0" anchor="ctr"/>
-          <a:lstStyle/>
-          <a:p>
-            <a:pPr algn="ctr"/>
-          </a:p>
-        </p:txBody>
-      </p:sp>
-      <p:sp>
-        <p:nvSpPr>
-          <p:cNvPr id="6" name="TextBox 5"/>
+              <a:t>8. Đánh giá tiến độ thực hiện so với kế hoạch đề ra</a:t>
+            </a:r>
+          </a:p>
+        </p:txBody>
+      </p:sp>
+      <p:sp>
+        <p:nvSpPr>
+          <p:cNvPr id="5" name="TextBox 4"/>
           <p:cNvSpPr txBox="1"/>
           <p:nvPr/>
         </p:nvSpPr>
         <p:spPr>
           <a:xfrm>
-            <a:off x="960120" y="1645920"/>
-            <a:ext cx="4663440" cy="4389120"/>
+            <a:off x="594360" y="6446520"/>
+            <a:ext cx="10972800" cy="274320"/>
           </a:xfrm>
           <a:prstGeom prst="rect">
             <a:avLst/>
@@ -7571,142 +8411,34 @@
           <a:noFill/>
         </p:spPr>
         <p:txBody>
-          <a:bodyPr wrap="square" lIns="0" tIns="0" rIns="0" bIns="0">
+          <a:bodyPr wrap="none">
             <a:spAutoFit/>
           </a:bodyPr>
           <a:lstStyle/>
           <a:p>
             <a:pPr>
-              <a:spcAft>
-                <a:spcPts val="400"/>
-              </a:spcAft>
-              <a:defRPr sz="1500" b="1">
-                <a:solidFill>
-                  <a:srgbClr val="0B2347"/>
-                </a:solidFill>
-              </a:defRPr>
-            </a:pPr>
-            <a:r>
-              <a:t>Thiết kế giao diện hiện đại (Shadcn/Vercel)</a:t>
-            </a:r>
-          </a:p>
-          <a:p>
-            <a:pPr>
-              <a:spcAft>
-                <a:spcPts val="800"/>
-              </a:spcAft>
-              <a:defRPr sz="1100">
-                <a:solidFill>
-                  <a:srgbClr val="646E7D"/>
-                </a:solidFill>
-              </a:defRPr>
-            </a:pPr>
-            <a:r>
-              <a:t>Trực quan, dễ dùng trên cả Smartphone &amp; Laptop</a:t>
-            </a:r>
-          </a:p>
-          <a:p>
-            <a:pPr>
-              <a:spcAft>
-                <a:spcPts val="500"/>
-              </a:spcAft>
-              <a:defRPr sz="1200">
-                <a:solidFill>
-                  <a:srgbClr val="181E2A"/>
-                </a:solidFill>
-              </a:defRPr>
-            </a:pPr>
-            <a:r>
-              <a:t>•  Phong cách thiết kế tối giản: Tông màu sáng đơn sắc (Monochrome Light Theme), sử dụng hệ font chuẩn Inter và icon vector nét mảnh.</a:t>
-            </a:r>
-          </a:p>
-          <a:p>
-            <a:pPr>
-              <a:spcAft>
-                <a:spcPts val="500"/>
-              </a:spcAft>
-              <a:defRPr sz="1200">
-                <a:solidFill>
-                  <a:srgbClr val="181E2A"/>
-                </a:solidFill>
-              </a:defRPr>
-            </a:pPr>
-            <a:r>
-              <a:t>•  4 Phân hệ chức năng hoàn chỉnh:</a:t>
-            </a:r>
-          </a:p>
-          <a:p>
-            <a:pPr>
-              <a:spcAft>
-                <a:spcPts val="500"/>
-              </a:spcAft>
-              <a:defRPr sz="1200">
-                <a:solidFill>
-                  <a:srgbClr val="181E2A"/>
-                </a:solidFill>
-              </a:defRPr>
-            </a:pPr>
-            <a:r>
-              <a:t>•      • Tổng quan: Trạng thái khóa cửa thời gian thực, nút mở từ xa, màn hình LCD 16x2 phản chiếu (Live Mirror).</a:t>
-            </a:r>
-          </a:p>
-          <a:p>
-            <a:pPr>
-              <a:spcAft>
-                <a:spcPts val="500"/>
-              </a:spcAft>
-              <a:defRPr sz="1200">
-                <a:solidFill>
-                  <a:srgbClr val="181E2A"/>
-                </a:solidFill>
-              </a:defRPr>
-            </a:pPr>
-            <a:r>
-              <a:t>•      • Nhật ký ra vào: Ghi nhận thời gian, phương thức, kết quả hợp lệ/từ chối, bộ lọc và xuất file báo cáo CSV.</a:t>
-            </a:r>
-          </a:p>
-          <a:p>
-            <a:pPr>
-              <a:spcAft>
-                <a:spcPts val="500"/>
-              </a:spcAft>
-              <a:defRPr sz="1200">
-                <a:solidFill>
-                  <a:srgbClr val="181E2A"/>
-                </a:solidFill>
-              </a:defRPr>
-            </a:pPr>
-            <a:r>
-              <a:t>•      • Quản lý vân tay &amp; RFID: Đăng ký mẫu vân tay mới, đọc thẻ nhanh từ RC522, xóa từng người dùng.</a:t>
-            </a:r>
-          </a:p>
-          <a:p>
-            <a:pPr>
-              <a:spcAft>
-                <a:spcPts val="500"/>
-              </a:spcAft>
-              <a:defRPr sz="1200">
-                <a:solidFill>
-                  <a:srgbClr val="181E2A"/>
-                </a:solidFill>
-              </a:defRPr>
-            </a:pPr>
-            <a:r>
-              <a:t>•      • Cấu hình hệ thống: Chuyển đổi 1 lớp / 2 lớp, đổi mã PIN Keypad, chỉnh thời gian mở.</a:t>
-            </a:r>
-          </a:p>
-        </p:txBody>
-      </p:sp>
-      <p:sp>
-        <p:nvSpPr>
-          <p:cNvPr id="7" name="Rounded Rectangle 6"/>
+              <a:defRPr sz="950">
+                <a:solidFill>
+                  <a:srgbClr val="5F6C7D"/>
+                </a:solidFill>
+              </a:defRPr>
+            </a:pPr>
+            <a:r>
+              <a:t>Trường Đại học Công nghệ – ĐHQGHN  |  Nhóm 13: Nguyễn Tuấn Sơn – Vũ Hữu Hoạt                                                                                     Slide 9 / 10</a:t>
+            </a:r>
+          </a:p>
+        </p:txBody>
+      </p:sp>
+      <p:sp>
+        <p:nvSpPr>
+          <p:cNvPr id="6" name="Rounded Rectangle 5"/>
           <p:cNvSpPr/>
           <p:nvPr/>
         </p:nvSpPr>
         <p:spPr>
           <a:xfrm>
-            <a:off x="6217920" y="1463040"/>
-            <a:ext cx="5212080" cy="4754880"/>
+            <a:off x="594360" y="1234440"/>
+            <a:ext cx="5394960" cy="2377440"/>
           </a:xfrm>
           <a:prstGeom prst="roundRect">
             <a:avLst/>
@@ -7744,14 +8476,14 @@
       </p:sp>
       <p:sp>
         <p:nvSpPr>
-          <p:cNvPr id="8" name="TextBox 7"/>
+          <p:cNvPr id="7" name="TextBox 6"/>
           <p:cNvSpPr txBox="1"/>
           <p:nvPr/>
         </p:nvSpPr>
         <p:spPr>
           <a:xfrm>
-            <a:off x="6446520" y="1645920"/>
-            <a:ext cx="4754880" cy="4389120"/>
+            <a:off x="795528" y="1399032"/>
+            <a:ext cx="4992624" cy="2084832"/>
           </a:xfrm>
           <a:prstGeom prst="rect">
             <a:avLst/>
@@ -7766,121 +8498,385 @@
           <a:p>
             <a:pPr>
               <a:spcAft>
-                <a:spcPts val="400"/>
-              </a:spcAft>
-              <a:defRPr sz="1500" b="1">
+                <a:spcPts val="300"/>
+              </a:spcAft>
+              <a:defRPr sz="1450" b="1">
                 <a:solidFill>
                   <a:srgbClr val="10559A"/>
                 </a:solidFill>
               </a:defRPr>
             </a:pPr>
             <a:r>
-              <a:t>Triển khai trực tuyến &amp; Bộ giả lập phần cứng</a:t>
-            </a:r>
-          </a:p>
-          <a:p>
-            <a:pPr>
-              <a:spcAft>
-                <a:spcPts val="800"/>
+              <a:t>Giai đoạn 1 (Tuần 1 – 2): Khảo sát &amp; Mua linh kiện  [ĐÃ HOÀN THÀNH 100%]</a:t>
+            </a:r>
+          </a:p>
+          <a:p>
+            <a:pPr>
+              <a:spcAft>
+                <a:spcPts val="450"/>
               </a:spcAft>
               <a:defRPr sz="1100">
                 <a:solidFill>
-                  <a:srgbClr val="646E7D"/>
-                </a:solidFill>
-              </a:defRPr>
-            </a:pPr>
-            <a:r>
-              <a:t>Sẵn sàng trình chiếu demo trực tiếp tại buổi báo cáo</a:t>
-            </a:r>
-          </a:p>
-          <a:p>
-            <a:pPr>
-              <a:spcAft>
-                <a:spcPts val="500"/>
-              </a:spcAft>
-              <a:defRPr sz="1200">
-                <a:solidFill>
-                  <a:srgbClr val="181E2A"/>
-                </a:solidFill>
-              </a:defRPr>
-            </a:pPr>
-            <a:r>
-              <a:t>•  Triển khai thành công trên nền tảng Vercel:</a:t>
-            </a:r>
-          </a:p>
-          <a:p>
-            <a:pPr>
-              <a:spcAft>
-                <a:spcPts val="500"/>
-              </a:spcAft>
-              <a:defRPr sz="1200">
-                <a:solidFill>
-                  <a:srgbClr val="181E2A"/>
-                </a:solidFill>
-              </a:defRPr>
-            </a:pPr>
-            <a:r>
-              <a:t>•      • Địa chỉ truy cập trực tuyến: https://smartdoor-nhom13-data.vercel.app</a:t>
-            </a:r>
-          </a:p>
-          <a:p>
-            <a:pPr>
-              <a:spcAft>
-                <a:spcPts val="500"/>
-              </a:spcAft>
-              <a:defRPr sz="1200">
-                <a:solidFill>
-                  <a:srgbClr val="181E2A"/>
-                </a:solidFill>
-              </a:defRPr>
-            </a:pPr>
-            <a:r>
-              <a:t>•      • Đồng bộ liên tục qua kho mã nguồn GitHub: tuansonuet197/smartdoor-nhom13.</a:t>
-            </a:r>
-          </a:p>
-          <a:p>
-            <a:pPr>
-              <a:spcAft>
-                <a:spcPts val="500"/>
-              </a:spcAft>
-              <a:defRPr sz="1200">
-                <a:solidFill>
-                  <a:srgbClr val="181E2A"/>
-                </a:solidFill>
-              </a:defRPr>
-            </a:pPr>
-            <a:r>
-              <a:t>•  Bộ giả lập phần cứng tích hợp sẵn (Draggable Simulator):</a:t>
-            </a:r>
-          </a:p>
-          <a:p>
-            <a:pPr>
-              <a:spcAft>
-                <a:spcPts val="500"/>
-              </a:spcAft>
-              <a:defRPr sz="1200">
-                <a:solidFill>
-                  <a:srgbClr val="181E2A"/>
-                </a:solidFill>
-              </a:defRPr>
-            </a:pPr>
-            <a:r>
-              <a:t>•      • Hỗ trợ kéo thả tự do trên màn hình để không che bảng điều khiển.</a:t>
-            </a:r>
-          </a:p>
-          <a:p>
-            <a:pPr>
-              <a:spcAft>
-                <a:spcPts val="500"/>
-              </a:spcAft>
-              <a:defRPr sz="1200">
-                <a:solidFill>
-                  <a:srgbClr val="181E2A"/>
-                </a:solidFill>
-              </a:defRPr>
-            </a:pPr>
-            <a:r>
-              <a:t>•      • Cho phép giả lập quét vân tay đúng/sai, quẹt thẻ RFID và bàn phím 4x4 ảo để kiểm thử toàn diện quy trình 2FA ngay cả khi chưa cắm mạch.</a:t>
+                  <a:srgbClr val="141C28"/>
+                </a:solidFill>
+              </a:defRPr>
+            </a:pPr>
+            <a:r>
+              <a:t>•  Chốt sơ đồ tổng thể hệ thống cửa bảo mật 3 phương thức xác thực + Web App.</a:t>
+            </a:r>
+          </a:p>
+          <a:p>
+            <a:pPr>
+              <a:spcAft>
+                <a:spcPts val="450"/>
+              </a:spcAft>
+              <a:defRPr sz="1100">
+                <a:solidFill>
+                  <a:srgbClr val="141C28"/>
+                </a:solidFill>
+              </a:defRPr>
+            </a:pPr>
+            <a:r>
+              <a:t>•  Mua đầy đủ 100% linh kiện: Cảm biến vân tay AS608, RFID RC522 + thẻ S50/NFC, Keypad 4x4 có nắp đậy, màn hình LCD I2C, ESP32, Khóa chốt 12V và linh kiện nguồn.</a:t>
+            </a:r>
+          </a:p>
+        </p:txBody>
+      </p:sp>
+      <p:sp>
+        <p:nvSpPr>
+          <p:cNvPr id="8" name="Rounded Rectangle 7"/>
+          <p:cNvSpPr/>
+          <p:nvPr/>
+        </p:nvSpPr>
+        <p:spPr>
+          <a:xfrm>
+            <a:off x="6199632" y="1234440"/>
+            <a:ext cx="5394960" cy="2377440"/>
+          </a:xfrm>
+          <a:prstGeom prst="roundRect">
+            <a:avLst/>
+          </a:prstGeom>
+          <a:solidFill>
+            <a:srgbClr val="FFFFFF"/>
+          </a:solidFill>
+          <a:ln w="19050">
+            <a:solidFill>
+              <a:srgbClr val="10559A"/>
+            </a:solidFill>
+          </a:ln>
+        </p:spPr>
+        <p:style>
+          <a:lnRef idx="1">
+            <a:schemeClr val="accent1"/>
+          </a:lnRef>
+          <a:fillRef idx="3">
+            <a:schemeClr val="accent1"/>
+          </a:fillRef>
+          <a:effectRef idx="2">
+            <a:schemeClr val="accent1"/>
+          </a:effectRef>
+          <a:fontRef idx="minor">
+            <a:schemeClr val="lt1"/>
+          </a:fontRef>
+        </p:style>
+        <p:txBody>
+          <a:bodyPr rtlCol="0" anchor="ctr"/>
+          <a:lstStyle/>
+          <a:p>
+            <a:pPr algn="ctr"/>
+          </a:p>
+        </p:txBody>
+      </p:sp>
+      <p:sp>
+        <p:nvSpPr>
+          <p:cNvPr id="9" name="TextBox 8"/>
+          <p:cNvSpPr txBox="1"/>
+          <p:nvPr/>
+        </p:nvSpPr>
+        <p:spPr>
+          <a:xfrm>
+            <a:off x="6400800" y="1399032"/>
+            <a:ext cx="4992624" cy="2084832"/>
+          </a:xfrm>
+          <a:prstGeom prst="rect">
+            <a:avLst/>
+          </a:prstGeom>
+          <a:noFill/>
+        </p:spPr>
+        <p:txBody>
+          <a:bodyPr wrap="square" lIns="0" tIns="0" rIns="0" bIns="0">
+            <a:spAutoFit/>
+          </a:bodyPr>
+          <a:lstStyle/>
+          <a:p>
+            <a:pPr>
+              <a:spcAft>
+                <a:spcPts val="300"/>
+              </a:spcAft>
+              <a:defRPr sz="1450" b="1">
+                <a:solidFill>
+                  <a:srgbClr val="10559A"/>
+                </a:solidFill>
+              </a:defRPr>
+            </a:pPr>
+            <a:r>
+              <a:t>Giai đoạn 2 (Tuần 3 – 4): Thiết kế PCB &amp; Web App  [ĐÃ HOÀN THÀNH 100%]</a:t>
+            </a:r>
+          </a:p>
+          <a:p>
+            <a:pPr>
+              <a:spcAft>
+                <a:spcPts val="450"/>
+              </a:spcAft>
+              <a:defRPr sz="1100">
+                <a:solidFill>
+                  <a:srgbClr val="141C28"/>
+                </a:solidFill>
+              </a:defRPr>
+            </a:pPr>
+            <a:r>
+              <a:t>•  Vũ Hữu Hoạt: Đã nghiên cứu datasheet, đo chân linh kiện, hoàn thành vẽ sơ đồ nguyên lý (Schematic) và Layout mạch in PCB 2 lớp.</a:t>
+            </a:r>
+          </a:p>
+          <a:p>
+            <a:pPr>
+              <a:spcAft>
+                <a:spcPts val="450"/>
+              </a:spcAft>
+              <a:defRPr sz="1100">
+                <a:solidFill>
+                  <a:srgbClr val="141C28"/>
+                </a:solidFill>
+              </a:defRPr>
+            </a:pPr>
+            <a:r>
+              <a:t>•  Nguyễn Tuấn Sơn: Đã lập trình xong bộ mã nguồn ESP32 (PlatformIO), hoàn thiện giao diện Web App tích hợp bảo mật 2 lớp (2FA) và đưa lên tên miền Vercel.</a:t>
+            </a:r>
+          </a:p>
+        </p:txBody>
+      </p:sp>
+      <p:sp>
+        <p:nvSpPr>
+          <p:cNvPr id="10" name="Rounded Rectangle 9"/>
+          <p:cNvSpPr/>
+          <p:nvPr/>
+        </p:nvSpPr>
+        <p:spPr>
+          <a:xfrm>
+            <a:off x="594360" y="3840480"/>
+            <a:ext cx="5394960" cy="2423160"/>
+          </a:xfrm>
+          <a:prstGeom prst="roundRect">
+            <a:avLst/>
+          </a:prstGeom>
+          <a:solidFill>
+            <a:srgbClr val="F6F8FB"/>
+          </a:solidFill>
+          <a:ln w="12700">
+            <a:solidFill>
+              <a:srgbClr val="DAE1EB"/>
+            </a:solidFill>
+          </a:ln>
+        </p:spPr>
+        <p:style>
+          <a:lnRef idx="1">
+            <a:schemeClr val="accent1"/>
+          </a:lnRef>
+          <a:fillRef idx="3">
+            <a:schemeClr val="accent1"/>
+          </a:fillRef>
+          <a:effectRef idx="2">
+            <a:schemeClr val="accent1"/>
+          </a:effectRef>
+          <a:fontRef idx="minor">
+            <a:schemeClr val="lt1"/>
+          </a:fontRef>
+        </p:style>
+        <p:txBody>
+          <a:bodyPr rtlCol="0" anchor="ctr"/>
+          <a:lstStyle/>
+          <a:p>
+            <a:pPr algn="ctr"/>
+          </a:p>
+        </p:txBody>
+      </p:sp>
+      <p:sp>
+        <p:nvSpPr>
+          <p:cNvPr id="11" name="TextBox 10"/>
+          <p:cNvSpPr txBox="1"/>
+          <p:nvPr/>
+        </p:nvSpPr>
+        <p:spPr>
+          <a:xfrm>
+            <a:off x="795528" y="4005072"/>
+            <a:ext cx="4992624" cy="2130552"/>
+          </a:xfrm>
+          <a:prstGeom prst="rect">
+            <a:avLst/>
+          </a:prstGeom>
+          <a:noFill/>
+        </p:spPr>
+        <p:txBody>
+          <a:bodyPr wrap="square" lIns="0" tIns="0" rIns="0" bIns="0">
+            <a:spAutoFit/>
+          </a:bodyPr>
+          <a:lstStyle/>
+          <a:p>
+            <a:pPr>
+              <a:spcAft>
+                <a:spcPts val="300"/>
+              </a:spcAft>
+              <a:defRPr sz="1450" b="1">
+                <a:solidFill>
+                  <a:srgbClr val="0B2347"/>
+                </a:solidFill>
+              </a:defRPr>
+            </a:pPr>
+            <a:r>
+              <a:t>Giai đoạn 3 (Tuần 5 – 6): Gia công mạch &amp; Tích hợp  [DỰ KIẾN TIẾP THEO]</a:t>
+            </a:r>
+          </a:p>
+          <a:p>
+            <a:pPr>
+              <a:spcAft>
+                <a:spcPts val="450"/>
+              </a:spcAft>
+              <a:defRPr sz="1100">
+                <a:solidFill>
+                  <a:srgbClr val="141C28"/>
+                </a:solidFill>
+              </a:defRPr>
+            </a:pPr>
+            <a:r>
+              <a:t>•  Vũ Hữu Hoạt: Gia công ăn mòn/đặt in mạch PCB, hàn linh kiện, đo kiểm tra khối nguồn hạ áp 12V -&gt; 5V/3.3V và dựng khung mô hình cửa cơ khí.</a:t>
+            </a:r>
+          </a:p>
+          <a:p>
+            <a:pPr>
+              <a:spcAft>
+                <a:spcPts val="450"/>
+              </a:spcAft>
+              <a:defRPr sz="1100">
+                <a:solidFill>
+                  <a:srgbClr val="141C28"/>
+                </a:solidFill>
+              </a:defRPr>
+            </a:pPr>
+            <a:r>
+              <a:t>•  Nguyễn Tuấn Sơn: Nạp code và hệ thống file LittleFS lên mạch ESP32 thực tế, hiệu chỉnh độ nhạy cảm biến AS608 và RC522 trên bo mạch.</a:t>
+            </a:r>
+          </a:p>
+        </p:txBody>
+      </p:sp>
+      <p:sp>
+        <p:nvSpPr>
+          <p:cNvPr id="12" name="Rounded Rectangle 11"/>
+          <p:cNvSpPr/>
+          <p:nvPr/>
+        </p:nvSpPr>
+        <p:spPr>
+          <a:xfrm>
+            <a:off x="6199632" y="3840480"/>
+            <a:ext cx="5394960" cy="2423160"/>
+          </a:xfrm>
+          <a:prstGeom prst="roundRect">
+            <a:avLst/>
+          </a:prstGeom>
+          <a:solidFill>
+            <a:srgbClr val="F6F8FB"/>
+          </a:solidFill>
+          <a:ln w="12700">
+            <a:solidFill>
+              <a:srgbClr val="DAE1EB"/>
+            </a:solidFill>
+          </a:ln>
+        </p:spPr>
+        <p:style>
+          <a:lnRef idx="1">
+            <a:schemeClr val="accent1"/>
+          </a:lnRef>
+          <a:fillRef idx="3">
+            <a:schemeClr val="accent1"/>
+          </a:fillRef>
+          <a:effectRef idx="2">
+            <a:schemeClr val="accent1"/>
+          </a:effectRef>
+          <a:fontRef idx="minor">
+            <a:schemeClr val="lt1"/>
+          </a:fontRef>
+        </p:style>
+        <p:txBody>
+          <a:bodyPr rtlCol="0" anchor="ctr"/>
+          <a:lstStyle/>
+          <a:p>
+            <a:pPr algn="ctr"/>
+          </a:p>
+        </p:txBody>
+      </p:sp>
+      <p:sp>
+        <p:nvSpPr>
+          <p:cNvPr id="13" name="TextBox 12"/>
+          <p:cNvSpPr txBox="1"/>
+          <p:nvPr/>
+        </p:nvSpPr>
+        <p:spPr>
+          <a:xfrm>
+            <a:off x="6400800" y="4005072"/>
+            <a:ext cx="4992624" cy="2130552"/>
+          </a:xfrm>
+          <a:prstGeom prst="rect">
+            <a:avLst/>
+          </a:prstGeom>
+          <a:noFill/>
+        </p:spPr>
+        <p:txBody>
+          <a:bodyPr wrap="square" lIns="0" tIns="0" rIns="0" bIns="0">
+            <a:spAutoFit/>
+          </a:bodyPr>
+          <a:lstStyle/>
+          <a:p>
+            <a:pPr>
+              <a:spcAft>
+                <a:spcPts val="300"/>
+              </a:spcAft>
+              <a:defRPr sz="1450" b="1">
+                <a:solidFill>
+                  <a:srgbClr val="0B2347"/>
+                </a:solidFill>
+              </a:defRPr>
+            </a:pPr>
+            <a:r>
+              <a:t>Giai đoạn 4 (Tuần 7 – 8): Lắp đặt hoàn thiện &amp; Báo cáo  [DỰ KIẾN]</a:t>
+            </a:r>
+          </a:p>
+          <a:p>
+            <a:pPr>
+              <a:spcAft>
+                <a:spcPts val="450"/>
+              </a:spcAft>
+              <a:defRPr sz="1100">
+                <a:solidFill>
+                  <a:srgbClr val="141C28"/>
+                </a:solidFill>
+              </a:defRPr>
+            </a:pPr>
+            <a:r>
+              <a:t>•  Lắp đặt toàn bộ bo mạch PCB, khóa chốt 12V, LCD, Keypad 4x4, AS608, RC522 lên khung mô hình cửa hoàn chỉnh.</a:t>
+            </a:r>
+          </a:p>
+          <a:p>
+            <a:pPr>
+              <a:spcAft>
+                <a:spcPts val="450"/>
+              </a:spcAft>
+              <a:defRPr sz="1100">
+                <a:solidFill>
+                  <a:srgbClr val="141C28"/>
+                </a:solidFill>
+              </a:defRPr>
+            </a:pPr>
+            <a:r>
+              <a:t>•  Kiểm thử thực nghiệm các kịch bản bảo mật 1 lớp / 2 lớp, trích xuất file CSV lịch sử ra vào và hoàn thiện cuốn Báo cáo đồ án Cơ Điện Tử.</a:t>
             </a:r>
           </a:p>
         </p:txBody>

--- a/slide_baocao/BaoCao_GiuaKy_Nhom13.pptx
+++ b/slide_baocao/BaoCao_GiuaKy_Nhom13.pptx
@@ -13,8 +13,6 @@
     <p:sldId id="261" r:id="rId12"/>
     <p:sldId id="262" r:id="rId13"/>
     <p:sldId id="263" r:id="rId14"/>
-    <p:sldId id="264" r:id="rId15"/>
-    <p:sldId id="265" r:id="rId16"/>
   </p:sldIdLst>
   <p:sldSz cx="12191695" cy="6858000" type="screen4x3"/>
   <p:notesSz cx="6858000" cy="9144000"/>
@@ -3112,7 +3110,7 @@
             <a:avLst/>
           </a:prstGeom>
           <a:solidFill>
-            <a:srgbClr val="0B2347"/>
+            <a:srgbClr val="FFFFFF"/>
           </a:solidFill>
           <a:ln>
             <a:noFill/>
@@ -3148,14 +3146,14 @@
         </p:nvSpPr>
         <p:spPr>
           <a:xfrm>
-            <a:off x="594360" y="914400"/>
-            <a:ext cx="91440" cy="4937760"/>
+            <a:off x="0" y="0"/>
+            <a:ext cx="12191695" cy="137160"/>
           </a:xfrm>
           <a:prstGeom prst="rect">
             <a:avLst/>
           </a:prstGeom>
           <a:solidFill>
-            <a:srgbClr val="38BDF8"/>
+            <a:srgbClr val="0E52A0"/>
           </a:solidFill>
           <a:ln>
             <a:noFill/>
@@ -3191,8 +3189,8 @@
         </p:nvSpPr>
         <p:spPr>
           <a:xfrm>
-            <a:off x="868680" y="914400"/>
-            <a:ext cx="6583680" cy="4937760"/>
+            <a:off x="822960" y="1188720"/>
+            <a:ext cx="6858000" cy="4572000"/>
           </a:xfrm>
           <a:prstGeom prst="rect">
             <a:avLst/>
@@ -3207,99 +3205,114 @@
           <a:p>
             <a:pPr>
               <a:spcAft>
-                <a:spcPts val="1600"/>
+                <a:spcPts val="2400"/>
               </a:spcAft>
-              <a:defRPr sz="1200" b="1">
-                <a:solidFill>
-                  <a:srgbClr val="93C5FD"/>
-                </a:solidFill>
-              </a:defRPr>
-            </a:pPr>
-            <a:r>
-              <a:t>ĐẠI HỌC QUỐC GIA HÀ NỘI</a:t>
+              <a:defRPr sz="1300" b="1">
+                <a:solidFill>
+                  <a:srgbClr val="0E52A0"/>
+                </a:solidFill>
+                <a:latin typeface="Arial"/>
+              </a:defRPr>
+            </a:pPr>
+            <a:r>
+              <a:t>TRƯỜNG ĐẠI HỌC CÔNG NGHỆ – ĐHQGHN</a:t>
             </a:r>
             <a:br/>
             <a:r>
-              <a:t>TRƯỜNG ĐẠI HỌC CÔNG NGHỆ (UET)</a:t>
+              <a:t>KHOA CƠ HỌC KỸ THUẬT VÀ TỰ ĐỘNG HÓA</a:t>
             </a:r>
           </a:p>
           <a:p>
             <a:pPr>
               <a:spcAft>
-                <a:spcPts val="1200"/>
+                <a:spcPts val="1000"/>
               </a:spcAft>
-              <a:defRPr sz="1400" b="1">
-                <a:solidFill>
-                  <a:srgbClr val="FBBF24"/>
-                </a:solidFill>
-              </a:defRPr>
-            </a:pPr>
-            <a:r>
-              <a:t>BÁO CÁO TIẾN ĐỘ GIỮA KỲ — ĐỒ ÁN CƠ ĐIỆN TỬ</a:t>
+              <a:defRPr sz="1500" b="1">
+                <a:solidFill>
+                  <a:srgbClr val="646E7D"/>
+                </a:solidFill>
+                <a:latin typeface="Arial"/>
+              </a:defRPr>
+            </a:pPr>
+            <a:r>
+              <a:t>BÁO CÁO TIẾN ĐỘ ĐỒ ÁN GIỮA KỲ</a:t>
+            </a:r>
+          </a:p>
+          <a:p>
+            <a:pPr>
+              <a:defRPr sz="3200" b="1">
+                <a:solidFill>
+                  <a:srgbClr val="141821"/>
+                </a:solidFill>
+                <a:latin typeface="Arial"/>
+              </a:defRPr>
+            </a:pPr>
+            <a:r>
+              <a:t>Mô hình Hệ thống Cửa Bảo Mật</a:t>
             </a:r>
           </a:p>
           <a:p>
             <a:pPr>
               <a:spcAft>
-                <a:spcPts val="1600"/>
+                <a:spcPts val="3200"/>
               </a:spcAft>
-              <a:defRPr sz="2300" b="1">
-                <a:solidFill>
-                  <a:srgbClr val="FFFFFF"/>
-                </a:solidFill>
-              </a:defRPr>
-            </a:pPr>
-            <a:r>
-              <a:t>THIẾT KẾ MÔ HÌNH HỆ THỐNG CỬA BẢO MẬT TÍCH HỢP VÂN TAY AS608, THẺ TỪ RFID RC522, KEYPAD 4x4 &amp; WEB APP</a:t>
-            </a:r>
-          </a:p>
-          <a:p>
-            <a:pPr>
-              <a:defRPr sz="1250">
-                <a:solidFill>
-                  <a:srgbClr val="DBEAFE"/>
-                </a:solidFill>
-              </a:defRPr>
-            </a:pPr>
-            <a:r>
-              <a:t>•  Nhóm thực hiện: Nhóm 13</a:t>
+              <a:defRPr sz="1800">
+                <a:solidFill>
+                  <a:srgbClr val="0E52A0"/>
+                </a:solidFill>
+                <a:latin typeface="Arial"/>
+              </a:defRPr>
+            </a:pPr>
+            <a:r>
+              <a:t>Tích hợp Vân tay AS608, Thẻ RFID RC522, Keypad 4x4 &amp; Web App</a:t>
+            </a:r>
+          </a:p>
+          <a:p>
+            <a:pPr>
+              <a:spcAft>
+                <a:spcPts val="800"/>
+              </a:spcAft>
+              <a:defRPr sz="1400">
+                <a:solidFill>
+                  <a:srgbClr val="141821"/>
+                </a:solidFill>
+                <a:latin typeface="Arial"/>
+              </a:defRPr>
+            </a:pPr>
+            <a:r>
+              <a:t>Sinh viên thực hiện (Nhóm 13):</a:t>
             </a:r>
             <a:br/>
             <a:r>
-              <a:t>•  Nguyễn Tuấn Sơn — Phần mềm nhúng ESP32, Web App &amp; Báo cáo</a:t>
+              <a:t>• Nguyễn Tuấn Sơn  —  Lập trình ESP32, Giao diện Web App &amp; Báo cáo</a:t>
             </a:r>
             <a:br/>
             <a:r>
-              <a:t>•  Vũ Hữu Hoạt — Thiết kế phần cứng, Mạch in PCB 2 lớp &amp; Mô hình cơ khí</a:t>
-            </a:r>
-            <a:br/>
-            <a:br/>
-            <a:r>
-              <a:t>•  Tiến độ hiện tại: Đã mua đủ 100% linh kiện, hoàn tất vẽ PCB &amp; triển khai Web App trên Vercel</a:t>
-            </a:r>
-          </a:p>
-        </p:txBody>
-      </p:sp>
-      <p:sp>
-        <p:nvSpPr>
-          <p:cNvPr id="5" name="Rounded Rectangle 4"/>
+              <a:t>• Vũ Hữu Hoạt        —  Thiết kế phần cứng, Vẽ mạch PCB &amp; Mô hình</a:t>
+            </a:r>
+          </a:p>
+        </p:txBody>
+      </p:sp>
+      <p:sp>
+        <p:nvSpPr>
+          <p:cNvPr id="5" name="Rectangle 4"/>
           <p:cNvSpPr/>
           <p:nvPr/>
         </p:nvSpPr>
         <p:spPr>
           <a:xfrm>
-            <a:off x="7635240" y="960120"/>
-            <a:ext cx="4069080" cy="2697480"/>
-          </a:xfrm>
-          <a:prstGeom prst="roundRect">
+            <a:off x="8046720" y="1371600"/>
+            <a:ext cx="3474720" cy="4114800"/>
+          </a:xfrm>
+          <a:prstGeom prst="rect">
             <a:avLst/>
           </a:prstGeom>
           <a:solidFill>
             <a:srgbClr val="FFFFFF"/>
           </a:solidFill>
-          <a:ln w="15240">
+          <a:ln w="12700">
             <a:solidFill>
-              <a:srgbClr val="DAE1EB"/>
+              <a:srgbClr val="E2E8F0"/>
             </a:solidFill>
           </a:ln>
         </p:spPr>
@@ -3341,8 +3354,8 @@
         </p:blipFill>
         <p:spPr>
           <a:xfrm>
-            <a:off x="7975023" y="1069848"/>
-            <a:ext cx="3389514" cy="2130552"/>
+            <a:off x="8119872" y="2222906"/>
+            <a:ext cx="3328416" cy="2092147"/>
           </a:xfrm>
           <a:prstGeom prst="rect">
             <a:avLst/>
@@ -3357,8 +3370,8 @@
         </p:nvSpPr>
         <p:spPr>
           <a:xfrm>
-            <a:off x="7744968" y="3273552"/>
-            <a:ext cx="3849624" cy="347472"/>
+            <a:off x="8046720" y="5166360"/>
+            <a:ext cx="3474720" cy="320040"/>
           </a:xfrm>
           <a:prstGeom prst="rect">
             <a:avLst/>
@@ -3366,858 +3379,21 @@
           <a:noFill/>
         </p:spPr>
         <p:txBody>
-          <a:bodyPr wrap="square">
-            <a:spAutoFit/>
-          </a:bodyPr>
-          <a:lstStyle/>
-          <a:p>
-            <a:pPr algn="ctr">
-              <a:defRPr sz="1000" b="1">
-                <a:solidFill>
-                  <a:srgbClr val="0B2347"/>
-                </a:solidFill>
-              </a:defRPr>
-            </a:pPr>
-            <a:r>
-              <a:t>Giao diện Web App đã hoàn thiện</a:t>
-            </a:r>
-          </a:p>
-        </p:txBody>
-      </p:sp>
-      <p:sp>
-        <p:nvSpPr>
-          <p:cNvPr id="8" name="Rounded Rectangle 7"/>
-          <p:cNvSpPr/>
-          <p:nvPr/>
-        </p:nvSpPr>
-        <p:spPr>
-          <a:xfrm>
-            <a:off x="7635240" y="3840480"/>
-            <a:ext cx="1280160" cy="1965960"/>
-          </a:xfrm>
-          <a:prstGeom prst="roundRect">
-            <a:avLst/>
-          </a:prstGeom>
-          <a:solidFill>
-            <a:srgbClr val="FFFFFF"/>
-          </a:solidFill>
-          <a:ln w="15240">
-            <a:solidFill>
-              <a:srgbClr val="DAE1EB"/>
-            </a:solidFill>
-          </a:ln>
-        </p:spPr>
-        <p:style>
-          <a:lnRef idx="1">
-            <a:schemeClr val="accent1"/>
-          </a:lnRef>
-          <a:fillRef idx="3">
-            <a:schemeClr val="accent1"/>
-          </a:fillRef>
-          <a:effectRef idx="2">
-            <a:schemeClr val="accent1"/>
-          </a:effectRef>
-          <a:fontRef idx="minor">
-            <a:schemeClr val="lt1"/>
-          </a:fontRef>
-        </p:style>
-        <p:txBody>
-          <a:bodyPr rtlCol="0" anchor="ctr"/>
-          <a:lstStyle/>
-          <a:p>
-            <a:pPr algn="ctr"/>
-          </a:p>
-        </p:txBody>
-      </p:sp>
-      <p:pic>
-        <p:nvPicPr>
-          <p:cNvPr id="9" name="Picture 8" descr="image2.jpg"/>
-          <p:cNvPicPr>
-            <a:picLocks noChangeAspect="1"/>
-          </p:cNvPicPr>
-          <p:nvPr/>
-        </p:nvPicPr>
-        <p:blipFill>
-          <a:blip r:embed="rId3"/>
-          <a:stretch>
-            <a:fillRect/>
-          </a:stretch>
-        </p:blipFill>
-        <p:spPr>
-          <a:xfrm>
-            <a:off x="7744968" y="4119372"/>
-            <a:ext cx="1060704" cy="1060704"/>
-          </a:xfrm>
-          <a:prstGeom prst="rect">
-            <a:avLst/>
-          </a:prstGeom>
-        </p:spPr>
-      </p:pic>
-      <p:sp>
-        <p:nvSpPr>
-          <p:cNvPr id="10" name="TextBox 9"/>
-          <p:cNvSpPr txBox="1"/>
-          <p:nvPr/>
-        </p:nvSpPr>
-        <p:spPr>
-          <a:xfrm>
-            <a:off x="7744968" y="5422392"/>
-            <a:ext cx="1060704" cy="347472"/>
-          </a:xfrm>
-          <a:prstGeom prst="rect">
-            <a:avLst/>
-          </a:prstGeom>
-          <a:noFill/>
-        </p:spPr>
-        <p:txBody>
-          <a:bodyPr wrap="square">
-            <a:spAutoFit/>
-          </a:bodyPr>
-          <a:lstStyle/>
-          <a:p>
-            <a:pPr algn="ctr">
-              <a:defRPr sz="1000" b="1">
-                <a:solidFill>
-                  <a:srgbClr val="0B2347"/>
-                </a:solidFill>
-              </a:defRPr>
-            </a:pPr>
-            <a:r>
-              <a:t>Vân tay AS608</a:t>
-            </a:r>
-          </a:p>
-        </p:txBody>
-      </p:sp>
-      <p:sp>
-        <p:nvSpPr>
-          <p:cNvPr id="11" name="Rounded Rectangle 10"/>
-          <p:cNvSpPr/>
-          <p:nvPr/>
-        </p:nvSpPr>
-        <p:spPr>
-          <a:xfrm>
-            <a:off x="9025128" y="3840480"/>
-            <a:ext cx="1280160" cy="1965960"/>
-          </a:xfrm>
-          <a:prstGeom prst="roundRect">
-            <a:avLst/>
-          </a:prstGeom>
-          <a:solidFill>
-            <a:srgbClr val="FFFFFF"/>
-          </a:solidFill>
-          <a:ln w="15240">
-            <a:solidFill>
-              <a:srgbClr val="DAE1EB"/>
-            </a:solidFill>
-          </a:ln>
-        </p:spPr>
-        <p:style>
-          <a:lnRef idx="1">
-            <a:schemeClr val="accent1"/>
-          </a:lnRef>
-          <a:fillRef idx="3">
-            <a:schemeClr val="accent1"/>
-          </a:fillRef>
-          <a:effectRef idx="2">
-            <a:schemeClr val="accent1"/>
-          </a:effectRef>
-          <a:fontRef idx="minor">
-            <a:schemeClr val="lt1"/>
-          </a:fontRef>
-        </p:style>
-        <p:txBody>
-          <a:bodyPr rtlCol="0" anchor="ctr"/>
-          <a:lstStyle/>
-          <a:p>
-            <a:pPr algn="ctr"/>
-          </a:p>
-        </p:txBody>
-      </p:sp>
-      <p:pic>
-        <p:nvPicPr>
-          <p:cNvPr id="12" name="Picture 11" descr="image3.jpg"/>
-          <p:cNvPicPr>
-            <a:picLocks noChangeAspect="1"/>
-          </p:cNvPicPr>
-          <p:nvPr/>
-        </p:nvPicPr>
-        <p:blipFill>
-          <a:blip r:embed="rId4"/>
-          <a:stretch>
-            <a:fillRect/>
-          </a:stretch>
-        </p:blipFill>
-        <p:spPr>
-          <a:xfrm>
-            <a:off x="9134856" y="4119372"/>
-            <a:ext cx="1060704" cy="1060704"/>
-          </a:xfrm>
-          <a:prstGeom prst="rect">
-            <a:avLst/>
-          </a:prstGeom>
-        </p:spPr>
-      </p:pic>
-      <p:sp>
-        <p:nvSpPr>
-          <p:cNvPr id="13" name="TextBox 12"/>
-          <p:cNvSpPr txBox="1"/>
-          <p:nvPr/>
-        </p:nvSpPr>
-        <p:spPr>
-          <a:xfrm>
-            <a:off x="9134856" y="5422392"/>
-            <a:ext cx="1060704" cy="347472"/>
-          </a:xfrm>
-          <a:prstGeom prst="rect">
-            <a:avLst/>
-          </a:prstGeom>
-          <a:noFill/>
-        </p:spPr>
-        <p:txBody>
-          <a:bodyPr wrap="square">
-            <a:spAutoFit/>
-          </a:bodyPr>
-          <a:lstStyle/>
-          <a:p>
-            <a:pPr algn="ctr">
-              <a:defRPr sz="1000" b="1">
-                <a:solidFill>
-                  <a:srgbClr val="0B2347"/>
-                </a:solidFill>
-              </a:defRPr>
-            </a:pPr>
-            <a:r>
-              <a:t>RFID RC522</a:t>
-            </a:r>
-          </a:p>
-        </p:txBody>
-      </p:sp>
-      <p:sp>
-        <p:nvSpPr>
-          <p:cNvPr id="14" name="Rounded Rectangle 13"/>
-          <p:cNvSpPr/>
-          <p:nvPr/>
-        </p:nvSpPr>
-        <p:spPr>
-          <a:xfrm>
-            <a:off x="10424160" y="3840480"/>
-            <a:ext cx="1280160" cy="1965960"/>
-          </a:xfrm>
-          <a:prstGeom prst="roundRect">
-            <a:avLst/>
-          </a:prstGeom>
-          <a:solidFill>
-            <a:srgbClr val="FFFFFF"/>
-          </a:solidFill>
-          <a:ln w="15240">
-            <a:solidFill>
-              <a:srgbClr val="DAE1EB"/>
-            </a:solidFill>
-          </a:ln>
-        </p:spPr>
-        <p:style>
-          <a:lnRef idx="1">
-            <a:schemeClr val="accent1"/>
-          </a:lnRef>
-          <a:fillRef idx="3">
-            <a:schemeClr val="accent1"/>
-          </a:fillRef>
-          <a:effectRef idx="2">
-            <a:schemeClr val="accent1"/>
-          </a:effectRef>
-          <a:fontRef idx="minor">
-            <a:schemeClr val="lt1"/>
-          </a:fontRef>
-        </p:style>
-        <p:txBody>
-          <a:bodyPr rtlCol="0" anchor="ctr"/>
-          <a:lstStyle/>
-          <a:p>
-            <a:pPr algn="ctr"/>
-          </a:p>
-        </p:txBody>
-      </p:sp>
-      <p:pic>
-        <p:nvPicPr>
-          <p:cNvPr id="15" name="Picture 14" descr="image4.jpg"/>
-          <p:cNvPicPr>
-            <a:picLocks noChangeAspect="1"/>
-          </p:cNvPicPr>
-          <p:nvPr/>
-        </p:nvPicPr>
-        <p:blipFill>
-          <a:blip r:embed="rId5"/>
-          <a:stretch>
-            <a:fillRect/>
-          </a:stretch>
-        </p:blipFill>
-        <p:spPr>
-          <a:xfrm>
-            <a:off x="10533888" y="4119372"/>
-            <a:ext cx="1060704" cy="1060704"/>
-          </a:xfrm>
-          <a:prstGeom prst="rect">
-            <a:avLst/>
-          </a:prstGeom>
-        </p:spPr>
-      </p:pic>
-      <p:sp>
-        <p:nvSpPr>
-          <p:cNvPr id="16" name="TextBox 15"/>
-          <p:cNvSpPr txBox="1"/>
-          <p:nvPr/>
-        </p:nvSpPr>
-        <p:spPr>
-          <a:xfrm>
-            <a:off x="10533888" y="5422392"/>
-            <a:ext cx="1060704" cy="347472"/>
-          </a:xfrm>
-          <a:prstGeom prst="rect">
-            <a:avLst/>
-          </a:prstGeom>
-          <a:noFill/>
-        </p:spPr>
-        <p:txBody>
-          <a:bodyPr wrap="square">
-            <a:spAutoFit/>
-          </a:bodyPr>
-          <a:lstStyle/>
-          <a:p>
-            <a:pPr algn="ctr">
-              <a:defRPr sz="1000" b="1">
-                <a:solidFill>
-                  <a:srgbClr val="0B2347"/>
-                </a:solidFill>
-              </a:defRPr>
-            </a:pPr>
-            <a:r>
-              <a:t>Keypad 4x4</a:t>
-            </a:r>
-          </a:p>
-        </p:txBody>
-      </p:sp>
-    </p:spTree>
-  </p:cSld>
-  <p:clrMapOvr>
-    <a:masterClrMapping/>
-  </p:clrMapOvr>
-</p:sld>
-</file>
-
-<file path=ppt/slides/slide10.xml><?xml version="1.0" encoding="utf-8"?>
-<p:sld xmlns:a="http://schemas.openxmlformats.org/drawingml/2006/main" xmlns:p="http://schemas.openxmlformats.org/presentationml/2006/main" xmlns:r="http://schemas.openxmlformats.org/officeDocument/2006/relationships">
-  <p:cSld>
-    <p:spTree>
-      <p:nvGrpSpPr>
-        <p:cNvPr id="1" name=""/>
-        <p:cNvGrpSpPr/>
-        <p:nvPr/>
-      </p:nvGrpSpPr>
-      <p:grpSpPr/>
-      <p:sp>
-        <p:nvSpPr>
-          <p:cNvPr id="2" name="Rectangle 1"/>
-          <p:cNvSpPr/>
-          <p:nvPr/>
-        </p:nvSpPr>
-        <p:spPr>
-          <a:xfrm>
-            <a:off x="0" y="0"/>
-            <a:ext cx="12191695" cy="100584"/>
-          </a:xfrm>
-          <a:prstGeom prst="rect">
-            <a:avLst/>
-          </a:prstGeom>
-          <a:solidFill>
-            <a:srgbClr val="10559A"/>
-          </a:solidFill>
-          <a:ln>
-            <a:noFill/>
-          </a:ln>
-        </p:spPr>
-        <p:style>
-          <a:lnRef idx="1">
-            <a:schemeClr val="accent1"/>
-          </a:lnRef>
-          <a:fillRef idx="3">
-            <a:schemeClr val="accent1"/>
-          </a:fillRef>
-          <a:effectRef idx="2">
-            <a:schemeClr val="accent1"/>
-          </a:effectRef>
-          <a:fontRef idx="minor">
-            <a:schemeClr val="lt1"/>
-          </a:fontRef>
-        </p:style>
-        <p:txBody>
-          <a:bodyPr rtlCol="0" anchor="ctr"/>
-          <a:lstStyle/>
-          <a:p>
-            <a:pPr algn="ctr"/>
-          </a:p>
-        </p:txBody>
-      </p:sp>
-      <p:sp>
-        <p:nvSpPr>
-          <p:cNvPr id="3" name="TextBox 2"/>
-          <p:cNvSpPr txBox="1"/>
-          <p:nvPr/>
-        </p:nvSpPr>
-        <p:spPr>
-          <a:xfrm>
-            <a:off x="594360" y="292608"/>
-            <a:ext cx="9601200" cy="274320"/>
-          </a:xfrm>
-          <a:prstGeom prst="rect">
-            <a:avLst/>
-          </a:prstGeom>
-          <a:noFill/>
-        </p:spPr>
-        <p:txBody>
           <a:bodyPr wrap="none" lIns="0" tIns="0" rIns="0" bIns="0">
             <a:spAutoFit/>
           </a:bodyPr>
           <a:lstStyle/>
           <a:p>
-            <a:pPr>
-              <a:defRPr sz="1050" b="1">
-                <a:solidFill>
-                  <a:srgbClr val="10559A"/>
-                </a:solidFill>
-              </a:defRPr>
-            </a:pPr>
-            <a:r>
-              <a:t>BÁO CÁO TIẾN ĐỘ GIỮA KỲ — ĐỒ ÁN CƠ ĐIỆN TỬ (NHÓM 13)</a:t>
-            </a:r>
-          </a:p>
-        </p:txBody>
-      </p:sp>
-      <p:sp>
-        <p:nvSpPr>
-          <p:cNvPr id="4" name="TextBox 3"/>
-          <p:cNvSpPr txBox="1"/>
-          <p:nvPr/>
-        </p:nvSpPr>
-        <p:spPr>
-          <a:xfrm>
-            <a:off x="594360" y="566928"/>
-            <a:ext cx="10515600" cy="502920"/>
-          </a:xfrm>
-          <a:prstGeom prst="rect">
-            <a:avLst/>
-          </a:prstGeom>
-          <a:noFill/>
-        </p:spPr>
-        <p:txBody>
-          <a:bodyPr wrap="none" lIns="0" tIns="0" rIns="0" bIns="0">
-            <a:spAutoFit/>
-          </a:bodyPr>
-          <a:lstStyle/>
-          <a:p>
-            <a:pPr>
-              <a:defRPr sz="2100" b="1">
-                <a:solidFill>
-                  <a:srgbClr val="0B2347"/>
-                </a:solidFill>
-              </a:defRPr>
-            </a:pPr>
-            <a:r>
-              <a:t>9. Tổng kết báo cáo giữa kỳ &amp; Trình chiếu Demo Web App</a:t>
-            </a:r>
-          </a:p>
-        </p:txBody>
-      </p:sp>
-      <p:sp>
-        <p:nvSpPr>
-          <p:cNvPr id="5" name="TextBox 4"/>
-          <p:cNvSpPr txBox="1"/>
-          <p:nvPr/>
-        </p:nvSpPr>
-        <p:spPr>
-          <a:xfrm>
-            <a:off x="594360" y="6446520"/>
-            <a:ext cx="10972800" cy="274320"/>
-          </a:xfrm>
-          <a:prstGeom prst="rect">
-            <a:avLst/>
-          </a:prstGeom>
-          <a:noFill/>
-        </p:spPr>
-        <p:txBody>
-          <a:bodyPr wrap="none">
-            <a:spAutoFit/>
-          </a:bodyPr>
-          <a:lstStyle/>
-          <a:p>
-            <a:pPr>
-              <a:defRPr sz="950">
-                <a:solidFill>
-                  <a:srgbClr val="5F6C7D"/>
-                </a:solidFill>
-              </a:defRPr>
-            </a:pPr>
-            <a:r>
-              <a:t>Trường Đại học Công nghệ – ĐHQGHN  |  Nhóm 13: Nguyễn Tuấn Sơn – Vũ Hữu Hoạt                                                                                     Slide 10 / 10</a:t>
-            </a:r>
-          </a:p>
-        </p:txBody>
-      </p:sp>
-      <p:sp>
-        <p:nvSpPr>
-          <p:cNvPr id="6" name="Rounded Rectangle 5"/>
-          <p:cNvSpPr/>
-          <p:nvPr/>
-        </p:nvSpPr>
-        <p:spPr>
-          <a:xfrm>
-            <a:off x="594360" y="1234440"/>
-            <a:ext cx="5669280" cy="5029200"/>
-          </a:xfrm>
-          <a:prstGeom prst="roundRect">
-            <a:avLst/>
-          </a:prstGeom>
-          <a:solidFill>
-            <a:srgbClr val="FFFFFF"/>
-          </a:solidFill>
-          <a:ln w="19050">
-            <a:solidFill>
-              <a:srgbClr val="10559A"/>
-            </a:solidFill>
-          </a:ln>
-        </p:spPr>
-        <p:style>
-          <a:lnRef idx="1">
-            <a:schemeClr val="accent1"/>
-          </a:lnRef>
-          <a:fillRef idx="3">
-            <a:schemeClr val="accent1"/>
-          </a:fillRef>
-          <a:effectRef idx="2">
-            <a:schemeClr val="accent1"/>
-          </a:effectRef>
-          <a:fontRef idx="minor">
-            <a:schemeClr val="lt1"/>
-          </a:fontRef>
-        </p:style>
-        <p:txBody>
-          <a:bodyPr rtlCol="0" anchor="ctr"/>
-          <a:lstStyle/>
-          <a:p>
-            <a:pPr algn="ctr"/>
-          </a:p>
-        </p:txBody>
-      </p:sp>
-      <p:sp>
-        <p:nvSpPr>
-          <p:cNvPr id="7" name="TextBox 6"/>
-          <p:cNvSpPr txBox="1"/>
-          <p:nvPr/>
-        </p:nvSpPr>
-        <p:spPr>
-          <a:xfrm>
-            <a:off x="795528" y="1399032"/>
-            <a:ext cx="5266944" cy="4736592"/>
-          </a:xfrm>
-          <a:prstGeom prst="rect">
-            <a:avLst/>
-          </a:prstGeom>
-          <a:noFill/>
-        </p:spPr>
-        <p:txBody>
-          <a:bodyPr wrap="square" lIns="0" tIns="0" rIns="0" bIns="0">
-            <a:spAutoFit/>
-          </a:bodyPr>
-          <a:lstStyle/>
-          <a:p>
-            <a:pPr>
-              <a:spcAft>
-                <a:spcPts val="300"/>
-              </a:spcAft>
-              <a:defRPr sz="1450" b="1">
-                <a:solidFill>
-                  <a:srgbClr val="10559A"/>
-                </a:solidFill>
-              </a:defRPr>
-            </a:pPr>
-            <a:r>
-              <a:t>Tóm tắt các kết quả đạt được tính đến giữa kỳ</a:t>
-            </a:r>
-          </a:p>
-          <a:p>
-            <a:pPr>
-              <a:spcAft>
-                <a:spcPts val="700"/>
-              </a:spcAft>
-              <a:defRPr sz="1050">
-                <a:solidFill>
-                  <a:srgbClr val="5F6C7D"/>
-                </a:solidFill>
-              </a:defRPr>
-            </a:pPr>
-            <a:r>
-              <a:t>Đảm bảo 100% tiến độ theo kế hoạch học phần</a:t>
-            </a:r>
-          </a:p>
-          <a:p>
-            <a:pPr>
-              <a:spcAft>
-                <a:spcPts val="450"/>
-              </a:spcAft>
-              <a:defRPr sz="1200">
-                <a:solidFill>
-                  <a:srgbClr val="141C28"/>
-                </a:solidFill>
-              </a:defRPr>
-            </a:pPr>
-            <a:r>
-              <a:t>•  1. Về linh kiện vật tư: Đã chuẩn bị đầy đủ 100% các module cảm biến và cơ cấu chấp hành theo đúng danh mục đề tài.</a:t>
-            </a:r>
-          </a:p>
-          <a:p>
-            <a:pPr>
-              <a:spcAft>
-                <a:spcPts val="450"/>
-              </a:spcAft>
-              <a:defRPr sz="1200">
-                <a:solidFill>
-                  <a:srgbClr val="141C28"/>
-                </a:solidFill>
-              </a:defRPr>
-            </a:pPr>
-            <a:r>
-              <a:t>•  2. Về nghiên cứu lý thuyết &amp; mạch điện: Đã làm chủ datasheet, giao thức UART2 / SPI / I2C / Matrix Scanning và hoàn thành bản vẽ mạch in PCB trung tâm.</a:t>
-            </a:r>
-          </a:p>
-          <a:p>
-            <a:pPr>
-              <a:spcAft>
-                <a:spcPts val="450"/>
-              </a:spcAft>
-              <a:defRPr sz="1200">
-                <a:solidFill>
-                  <a:srgbClr val="141C28"/>
-                </a:solidFill>
-              </a:defRPr>
-            </a:pPr>
-            <a:r>
-              <a:t>•  3. Về phần mềm &amp; Web App: Đã hoàn thiện sớm hơn tiến độ (vừa có Firmware C++ cho ESP32, vừa có Web App tối giản hỗ trợ bảo mật 1 lớp &amp; 2FA).</a:t>
-            </a:r>
-          </a:p>
-          <a:p>
-            <a:pPr>
-              <a:spcAft>
-                <a:spcPts val="450"/>
-              </a:spcAft>
-              <a:defRPr sz="1200">
-                <a:solidFill>
-                  <a:srgbClr val="141C28"/>
-                </a:solidFill>
-              </a:defRPr>
-            </a:pPr>
-            <a:r>
-              <a:t>•  4. Sẵn sàng chuyển sang Giai đoạn 3 (Gia công hàn mạch PCB và lắp dựng cơ khí khung cửa).</a:t>
-            </a:r>
-          </a:p>
-        </p:txBody>
-      </p:sp>
-      <p:sp>
-        <p:nvSpPr>
-          <p:cNvPr id="8" name="Rounded Rectangle 7"/>
-          <p:cNvSpPr/>
-          <p:nvPr/>
-        </p:nvSpPr>
-        <p:spPr>
-          <a:xfrm>
-            <a:off x="6446520" y="1234440"/>
-            <a:ext cx="5148072" cy="3474720"/>
-          </a:xfrm>
-          <a:prstGeom prst="roundRect">
-            <a:avLst/>
-          </a:prstGeom>
-          <a:solidFill>
-            <a:srgbClr val="FFFFFF"/>
-          </a:solidFill>
-          <a:ln w="15240">
-            <a:solidFill>
-              <a:srgbClr val="DAE1EB"/>
-            </a:solidFill>
-          </a:ln>
-        </p:spPr>
-        <p:style>
-          <a:lnRef idx="1">
-            <a:schemeClr val="accent1"/>
-          </a:lnRef>
-          <a:fillRef idx="3">
-            <a:schemeClr val="accent1"/>
-          </a:fillRef>
-          <a:effectRef idx="2">
-            <a:schemeClr val="accent1"/>
-          </a:effectRef>
-          <a:fontRef idx="minor">
-            <a:schemeClr val="lt1"/>
-          </a:fontRef>
-        </p:style>
-        <p:txBody>
-          <a:bodyPr rtlCol="0" anchor="ctr"/>
-          <a:lstStyle/>
-          <a:p>
-            <a:pPr algn="ctr"/>
-          </a:p>
-        </p:txBody>
-      </p:sp>
-      <p:pic>
-        <p:nvPicPr>
-          <p:cNvPr id="9" name="Picture 8" descr="web_dashboard.png"/>
-          <p:cNvPicPr>
-            <a:picLocks noChangeAspect="1"/>
-          </p:cNvPicPr>
-          <p:nvPr/>
-        </p:nvPicPr>
-        <p:blipFill>
-          <a:blip r:embed="rId2"/>
-          <a:stretch>
-            <a:fillRect/>
-          </a:stretch>
-        </p:blipFill>
-        <p:spPr>
-          <a:xfrm>
-            <a:off x="6707540" y="1344168"/>
-            <a:ext cx="4626032" cy="2907792"/>
-          </a:xfrm>
-          <a:prstGeom prst="rect">
-            <a:avLst/>
-          </a:prstGeom>
-        </p:spPr>
-      </p:pic>
-      <p:sp>
-        <p:nvSpPr>
-          <p:cNvPr id="10" name="TextBox 9"/>
-          <p:cNvSpPr txBox="1"/>
-          <p:nvPr/>
-        </p:nvSpPr>
-        <p:spPr>
-          <a:xfrm>
-            <a:off x="6556248" y="4325112"/>
-            <a:ext cx="4928616" cy="347472"/>
-          </a:xfrm>
-          <a:prstGeom prst="rect">
-            <a:avLst/>
-          </a:prstGeom>
-          <a:noFill/>
-        </p:spPr>
-        <p:txBody>
-          <a:bodyPr wrap="square">
-            <a:spAutoFit/>
-          </a:bodyPr>
-          <a:lstStyle/>
-          <a:p>
             <a:pPr algn="ctr">
-              <a:defRPr sz="1000" b="1">
-                <a:solidFill>
-                  <a:srgbClr val="0B2347"/>
-                </a:solidFill>
-              </a:defRPr>
-            </a:pPr>
-            <a:r>
-              <a:t>Demo trực tiếp tại: https://smartdoor-nhom13-data.vercel.app</a:t>
-            </a:r>
-          </a:p>
-        </p:txBody>
-      </p:sp>
-      <p:sp>
-        <p:nvSpPr>
-          <p:cNvPr id="11" name="Rounded Rectangle 10"/>
-          <p:cNvSpPr/>
-          <p:nvPr/>
-        </p:nvSpPr>
-        <p:spPr>
-          <a:xfrm>
-            <a:off x="6446520" y="4846320"/>
-            <a:ext cx="5148072" cy="1417320"/>
-          </a:xfrm>
-          <a:prstGeom prst="roundRect">
-            <a:avLst/>
-          </a:prstGeom>
-          <a:solidFill>
-            <a:srgbClr val="F6F8FB"/>
-          </a:solidFill>
-          <a:ln w="12700">
-            <a:solidFill>
-              <a:srgbClr val="DAE1EB"/>
-            </a:solidFill>
-          </a:ln>
-        </p:spPr>
-        <p:style>
-          <a:lnRef idx="1">
-            <a:schemeClr val="accent1"/>
-          </a:lnRef>
-          <a:fillRef idx="3">
-            <a:schemeClr val="accent1"/>
-          </a:fillRef>
-          <a:effectRef idx="2">
-            <a:schemeClr val="accent1"/>
-          </a:effectRef>
-          <a:fontRef idx="minor">
-            <a:schemeClr val="lt1"/>
-          </a:fontRef>
-        </p:style>
-        <p:txBody>
-          <a:bodyPr rtlCol="0" anchor="ctr"/>
-          <a:lstStyle/>
-          <a:p>
-            <a:pPr algn="ctr"/>
-          </a:p>
-        </p:txBody>
-      </p:sp>
-      <p:sp>
-        <p:nvSpPr>
-          <p:cNvPr id="12" name="TextBox 11"/>
-          <p:cNvSpPr txBox="1"/>
-          <p:nvPr/>
-        </p:nvSpPr>
-        <p:spPr>
-          <a:xfrm>
-            <a:off x="6647688" y="5010912"/>
-            <a:ext cx="4745736" cy="1124712"/>
-          </a:xfrm>
-          <a:prstGeom prst="rect">
-            <a:avLst/>
-          </a:prstGeom>
-          <a:noFill/>
-        </p:spPr>
-        <p:txBody>
-          <a:bodyPr wrap="square" lIns="0" tIns="0" rIns="0" bIns="0">
-            <a:spAutoFit/>
-          </a:bodyPr>
-          <a:lstStyle/>
-          <a:p>
-            <a:pPr>
-              <a:spcAft>
-                <a:spcPts val="300"/>
-              </a:spcAft>
-              <a:defRPr sz="1450" b="1">
-                <a:solidFill>
-                  <a:srgbClr val="0B2347"/>
-                </a:solidFill>
-              </a:defRPr>
-            </a:pPr>
-            <a:r>
-              <a:t>Cảm ơn Thầy/Cô và các bạn đã lắng nghe!</a:t>
-            </a:r>
-          </a:p>
-          <a:p>
-            <a:pPr>
-              <a:spcAft>
-                <a:spcPts val="450"/>
-              </a:spcAft>
-              <a:defRPr sz="1150">
-                <a:solidFill>
-                  <a:srgbClr val="141C28"/>
-                </a:solidFill>
-              </a:defRPr>
-            </a:pPr>
-            <a:r>
-              <a:t>•  Nhóm 13 xin phép chuyển sang phần Demo trực tiếp giao diện Web App &amp; Chế độ bảo mật 2 lớp trên trình duyệt và nhận ý kiến đóng góp của Thầy/Cô.</a:t>
+              <a:defRPr sz="1100" b="1">
+                <a:solidFill>
+                  <a:srgbClr val="646E7D"/>
+                </a:solidFill>
+                <a:latin typeface="Arial"/>
+              </a:defRPr>
+            </a:pPr>
+            <a:r>
+              <a:t>Giao diện Web App đã hoàn thiện</a:t>
             </a:r>
           </a:p>
         </p:txBody>
@@ -4242,23 +3418,133 @@
       <p:grpSpPr/>
       <p:sp>
         <p:nvSpPr>
-          <p:cNvPr id="2" name="Rectangle 1"/>
+          <p:cNvPr id="2" name="TextBox 1"/>
+          <p:cNvSpPr txBox="1"/>
+          <p:nvPr/>
+        </p:nvSpPr>
+        <p:spPr>
+          <a:xfrm>
+            <a:off x="731520" y="365760"/>
+            <a:ext cx="9144000" cy="274320"/>
+          </a:xfrm>
+          <a:prstGeom prst="rect">
+            <a:avLst/>
+          </a:prstGeom>
+          <a:noFill/>
+        </p:spPr>
+        <p:txBody>
+          <a:bodyPr wrap="none" lIns="0" tIns="0" rIns="0" bIns="0">
+            <a:spAutoFit/>
+          </a:bodyPr>
+          <a:lstStyle/>
+          <a:p>
+            <a:pPr>
+              <a:defRPr sz="1100" b="1">
+                <a:solidFill>
+                  <a:srgbClr val="0E52A0"/>
+                </a:solidFill>
+                <a:latin typeface="Arial"/>
+              </a:defRPr>
+            </a:pPr>
+            <a:r>
+              <a:t>BÁO CÁO GIỮA KỲ — ĐỒ ÁN CƠ ĐIỆN TỬ (NHÓM 13)</a:t>
+            </a:r>
+          </a:p>
+        </p:txBody>
+      </p:sp>
+      <p:sp>
+        <p:nvSpPr>
+          <p:cNvPr id="3" name="TextBox 2"/>
+          <p:cNvSpPr txBox="1"/>
+          <p:nvPr/>
+        </p:nvSpPr>
+        <p:spPr>
+          <a:xfrm>
+            <a:off x="731520" y="658368"/>
+            <a:ext cx="10515600" cy="548640"/>
+          </a:xfrm>
+          <a:prstGeom prst="rect">
+            <a:avLst/>
+          </a:prstGeom>
+          <a:noFill/>
+        </p:spPr>
+        <p:txBody>
+          <a:bodyPr wrap="none" lIns="0" tIns="0" rIns="0" bIns="0">
+            <a:spAutoFit/>
+          </a:bodyPr>
+          <a:lstStyle/>
+          <a:p>
+            <a:pPr>
+              <a:defRPr sz="2200" b="1">
+                <a:solidFill>
+                  <a:srgbClr val="141821"/>
+                </a:solidFill>
+                <a:latin typeface="Arial"/>
+              </a:defRPr>
+            </a:pPr>
+            <a:r>
+              <a:t>1. Sơ đồ khối &amp; Cấu trúc hệ thống</a:t>
+            </a:r>
+          </a:p>
+        </p:txBody>
+      </p:sp>
+      <p:sp>
+        <p:nvSpPr>
+          <p:cNvPr id="4" name="TextBox 3"/>
+          <p:cNvSpPr txBox="1"/>
+          <p:nvPr/>
+        </p:nvSpPr>
+        <p:spPr>
+          <a:xfrm>
+            <a:off x="731520" y="6309360"/>
+            <a:ext cx="10698480" cy="274320"/>
+          </a:xfrm>
+          <a:prstGeom prst="rect">
+            <a:avLst/>
+          </a:prstGeom>
+          <a:noFill/>
+        </p:spPr>
+        <p:txBody>
+          <a:bodyPr wrap="none" lIns="0" tIns="0" rIns="0" bIns="0">
+            <a:spAutoFit/>
+          </a:bodyPr>
+          <a:lstStyle/>
+          <a:p>
+            <a:pPr>
+              <a:defRPr sz="1000">
+                <a:solidFill>
+                  <a:srgbClr val="646E7D"/>
+                </a:solidFill>
+                <a:latin typeface="Arial"/>
+              </a:defRPr>
+            </a:pPr>
+            <a:r>
+              <a:t>Đề tài Cửa bảo mật — Nguyễn Tuấn Sơn, Vũ Hữu Hoạt (UET)                                                                     Trang 2 / 8</a:t>
+            </a:r>
+          </a:p>
+        </p:txBody>
+      </p:sp>
+      <p:sp>
+        <p:nvSpPr>
+          <p:cNvPr id="5" name="Rectangle 4"/>
           <p:cNvSpPr/>
           <p:nvPr/>
         </p:nvSpPr>
         <p:spPr>
           <a:xfrm>
-            <a:off x="0" y="0"/>
-            <a:ext cx="12191695" cy="100584"/>
+            <a:off x="731520" y="1371600"/>
+            <a:ext cx="6217920" cy="3200400"/>
           </a:xfrm>
           <a:prstGeom prst="rect">
             <a:avLst/>
           </a:prstGeom>
           <a:solidFill>
-            <a:srgbClr val="10559A"/>
+            <a:srgbClr val="FFFFFF"/>
           </a:solidFill>
-          <a:ln>
-            <a:noFill/>
+          <a:ln w="12700">
+            <a:solidFill>
+              <a:srgbClr val="E2E8F0"/>
+            </a:solidFill>
           </a:ln>
         </p:spPr>
         <p:style>
@@ -4283,159 +3569,9 @@
           </a:p>
         </p:txBody>
       </p:sp>
-      <p:sp>
-        <p:nvSpPr>
-          <p:cNvPr id="3" name="TextBox 2"/>
-          <p:cNvSpPr txBox="1"/>
-          <p:nvPr/>
-        </p:nvSpPr>
-        <p:spPr>
-          <a:xfrm>
-            <a:off x="594360" y="292608"/>
-            <a:ext cx="9601200" cy="274320"/>
-          </a:xfrm>
-          <a:prstGeom prst="rect">
-            <a:avLst/>
-          </a:prstGeom>
-          <a:noFill/>
-        </p:spPr>
-        <p:txBody>
-          <a:bodyPr wrap="none" lIns="0" tIns="0" rIns="0" bIns="0">
-            <a:spAutoFit/>
-          </a:bodyPr>
-          <a:lstStyle/>
-          <a:p>
-            <a:pPr>
-              <a:defRPr sz="1050" b="1">
-                <a:solidFill>
-                  <a:srgbClr val="10559A"/>
-                </a:solidFill>
-              </a:defRPr>
-            </a:pPr>
-            <a:r>
-              <a:t>BÁO CÁO TIẾN ĐỘ GIỮA KỲ — ĐỒ ÁN CƠ ĐIỆN TỬ (NHÓM 13)</a:t>
-            </a:r>
-          </a:p>
-        </p:txBody>
-      </p:sp>
-      <p:sp>
-        <p:nvSpPr>
-          <p:cNvPr id="4" name="TextBox 3"/>
-          <p:cNvSpPr txBox="1"/>
-          <p:nvPr/>
-        </p:nvSpPr>
-        <p:spPr>
-          <a:xfrm>
-            <a:off x="594360" y="566928"/>
-            <a:ext cx="10515600" cy="502920"/>
-          </a:xfrm>
-          <a:prstGeom prst="rect">
-            <a:avLst/>
-          </a:prstGeom>
-          <a:noFill/>
-        </p:spPr>
-        <p:txBody>
-          <a:bodyPr wrap="none" lIns="0" tIns="0" rIns="0" bIns="0">
-            <a:spAutoFit/>
-          </a:bodyPr>
-          <a:lstStyle/>
-          <a:p>
-            <a:pPr>
-              <a:defRPr sz="2100" b="1">
-                <a:solidFill>
-                  <a:srgbClr val="0B2347"/>
-                </a:solidFill>
-              </a:defRPr>
-            </a:pPr>
-            <a:r>
-              <a:t>1. Cấu trúc tổng thể hệ thống &amp; Mục tiêu thiết kế</a:t>
-            </a:r>
-          </a:p>
-        </p:txBody>
-      </p:sp>
-      <p:sp>
-        <p:nvSpPr>
-          <p:cNvPr id="5" name="TextBox 4"/>
-          <p:cNvSpPr txBox="1"/>
-          <p:nvPr/>
-        </p:nvSpPr>
-        <p:spPr>
-          <a:xfrm>
-            <a:off x="594360" y="6446520"/>
-            <a:ext cx="10972800" cy="274320"/>
-          </a:xfrm>
-          <a:prstGeom prst="rect">
-            <a:avLst/>
-          </a:prstGeom>
-          <a:noFill/>
-        </p:spPr>
-        <p:txBody>
-          <a:bodyPr wrap="none">
-            <a:spAutoFit/>
-          </a:bodyPr>
-          <a:lstStyle/>
-          <a:p>
-            <a:pPr>
-              <a:defRPr sz="950">
-                <a:solidFill>
-                  <a:srgbClr val="5F6C7D"/>
-                </a:solidFill>
-              </a:defRPr>
-            </a:pPr>
-            <a:r>
-              <a:t>Trường Đại học Công nghệ – ĐHQGHN  |  Nhóm 13: Nguyễn Tuấn Sơn – Vũ Hữu Hoạt                                                                                     Slide 2 / 10</a:t>
-            </a:r>
-          </a:p>
-        </p:txBody>
-      </p:sp>
-      <p:sp>
-        <p:nvSpPr>
-          <p:cNvPr id="6" name="Rounded Rectangle 5"/>
-          <p:cNvSpPr/>
-          <p:nvPr/>
-        </p:nvSpPr>
-        <p:spPr>
-          <a:xfrm>
-            <a:off x="594360" y="1234440"/>
-            <a:ext cx="5943600" cy="2971800"/>
-          </a:xfrm>
-          <a:prstGeom prst="roundRect">
-            <a:avLst/>
-          </a:prstGeom>
-          <a:solidFill>
-            <a:srgbClr val="FFFFFF"/>
-          </a:solidFill>
-          <a:ln w="15240">
-            <a:solidFill>
-              <a:srgbClr val="DAE1EB"/>
-            </a:solidFill>
-          </a:ln>
-        </p:spPr>
-        <p:style>
-          <a:lnRef idx="1">
-            <a:schemeClr val="accent1"/>
-          </a:lnRef>
-          <a:fillRef idx="3">
-            <a:schemeClr val="accent1"/>
-          </a:fillRef>
-          <a:effectRef idx="2">
-            <a:schemeClr val="accent1"/>
-          </a:effectRef>
-          <a:fontRef idx="minor">
-            <a:schemeClr val="lt1"/>
-          </a:fontRef>
-        </p:style>
-        <p:txBody>
-          <a:bodyPr rtlCol="0" anchor="ctr"/>
-          <a:lstStyle/>
-          <a:p>
-            <a:pPr algn="ctr"/>
-          </a:p>
-        </p:txBody>
-      </p:sp>
       <p:pic>
         <p:nvPicPr>
-          <p:cNvPr id="7" name="Picture 6" descr="image1.png"/>
+          <p:cNvPr id="6" name="Picture 5" descr="image1.png"/>
           <p:cNvPicPr>
             <a:picLocks noChangeAspect="1"/>
           </p:cNvPicPr>
@@ -4449,8 +3585,8 @@
         </p:blipFill>
         <p:spPr>
           <a:xfrm>
-            <a:off x="704088" y="1572773"/>
-            <a:ext cx="5724144" cy="1947661"/>
+            <a:off x="804672" y="1778835"/>
+            <a:ext cx="6071616" cy="2065890"/>
           </a:xfrm>
           <a:prstGeom prst="rect">
             <a:avLst/>
@@ -4459,14 +3595,14 @@
       </p:pic>
       <p:sp>
         <p:nvSpPr>
-          <p:cNvPr id="8" name="TextBox 7"/>
+          <p:cNvPr id="7" name="TextBox 6"/>
           <p:cNvSpPr txBox="1"/>
           <p:nvPr/>
         </p:nvSpPr>
         <p:spPr>
           <a:xfrm>
-            <a:off x="704088" y="3822192"/>
-            <a:ext cx="5724144" cy="347472"/>
+            <a:off x="731520" y="4251960"/>
+            <a:ext cx="6217920" cy="320040"/>
           </a:xfrm>
           <a:prstGeom prst="rect">
             <a:avLst/>
@@ -4474,79 +3610,35 @@
           <a:noFill/>
         </p:spPr>
         <p:txBody>
-          <a:bodyPr wrap="square">
+          <a:bodyPr wrap="none" lIns="0" tIns="0" rIns="0" bIns="0">
             <a:spAutoFit/>
           </a:bodyPr>
           <a:lstStyle/>
           <a:p>
             <a:pPr algn="ctr">
-              <a:defRPr sz="1000" b="1">
-                <a:solidFill>
-                  <a:srgbClr val="0B2347"/>
-                </a:solidFill>
-              </a:defRPr>
-            </a:pPr>
-            <a:r>
-              <a:t>Hình 1.1: Sơ đồ khối tổng thể hệ thống cửa bảo mật tích hợp ESP32 &amp; Web App</a:t>
-            </a:r>
-          </a:p>
-        </p:txBody>
-      </p:sp>
-      <p:sp>
-        <p:nvSpPr>
-          <p:cNvPr id="9" name="Rounded Rectangle 8"/>
-          <p:cNvSpPr/>
-          <p:nvPr/>
-        </p:nvSpPr>
-        <p:spPr>
-          <a:xfrm>
-            <a:off x="594360" y="4370832"/>
-            <a:ext cx="5943600" cy="1920240"/>
-          </a:xfrm>
-          <a:prstGeom prst="roundRect">
-            <a:avLst/>
-          </a:prstGeom>
-          <a:solidFill>
-            <a:srgbClr val="F6F8FB"/>
-          </a:solidFill>
-          <a:ln w="12700">
-            <a:solidFill>
-              <a:srgbClr val="DAE1EB"/>
-            </a:solidFill>
-          </a:ln>
-        </p:spPr>
-        <p:style>
-          <a:lnRef idx="1">
-            <a:schemeClr val="accent1"/>
-          </a:lnRef>
-          <a:fillRef idx="3">
-            <a:schemeClr val="accent1"/>
-          </a:fillRef>
-          <a:effectRef idx="2">
-            <a:schemeClr val="accent1"/>
-          </a:effectRef>
-          <a:fontRef idx="minor">
-            <a:schemeClr val="lt1"/>
-          </a:fontRef>
-        </p:style>
-        <p:txBody>
-          <a:bodyPr rtlCol="0" anchor="ctr"/>
-          <a:lstStyle/>
-          <a:p>
-            <a:pPr algn="ctr"/>
-          </a:p>
-        </p:txBody>
-      </p:sp>
-      <p:sp>
-        <p:nvSpPr>
-          <p:cNvPr id="10" name="TextBox 9"/>
+              <a:defRPr sz="1100" b="1">
+                <a:solidFill>
+                  <a:srgbClr val="646E7D"/>
+                </a:solidFill>
+                <a:latin typeface="Arial"/>
+              </a:defRPr>
+            </a:pPr>
+            <a:r>
+              <a:t>Hình 1: Sơ đồ kết nối các khối chức năng</a:t>
+            </a:r>
+          </a:p>
+        </p:txBody>
+      </p:sp>
+      <p:sp>
+        <p:nvSpPr>
+          <p:cNvPr id="8" name="TextBox 7"/>
           <p:cNvSpPr txBox="1"/>
           <p:nvPr/>
         </p:nvSpPr>
         <p:spPr>
           <a:xfrm>
-            <a:off x="795528" y="4535424"/>
-            <a:ext cx="5541264" cy="1627632"/>
+            <a:off x="7315200" y="1371600"/>
+            <a:ext cx="4114800" cy="4389120"/>
           </a:xfrm>
           <a:prstGeom prst="rect">
             <a:avLst/>
@@ -4554,112 +3646,138 @@
           <a:noFill/>
         </p:spPr>
         <p:txBody>
-          <a:bodyPr wrap="square" lIns="0" tIns="0" rIns="0" bIns="0">
+          <a:bodyPr wrap="square">
             <a:spAutoFit/>
           </a:bodyPr>
           <a:lstStyle/>
           <a:p>
             <a:pPr>
+              <a:defRPr sz="1450" b="1">
+                <a:solidFill>
+                  <a:srgbClr val="0E52A0"/>
+                </a:solidFill>
+                <a:latin typeface="Arial"/>
+              </a:defRPr>
+            </a:pPr>
+            <a:r>
+              <a:t>Khối Xác thực tại cửa:</a:t>
+            </a:r>
+          </a:p>
+          <a:p>
+            <a:pPr>
               <a:spcAft>
-                <a:spcPts val="300"/>
+                <a:spcPts val="1000"/>
               </a:spcAft>
+              <a:defRPr sz="1300">
+                <a:solidFill>
+                  <a:srgbClr val="141821"/>
+                </a:solidFill>
+                <a:latin typeface="Arial"/>
+              </a:defRPr>
+            </a:pPr>
+            <a:r>
+              <a:t>Cảm biến vân tay quang học AS608, Module đọc thẻ RFID RC522 (13.56 MHz) và Bàn phím ma trận 4x4.</a:t>
+            </a:r>
+          </a:p>
+          <a:p>
+            <a:pPr>
               <a:defRPr sz="1450" b="1">
                 <a:solidFill>
-                  <a:srgbClr val="0B2347"/>
-                </a:solidFill>
-              </a:defRPr>
-            </a:pPr>
-            <a:r>
-              <a:t>Điểm cải tiến trong quá trình triển khai thực tế</a:t>
+                  <a:srgbClr val="0E52A0"/>
+                </a:solidFill>
+                <a:latin typeface="Arial"/>
+              </a:defRPr>
+            </a:pPr>
+            <a:r>
+              <a:t>Khối Xử lý trung tâm:</a:t>
             </a:r>
           </a:p>
           <a:p>
             <a:pPr>
               <a:spcAft>
-                <a:spcPts val="450"/>
+                <a:spcPts val="1000"/>
               </a:spcAft>
-              <a:defRPr sz="1100">
-                <a:solidFill>
-                  <a:srgbClr val="141C28"/>
-                </a:solidFill>
-              </a:defRPr>
-            </a:pPr>
-            <a:r>
-              <a:t>•  Thay thế khối loa thông báo bằng Màn hình tinh thể lỏng LCD 16x2 I2C (0x27) giúp hiển thị trực quan trạng thái khóa, ký tự mật khẩu (*) và hướng dẫn xác thực 2 lớp.</a:t>
+              <a:defRPr sz="1300">
+                <a:solidFill>
+                  <a:srgbClr val="141821"/>
+                </a:solidFill>
+                <a:latin typeface="Arial"/>
+              </a:defRPr>
+            </a:pPr>
+            <a:r>
+              <a:t>Vi điều khiển ESP32 nhận dữ liệu, kiểm tra quyền truy cập và điều khiển các ngoại vi.</a:t>
+            </a:r>
+          </a:p>
+          <a:p>
+            <a:pPr>
+              <a:defRPr sz="1450" b="1">
+                <a:solidFill>
+                  <a:srgbClr val="0E52A0"/>
+                </a:solidFill>
+                <a:latin typeface="Arial"/>
+              </a:defRPr>
+            </a:pPr>
+            <a:r>
+              <a:t>Khối Hiển thị &amp; Chấp hành:</a:t>
             </a:r>
           </a:p>
           <a:p>
             <a:pPr>
               <a:spcAft>
-                <a:spcPts val="450"/>
+                <a:spcPts val="1000"/>
               </a:spcAft>
-              <a:defRPr sz="1100">
-                <a:solidFill>
-                  <a:srgbClr val="141C28"/>
-                </a:solidFill>
-              </a:defRPr>
-            </a:pPr>
-            <a:r>
-              <a:t>•  Nâng cấp bàn phím lên chuẩn Ma trận 4x4 (16 phím vật lý có nắp che bụi) để tận dụng các phím A, B, C, D cho thao tác khóa nhanh và xác nhận.</a:t>
-            </a:r>
-          </a:p>
-        </p:txBody>
-      </p:sp>
-      <p:sp>
-        <p:nvSpPr>
-          <p:cNvPr id="11" name="Rounded Rectangle 10"/>
-          <p:cNvSpPr/>
-          <p:nvPr/>
-        </p:nvSpPr>
-        <p:spPr>
-          <a:xfrm>
-            <a:off x="6720840" y="1234440"/>
-            <a:ext cx="4873752" cy="5056632"/>
-          </a:xfrm>
-          <a:prstGeom prst="roundRect">
-            <a:avLst/>
-          </a:prstGeom>
-          <a:solidFill>
-            <a:srgbClr val="FFFFFF"/>
-          </a:solidFill>
-          <a:ln w="19050">
-            <a:solidFill>
-              <a:srgbClr val="10559A"/>
-            </a:solidFill>
-          </a:ln>
-        </p:spPr>
-        <p:style>
-          <a:lnRef idx="1">
-            <a:schemeClr val="accent1"/>
-          </a:lnRef>
-          <a:fillRef idx="3">
-            <a:schemeClr val="accent1"/>
-          </a:fillRef>
-          <a:effectRef idx="2">
-            <a:schemeClr val="accent1"/>
-          </a:effectRef>
-          <a:fontRef idx="minor">
-            <a:schemeClr val="lt1"/>
-          </a:fontRef>
-        </p:style>
-        <p:txBody>
-          <a:bodyPr rtlCol="0" anchor="ctr"/>
-          <a:lstStyle/>
-          <a:p>
-            <a:pPr algn="ctr"/>
-          </a:p>
-        </p:txBody>
-      </p:sp>
-      <p:sp>
-        <p:nvSpPr>
-          <p:cNvPr id="12" name="TextBox 11"/>
+              <a:defRPr sz="1300">
+                <a:solidFill>
+                  <a:srgbClr val="141821"/>
+                </a:solidFill>
+                <a:latin typeface="Arial"/>
+              </a:defRPr>
+            </a:pPr>
+            <a:r>
+              <a:t>Màn hình LCD 16x2 I2C hiển thị thông báo hướng dẫn và Khóa chốt điện từ 12V thực hiện mở/đóng cửa.</a:t>
+            </a:r>
+          </a:p>
+          <a:p>
+            <a:pPr>
+              <a:defRPr sz="1450" b="1">
+                <a:solidFill>
+                  <a:srgbClr val="0E52A0"/>
+                </a:solidFill>
+                <a:latin typeface="Arial"/>
+              </a:defRPr>
+            </a:pPr>
+            <a:r>
+              <a:t>Khối Giám sát Web App:</a:t>
+            </a:r>
+          </a:p>
+          <a:p>
+            <a:pPr>
+              <a:spcAft>
+                <a:spcPts val="1000"/>
+              </a:spcAft>
+              <a:defRPr sz="1300">
+                <a:solidFill>
+                  <a:srgbClr val="141821"/>
+                </a:solidFill>
+                <a:latin typeface="Arial"/>
+              </a:defRPr>
+            </a:pPr>
+            <a:r>
+              <a:t>ESP32 kết nối Wi-Fi, chạy Web Server cục bộ giúp theo dõi trạng thái, xem lịch sử ra vào và mở khóa từ xa.</a:t>
+            </a:r>
+          </a:p>
+        </p:txBody>
+      </p:sp>
+      <p:sp>
+        <p:nvSpPr>
+          <p:cNvPr id="9" name="TextBox 8"/>
           <p:cNvSpPr txBox="1"/>
           <p:nvPr/>
         </p:nvSpPr>
         <p:spPr>
           <a:xfrm>
-            <a:off x="6922008" y="1399032"/>
-            <a:ext cx="4471416" cy="4764024"/>
+            <a:off x="731520" y="4754880"/>
+            <a:ext cx="6217920" cy="1097280"/>
           </a:xfrm>
           <a:prstGeom prst="rect">
             <a:avLst/>
@@ -4667,98 +3785,36 @@
           <a:noFill/>
         </p:spPr>
         <p:txBody>
-          <a:bodyPr wrap="square" lIns="0" tIns="0" rIns="0" bIns="0">
+          <a:bodyPr wrap="square">
             <a:spAutoFit/>
           </a:bodyPr>
           <a:lstStyle/>
           <a:p>
             <a:pPr>
-              <a:spcAft>
-                <a:spcPts val="300"/>
-              </a:spcAft>
-              <a:defRPr sz="1450" b="1">
-                <a:solidFill>
-                  <a:srgbClr val="10559A"/>
-                </a:solidFill>
-              </a:defRPr>
-            </a:pPr>
-            <a:r>
-              <a:t>4 Khối chức năng đồng bộ của đề tài</a:t>
-            </a:r>
-          </a:p>
-          <a:p>
-            <a:pPr>
-              <a:spcAft>
-                <a:spcPts val="700"/>
-              </a:spcAft>
-              <a:defRPr sz="1050">
-                <a:solidFill>
-                  <a:srgbClr val="5F6C7D"/>
-                </a:solidFill>
-              </a:defRPr>
-            </a:pPr>
-            <a:r>
-              <a:t>Sự kết hợp giữa phần cứng cơ điện tử và phần mềm nhúng</a:t>
-            </a:r>
-          </a:p>
-          <a:p>
-            <a:pPr>
-              <a:spcAft>
-                <a:spcPts val="450"/>
-              </a:spcAft>
-              <a:defRPr sz="1150">
-                <a:solidFill>
-                  <a:srgbClr val="141C28"/>
-                </a:solidFill>
-              </a:defRPr>
-            </a:pPr>
-            <a:r>
-              <a:t>•  Khối Thu thập &amp; Xác thực: Kết hợp 3 phương thức độc lập gồm Cảm biến vân tay quang học AS608 (UART2), Đầu đọc thẻ RFID RC522 (SPI 13.56MHz) và Bàn phím ma trận 4x4.</a:t>
-            </a:r>
-          </a:p>
-          <a:p>
-            <a:pPr>
-              <a:spcAft>
-                <a:spcPts val="450"/>
-              </a:spcAft>
-              <a:defRPr sz="1150">
-                <a:solidFill>
-                  <a:srgbClr val="141C28"/>
-                </a:solidFill>
-              </a:defRPr>
-            </a:pPr>
-            <a:r>
-              <a:t>•  Khối Mạch in trung tâm (PCB): Liên kết toàn bộ các module về vi điều khiển ESP32, tích hợp nguồn hạ áp (12V -&gt; 5V/3.3V) và mạch kích khóa chốt kèm Diode chống xung nhiễu.</a:t>
-            </a:r>
-          </a:p>
-          <a:p>
-            <a:pPr>
-              <a:spcAft>
-                <a:spcPts val="450"/>
-              </a:spcAft>
-              <a:defRPr sz="1150">
-                <a:solidFill>
-                  <a:srgbClr val="141C28"/>
-                </a:solidFill>
-              </a:defRPr>
-            </a:pPr>
-            <a:r>
-              <a:t>•  Khối Hiển thị &amp; Chấp hành tại cửa: Màn hình LCD 16x2 hiển thị hướng dẫn tại chỗ và Khóa chốt điện từ 12V đóng/mở cửa tự động.</a:t>
-            </a:r>
-          </a:p>
-          <a:p>
-            <a:pPr>
-              <a:spcAft>
-                <a:spcPts val="450"/>
-              </a:spcAft>
-              <a:defRPr sz="1150">
-                <a:solidFill>
-                  <a:srgbClr val="141C28"/>
-                </a:solidFill>
-              </a:defRPr>
-            </a:pPr>
-            <a:r>
-              <a:t>•  Khối Giao diện Web App (ESP32 Wi-Fi): Theo dõi trạng thái cửa thời gian thực qua WebSocket, mở khóa từ xa, quản lý danh sách thẻ/vân tay và chuyển đổi bảo mật 1 lớp / 2 lớp (2FA).</a:t>
+              <a:defRPr b="1" sz="1300">
+                <a:solidFill>
+                  <a:srgbClr val="141821"/>
+                </a:solidFill>
+              </a:defRPr>
+            </a:pPr>
+            <a:r>
+              <a:t>Điều chỉnh thực tế trong quá trình làm:</a:t>
+            </a:r>
+          </a:p>
+          <a:p>
+            <a:pPr>
+              <a:defRPr sz="1200">
+                <a:solidFill>
+                  <a:srgbClr val="646E7D"/>
+                </a:solidFill>
+              </a:defRPr>
+            </a:pPr>
+            <a:r>
+              <a:t>• Dùng Màn hình LCD 16x2 I2C thay cho loa để người dùng dễ theo dõi trạng thái, ký tự mật khẩu và thời gian đếm ngược.</a:t>
+            </a:r>
+            <a:br/>
+            <a:r>
+              <a:t>• Dùng Bàn phím ma trận 4x4 (16 phím) để có thêm các phím chức năng (Xóa *, Xác nhận #/D, Khóa C).</a:t>
             </a:r>
           </a:p>
         </p:txBody>
@@ -4783,23 +3839,133 @@
       <p:grpSpPr/>
       <p:sp>
         <p:nvSpPr>
-          <p:cNvPr id="2" name="Rectangle 1"/>
+          <p:cNvPr id="2" name="TextBox 1"/>
+          <p:cNvSpPr txBox="1"/>
+          <p:nvPr/>
+        </p:nvSpPr>
+        <p:spPr>
+          <a:xfrm>
+            <a:off x="731520" y="365760"/>
+            <a:ext cx="9144000" cy="274320"/>
+          </a:xfrm>
+          <a:prstGeom prst="rect">
+            <a:avLst/>
+          </a:prstGeom>
+          <a:noFill/>
+        </p:spPr>
+        <p:txBody>
+          <a:bodyPr wrap="none" lIns="0" tIns="0" rIns="0" bIns="0">
+            <a:spAutoFit/>
+          </a:bodyPr>
+          <a:lstStyle/>
+          <a:p>
+            <a:pPr>
+              <a:defRPr sz="1100" b="1">
+                <a:solidFill>
+                  <a:srgbClr val="0E52A0"/>
+                </a:solidFill>
+                <a:latin typeface="Arial"/>
+              </a:defRPr>
+            </a:pPr>
+            <a:r>
+              <a:t>BÁO CÁO GIỮA KỲ — ĐỒ ÁN CƠ ĐIỆN TỬ (NHÓM 13)</a:t>
+            </a:r>
+          </a:p>
+        </p:txBody>
+      </p:sp>
+      <p:sp>
+        <p:nvSpPr>
+          <p:cNvPr id="3" name="TextBox 2"/>
+          <p:cNvSpPr txBox="1"/>
+          <p:nvPr/>
+        </p:nvSpPr>
+        <p:spPr>
+          <a:xfrm>
+            <a:off x="731520" y="658368"/>
+            <a:ext cx="10515600" cy="548640"/>
+          </a:xfrm>
+          <a:prstGeom prst="rect">
+            <a:avLst/>
+          </a:prstGeom>
+          <a:noFill/>
+        </p:spPr>
+        <p:txBody>
+          <a:bodyPr wrap="none" lIns="0" tIns="0" rIns="0" bIns="0">
+            <a:spAutoFit/>
+          </a:bodyPr>
+          <a:lstStyle/>
+          <a:p>
+            <a:pPr>
+              <a:defRPr sz="2200" b="1">
+                <a:solidFill>
+                  <a:srgbClr val="141821"/>
+                </a:solidFill>
+                <a:latin typeface="Arial"/>
+              </a:defRPr>
+            </a:pPr>
+            <a:r>
+              <a:t>2. Linh kiện thực tế nhóm đã mua và khảo sát</a:t>
+            </a:r>
+          </a:p>
+        </p:txBody>
+      </p:sp>
+      <p:sp>
+        <p:nvSpPr>
+          <p:cNvPr id="4" name="TextBox 3"/>
+          <p:cNvSpPr txBox="1"/>
+          <p:nvPr/>
+        </p:nvSpPr>
+        <p:spPr>
+          <a:xfrm>
+            <a:off x="731520" y="6309360"/>
+            <a:ext cx="10698480" cy="274320"/>
+          </a:xfrm>
+          <a:prstGeom prst="rect">
+            <a:avLst/>
+          </a:prstGeom>
+          <a:noFill/>
+        </p:spPr>
+        <p:txBody>
+          <a:bodyPr wrap="none" lIns="0" tIns="0" rIns="0" bIns="0">
+            <a:spAutoFit/>
+          </a:bodyPr>
+          <a:lstStyle/>
+          <a:p>
+            <a:pPr>
+              <a:defRPr sz="1000">
+                <a:solidFill>
+                  <a:srgbClr val="646E7D"/>
+                </a:solidFill>
+                <a:latin typeface="Arial"/>
+              </a:defRPr>
+            </a:pPr>
+            <a:r>
+              <a:t>Đề tài Cửa bảo mật — Nguyễn Tuấn Sơn, Vũ Hữu Hoạt (UET)                                                                     Trang 3 / 8</a:t>
+            </a:r>
+          </a:p>
+        </p:txBody>
+      </p:sp>
+      <p:sp>
+        <p:nvSpPr>
+          <p:cNvPr id="5" name="Rectangle 4"/>
           <p:cNvSpPr/>
           <p:nvPr/>
         </p:nvSpPr>
         <p:spPr>
           <a:xfrm>
-            <a:off x="0" y="0"/>
-            <a:ext cx="12191695" cy="100584"/>
+            <a:off x="731520" y="1371600"/>
+            <a:ext cx="3328416" cy="2194560"/>
           </a:xfrm>
           <a:prstGeom prst="rect">
             <a:avLst/>
           </a:prstGeom>
           <a:solidFill>
-            <a:srgbClr val="10559A"/>
+            <a:srgbClr val="FFFFFF"/>
           </a:solidFill>
-          <a:ln>
-            <a:noFill/>
+          <a:ln w="12700">
+            <a:solidFill>
+              <a:srgbClr val="E2E8F0"/>
+            </a:solidFill>
           </a:ln>
         </p:spPr>
         <p:style>
@@ -4824,16 +3990,40 @@
           </a:p>
         </p:txBody>
       </p:sp>
-      <p:sp>
-        <p:nvSpPr>
-          <p:cNvPr id="3" name="TextBox 2"/>
+      <p:pic>
+        <p:nvPicPr>
+          <p:cNvPr id="6" name="Picture 5" descr="image2.jpg"/>
+          <p:cNvPicPr>
+            <a:picLocks noChangeAspect="1"/>
+          </p:cNvPicPr>
+          <p:nvPr/>
+        </p:nvPicPr>
+        <p:blipFill>
+          <a:blip r:embed="rId2"/>
+          <a:stretch>
+            <a:fillRect/>
+          </a:stretch>
+        </p:blipFill>
+        <p:spPr>
+          <a:xfrm>
+            <a:off x="1531620" y="1444752"/>
+            <a:ext cx="1728216" cy="1728216"/>
+          </a:xfrm>
+          <a:prstGeom prst="rect">
+            <a:avLst/>
+          </a:prstGeom>
+        </p:spPr>
+      </p:pic>
+      <p:sp>
+        <p:nvSpPr>
+          <p:cNvPr id="7" name="TextBox 6"/>
           <p:cNvSpPr txBox="1"/>
           <p:nvPr/>
         </p:nvSpPr>
         <p:spPr>
           <a:xfrm>
-            <a:off x="594360" y="292608"/>
-            <a:ext cx="9601200" cy="274320"/>
+            <a:off x="731520" y="3246120"/>
+            <a:ext cx="3328416" cy="320040"/>
           </a:xfrm>
           <a:prstGeom prst="rect">
             <a:avLst/>
@@ -4846,29 +4036,30 @@
           </a:bodyPr>
           <a:lstStyle/>
           <a:p>
-            <a:pPr>
-              <a:defRPr sz="1050" b="1">
-                <a:solidFill>
-                  <a:srgbClr val="10559A"/>
-                </a:solidFill>
-              </a:defRPr>
-            </a:pPr>
-            <a:r>
-              <a:t>BÁO CÁO TIẾN ĐỘ GIỮA KỲ — ĐỒ ÁN CƠ ĐIỆN TỬ (NHÓM 13)</a:t>
-            </a:r>
-          </a:p>
-        </p:txBody>
-      </p:sp>
-      <p:sp>
-        <p:nvSpPr>
-          <p:cNvPr id="4" name="TextBox 3"/>
+            <a:pPr algn="ctr">
+              <a:defRPr sz="1100" b="1">
+                <a:solidFill>
+                  <a:srgbClr val="646E7D"/>
+                </a:solidFill>
+                <a:latin typeface="Arial"/>
+              </a:defRPr>
+            </a:pPr>
+            <a:r>
+              <a:t>Cảm biến vân tay AS608</a:t>
+            </a:r>
+          </a:p>
+        </p:txBody>
+      </p:sp>
+      <p:sp>
+        <p:nvSpPr>
+          <p:cNvPr id="8" name="TextBox 7"/>
           <p:cNvSpPr txBox="1"/>
           <p:nvPr/>
         </p:nvSpPr>
         <p:spPr>
           <a:xfrm>
-            <a:off x="594360" y="566928"/>
-            <a:ext cx="10515600" cy="502920"/>
+            <a:off x="731520" y="3749039"/>
+            <a:ext cx="3328416" cy="2286000"/>
           </a:xfrm>
           <a:prstGeom prst="rect">
             <a:avLst/>
@@ -4876,79 +4067,72 @@
           <a:noFill/>
         </p:spPr>
         <p:txBody>
-          <a:bodyPr wrap="none" lIns="0" tIns="0" rIns="0" bIns="0">
+          <a:bodyPr wrap="square">
             <a:spAutoFit/>
           </a:bodyPr>
           <a:lstStyle/>
           <a:p>
             <a:pPr>
-              <a:defRPr sz="2100" b="1">
-                <a:solidFill>
-                  <a:srgbClr val="0B2347"/>
-                </a:solidFill>
-              </a:defRPr>
-            </a:pPr>
-            <a:r>
-              <a:t>2. Danh mục linh kiện thực tế đã chuẩn bị &amp; Thông số Datasheet</a:t>
-            </a:r>
-          </a:p>
-        </p:txBody>
-      </p:sp>
-      <p:sp>
-        <p:nvSpPr>
-          <p:cNvPr id="5" name="TextBox 4"/>
-          <p:cNvSpPr txBox="1"/>
-          <p:nvPr/>
-        </p:nvSpPr>
-        <p:spPr>
-          <a:xfrm>
-            <a:off x="594360" y="6446520"/>
-            <a:ext cx="10972800" cy="274320"/>
-          </a:xfrm>
-          <a:prstGeom prst="rect">
-            <a:avLst/>
-          </a:prstGeom>
-          <a:noFill/>
-        </p:spPr>
-        <p:txBody>
-          <a:bodyPr wrap="none">
-            <a:spAutoFit/>
-          </a:bodyPr>
-          <a:lstStyle/>
-          <a:p>
-            <a:pPr>
-              <a:defRPr sz="950">
-                <a:solidFill>
-                  <a:srgbClr val="5F6C7D"/>
-                </a:solidFill>
-              </a:defRPr>
-            </a:pPr>
-            <a:r>
-              <a:t>Trường Đại học Công nghệ – ĐHQGHN  |  Nhóm 13: Nguyễn Tuấn Sơn – Vũ Hữu Hoạt                                                                                     Slide 3 / 10</a:t>
-            </a:r>
-          </a:p>
-        </p:txBody>
-      </p:sp>
-      <p:sp>
-        <p:nvSpPr>
-          <p:cNvPr id="6" name="Rounded Rectangle 5"/>
+              <a:defRPr b="1" sz="1500">
+                <a:solidFill>
+                  <a:srgbClr val="0E52A0"/>
+                </a:solidFill>
+              </a:defRPr>
+            </a:pPr>
+            <a:r>
+              <a:t>Cảm biến vân tay AS608</a:t>
+            </a:r>
+          </a:p>
+          <a:p>
+            <a:pPr>
+              <a:defRPr sz="1300">
+                <a:solidFill>
+                  <a:srgbClr val="141821"/>
+                </a:solidFill>
+              </a:defRPr>
+            </a:pPr>
+            <a:r>
+              <a:t>• Điện áp: 3.3V – 5.0V DC</a:t>
+            </a:r>
+            <a:br/>
+            <a:r>
+              <a:t>• Giao tiếp: UART TTL (baudrate 57600)</a:t>
+            </a:r>
+            <a:br/>
+            <a:r>
+              <a:t>• Bộ nhớ: Lưu 127 mẫu vân tay trực tiếp trong cảm biến</a:t>
+            </a:r>
+            <a:br/>
+            <a:r>
+              <a:t>• Tốc độ nhận dạng: &lt; 1 giây</a:t>
+            </a:r>
+            <a:br/>
+            <a:r>
+              <a:t>• Trạng thái: Đã mua, test tốt</a:t>
+            </a:r>
+          </a:p>
+        </p:txBody>
+      </p:sp>
+      <p:sp>
+        <p:nvSpPr>
+          <p:cNvPr id="9" name="Rectangle 8"/>
           <p:cNvSpPr/>
           <p:nvPr/>
         </p:nvSpPr>
         <p:spPr>
           <a:xfrm>
-            <a:off x="594360" y="1234440"/>
-            <a:ext cx="3520440" cy="2331720"/>
-          </a:xfrm>
-          <a:prstGeom prst="roundRect">
+            <a:off x="4425696" y="1371600"/>
+            <a:ext cx="3328416" cy="2194560"/>
+          </a:xfrm>
+          <a:prstGeom prst="rect">
             <a:avLst/>
           </a:prstGeom>
           <a:solidFill>
             <a:srgbClr val="FFFFFF"/>
           </a:solidFill>
-          <a:ln w="15240">
+          <a:ln w="12700">
             <a:solidFill>
-              <a:srgbClr val="DAE1EB"/>
+              <a:srgbClr val="E2E8F0"/>
             </a:solidFill>
           </a:ln>
         </p:spPr>
@@ -4976,22 +4160,22 @@
       </p:sp>
       <p:pic>
         <p:nvPicPr>
-          <p:cNvPr id="7" name="Picture 6" descr="image2.jpg"/>
+          <p:cNvPr id="10" name="Picture 9" descr="image3.jpg"/>
           <p:cNvPicPr>
             <a:picLocks noChangeAspect="1"/>
           </p:cNvPicPr>
           <p:nvPr/>
         </p:nvPicPr>
         <p:blipFill>
-          <a:blip r:embed="rId2"/>
+          <a:blip r:embed="rId3"/>
           <a:stretch>
             <a:fillRect/>
           </a:stretch>
         </p:blipFill>
         <p:spPr>
           <a:xfrm>
-            <a:off x="1472184" y="1344168"/>
-            <a:ext cx="1764792" cy="1764792"/>
+            <a:off x="5225796" y="1444752"/>
+            <a:ext cx="1728216" cy="1728216"/>
           </a:xfrm>
           <a:prstGeom prst="rect">
             <a:avLst/>
@@ -5000,14 +4184,14 @@
       </p:pic>
       <p:sp>
         <p:nvSpPr>
-          <p:cNvPr id="8" name="TextBox 7"/>
+          <p:cNvPr id="11" name="TextBox 10"/>
           <p:cNvSpPr txBox="1"/>
           <p:nvPr/>
         </p:nvSpPr>
         <p:spPr>
           <a:xfrm>
-            <a:off x="704088" y="3182112"/>
-            <a:ext cx="3300984" cy="347472"/>
+            <a:off x="4425696" y="3246120"/>
+            <a:ext cx="3328416" cy="320040"/>
           </a:xfrm>
           <a:prstGeom prst="rect">
             <a:avLst/>
@@ -5015,44 +4199,108 @@
           <a:noFill/>
         </p:spPr>
         <p:txBody>
+          <a:bodyPr wrap="none" lIns="0" tIns="0" rIns="0" bIns="0">
+            <a:spAutoFit/>
+          </a:bodyPr>
+          <a:lstStyle/>
+          <a:p>
+            <a:pPr algn="ctr">
+              <a:defRPr sz="1100" b="1">
+                <a:solidFill>
+                  <a:srgbClr val="646E7D"/>
+                </a:solidFill>
+                <a:latin typeface="Arial"/>
+              </a:defRPr>
+            </a:pPr>
+            <a:r>
+              <a:t>Module RFID-RC522 &amp; Thẻ từ</a:t>
+            </a:r>
+          </a:p>
+        </p:txBody>
+      </p:sp>
+      <p:sp>
+        <p:nvSpPr>
+          <p:cNvPr id="12" name="TextBox 11"/>
+          <p:cNvSpPr txBox="1"/>
+          <p:nvPr/>
+        </p:nvSpPr>
+        <p:spPr>
+          <a:xfrm>
+            <a:off x="4425696" y="3749039"/>
+            <a:ext cx="3328416" cy="2286000"/>
+          </a:xfrm>
+          <a:prstGeom prst="rect">
+            <a:avLst/>
+          </a:prstGeom>
+          <a:noFill/>
+        </p:spPr>
+        <p:txBody>
           <a:bodyPr wrap="square">
             <a:spAutoFit/>
           </a:bodyPr>
           <a:lstStyle/>
           <a:p>
-            <a:pPr algn="ctr">
-              <a:defRPr sz="1000" b="1">
-                <a:solidFill>
-                  <a:srgbClr val="0B2347"/>
-                </a:solidFill>
-              </a:defRPr>
-            </a:pPr>
-            <a:r>
-              <a:t>Cảm biến vân tay quang học AS608 (Đã mua)</a:t>
-            </a:r>
-          </a:p>
-        </p:txBody>
-      </p:sp>
-      <p:sp>
-        <p:nvSpPr>
-          <p:cNvPr id="9" name="Rounded Rectangle 8"/>
+            <a:pPr>
+              <a:defRPr b="1" sz="1500">
+                <a:solidFill>
+                  <a:srgbClr val="0E52A0"/>
+                </a:solidFill>
+              </a:defRPr>
+            </a:pPr>
+            <a:r>
+              <a:t>Module đọc thẻ RFID RC522</a:t>
+            </a:r>
+          </a:p>
+          <a:p>
+            <a:pPr>
+              <a:defRPr sz="1300">
+                <a:solidFill>
+                  <a:srgbClr val="141821"/>
+                </a:solidFill>
+              </a:defRPr>
+            </a:pPr>
+            <a:r>
+              <a:t>• Điện áp cấp: 3.3V DC (không cấp 5V)</a:t>
+            </a:r>
+            <a:br/>
+            <a:r>
+              <a:t>• Tần số: 13.56 MHz (chuẩn SPI)</a:t>
+            </a:r>
+            <a:br/>
+            <a:r>
+              <a:t>• Đọc thẻ trắng S50 và móc khóa NFC</a:t>
+            </a:r>
+            <a:br/>
+            <a:r>
+              <a:t>• Khoảng cách nhận thẻ: 0 – 30 mm</a:t>
+            </a:r>
+            <a:br/>
+            <a:r>
+              <a:t>• Trạng thái: Đã mua, test đọc UID tốt</a:t>
+            </a:r>
+          </a:p>
+        </p:txBody>
+      </p:sp>
+      <p:sp>
+        <p:nvSpPr>
+          <p:cNvPr id="13" name="Rectangle 12"/>
           <p:cNvSpPr/>
           <p:nvPr/>
         </p:nvSpPr>
         <p:spPr>
           <a:xfrm>
-            <a:off x="594360" y="3675887"/>
-            <a:ext cx="3520440" cy="2606040"/>
-          </a:xfrm>
-          <a:prstGeom prst="roundRect">
+            <a:off x="8119872" y="1371600"/>
+            <a:ext cx="3328416" cy="2194560"/>
+          </a:xfrm>
+          <a:prstGeom prst="rect">
             <a:avLst/>
           </a:prstGeom>
           <a:solidFill>
-            <a:srgbClr val="F6F8FB"/>
+            <a:srgbClr val="FFFFFF"/>
           </a:solidFill>
           <a:ln w="12700">
             <a:solidFill>
-              <a:srgbClr val="DAE1EB"/>
+              <a:srgbClr val="E2E8F0"/>
             </a:solidFill>
           </a:ln>
         </p:spPr>
@@ -5078,399 +4326,9 @@
           </a:p>
         </p:txBody>
       </p:sp>
-      <p:sp>
-        <p:nvSpPr>
-          <p:cNvPr id="10" name="TextBox 9"/>
-          <p:cNvSpPr txBox="1"/>
-          <p:nvPr/>
-        </p:nvSpPr>
-        <p:spPr>
-          <a:xfrm>
-            <a:off x="795528" y="3840479"/>
-            <a:ext cx="3118104" cy="2313432"/>
-          </a:xfrm>
-          <a:prstGeom prst="rect">
-            <a:avLst/>
-          </a:prstGeom>
-          <a:noFill/>
-        </p:spPr>
-        <p:txBody>
-          <a:bodyPr wrap="square" lIns="0" tIns="0" rIns="0" bIns="0">
-            <a:spAutoFit/>
-          </a:bodyPr>
-          <a:lstStyle/>
-          <a:p>
-            <a:pPr>
-              <a:spcAft>
-                <a:spcPts val="300"/>
-              </a:spcAft>
-              <a:defRPr sz="1450" b="1">
-                <a:solidFill>
-                  <a:srgbClr val="0B2347"/>
-                </a:solidFill>
-              </a:defRPr>
-            </a:pPr>
-            <a:r>
-              <a:t>Thông số Datasheet AS608</a:t>
-            </a:r>
-          </a:p>
-          <a:p>
-            <a:pPr>
-              <a:spcAft>
-                <a:spcPts val="450"/>
-              </a:spcAft>
-              <a:defRPr sz="1100">
-                <a:solidFill>
-                  <a:srgbClr val="141C28"/>
-                </a:solidFill>
-              </a:defRPr>
-            </a:pPr>
-            <a:r>
-              <a:t>•  Điện áp cấp: 3.3V – 5.0V DC (Dòng đỉnh &lt; 120mA).</a:t>
-            </a:r>
-          </a:p>
-          <a:p>
-            <a:pPr>
-              <a:spcAft>
-                <a:spcPts val="450"/>
-              </a:spcAft>
-              <a:defRPr sz="1100">
-                <a:solidFill>
-                  <a:srgbClr val="141C28"/>
-                </a:solidFill>
-              </a:defRPr>
-            </a:pPr>
-            <a:r>
-              <a:t>•  Giao tiếp: UART TTL (57600 bps) qua Header 6 chân.</a:t>
-            </a:r>
-          </a:p>
-          <a:p>
-            <a:pPr>
-              <a:spcAft>
-                <a:spcPts val="450"/>
-              </a:spcAft>
-              <a:defRPr sz="1100">
-                <a:solidFill>
-                  <a:srgbClr val="141C28"/>
-                </a:solidFill>
-              </a:defRPr>
-            </a:pPr>
-            <a:r>
-              <a:t>•  Lưu trữ: Tối đa 127 mẫu vân tay trong Flash nội.</a:t>
-            </a:r>
-          </a:p>
-          <a:p>
-            <a:pPr>
-              <a:spcAft>
-                <a:spcPts val="450"/>
-              </a:spcAft>
-              <a:defRPr sz="1100">
-                <a:solidFill>
-                  <a:srgbClr val="141C28"/>
-                </a:solidFill>
-              </a:defRPr>
-            </a:pPr>
-            <a:r>
-              <a:t>•  Thời gian xử lý ảnh &amp; tìm kiếm: &lt; 1.0 giây.</a:t>
-            </a:r>
-          </a:p>
-        </p:txBody>
-      </p:sp>
-      <p:sp>
-        <p:nvSpPr>
-          <p:cNvPr id="11" name="Rounded Rectangle 10"/>
-          <p:cNvSpPr/>
-          <p:nvPr/>
-        </p:nvSpPr>
-        <p:spPr>
-          <a:xfrm>
-            <a:off x="4334256" y="1234440"/>
-            <a:ext cx="3520440" cy="2331720"/>
-          </a:xfrm>
-          <a:prstGeom prst="roundRect">
-            <a:avLst/>
-          </a:prstGeom>
-          <a:solidFill>
-            <a:srgbClr val="FFFFFF"/>
-          </a:solidFill>
-          <a:ln w="15240">
-            <a:solidFill>
-              <a:srgbClr val="DAE1EB"/>
-            </a:solidFill>
-          </a:ln>
-        </p:spPr>
-        <p:style>
-          <a:lnRef idx="1">
-            <a:schemeClr val="accent1"/>
-          </a:lnRef>
-          <a:fillRef idx="3">
-            <a:schemeClr val="accent1"/>
-          </a:fillRef>
-          <a:effectRef idx="2">
-            <a:schemeClr val="accent1"/>
-          </a:effectRef>
-          <a:fontRef idx="minor">
-            <a:schemeClr val="lt1"/>
-          </a:fontRef>
-        </p:style>
-        <p:txBody>
-          <a:bodyPr rtlCol="0" anchor="ctr"/>
-          <a:lstStyle/>
-          <a:p>
-            <a:pPr algn="ctr"/>
-          </a:p>
-        </p:txBody>
-      </p:sp>
       <p:pic>
         <p:nvPicPr>
-          <p:cNvPr id="12" name="Picture 11" descr="image3.jpg"/>
-          <p:cNvPicPr>
-            <a:picLocks noChangeAspect="1"/>
-          </p:cNvPicPr>
-          <p:nvPr/>
-        </p:nvPicPr>
-        <p:blipFill>
-          <a:blip r:embed="rId3"/>
-          <a:stretch>
-            <a:fillRect/>
-          </a:stretch>
-        </p:blipFill>
-        <p:spPr>
-          <a:xfrm>
-            <a:off x="5212080" y="1344168"/>
-            <a:ext cx="1764792" cy="1764792"/>
-          </a:xfrm>
-          <a:prstGeom prst="rect">
-            <a:avLst/>
-          </a:prstGeom>
-        </p:spPr>
-      </p:pic>
-      <p:sp>
-        <p:nvSpPr>
-          <p:cNvPr id="13" name="TextBox 12"/>
-          <p:cNvSpPr txBox="1"/>
-          <p:nvPr/>
-        </p:nvSpPr>
-        <p:spPr>
-          <a:xfrm>
-            <a:off x="4443984" y="3182112"/>
-            <a:ext cx="3300984" cy="347472"/>
-          </a:xfrm>
-          <a:prstGeom prst="rect">
-            <a:avLst/>
-          </a:prstGeom>
-          <a:noFill/>
-        </p:spPr>
-        <p:txBody>
-          <a:bodyPr wrap="square">
-            <a:spAutoFit/>
-          </a:bodyPr>
-          <a:lstStyle/>
-          <a:p>
-            <a:pPr algn="ctr">
-              <a:defRPr sz="1000" b="1">
-                <a:solidFill>
-                  <a:srgbClr val="0B2347"/>
-                </a:solidFill>
-              </a:defRPr>
-            </a:pPr>
-            <a:r>
-              <a:t>Module RFID RC522 13.56MHz + Thẻ S50 (Đã mua)</a:t>
-            </a:r>
-          </a:p>
-        </p:txBody>
-      </p:sp>
-      <p:sp>
-        <p:nvSpPr>
-          <p:cNvPr id="14" name="Rounded Rectangle 13"/>
-          <p:cNvSpPr/>
-          <p:nvPr/>
-        </p:nvSpPr>
-        <p:spPr>
-          <a:xfrm>
-            <a:off x="4334256" y="3675887"/>
-            <a:ext cx="3520440" cy="2606040"/>
-          </a:xfrm>
-          <a:prstGeom prst="roundRect">
-            <a:avLst/>
-          </a:prstGeom>
-          <a:solidFill>
-            <a:srgbClr val="FFFFFF"/>
-          </a:solidFill>
-          <a:ln w="19050">
-            <a:solidFill>
-              <a:srgbClr val="10559A"/>
-            </a:solidFill>
-          </a:ln>
-        </p:spPr>
-        <p:style>
-          <a:lnRef idx="1">
-            <a:schemeClr val="accent1"/>
-          </a:lnRef>
-          <a:fillRef idx="3">
-            <a:schemeClr val="accent1"/>
-          </a:fillRef>
-          <a:effectRef idx="2">
-            <a:schemeClr val="accent1"/>
-          </a:effectRef>
-          <a:fontRef idx="minor">
-            <a:schemeClr val="lt1"/>
-          </a:fontRef>
-        </p:style>
-        <p:txBody>
-          <a:bodyPr rtlCol="0" anchor="ctr"/>
-          <a:lstStyle/>
-          <a:p>
-            <a:pPr algn="ctr"/>
-          </a:p>
-        </p:txBody>
-      </p:sp>
-      <p:sp>
-        <p:nvSpPr>
-          <p:cNvPr id="15" name="TextBox 14"/>
-          <p:cNvSpPr txBox="1"/>
-          <p:nvPr/>
-        </p:nvSpPr>
-        <p:spPr>
-          <a:xfrm>
-            <a:off x="4535424" y="3840479"/>
-            <a:ext cx="3118104" cy="2313432"/>
-          </a:xfrm>
-          <a:prstGeom prst="rect">
-            <a:avLst/>
-          </a:prstGeom>
-          <a:noFill/>
-        </p:spPr>
-        <p:txBody>
-          <a:bodyPr wrap="square" lIns="0" tIns="0" rIns="0" bIns="0">
-            <a:spAutoFit/>
-          </a:bodyPr>
-          <a:lstStyle/>
-          <a:p>
-            <a:pPr>
-              <a:spcAft>
-                <a:spcPts val="300"/>
-              </a:spcAft>
-              <a:defRPr sz="1450" b="1">
-                <a:solidFill>
-                  <a:srgbClr val="10559A"/>
-                </a:solidFill>
-              </a:defRPr>
-            </a:pPr>
-            <a:r>
-              <a:t>Thông số Datasheet RC522</a:t>
-            </a:r>
-          </a:p>
-          <a:p>
-            <a:pPr>
-              <a:spcAft>
-                <a:spcPts val="450"/>
-              </a:spcAft>
-              <a:defRPr sz="1100">
-                <a:solidFill>
-                  <a:srgbClr val="141C28"/>
-                </a:solidFill>
-              </a:defRPr>
-            </a:pPr>
-            <a:r>
-              <a:t>•  Nguồn cấp bắt buộc: 3.3V DC (Dòng 13 – 26mA).</a:t>
-            </a:r>
-          </a:p>
-          <a:p>
-            <a:pPr>
-              <a:spcAft>
-                <a:spcPts val="450"/>
-              </a:spcAft>
-              <a:defRPr sz="1100">
-                <a:solidFill>
-                  <a:srgbClr val="141C28"/>
-                </a:solidFill>
-              </a:defRPr>
-            </a:pPr>
-            <a:r>
-              <a:t>•  Tần số hoạt động: 13.56 MHz (Đọc thẻ S50 &amp; NFC).</a:t>
-            </a:r>
-          </a:p>
-          <a:p>
-            <a:pPr>
-              <a:spcAft>
-                <a:spcPts val="450"/>
-              </a:spcAft>
-              <a:defRPr sz="1100">
-                <a:solidFill>
-                  <a:srgbClr val="141C28"/>
-                </a:solidFill>
-              </a:defRPr>
-            </a:pPr>
-            <a:r>
-              <a:t>•  Giao tiếp: Chuẩn SPI tốc độ cao (10 Mbps).</a:t>
-            </a:r>
-          </a:p>
-          <a:p>
-            <a:pPr>
-              <a:spcAft>
-                <a:spcPts val="450"/>
-              </a:spcAft>
-              <a:defRPr sz="1100">
-                <a:solidFill>
-                  <a:srgbClr val="141C28"/>
-                </a:solidFill>
-              </a:defRPr>
-            </a:pPr>
-            <a:r>
-              <a:t>•  Khoảng cách nhận diện thẻ: 0 – 30 mm.</a:t>
-            </a:r>
-          </a:p>
-        </p:txBody>
-      </p:sp>
-      <p:sp>
-        <p:nvSpPr>
-          <p:cNvPr id="16" name="Rounded Rectangle 15"/>
-          <p:cNvSpPr/>
-          <p:nvPr/>
-        </p:nvSpPr>
-        <p:spPr>
-          <a:xfrm>
-            <a:off x="8074152" y="1234440"/>
-            <a:ext cx="3520440" cy="2331720"/>
-          </a:xfrm>
-          <a:prstGeom prst="roundRect">
-            <a:avLst/>
-          </a:prstGeom>
-          <a:solidFill>
-            <a:srgbClr val="FFFFFF"/>
-          </a:solidFill>
-          <a:ln w="15240">
-            <a:solidFill>
-              <a:srgbClr val="DAE1EB"/>
-            </a:solidFill>
-          </a:ln>
-        </p:spPr>
-        <p:style>
-          <a:lnRef idx="1">
-            <a:schemeClr val="accent1"/>
-          </a:lnRef>
-          <a:fillRef idx="3">
-            <a:schemeClr val="accent1"/>
-          </a:fillRef>
-          <a:effectRef idx="2">
-            <a:schemeClr val="accent1"/>
-          </a:effectRef>
-          <a:fontRef idx="minor">
-            <a:schemeClr val="lt1"/>
-          </a:fontRef>
-        </p:style>
-        <p:txBody>
-          <a:bodyPr rtlCol="0" anchor="ctr"/>
-          <a:lstStyle/>
-          <a:p>
-            <a:pPr algn="ctr"/>
-          </a:p>
-        </p:txBody>
-      </p:sp>
-      <p:pic>
-        <p:nvPicPr>
-          <p:cNvPr id="17" name="Picture 16" descr="image4.jpg"/>
+          <p:cNvPr id="14" name="Picture 13" descr="image4.jpg"/>
           <p:cNvPicPr>
             <a:picLocks noChangeAspect="1"/>
           </p:cNvPicPr>
@@ -5484,8 +4342,8 @@
         </p:blipFill>
         <p:spPr>
           <a:xfrm>
-            <a:off x="8951976" y="1344168"/>
-            <a:ext cx="1764792" cy="1764792"/>
+            <a:off x="8919972" y="1444752"/>
+            <a:ext cx="1728216" cy="1728216"/>
           </a:xfrm>
           <a:prstGeom prst="rect">
             <a:avLst/>
@@ -5494,14 +4352,14 @@
       </p:pic>
       <p:sp>
         <p:nvSpPr>
-          <p:cNvPr id="18" name="TextBox 17"/>
+          <p:cNvPr id="15" name="TextBox 14"/>
           <p:cNvSpPr txBox="1"/>
           <p:nvPr/>
         </p:nvSpPr>
         <p:spPr>
           <a:xfrm>
-            <a:off x="8183880" y="3182112"/>
-            <a:ext cx="3300984" cy="347472"/>
+            <a:off x="8119872" y="3246120"/>
+            <a:ext cx="3328416" cy="320040"/>
           </a:xfrm>
           <a:prstGeom prst="rect">
             <a:avLst/>
@@ -5509,79 +4367,35 @@
           <a:noFill/>
         </p:spPr>
         <p:txBody>
-          <a:bodyPr wrap="square">
+          <a:bodyPr wrap="none" lIns="0" tIns="0" rIns="0" bIns="0">
             <a:spAutoFit/>
           </a:bodyPr>
           <a:lstStyle/>
           <a:p>
             <a:pPr algn="ctr">
-              <a:defRPr sz="1000" b="1">
-                <a:solidFill>
-                  <a:srgbClr val="0B2347"/>
-                </a:solidFill>
-              </a:defRPr>
-            </a:pPr>
-            <a:r>
-              <a:t>Bàn phím cứng ma trận có nắp đậy (Đã mua)</a:t>
-            </a:r>
-          </a:p>
-        </p:txBody>
-      </p:sp>
-      <p:sp>
-        <p:nvSpPr>
-          <p:cNvPr id="19" name="Rounded Rectangle 18"/>
-          <p:cNvSpPr/>
-          <p:nvPr/>
-        </p:nvSpPr>
-        <p:spPr>
-          <a:xfrm>
-            <a:off x="8074152" y="3675887"/>
-            <a:ext cx="3520440" cy="2606040"/>
-          </a:xfrm>
-          <a:prstGeom prst="roundRect">
-            <a:avLst/>
-          </a:prstGeom>
-          <a:solidFill>
-            <a:srgbClr val="F6F8FB"/>
-          </a:solidFill>
-          <a:ln w="12700">
-            <a:solidFill>
-              <a:srgbClr val="DAE1EB"/>
-            </a:solidFill>
-          </a:ln>
-        </p:spPr>
-        <p:style>
-          <a:lnRef idx="1">
-            <a:schemeClr val="accent1"/>
-          </a:lnRef>
-          <a:fillRef idx="3">
-            <a:schemeClr val="accent1"/>
-          </a:fillRef>
-          <a:effectRef idx="2">
-            <a:schemeClr val="accent1"/>
-          </a:effectRef>
-          <a:fontRef idx="minor">
-            <a:schemeClr val="lt1"/>
-          </a:fontRef>
-        </p:style>
-        <p:txBody>
-          <a:bodyPr rtlCol="0" anchor="ctr"/>
-          <a:lstStyle/>
-          <a:p>
-            <a:pPr algn="ctr"/>
-          </a:p>
-        </p:txBody>
-      </p:sp>
-      <p:sp>
-        <p:nvSpPr>
-          <p:cNvPr id="20" name="TextBox 19"/>
+              <a:defRPr sz="1100" b="1">
+                <a:solidFill>
+                  <a:srgbClr val="646E7D"/>
+                </a:solidFill>
+                <a:latin typeface="Arial"/>
+              </a:defRPr>
+            </a:pPr>
+            <a:r>
+              <a:t>Bàn phím ma trận 4x4 có nắp</a:t>
+            </a:r>
+          </a:p>
+        </p:txBody>
+      </p:sp>
+      <p:sp>
+        <p:nvSpPr>
+          <p:cNvPr id="16" name="TextBox 15"/>
           <p:cNvSpPr txBox="1"/>
           <p:nvPr/>
         </p:nvSpPr>
         <p:spPr>
           <a:xfrm>
-            <a:off x="8275320" y="3840479"/>
-            <a:ext cx="3118104" cy="2313432"/>
+            <a:off x="8119872" y="3749039"/>
+            <a:ext cx="3328416" cy="2286000"/>
           </a:xfrm>
           <a:prstGeom prst="rect">
             <a:avLst/>
@@ -5589,68 +4403,44 @@
           <a:noFill/>
         </p:spPr>
         <p:txBody>
-          <a:bodyPr wrap="square" lIns="0" tIns="0" rIns="0" bIns="0">
+          <a:bodyPr wrap="square">
             <a:spAutoFit/>
           </a:bodyPr>
           <a:lstStyle/>
           <a:p>
             <a:pPr>
-              <a:spcAft>
-                <a:spcPts val="300"/>
-              </a:spcAft>
-              <a:defRPr sz="1450" b="1">
-                <a:solidFill>
-                  <a:srgbClr val="0B2347"/>
-                </a:solidFill>
-              </a:defRPr>
-            </a:pPr>
-            <a:r>
-              <a:t>Keypad 4x4, LCD I2C &amp; Khóa 12V</a:t>
-            </a:r>
-          </a:p>
-          <a:p>
-            <a:pPr>
-              <a:spcAft>
-                <a:spcPts val="450"/>
-              </a:spcAft>
-              <a:defRPr sz="1100">
-                <a:solidFill>
-                  <a:srgbClr val="141C28"/>
-                </a:solidFill>
-              </a:defRPr>
-            </a:pPr>
-            <a:r>
-              <a:t>•  Bàn phím ma trận 4x4: Phím vật lý độ nảy cao, có nắp che chống bụi, quét 8 chân Hàng – Cột về PCB.</a:t>
-            </a:r>
-          </a:p>
-          <a:p>
-            <a:pPr>
-              <a:spcAft>
-                <a:spcPts val="450"/>
-              </a:spcAft>
-              <a:defRPr sz="1100">
-                <a:solidFill>
-                  <a:srgbClr val="141C28"/>
-                </a:solidFill>
-              </a:defRPr>
-            </a:pPr>
-            <a:r>
-              <a:t>•  Màn hình LCD 16x2 I2C: Điện áp 5V, địa chỉ 0x27.</a:t>
-            </a:r>
-          </a:p>
-          <a:p>
-            <a:pPr>
-              <a:spcAft>
-                <a:spcPts val="450"/>
-              </a:spcAft>
-              <a:defRPr sz="1100">
-                <a:solidFill>
-                  <a:srgbClr val="141C28"/>
-                </a:solidFill>
-              </a:defRPr>
-            </a:pPr>
-            <a:r>
-              <a:t>•  Khóa chốt điện từ 12V: Dòng kích 0.8A – 1.2A, đóng mở qua Relay/MOSFET có Diode dập xung.</a:t>
+              <a:defRPr b="1" sz="1500">
+                <a:solidFill>
+                  <a:srgbClr val="0E52A0"/>
+                </a:solidFill>
+              </a:defRPr>
+            </a:pPr>
+            <a:r>
+              <a:t>Bàn phím 4x4 &amp; Khóa chốt 12V</a:t>
+            </a:r>
+          </a:p>
+          <a:p>
+            <a:pPr>
+              <a:defRPr sz="1300">
+                <a:solidFill>
+                  <a:srgbClr val="141821"/>
+                </a:solidFill>
+              </a:defRPr>
+            </a:pPr>
+            <a:r>
+              <a:t>• Bàn phím 4x4: Phím cứng có nắp đậy, quét 8 chân Hàng - Cột</a:t>
+            </a:r>
+            <a:br/>
+            <a:r>
+              <a:t>• Màn hình: LCD 16x2 giao tiếp I2C 2 dây (SDA/SCL)</a:t>
+            </a:r>
+            <a:br/>
+            <a:r>
+              <a:t>• Khóa chốt 12V: Kích mở qua Relay/MOSFET</a:t>
+            </a:r>
+            <a:br/>
+            <a:r>
+              <a:t>• Trạng thái: Đã có đủ linh kiện</a:t>
             </a:r>
           </a:p>
         </p:txBody>
@@ -5675,57 +4465,14 @@
       <p:grpSpPr/>
       <p:sp>
         <p:nvSpPr>
-          <p:cNvPr id="2" name="Rectangle 1"/>
-          <p:cNvSpPr/>
-          <p:nvPr/>
-        </p:nvSpPr>
-        <p:spPr>
-          <a:xfrm>
-            <a:off x="0" y="0"/>
-            <a:ext cx="12191695" cy="100584"/>
-          </a:xfrm>
-          <a:prstGeom prst="rect">
-            <a:avLst/>
-          </a:prstGeom>
-          <a:solidFill>
-            <a:srgbClr val="10559A"/>
-          </a:solidFill>
-          <a:ln>
-            <a:noFill/>
-          </a:ln>
-        </p:spPr>
-        <p:style>
-          <a:lnRef idx="1">
-            <a:schemeClr val="accent1"/>
-          </a:lnRef>
-          <a:fillRef idx="3">
-            <a:schemeClr val="accent1"/>
-          </a:fillRef>
-          <a:effectRef idx="2">
-            <a:schemeClr val="accent1"/>
-          </a:effectRef>
-          <a:fontRef idx="minor">
-            <a:schemeClr val="lt1"/>
-          </a:fontRef>
-        </p:style>
-        <p:txBody>
-          <a:bodyPr rtlCol="0" anchor="ctr"/>
-          <a:lstStyle/>
-          <a:p>
-            <a:pPr algn="ctr"/>
-          </a:p>
-        </p:txBody>
-      </p:sp>
-      <p:sp>
-        <p:nvSpPr>
-          <p:cNvPr id="3" name="TextBox 2"/>
+          <p:cNvPr id="2" name="TextBox 1"/>
           <p:cNvSpPr txBox="1"/>
           <p:nvPr/>
         </p:nvSpPr>
         <p:spPr>
           <a:xfrm>
-            <a:off x="594360" y="292608"/>
-            <a:ext cx="9601200" cy="274320"/>
+            <a:off x="731520" y="365760"/>
+            <a:ext cx="9144000" cy="274320"/>
           </a:xfrm>
           <a:prstGeom prst="rect">
             <a:avLst/>
@@ -5739,28 +4486,29 @@
           <a:lstStyle/>
           <a:p>
             <a:pPr>
-              <a:defRPr sz="1050" b="1">
-                <a:solidFill>
-                  <a:srgbClr val="10559A"/>
-                </a:solidFill>
-              </a:defRPr>
-            </a:pPr>
-            <a:r>
-              <a:t>BÁO CÁO TIẾN ĐỘ GIỮA KỲ — ĐỒ ÁN CƠ ĐIỆN TỬ (NHÓM 13)</a:t>
-            </a:r>
-          </a:p>
-        </p:txBody>
-      </p:sp>
-      <p:sp>
-        <p:nvSpPr>
-          <p:cNvPr id="4" name="TextBox 3"/>
+              <a:defRPr sz="1100" b="1">
+                <a:solidFill>
+                  <a:srgbClr val="0E52A0"/>
+                </a:solidFill>
+                <a:latin typeface="Arial"/>
+              </a:defRPr>
+            </a:pPr>
+            <a:r>
+              <a:t>BÁO CÁO GIỮA KỲ — ĐỒ ÁN CƠ ĐIỆN TỬ (NHÓM 13)</a:t>
+            </a:r>
+          </a:p>
+        </p:txBody>
+      </p:sp>
+      <p:sp>
+        <p:nvSpPr>
+          <p:cNvPr id="3" name="TextBox 2"/>
           <p:cNvSpPr txBox="1"/>
           <p:nvPr/>
         </p:nvSpPr>
         <p:spPr>
           <a:xfrm>
-            <a:off x="594360" y="566928"/>
-            <a:ext cx="10515600" cy="502920"/>
+            <a:off x="731520" y="658368"/>
+            <a:ext cx="10515600" cy="548640"/>
           </a:xfrm>
           <a:prstGeom prst="rect">
             <a:avLst/>
@@ -5774,28 +4522,29 @@
           <a:lstStyle/>
           <a:p>
             <a:pPr>
-              <a:defRPr sz="2100" b="1">
-                <a:solidFill>
-                  <a:srgbClr val="0B2347"/>
-                </a:solidFill>
-              </a:defRPr>
-            </a:pPr>
-            <a:r>
-              <a:t>3. Nghiên cứu giao thức kết nối &amp; Quy hoạch sơ đồ chân ESP32</a:t>
-            </a:r>
-          </a:p>
-        </p:txBody>
-      </p:sp>
-      <p:sp>
-        <p:nvSpPr>
-          <p:cNvPr id="5" name="TextBox 4"/>
+              <a:defRPr sz="2200" b="1">
+                <a:solidFill>
+                  <a:srgbClr val="141821"/>
+                </a:solidFill>
+                <a:latin typeface="Arial"/>
+              </a:defRPr>
+            </a:pPr>
+            <a:r>
+              <a:t>3. Sơ đồ kết nối chân ESP32 &amp; Giải pháp chống nhiễu</a:t>
+            </a:r>
+          </a:p>
+        </p:txBody>
+      </p:sp>
+      <p:sp>
+        <p:nvSpPr>
+          <p:cNvPr id="4" name="TextBox 3"/>
           <p:cNvSpPr txBox="1"/>
           <p:nvPr/>
         </p:nvSpPr>
         <p:spPr>
           <a:xfrm>
-            <a:off x="594360" y="6446520"/>
-            <a:ext cx="10972800" cy="274320"/>
+            <a:off x="731520" y="6309360"/>
+            <a:ext cx="10698480" cy="274320"/>
           </a:xfrm>
           <a:prstGeom prst="rect">
             <a:avLst/>
@@ -5803,79 +4552,35 @@
           <a:noFill/>
         </p:spPr>
         <p:txBody>
-          <a:bodyPr wrap="none">
+          <a:bodyPr wrap="none" lIns="0" tIns="0" rIns="0" bIns="0">
             <a:spAutoFit/>
           </a:bodyPr>
           <a:lstStyle/>
           <a:p>
             <a:pPr>
-              <a:defRPr sz="950">
-                <a:solidFill>
-                  <a:srgbClr val="5F6C7D"/>
-                </a:solidFill>
-              </a:defRPr>
-            </a:pPr>
-            <a:r>
-              <a:t>Trường Đại học Công nghệ – ĐHQGHN  |  Nhóm 13: Nguyễn Tuấn Sơn – Vũ Hữu Hoạt                                                                                     Slide 4 / 10</a:t>
-            </a:r>
-          </a:p>
-        </p:txBody>
-      </p:sp>
-      <p:sp>
-        <p:nvSpPr>
-          <p:cNvPr id="6" name="Rounded Rectangle 5"/>
-          <p:cNvSpPr/>
-          <p:nvPr/>
-        </p:nvSpPr>
-        <p:spPr>
-          <a:xfrm>
-            <a:off x="594360" y="1234440"/>
-            <a:ext cx="5669280" cy="5029200"/>
-          </a:xfrm>
-          <a:prstGeom prst="roundRect">
-            <a:avLst/>
-          </a:prstGeom>
-          <a:solidFill>
-            <a:srgbClr val="F6F8FB"/>
-          </a:solidFill>
-          <a:ln w="12700">
-            <a:solidFill>
-              <a:srgbClr val="DAE1EB"/>
-            </a:solidFill>
-          </a:ln>
-        </p:spPr>
-        <p:style>
-          <a:lnRef idx="1">
-            <a:schemeClr val="accent1"/>
-          </a:lnRef>
-          <a:fillRef idx="3">
-            <a:schemeClr val="accent1"/>
-          </a:fillRef>
-          <a:effectRef idx="2">
-            <a:schemeClr val="accent1"/>
-          </a:effectRef>
-          <a:fontRef idx="minor">
-            <a:schemeClr val="lt1"/>
-          </a:fontRef>
-        </p:style>
-        <p:txBody>
-          <a:bodyPr rtlCol="0" anchor="ctr"/>
-          <a:lstStyle/>
-          <a:p>
-            <a:pPr algn="ctr"/>
-          </a:p>
-        </p:txBody>
-      </p:sp>
-      <p:sp>
-        <p:nvSpPr>
-          <p:cNvPr id="7" name="TextBox 6"/>
+              <a:defRPr sz="1000">
+                <a:solidFill>
+                  <a:srgbClr val="646E7D"/>
+                </a:solidFill>
+                <a:latin typeface="Arial"/>
+              </a:defRPr>
+            </a:pPr>
+            <a:r>
+              <a:t>Đề tài Cửa bảo mật — Nguyễn Tuấn Sơn, Vũ Hữu Hoạt (UET)                                                                     Trang 4 / 8</a:t>
+            </a:r>
+          </a:p>
+        </p:txBody>
+      </p:sp>
+      <p:sp>
+        <p:nvSpPr>
+          <p:cNvPr id="5" name="TextBox 4"/>
           <p:cNvSpPr txBox="1"/>
           <p:nvPr/>
         </p:nvSpPr>
         <p:spPr>
           <a:xfrm>
-            <a:off x="795528" y="1399032"/>
-            <a:ext cx="5266944" cy="4736592"/>
+            <a:off x="731520" y="1371600"/>
+            <a:ext cx="5303520" cy="4572000"/>
           </a:xfrm>
           <a:prstGeom prst="rect">
             <a:avLst/>
@@ -5883,247 +4588,120 @@
           <a:noFill/>
         </p:spPr>
         <p:txBody>
-          <a:bodyPr wrap="square" lIns="0" tIns="0" rIns="0" bIns="0">
+          <a:bodyPr wrap="square">
             <a:spAutoFit/>
           </a:bodyPr>
           <a:lstStyle/>
           <a:p>
             <a:pPr>
               <a:spcAft>
-                <a:spcPts val="300"/>
+                <a:spcPts val="1000"/>
               </a:spcAft>
-              <a:defRPr sz="1450" b="1">
-                <a:solidFill>
-                  <a:srgbClr val="0B2347"/>
-                </a:solidFill>
-              </a:defRPr>
-            </a:pPr>
-            <a:r>
-              <a:t>Quy hoạch Sơ đồ chân (Pinout ESP32) đồng bộ PCB</a:t>
+              <a:defRPr b="1" sz="1600">
+                <a:solidFill>
+                  <a:srgbClr val="0E52A0"/>
+                </a:solidFill>
+              </a:defRPr>
+            </a:pPr>
+            <a:r>
+              <a:t>Phân bổ chân GPIO trên ESP32:</a:t>
             </a:r>
           </a:p>
           <a:p>
             <a:pPr>
               <a:spcAft>
-                <a:spcPts val="700"/>
+                <a:spcPts val="800"/>
               </a:spcAft>
-              <a:defRPr sz="1050">
-                <a:solidFill>
-                  <a:srgbClr val="5F6C7D"/>
-                </a:solidFill>
-              </a:defRPr>
-            </a:pPr>
-            <a:r>
-              <a:t>Đã kiểm chứng tránh toàn bộ chân cấm (Strapping Pins &amp; Input-Only Pins)</a:t>
+              <a:defRPr sz="1350">
+                <a:solidFill>
+                  <a:srgbClr val="141821"/>
+                </a:solidFill>
+              </a:defRPr>
+            </a:pPr>
+            <a:r>
+              <a:t>• Vân tay AS608 (UART2): RX -&gt; GPIO 16, TX -&gt; GPIO 17</a:t>
             </a:r>
           </a:p>
           <a:p>
             <a:pPr>
               <a:spcAft>
-                <a:spcPts val="450"/>
+                <a:spcPts val="800"/>
               </a:spcAft>
-              <a:defRPr sz="1100">
-                <a:solidFill>
-                  <a:srgbClr val="141C28"/>
-                </a:solidFill>
-              </a:defRPr>
-            </a:pPr>
-            <a:r>
-              <a:t>•  1. Cảm biến vân tay AS608 (Chuẩn UART2 - 57600 bps):</a:t>
+              <a:defRPr sz="1350">
+                <a:solidFill>
+                  <a:srgbClr val="141821"/>
+                </a:solidFill>
+              </a:defRPr>
+            </a:pPr>
+            <a:r>
+              <a:t>• RFID RC522 (SPI): SS:5, SCK:18, MOSI:23, MISO:19, RST:4</a:t>
             </a:r>
           </a:p>
           <a:p>
             <a:pPr>
               <a:spcAft>
-                <a:spcPts val="450"/>
+                <a:spcPts val="800"/>
               </a:spcAft>
-              <a:defRPr sz="1100">
-                <a:solidFill>
-                  <a:srgbClr val="141C28"/>
-                </a:solidFill>
-              </a:defRPr>
-            </a:pPr>
-            <a:r>
-              <a:t>•      • Chân TX (AS608) -&gt; GPIO 16 (RX2)  |  Chân RX (AS608) -&gt; GPIO 17 (TX2)</a:t>
+              <a:defRPr sz="1350">
+                <a:solidFill>
+                  <a:srgbClr val="141821"/>
+                </a:solidFill>
+              </a:defRPr>
+            </a:pPr>
+            <a:r>
+              <a:t>• Màn hình LCD 16x2 (I2C): SDA -&gt; GPIO 21, SCL -&gt; GPIO 22</a:t>
             </a:r>
           </a:p>
           <a:p>
             <a:pPr>
               <a:spcAft>
-                <a:spcPts val="450"/>
+                <a:spcPts val="800"/>
               </a:spcAft>
-              <a:defRPr sz="1100">
-                <a:solidFill>
-                  <a:srgbClr val="141C28"/>
-                </a:solidFill>
-              </a:defRPr>
-            </a:pPr>
-            <a:r>
-              <a:t>•  2. Module đọc thẻ RFID RC522 (Chuẩn SPI - Nguồn 3.3V):</a:t>
+              <a:defRPr sz="1350">
+                <a:solidFill>
+                  <a:srgbClr val="141821"/>
+                </a:solidFill>
+              </a:defRPr>
+            </a:pPr>
+            <a:r>
+              <a:t>• Khóa chốt điện từ 12V: Điều khiển kích qua GPIO 2</a:t>
             </a:r>
           </a:p>
           <a:p>
             <a:pPr>
               <a:spcAft>
-                <a:spcPts val="450"/>
+                <a:spcPts val="800"/>
               </a:spcAft>
-              <a:defRPr sz="1100">
-                <a:solidFill>
-                  <a:srgbClr val="141C28"/>
-                </a:solidFill>
-              </a:defRPr>
-            </a:pPr>
-            <a:r>
-              <a:t>•      • SDA(SS): GPIO 5 | SCK: GPIO 18 | MOSI: GPIO 23 | MISO: GPIO 19 | RST: GPIO 4</a:t>
-            </a:r>
-          </a:p>
-          <a:p>
-            <a:pPr>
-              <a:spcAft>
-                <a:spcPts val="450"/>
-              </a:spcAft>
-              <a:defRPr sz="1100">
-                <a:solidFill>
-                  <a:srgbClr val="141C28"/>
-                </a:solidFill>
-              </a:defRPr>
-            </a:pPr>
-            <a:r>
-              <a:t>•  3. Màn hình hiển thị LCD 16x2 (Chuẩn I2C - Địa chỉ 0x27):</a:t>
-            </a:r>
-          </a:p>
-          <a:p>
-            <a:pPr>
-              <a:spcAft>
-                <a:spcPts val="450"/>
-              </a:spcAft>
-              <a:defRPr sz="1100">
-                <a:solidFill>
-                  <a:srgbClr val="141C28"/>
-                </a:solidFill>
-              </a:defRPr>
-            </a:pPr>
-            <a:r>
-              <a:t>•      • SDA -&gt; GPIO 21  |  SCL -&gt; GPIO 22</a:t>
-            </a:r>
-          </a:p>
-          <a:p>
-            <a:pPr>
-              <a:spcAft>
-                <a:spcPts val="450"/>
-              </a:spcAft>
-              <a:defRPr sz="1100">
-                <a:solidFill>
-                  <a:srgbClr val="141C28"/>
-                </a:solidFill>
-              </a:defRPr>
-            </a:pPr>
-            <a:r>
-              <a:t>•  4. Cơ cấu chấp hành Khóa chốt điện từ 12V:</a:t>
-            </a:r>
-          </a:p>
-          <a:p>
-            <a:pPr>
-              <a:spcAft>
-                <a:spcPts val="450"/>
-              </a:spcAft>
-              <a:defRPr sz="1100">
-                <a:solidFill>
-                  <a:srgbClr val="141C28"/>
-                </a:solidFill>
-              </a:defRPr>
-            </a:pPr>
-            <a:r>
-              <a:t>•      • Tín hiệu kích Relay/MOSFET -&gt; GPIO 2 (Mức HIGH kích mở khóa)</a:t>
-            </a:r>
-          </a:p>
-          <a:p>
-            <a:pPr>
-              <a:spcAft>
-                <a:spcPts val="450"/>
-              </a:spcAft>
-              <a:defRPr sz="1100">
-                <a:solidFill>
-                  <a:srgbClr val="141C28"/>
-                </a:solidFill>
-              </a:defRPr>
-            </a:pPr>
-            <a:r>
-              <a:t>•  5. Bàn phím ma trận Keypad 4x4 (8 chân GPIO):</a:t>
-            </a:r>
-          </a:p>
-          <a:p>
-            <a:pPr>
-              <a:spcAft>
-                <a:spcPts val="450"/>
-              </a:spcAft>
-              <a:defRPr sz="1100">
-                <a:solidFill>
-                  <a:srgbClr val="141C28"/>
-                </a:solidFill>
-              </a:defRPr>
-            </a:pPr>
-            <a:r>
-              <a:t>•      • 4 Hàng (R1 -&gt; R4): GPIO 13, 12, 14, 27  |  4 Cột (C1 -&gt; C4): GPIO 26, 25, 33, 32</a:t>
-            </a:r>
-          </a:p>
-        </p:txBody>
-      </p:sp>
-      <p:sp>
-        <p:nvSpPr>
-          <p:cNvPr id="8" name="Rounded Rectangle 7"/>
-          <p:cNvSpPr/>
-          <p:nvPr/>
-        </p:nvSpPr>
-        <p:spPr>
-          <a:xfrm>
-            <a:off x="6446520" y="1234440"/>
-            <a:ext cx="5148072" cy="5029200"/>
-          </a:xfrm>
-          <a:prstGeom prst="roundRect">
-            <a:avLst/>
-          </a:prstGeom>
-          <a:solidFill>
-            <a:srgbClr val="FFFFFF"/>
-          </a:solidFill>
-          <a:ln w="19050">
-            <a:solidFill>
-              <a:srgbClr val="10559A"/>
-            </a:solidFill>
-          </a:ln>
-        </p:spPr>
-        <p:style>
-          <a:lnRef idx="1">
-            <a:schemeClr val="accent1"/>
-          </a:lnRef>
-          <a:fillRef idx="3">
-            <a:schemeClr val="accent1"/>
-          </a:fillRef>
-          <a:effectRef idx="2">
-            <a:schemeClr val="accent1"/>
-          </a:effectRef>
-          <a:fontRef idx="minor">
-            <a:schemeClr val="lt1"/>
-          </a:fontRef>
-        </p:style>
-        <p:txBody>
-          <a:bodyPr rtlCol="0" anchor="ctr"/>
-          <a:lstStyle/>
-          <a:p>
-            <a:pPr algn="ctr"/>
-          </a:p>
-        </p:txBody>
-      </p:sp>
-      <p:sp>
-        <p:nvSpPr>
-          <p:cNvPr id="9" name="TextBox 8"/>
+              <a:defRPr sz="1350">
+                <a:solidFill>
+                  <a:srgbClr val="141821"/>
+                </a:solidFill>
+              </a:defRPr>
+            </a:pPr>
+            <a:r>
+              <a:t>• Bàn phím ma trận 4x4 (8 chân GPIO):</a:t>
+            </a:r>
+            <a:br/>
+            <a:r>
+              <a:t>   • 4 Hàng (R1-R4): GPIO 13, 12, 14, 27</a:t>
+            </a:r>
+            <a:br/>
+            <a:r>
+              <a:t>   • 4 Cột (C1-C4): GPIO 26, 25, 33, 32</a:t>
+            </a:r>
+          </a:p>
+        </p:txBody>
+      </p:sp>
+      <p:sp>
+        <p:nvSpPr>
+          <p:cNvPr id="6" name="TextBox 5"/>
           <p:cNvSpPr txBox="1"/>
           <p:nvPr/>
         </p:nvSpPr>
         <p:spPr>
           <a:xfrm>
-            <a:off x="6647688" y="1399032"/>
-            <a:ext cx="4745736" cy="4736592"/>
+            <a:off x="6400800" y="1371600"/>
+            <a:ext cx="5029200" cy="4572000"/>
           </a:xfrm>
           <a:prstGeom prst="rect">
             <a:avLst/>
@@ -6131,83 +4709,104 @@
           <a:noFill/>
         </p:spPr>
         <p:txBody>
-          <a:bodyPr wrap="square" lIns="0" tIns="0" rIns="0" bIns="0">
+          <a:bodyPr wrap="square">
             <a:spAutoFit/>
           </a:bodyPr>
           <a:lstStyle/>
           <a:p>
             <a:pPr>
               <a:spcAft>
-                <a:spcPts val="300"/>
+                <a:spcPts val="1000"/>
               </a:spcAft>
-              <a:defRPr sz="1450" b="1">
-                <a:solidFill>
-                  <a:srgbClr val="10559A"/>
-                </a:solidFill>
-              </a:defRPr>
-            </a:pPr>
-            <a:r>
-              <a:t>Giải quyết bài toán kỹ thuật khi nghiên cứu Datasheet</a:t>
+              <a:defRPr b="1" sz="1600">
+                <a:solidFill>
+                  <a:srgbClr val="0E52A0"/>
+                </a:solidFill>
+              </a:defRPr>
+            </a:pPr>
+            <a:r>
+              <a:t>Lưu ý kỹ thuật khi thiết kế mạch:</a:t>
+            </a:r>
+          </a:p>
+          <a:p>
+            <a:pPr>
+              <a:defRPr b="1" sz="1400">
+                <a:solidFill>
+                  <a:srgbClr val="141821"/>
+                </a:solidFill>
+              </a:defRPr>
+            </a:pPr>
+            <a:r>
+              <a:t>• Tránh chân Input-Only của ESP32:</a:t>
             </a:r>
           </a:p>
           <a:p>
             <a:pPr>
               <a:spcAft>
-                <a:spcPts val="700"/>
+                <a:spcPts val="800"/>
               </a:spcAft>
-              <a:defRPr sz="1050">
-                <a:solidFill>
-                  <a:srgbClr val="5F6C7D"/>
-                </a:solidFill>
-              </a:defRPr>
-            </a:pPr>
-            <a:r>
-              <a:t>Đảm bảo tính ổn định công nghiệp khi vận hành thực tế</a:t>
+              <a:defRPr sz="1300">
+                <a:solidFill>
+                  <a:srgbClr val="646E7D"/>
+                </a:solidFill>
+              </a:defRPr>
+            </a:pPr>
+            <a:r>
+              <a:t>   Các chân GPIO 34-39 không có trở kéo lên nội (pull-up). Nhóm đã chọn các chân GPIO 12..33 cho Keypad để quét phím ổn định, không cần hàn thêm trở ngoài.</a:t>
+            </a:r>
+          </a:p>
+          <a:p>
+            <a:pPr>
+              <a:defRPr b="1" sz="1400">
+                <a:solidFill>
+                  <a:srgbClr val="141821"/>
+                </a:solidFill>
+              </a:defRPr>
+            </a:pPr>
+            <a:r>
+              <a:t>• Bảo vệ điện áp 3.3V cho RC522:</a:t>
             </a:r>
           </a:p>
           <a:p>
             <a:pPr>
               <a:spcAft>
-                <a:spcPts val="450"/>
+                <a:spcPts val="800"/>
               </a:spcAft>
-              <a:defRPr sz="1150">
-                <a:solidFill>
-                  <a:srgbClr val="141C28"/>
-                </a:solidFill>
-              </a:defRPr>
-            </a:pPr>
-            <a:r>
-              <a:t>•  Tránh xung đột chân Input-Only (GPIO 34, 35, 36, 39): Các chân này trên ESP32 không có điện trở kéo lên nội (INPUT_PULLUP). Do đó nhóm quy hoạch Keypad 4x4 vào cụm chân 12..33 để quét ma trận ổn định không cần trở ngoài.</a:t>
+              <a:defRPr sz="1300">
+                <a:solidFill>
+                  <a:srgbClr val="646E7D"/>
+                </a:solidFill>
+              </a:defRPr>
+            </a:pPr>
+            <a:r>
+              <a:t>   Module RC522 dùng nguồn 3.3V, cấp 5V sẽ cháy chip. Mạch PCB thiết kế đường nguồn 3.3V riêng biệt.</a:t>
+            </a:r>
+          </a:p>
+          <a:p>
+            <a:pPr>
+              <a:defRPr b="1" sz="1400">
+                <a:solidFill>
+                  <a:srgbClr val="141821"/>
+                </a:solidFill>
+              </a:defRPr>
+            </a:pPr>
+            <a:r>
+              <a:t>• Chống xung ngược từ khóa 12V:</a:t>
             </a:r>
           </a:p>
           <a:p>
             <a:pPr>
               <a:spcAft>
-                <a:spcPts val="450"/>
+                <a:spcPts val="800"/>
               </a:spcAft>
-              <a:defRPr sz="1150">
-                <a:solidFill>
-                  <a:srgbClr val="141C28"/>
-                </a:solidFill>
-              </a:defRPr>
-            </a:pPr>
-            <a:r>
-              <a:t>•  Bảo vệ mức điện áp 3.3V cho RC522: Datasheet MFRC522 quy định chân VCC tối đa 3.6V. Mạch PCB tách đường nguồn 3.3V riêng cho RC522, tách biệt hoàn toàn với đường 5V của LCD và 12V của khóa chốt.</a:t>
-            </a:r>
-          </a:p>
-          <a:p>
-            <a:pPr>
-              <a:spcAft>
-                <a:spcPts val="450"/>
-              </a:spcAft>
-              <a:defRPr sz="1150">
-                <a:solidFill>
-                  <a:srgbClr val="141C28"/>
-                </a:solidFill>
-              </a:defRPr>
-            </a:pPr>
-            <a:r>
-              <a:t>•  Triệt tiêu xung nhiễu cảm ứng từ Khóa chốt 12V: Khi ngắt dòng cuộn hút khóa 12V sẽ sinh ra sức điện động ngược làm treo ESP32. Nhóm bố trí Diode 1N4007 mắc ngược cực song song khóa 12V kết hợp tụ lọc 470uF.</a:t>
+              <a:defRPr sz="1300">
+                <a:solidFill>
+                  <a:srgbClr val="646E7D"/>
+                </a:solidFill>
+              </a:defRPr>
+            </a:pPr>
+            <a:r>
+              <a:t>   Cuộn hút khóa 12V khi ngắt điện sinh ra xung áp ngược làm reset ESP32. Nhóm dùng Diode 1N4007 mắc song song ngược cực khóa kèm tụ lọc 470uF.</a:t>
             </a:r>
           </a:p>
         </p:txBody>
@@ -6232,23 +4831,133 @@
       <p:grpSpPr/>
       <p:sp>
         <p:nvSpPr>
-          <p:cNvPr id="2" name="Rectangle 1"/>
+          <p:cNvPr id="2" name="TextBox 1"/>
+          <p:cNvSpPr txBox="1"/>
+          <p:nvPr/>
+        </p:nvSpPr>
+        <p:spPr>
+          <a:xfrm>
+            <a:off x="731520" y="365760"/>
+            <a:ext cx="9144000" cy="274320"/>
+          </a:xfrm>
+          <a:prstGeom prst="rect">
+            <a:avLst/>
+          </a:prstGeom>
+          <a:noFill/>
+        </p:spPr>
+        <p:txBody>
+          <a:bodyPr wrap="none" lIns="0" tIns="0" rIns="0" bIns="0">
+            <a:spAutoFit/>
+          </a:bodyPr>
+          <a:lstStyle/>
+          <a:p>
+            <a:pPr>
+              <a:defRPr sz="1100" b="1">
+                <a:solidFill>
+                  <a:srgbClr val="0E52A0"/>
+                </a:solidFill>
+                <a:latin typeface="Arial"/>
+              </a:defRPr>
+            </a:pPr>
+            <a:r>
+              <a:t>BÁO CÁO GIỮA KỲ — ĐỒ ÁN CƠ ĐIỆN TỬ (NHÓM 13)</a:t>
+            </a:r>
+          </a:p>
+        </p:txBody>
+      </p:sp>
+      <p:sp>
+        <p:nvSpPr>
+          <p:cNvPr id="3" name="TextBox 2"/>
+          <p:cNvSpPr txBox="1"/>
+          <p:nvPr/>
+        </p:nvSpPr>
+        <p:spPr>
+          <a:xfrm>
+            <a:off x="731520" y="658368"/>
+            <a:ext cx="10515600" cy="548640"/>
+          </a:xfrm>
+          <a:prstGeom prst="rect">
+            <a:avLst/>
+          </a:prstGeom>
+          <a:noFill/>
+        </p:spPr>
+        <p:txBody>
+          <a:bodyPr wrap="none" lIns="0" tIns="0" rIns="0" bIns="0">
+            <a:spAutoFit/>
+          </a:bodyPr>
+          <a:lstStyle/>
+          <a:p>
+            <a:pPr>
+              <a:defRPr sz="2200" b="1">
+                <a:solidFill>
+                  <a:srgbClr val="141821"/>
+                </a:solidFill>
+                <a:latin typeface="Arial"/>
+              </a:defRPr>
+            </a:pPr>
+            <a:r>
+              <a:t>4. Kết quả thiết kế Mạch in PCB (Vũ Hữu Hoạt)</a:t>
+            </a:r>
+          </a:p>
+        </p:txBody>
+      </p:sp>
+      <p:sp>
+        <p:nvSpPr>
+          <p:cNvPr id="4" name="TextBox 3"/>
+          <p:cNvSpPr txBox="1"/>
+          <p:nvPr/>
+        </p:nvSpPr>
+        <p:spPr>
+          <a:xfrm>
+            <a:off x="731520" y="6309360"/>
+            <a:ext cx="10698480" cy="274320"/>
+          </a:xfrm>
+          <a:prstGeom prst="rect">
+            <a:avLst/>
+          </a:prstGeom>
+          <a:noFill/>
+        </p:spPr>
+        <p:txBody>
+          <a:bodyPr wrap="none" lIns="0" tIns="0" rIns="0" bIns="0">
+            <a:spAutoFit/>
+          </a:bodyPr>
+          <a:lstStyle/>
+          <a:p>
+            <a:pPr>
+              <a:defRPr sz="1000">
+                <a:solidFill>
+                  <a:srgbClr val="646E7D"/>
+                </a:solidFill>
+                <a:latin typeface="Arial"/>
+              </a:defRPr>
+            </a:pPr>
+            <a:r>
+              <a:t>Đề tài Cửa bảo mật — Nguyễn Tuấn Sơn, Vũ Hữu Hoạt (UET)                                                                     Trang 5 / 8</a:t>
+            </a:r>
+          </a:p>
+        </p:txBody>
+      </p:sp>
+      <p:sp>
+        <p:nvSpPr>
+          <p:cNvPr id="5" name="Rectangle 4"/>
           <p:cNvSpPr/>
           <p:nvPr/>
         </p:nvSpPr>
         <p:spPr>
           <a:xfrm>
-            <a:off x="0" y="0"/>
-            <a:ext cx="12191695" cy="100584"/>
+            <a:off x="731520" y="1371600"/>
+            <a:ext cx="5943600" cy="4572000"/>
           </a:xfrm>
           <a:prstGeom prst="rect">
             <a:avLst/>
           </a:prstGeom>
           <a:solidFill>
-            <a:srgbClr val="10559A"/>
+            <a:srgbClr val="FFFFFF"/>
           </a:solidFill>
-          <a:ln>
-            <a:noFill/>
+          <a:ln w="12700">
+            <a:solidFill>
+              <a:srgbClr val="E2E8F0"/>
+            </a:solidFill>
           </a:ln>
         </p:spPr>
         <p:style>
@@ -6273,159 +4982,9 @@
           </a:p>
         </p:txBody>
       </p:sp>
-      <p:sp>
-        <p:nvSpPr>
-          <p:cNvPr id="3" name="TextBox 2"/>
-          <p:cNvSpPr txBox="1"/>
-          <p:nvPr/>
-        </p:nvSpPr>
-        <p:spPr>
-          <a:xfrm>
-            <a:off x="594360" y="292608"/>
-            <a:ext cx="9601200" cy="274320"/>
-          </a:xfrm>
-          <a:prstGeom prst="rect">
-            <a:avLst/>
-          </a:prstGeom>
-          <a:noFill/>
-        </p:spPr>
-        <p:txBody>
-          <a:bodyPr wrap="none" lIns="0" tIns="0" rIns="0" bIns="0">
-            <a:spAutoFit/>
-          </a:bodyPr>
-          <a:lstStyle/>
-          <a:p>
-            <a:pPr>
-              <a:defRPr sz="1050" b="1">
-                <a:solidFill>
-                  <a:srgbClr val="10559A"/>
-                </a:solidFill>
-              </a:defRPr>
-            </a:pPr>
-            <a:r>
-              <a:t>BÁO CÁO TIẾN ĐỘ GIỮA KỲ — ĐỒ ÁN CƠ ĐIỆN TỬ (NHÓM 13)</a:t>
-            </a:r>
-          </a:p>
-        </p:txBody>
-      </p:sp>
-      <p:sp>
-        <p:nvSpPr>
-          <p:cNvPr id="4" name="TextBox 3"/>
-          <p:cNvSpPr txBox="1"/>
-          <p:nvPr/>
-        </p:nvSpPr>
-        <p:spPr>
-          <a:xfrm>
-            <a:off x="594360" y="566928"/>
-            <a:ext cx="10515600" cy="502920"/>
-          </a:xfrm>
-          <a:prstGeom prst="rect">
-            <a:avLst/>
-          </a:prstGeom>
-          <a:noFill/>
-        </p:spPr>
-        <p:txBody>
-          <a:bodyPr wrap="none" lIns="0" tIns="0" rIns="0" bIns="0">
-            <a:spAutoFit/>
-          </a:bodyPr>
-          <a:lstStyle/>
-          <a:p>
-            <a:pPr>
-              <a:defRPr sz="2100" b="1">
-                <a:solidFill>
-                  <a:srgbClr val="0B2347"/>
-                </a:solidFill>
-              </a:defRPr>
-            </a:pPr>
-            <a:r>
-              <a:t>4. Kết quả thiết kế Sơ đồ nguyên lý &amp; Mạch in PCB (Vũ Hữu Hoạt)</a:t>
-            </a:r>
-          </a:p>
-        </p:txBody>
-      </p:sp>
-      <p:sp>
-        <p:nvSpPr>
-          <p:cNvPr id="5" name="TextBox 4"/>
-          <p:cNvSpPr txBox="1"/>
-          <p:nvPr/>
-        </p:nvSpPr>
-        <p:spPr>
-          <a:xfrm>
-            <a:off x="594360" y="6446520"/>
-            <a:ext cx="10972800" cy="274320"/>
-          </a:xfrm>
-          <a:prstGeom prst="rect">
-            <a:avLst/>
-          </a:prstGeom>
-          <a:noFill/>
-        </p:spPr>
-        <p:txBody>
-          <a:bodyPr wrap="none">
-            <a:spAutoFit/>
-          </a:bodyPr>
-          <a:lstStyle/>
-          <a:p>
-            <a:pPr>
-              <a:defRPr sz="950">
-                <a:solidFill>
-                  <a:srgbClr val="5F6C7D"/>
-                </a:solidFill>
-              </a:defRPr>
-            </a:pPr>
-            <a:r>
-              <a:t>Trường Đại học Công nghệ – ĐHQGHN  |  Nhóm 13: Nguyễn Tuấn Sơn – Vũ Hữu Hoạt                                                                                     Slide 5 / 10</a:t>
-            </a:r>
-          </a:p>
-        </p:txBody>
-      </p:sp>
-      <p:sp>
-        <p:nvSpPr>
-          <p:cNvPr id="6" name="Rounded Rectangle 5"/>
-          <p:cNvSpPr/>
-          <p:nvPr/>
-        </p:nvSpPr>
-        <p:spPr>
-          <a:xfrm>
-            <a:off x="594360" y="1234440"/>
-            <a:ext cx="6080760" cy="5029200"/>
-          </a:xfrm>
-          <a:prstGeom prst="roundRect">
-            <a:avLst/>
-          </a:prstGeom>
-          <a:solidFill>
-            <a:srgbClr val="FFFFFF"/>
-          </a:solidFill>
-          <a:ln w="15240">
-            <a:solidFill>
-              <a:srgbClr val="DAE1EB"/>
-            </a:solidFill>
-          </a:ln>
-        </p:spPr>
-        <p:style>
-          <a:lnRef idx="1">
-            <a:schemeClr val="accent1"/>
-          </a:lnRef>
-          <a:fillRef idx="3">
-            <a:schemeClr val="accent1"/>
-          </a:fillRef>
-          <a:effectRef idx="2">
-            <a:schemeClr val="accent1"/>
-          </a:effectRef>
-          <a:fontRef idx="minor">
-            <a:schemeClr val="lt1"/>
-          </a:fontRef>
-        </p:style>
-        <p:txBody>
-          <a:bodyPr rtlCol="0" anchor="ctr"/>
-          <a:lstStyle/>
-          <a:p>
-            <a:pPr algn="ctr"/>
-          </a:p>
-        </p:txBody>
-      </p:sp>
       <p:pic>
         <p:nvPicPr>
-          <p:cNvPr id="7" name="Picture 6" descr="pcb_layout_preview.png"/>
+          <p:cNvPr id="6" name="Picture 5" descr="pcb_layout_preview.png"/>
           <p:cNvPicPr>
             <a:picLocks noChangeAspect="1"/>
           </p:cNvPicPr>
@@ -6439,8 +4998,8 @@
         </p:blipFill>
         <p:spPr>
           <a:xfrm>
-            <a:off x="704088" y="1719224"/>
-            <a:ext cx="5861304" cy="3712159"/>
+            <a:off x="804672" y="1661770"/>
+            <a:ext cx="5797296" cy="3671620"/>
           </a:xfrm>
           <a:prstGeom prst="rect">
             <a:avLst/>
@@ -6449,14 +5008,14 @@
       </p:pic>
       <p:sp>
         <p:nvSpPr>
-          <p:cNvPr id="8" name="TextBox 7"/>
+          <p:cNvPr id="7" name="TextBox 6"/>
           <p:cNvSpPr txBox="1"/>
           <p:nvPr/>
         </p:nvSpPr>
         <p:spPr>
           <a:xfrm>
-            <a:off x="704088" y="5879592"/>
-            <a:ext cx="5861304" cy="347472"/>
+            <a:off x="731520" y="5623560"/>
+            <a:ext cx="5943600" cy="320040"/>
           </a:xfrm>
           <a:prstGeom prst="rect">
             <a:avLst/>
@@ -6464,79 +5023,35 @@
           <a:noFill/>
         </p:spPr>
         <p:txBody>
-          <a:bodyPr wrap="square">
+          <a:bodyPr wrap="none" lIns="0" tIns="0" rIns="0" bIns="0">
             <a:spAutoFit/>
           </a:bodyPr>
           <a:lstStyle/>
           <a:p>
             <a:pPr algn="ctr">
-              <a:defRPr sz="1000" b="1">
-                <a:solidFill>
-                  <a:srgbClr val="0B2347"/>
-                </a:solidFill>
-              </a:defRPr>
-            </a:pPr>
-            <a:r>
-              <a:t>Hình 4.1: Sơ đồ bố trí các khối Header kết nối và đường mạch trên PCB trung tâm</a:t>
-            </a:r>
-          </a:p>
-        </p:txBody>
-      </p:sp>
-      <p:sp>
-        <p:nvSpPr>
-          <p:cNvPr id="9" name="Rounded Rectangle 8"/>
-          <p:cNvSpPr/>
-          <p:nvPr/>
-        </p:nvSpPr>
-        <p:spPr>
-          <a:xfrm>
-            <a:off x="6858000" y="1234440"/>
-            <a:ext cx="4736592" cy="5029200"/>
-          </a:xfrm>
-          <a:prstGeom prst="roundRect">
-            <a:avLst/>
-          </a:prstGeom>
-          <a:solidFill>
-            <a:srgbClr val="FFFFFF"/>
-          </a:solidFill>
-          <a:ln w="19050">
-            <a:solidFill>
-              <a:srgbClr val="10559A"/>
-            </a:solidFill>
-          </a:ln>
-        </p:spPr>
-        <p:style>
-          <a:lnRef idx="1">
-            <a:schemeClr val="accent1"/>
-          </a:lnRef>
-          <a:fillRef idx="3">
-            <a:schemeClr val="accent1"/>
-          </a:fillRef>
-          <a:effectRef idx="2">
-            <a:schemeClr val="accent1"/>
-          </a:effectRef>
-          <a:fontRef idx="minor">
-            <a:schemeClr val="lt1"/>
-          </a:fontRef>
-        </p:style>
-        <p:txBody>
-          <a:bodyPr rtlCol="0" anchor="ctr"/>
-          <a:lstStyle/>
-          <a:p>
-            <a:pPr algn="ctr"/>
-          </a:p>
-        </p:txBody>
-      </p:sp>
-      <p:sp>
-        <p:nvSpPr>
-          <p:cNvPr id="10" name="TextBox 9"/>
+              <a:defRPr sz="1100" b="1">
+                <a:solidFill>
+                  <a:srgbClr val="646E7D"/>
+                </a:solidFill>
+                <a:latin typeface="Arial"/>
+              </a:defRPr>
+            </a:pPr>
+            <a:r>
+              <a:t>Hình 2: Sơ đồ bố trí các khối trên bo mạch PCB</a:t>
+            </a:r>
+          </a:p>
+        </p:txBody>
+      </p:sp>
+      <p:sp>
+        <p:nvSpPr>
+          <p:cNvPr id="8" name="TextBox 7"/>
           <p:cNvSpPr txBox="1"/>
           <p:nvPr/>
         </p:nvSpPr>
         <p:spPr>
           <a:xfrm>
-            <a:off x="7059168" y="1399032"/>
-            <a:ext cx="4334256" cy="4736592"/>
+            <a:off x="7040880" y="1371600"/>
+            <a:ext cx="4389120" cy="4572000"/>
           </a:xfrm>
           <a:prstGeom prst="rect">
             <a:avLst/>
@@ -6544,128 +5059,91 @@
           <a:noFill/>
         </p:spPr>
         <p:txBody>
-          <a:bodyPr wrap="square" lIns="0" tIns="0" rIns="0" bIns="0">
+          <a:bodyPr wrap="square">
             <a:spAutoFit/>
           </a:bodyPr>
           <a:lstStyle/>
           <a:p>
             <a:pPr>
               <a:spcAft>
-                <a:spcPts val="300"/>
+                <a:spcPts val="1200"/>
               </a:spcAft>
-              <a:defRPr sz="1450" b="1">
-                <a:solidFill>
-                  <a:srgbClr val="10559A"/>
-                </a:solidFill>
-              </a:defRPr>
-            </a:pPr>
-            <a:r>
-              <a:t>Chi tiết công việc thiết kế PCB đã hoàn thành</a:t>
+              <a:defRPr b="1" sz="1600">
+                <a:solidFill>
+                  <a:srgbClr val="0E52A0"/>
+                </a:solidFill>
+              </a:defRPr>
+            </a:pPr>
+            <a:r>
+              <a:t>Nội dung Hoạt đã thực hiện:</a:t>
             </a:r>
           </a:p>
           <a:p>
             <a:pPr>
               <a:spcAft>
-                <a:spcPts val="700"/>
+                <a:spcPts val="1000"/>
               </a:spcAft>
-              <a:defRPr sz="1050">
-                <a:solidFill>
-                  <a:srgbClr val="5F6C7D"/>
-                </a:solidFill>
-              </a:defRPr>
-            </a:pPr>
-            <a:r>
-              <a:t>Phụ trách chính: Vũ Hữu Hoạt</a:t>
+              <a:defRPr sz="1350">
+                <a:solidFill>
+                  <a:srgbClr val="141821"/>
+                </a:solidFill>
+              </a:defRPr>
+            </a:pPr>
+            <a:r>
+              <a:t>• Đo đạc chân cắm thực tế: Đo đúng kích thước header của AS608, RC522, Keypad 4x4, LCD và Domino nguồn 12V.</a:t>
             </a:r>
           </a:p>
           <a:p>
             <a:pPr>
               <a:spcAft>
-                <a:spcPts val="450"/>
+                <a:spcPts val="1000"/>
               </a:spcAft>
-              <a:defRPr sz="1100">
-                <a:solidFill>
-                  <a:srgbClr val="141C28"/>
-                </a:solidFill>
-              </a:defRPr>
-            </a:pPr>
-            <a:r>
-              <a:t>•  Khảo sát &amp; Đo đạc chân cắm thực tế: Đã đo chuẩn khoảng cách pitch 2.54mm của các cụm Header 6 chân (AS608), 8 chân (RC522), 8 chân (Keypad 4x4), 4 chân (LCD I2C) và Domino nguồn 12V.</a:t>
+              <a:defRPr sz="1350">
+                <a:solidFill>
+                  <a:srgbClr val="141821"/>
+                </a:solidFill>
+              </a:defRPr>
+            </a:pPr>
+            <a:r>
+              <a:t>• Vẽ Sơ đồ nguyên lý (Schematic): Liên kết toàn bộ linh kiện về ESP32, thêm khối nguồn hạ áp (12V -&gt; 5V và 3.3V) và khối kích khóa 12V.</a:t>
             </a:r>
           </a:p>
           <a:p>
             <a:pPr>
               <a:spcAft>
-                <a:spcPts val="450"/>
+                <a:spcPts val="1000"/>
               </a:spcAft>
-              <a:defRPr sz="1100">
-                <a:solidFill>
-                  <a:srgbClr val="141C28"/>
-                </a:solidFill>
-              </a:defRPr>
-            </a:pPr>
-            <a:r>
-              <a:t>•  Hoàn thiện Sơ đồ nguyên lý (Schematic): Liên kết toàn bộ các khối về ESP32, tích hợp khối nguồn hạ áp Buck 12V -&gt; 5V/3.3V và tầng kích khóa chốt.</a:t>
+              <a:defRPr sz="1350">
+                <a:solidFill>
+                  <a:srgbClr val="141821"/>
+                </a:solidFill>
+              </a:defRPr>
+            </a:pPr>
+            <a:r>
+              <a:t>• Thiết kế Layout mạch in 2 lớp:</a:t>
+            </a:r>
+            <a:br/>
+            <a:r>
+              <a:t>  • Đường nguồn 12V cấp khóa chốt được vẽ to (&gt; 40 mil) để chịu dòng 1.5A an toàn.</a:t>
+            </a:r>
+            <a:br/>
+            <a:r>
+              <a:t>  • Phủ đồng Mass (GND) cả 2 mặt để chống nhiễu Wi-Fi và sóng RFID 13.56 MHz.</a:t>
             </a:r>
           </a:p>
           <a:p>
             <a:pPr>
               <a:spcAft>
-                <a:spcPts val="450"/>
+                <a:spcPts val="1000"/>
               </a:spcAft>
-              <a:defRPr sz="1100">
-                <a:solidFill>
-                  <a:srgbClr val="141C28"/>
-                </a:solidFill>
-              </a:defRPr>
-            </a:pPr>
-            <a:r>
-              <a:t>•  Thiết kế Layout PCB 2 lớp:</a:t>
-            </a:r>
-          </a:p>
-          <a:p>
-            <a:pPr>
-              <a:spcAft>
-                <a:spcPts val="450"/>
-              </a:spcAft>
-              <a:defRPr sz="1100">
-                <a:solidFill>
-                  <a:srgbClr val="141C28"/>
-                </a:solidFill>
-              </a:defRPr>
-            </a:pPr>
-            <a:r>
-              <a:t>•      • Đường mạch công suất 12V cấp cho khóa điện được đi dây độ rộng lớn (&gt; 40 mil) chịu dòng 1.5A.</a:t>
-            </a:r>
-          </a:p>
-          <a:p>
-            <a:pPr>
-              <a:spcAft>
-                <a:spcPts val="450"/>
-              </a:spcAft>
-              <a:defRPr sz="1100">
-                <a:solidFill>
-                  <a:srgbClr val="141C28"/>
-                </a:solidFill>
-              </a:defRPr>
-            </a:pPr>
-            <a:r>
-              <a:t>•      • Phủ đồng mặt Mass (GND Copper Pour) cả 2 lớp giúp chống nhiễu sóng Wi-Fi và RFID 13.56MHz.</a:t>
-            </a:r>
-          </a:p>
-          <a:p>
-            <a:pPr>
-              <a:spcAft>
-                <a:spcPts val="450"/>
-              </a:spcAft>
-              <a:defRPr sz="1100">
-                <a:solidFill>
-                  <a:srgbClr val="141C28"/>
-                </a:solidFill>
-              </a:defRPr>
-            </a:pPr>
-            <a:r>
-              <a:t>•      • Đã kiểm tra DRC (Design Rule Check) không còn lỗi và sẵn sàng gia công hàn mạch ở Giai đoạn 3.</a:t>
+              <a:defRPr sz="1350">
+                <a:solidFill>
+                  <a:srgbClr val="141821"/>
+                </a:solidFill>
+              </a:defRPr>
+            </a:pPr>
+            <a:r>
+              <a:t>• Trạng thái: Đã xuất file Gerber và sẵn sàng gửi gia công ở Giai đoạn 3.</a:t>
             </a:r>
           </a:p>
         </p:txBody>
@@ -6690,57 +5168,14 @@
       <p:grpSpPr/>
       <p:sp>
         <p:nvSpPr>
-          <p:cNvPr id="2" name="Rectangle 1"/>
-          <p:cNvSpPr/>
-          <p:nvPr/>
-        </p:nvSpPr>
-        <p:spPr>
-          <a:xfrm>
-            <a:off x="0" y="0"/>
-            <a:ext cx="12191695" cy="100584"/>
-          </a:xfrm>
-          <a:prstGeom prst="rect">
-            <a:avLst/>
-          </a:prstGeom>
-          <a:solidFill>
-            <a:srgbClr val="10559A"/>
-          </a:solidFill>
-          <a:ln>
-            <a:noFill/>
-          </a:ln>
-        </p:spPr>
-        <p:style>
-          <a:lnRef idx="1">
-            <a:schemeClr val="accent1"/>
-          </a:lnRef>
-          <a:fillRef idx="3">
-            <a:schemeClr val="accent1"/>
-          </a:fillRef>
-          <a:effectRef idx="2">
-            <a:schemeClr val="accent1"/>
-          </a:effectRef>
-          <a:fontRef idx="minor">
-            <a:schemeClr val="lt1"/>
-          </a:fontRef>
-        </p:style>
-        <p:txBody>
-          <a:bodyPr rtlCol="0" anchor="ctr"/>
-          <a:lstStyle/>
-          <a:p>
-            <a:pPr algn="ctr"/>
-          </a:p>
-        </p:txBody>
-      </p:sp>
-      <p:sp>
-        <p:nvSpPr>
-          <p:cNvPr id="3" name="TextBox 2"/>
+          <p:cNvPr id="2" name="TextBox 1"/>
           <p:cNvSpPr txBox="1"/>
           <p:nvPr/>
         </p:nvSpPr>
         <p:spPr>
           <a:xfrm>
-            <a:off x="594360" y="292608"/>
-            <a:ext cx="9601200" cy="274320"/>
+            <a:off x="731520" y="365760"/>
+            <a:ext cx="9144000" cy="274320"/>
           </a:xfrm>
           <a:prstGeom prst="rect">
             <a:avLst/>
@@ -6754,28 +5189,29 @@
           <a:lstStyle/>
           <a:p>
             <a:pPr>
-              <a:defRPr sz="1050" b="1">
-                <a:solidFill>
-                  <a:srgbClr val="10559A"/>
-                </a:solidFill>
-              </a:defRPr>
-            </a:pPr>
-            <a:r>
-              <a:t>BÁO CÁO TIẾN ĐỘ GIỮA KỲ — ĐỒ ÁN CƠ ĐIỆN TỬ (NHÓM 13)</a:t>
-            </a:r>
-          </a:p>
-        </p:txBody>
-      </p:sp>
-      <p:sp>
-        <p:nvSpPr>
-          <p:cNvPr id="4" name="TextBox 3"/>
+              <a:defRPr sz="1100" b="1">
+                <a:solidFill>
+                  <a:srgbClr val="0E52A0"/>
+                </a:solidFill>
+                <a:latin typeface="Arial"/>
+              </a:defRPr>
+            </a:pPr>
+            <a:r>
+              <a:t>BÁO CÁO GIỮA KỲ — ĐỒ ÁN CƠ ĐIỆN TỬ (NHÓM 13)</a:t>
+            </a:r>
+          </a:p>
+        </p:txBody>
+      </p:sp>
+      <p:sp>
+        <p:nvSpPr>
+          <p:cNvPr id="3" name="TextBox 2"/>
           <p:cNvSpPr txBox="1"/>
           <p:nvPr/>
         </p:nvSpPr>
         <p:spPr>
           <a:xfrm>
-            <a:off x="594360" y="566928"/>
-            <a:ext cx="10515600" cy="502920"/>
+            <a:off x="731520" y="658368"/>
+            <a:ext cx="10515600" cy="548640"/>
           </a:xfrm>
           <a:prstGeom prst="rect">
             <a:avLst/>
@@ -6789,28 +5225,29 @@
           <a:lstStyle/>
           <a:p>
             <a:pPr>
-              <a:defRPr sz="2100" b="1">
-                <a:solidFill>
-                  <a:srgbClr val="0B2347"/>
-                </a:solidFill>
-              </a:defRPr>
-            </a:pPr>
-            <a:r>
-              <a:t>5. Kiến trúc Firmware ESP32 &amp; Cơ chế Bảo mật 1 Lớp / 2 Lớp (2FA)</a:t>
-            </a:r>
-          </a:p>
-        </p:txBody>
-      </p:sp>
-      <p:sp>
-        <p:nvSpPr>
-          <p:cNvPr id="5" name="TextBox 4"/>
+              <a:defRPr sz="2200" b="1">
+                <a:solidFill>
+                  <a:srgbClr val="141821"/>
+                </a:solidFill>
+                <a:latin typeface="Arial"/>
+              </a:defRPr>
+            </a:pPr>
+            <a:r>
+              <a:t>5. Lập trình Firmware ESP32 &amp; Chế độ Bảo mật 2 lớp</a:t>
+            </a:r>
+          </a:p>
+        </p:txBody>
+      </p:sp>
+      <p:sp>
+        <p:nvSpPr>
+          <p:cNvPr id="4" name="TextBox 3"/>
           <p:cNvSpPr txBox="1"/>
           <p:nvPr/>
         </p:nvSpPr>
         <p:spPr>
           <a:xfrm>
-            <a:off x="594360" y="6446520"/>
-            <a:ext cx="10972800" cy="274320"/>
+            <a:off x="731520" y="6309360"/>
+            <a:ext cx="10698480" cy="274320"/>
           </a:xfrm>
           <a:prstGeom prst="rect">
             <a:avLst/>
@@ -6818,79 +5255,35 @@
           <a:noFill/>
         </p:spPr>
         <p:txBody>
-          <a:bodyPr wrap="none">
+          <a:bodyPr wrap="none" lIns="0" tIns="0" rIns="0" bIns="0">
             <a:spAutoFit/>
           </a:bodyPr>
           <a:lstStyle/>
           <a:p>
             <a:pPr>
-              <a:defRPr sz="950">
-                <a:solidFill>
-                  <a:srgbClr val="5F6C7D"/>
-                </a:solidFill>
-              </a:defRPr>
-            </a:pPr>
-            <a:r>
-              <a:t>Trường Đại học Công nghệ – ĐHQGHN  |  Nhóm 13: Nguyễn Tuấn Sơn – Vũ Hữu Hoạt                                                                                     Slide 6 / 10</a:t>
-            </a:r>
-          </a:p>
-        </p:txBody>
-      </p:sp>
-      <p:sp>
-        <p:nvSpPr>
-          <p:cNvPr id="6" name="Rounded Rectangle 5"/>
-          <p:cNvSpPr/>
-          <p:nvPr/>
-        </p:nvSpPr>
-        <p:spPr>
-          <a:xfrm>
-            <a:off x="594360" y="1234440"/>
-            <a:ext cx="5303520" cy="5029200"/>
-          </a:xfrm>
-          <a:prstGeom prst="roundRect">
-            <a:avLst/>
-          </a:prstGeom>
-          <a:solidFill>
-            <a:srgbClr val="F6F8FB"/>
-          </a:solidFill>
-          <a:ln w="12700">
-            <a:solidFill>
-              <a:srgbClr val="DAE1EB"/>
-            </a:solidFill>
-          </a:ln>
-        </p:spPr>
-        <p:style>
-          <a:lnRef idx="1">
-            <a:schemeClr val="accent1"/>
-          </a:lnRef>
-          <a:fillRef idx="3">
-            <a:schemeClr val="accent1"/>
-          </a:fillRef>
-          <a:effectRef idx="2">
-            <a:schemeClr val="accent1"/>
-          </a:effectRef>
-          <a:fontRef idx="minor">
-            <a:schemeClr val="lt1"/>
-          </a:fontRef>
-        </p:style>
-        <p:txBody>
-          <a:bodyPr rtlCol="0" anchor="ctr"/>
-          <a:lstStyle/>
-          <a:p>
-            <a:pPr algn="ctr"/>
-          </a:p>
-        </p:txBody>
-      </p:sp>
-      <p:sp>
-        <p:nvSpPr>
-          <p:cNvPr id="7" name="TextBox 6"/>
+              <a:defRPr sz="1000">
+                <a:solidFill>
+                  <a:srgbClr val="646E7D"/>
+                </a:solidFill>
+                <a:latin typeface="Arial"/>
+              </a:defRPr>
+            </a:pPr>
+            <a:r>
+              <a:t>Đề tài Cửa bảo mật — Nguyễn Tuấn Sơn, Vũ Hữu Hoạt (UET)                                                                     Trang 6 / 8</a:t>
+            </a:r>
+          </a:p>
+        </p:txBody>
+      </p:sp>
+      <p:sp>
+        <p:nvSpPr>
+          <p:cNvPr id="5" name="TextBox 4"/>
           <p:cNvSpPr txBox="1"/>
           <p:nvPr/>
         </p:nvSpPr>
         <p:spPr>
           <a:xfrm>
-            <a:off x="795528" y="1399032"/>
-            <a:ext cx="4901184" cy="4736592"/>
+            <a:off x="731520" y="1371600"/>
+            <a:ext cx="5120640" cy="4572000"/>
           </a:xfrm>
           <a:prstGeom prst="rect">
             <a:avLst/>
@@ -6898,217 +5291,97 @@
           <a:noFill/>
         </p:spPr>
         <p:txBody>
-          <a:bodyPr wrap="square" lIns="0" tIns="0" rIns="0" bIns="0">
+          <a:bodyPr wrap="square">
             <a:spAutoFit/>
           </a:bodyPr>
           <a:lstStyle/>
           <a:p>
             <a:pPr>
               <a:spcAft>
-                <a:spcPts val="300"/>
+                <a:spcPts val="1200"/>
               </a:spcAft>
-              <a:defRPr sz="1450" b="1">
-                <a:solidFill>
-                  <a:srgbClr val="0B2347"/>
-                </a:solidFill>
-              </a:defRPr>
-            </a:pPr>
-            <a:r>
-              <a:t>Kiến trúc Phần mềm nhúng ESP32 (PlatformIO)</a:t>
+              <a:defRPr b="1" sz="1600">
+                <a:solidFill>
+                  <a:srgbClr val="0E52A0"/>
+                </a:solidFill>
+              </a:defRPr>
+            </a:pPr>
+            <a:r>
+              <a:t>Lập trình ESP32 (Nguyễn Tuấn Sơn):</a:t>
             </a:r>
           </a:p>
           <a:p>
             <a:pPr>
               <a:spcAft>
-                <a:spcPts val="700"/>
+                <a:spcPts val="1000"/>
               </a:spcAft>
-              <a:defRPr sz="1050">
-                <a:solidFill>
-                  <a:srgbClr val="5F6C7D"/>
-                </a:solidFill>
-              </a:defRPr>
-            </a:pPr>
-            <a:r>
-              <a:t>Phụ trách chính: Nguyễn Tuấn Sơn</a:t>
+              <a:defRPr sz="1350">
+                <a:solidFill>
+                  <a:srgbClr val="141821"/>
+                </a:solidFill>
+              </a:defRPr>
+            </a:pPr>
+            <a:r>
+              <a:t>• Code chạy không chặn (Non-blocking): Không dùng delay(), dùng millis() quét Keypad 4x4 liên tục và đọc RFID/Vân tay mỗi 80ms, không làm đơ kết nối Web.</a:t>
             </a:r>
           </a:p>
           <a:p>
             <a:pPr>
               <a:spcAft>
-                <a:spcPts val="450"/>
+                <a:spcPts val="1000"/>
               </a:spcAft>
-              <a:defRPr sz="1150">
-                <a:solidFill>
-                  <a:srgbClr val="141C28"/>
-                </a:solidFill>
-              </a:defRPr>
-            </a:pPr>
-            <a:r>
-              <a:t>•  Vòng lặp Non-blocking (Không chặn):</a:t>
+              <a:defRPr sz="1350">
+                <a:solidFill>
+                  <a:srgbClr val="141821"/>
+                </a:solidFill>
+              </a:defRPr>
+            </a:pPr>
+            <a:r>
+              <a:t>• Lưu trữ dữ liệu trong LittleFS: Lưu thẳng file giao diện Web và file config.json vào bộ nhớ Flash ESP32. Mất điện không mất mật khẩu hay danh sách thẻ.</a:t>
             </a:r>
           </a:p>
           <a:p>
             <a:pPr>
               <a:spcAft>
-                <a:spcPts val="450"/>
+                <a:spcPts val="1000"/>
               </a:spcAft>
-              <a:defRPr sz="1150">
-                <a:solidFill>
-                  <a:srgbClr val="141C28"/>
-                </a:solidFill>
-              </a:defRPr>
-            </a:pPr>
-            <a:r>
-              <a:t>•      • Không sử dụng delay() dài gây đơ phím; dùng millis() quét Keypad 4x4 liên tục (&lt; 5ms) và quét AS608/RC522 mỗi 80ms.</a:t>
+              <a:defRPr sz="1350">
+                <a:solidFill>
+                  <a:srgbClr val="141821"/>
+                </a:solidFill>
+              </a:defRPr>
+            </a:pPr>
+            <a:r>
+              <a:t>• Giao thức WebSocket: Đẩy sự kiện quẹt thẻ/vân tay và phản chiếu dòng chữ LCD lên Web tức thì (&lt; 100ms).</a:t>
             </a:r>
           </a:p>
           <a:p>
             <a:pPr>
               <a:spcAft>
-                <a:spcPts val="450"/>
+                <a:spcPts val="1000"/>
               </a:spcAft>
-              <a:defRPr sz="1150">
-                <a:solidFill>
-                  <a:srgbClr val="141C28"/>
-                </a:solidFill>
-              </a:defRPr>
-            </a:pPr>
-            <a:r>
-              <a:t>•  Hệ thống tệp Flash LittleFS bền vững:</a:t>
-            </a:r>
-          </a:p>
-          <a:p>
-            <a:pPr>
-              <a:spcAft>
-                <a:spcPts val="450"/>
-              </a:spcAft>
-              <a:defRPr sz="1150">
-                <a:solidFill>
-                  <a:srgbClr val="141C28"/>
-                </a:solidFill>
-              </a:defRPr>
-            </a:pPr>
-            <a:r>
-              <a:t>•      • Lưu trữ toàn bộ file giao diện Web (index.html, style.css, app.js) và cơ sở dữ liệu config.json ngay trong bộ nhớ Flash 4MB của ESP32.</a:t>
-            </a:r>
-          </a:p>
-          <a:p>
-            <a:pPr>
-              <a:spcAft>
-                <a:spcPts val="450"/>
-              </a:spcAft>
-              <a:defRPr sz="1150">
-                <a:solidFill>
-                  <a:srgbClr val="141C28"/>
-                </a:solidFill>
-              </a:defRPr>
-            </a:pPr>
-            <a:r>
-              <a:t>•      • Mất điện không bị mất mật khẩu PIN, danh sách thẻ RFID hay ID vân tay.</a:t>
-            </a:r>
-          </a:p>
-          <a:p>
-            <a:pPr>
-              <a:spcAft>
-                <a:spcPts val="450"/>
-              </a:spcAft>
-              <a:defRPr sz="1150">
-                <a:solidFill>
-                  <a:srgbClr val="141C28"/>
-                </a:solidFill>
-              </a:defRPr>
-            </a:pPr>
-            <a:r>
-              <a:t>•  Giao thức WebSocket (/ws) &amp; mDNS:</a:t>
-            </a:r>
-          </a:p>
-          <a:p>
-            <a:pPr>
-              <a:spcAft>
-                <a:spcPts val="450"/>
-              </a:spcAft>
-              <a:defRPr sz="1150">
-                <a:solidFill>
-                  <a:srgbClr val="141C28"/>
-                </a:solidFill>
-              </a:defRPr>
-            </a:pPr>
-            <a:r>
-              <a:t>•      • Đồng bộ trạng thái cửa và màn hình LCD 16x2 lên trình duyệt dưới 100ms.</a:t>
-            </a:r>
-          </a:p>
-          <a:p>
-            <a:pPr>
-              <a:spcAft>
-                <a:spcPts val="450"/>
-              </a:spcAft>
-              <a:defRPr sz="1150">
-                <a:solidFill>
-                  <a:srgbClr val="141C28"/>
-                </a:solidFill>
-              </a:defRPr>
-            </a:pPr>
-            <a:r>
-              <a:t>•      • Tích hợp tên miền nội bộ http://smartdoor.local.</a:t>
-            </a:r>
-          </a:p>
-        </p:txBody>
-      </p:sp>
-      <p:sp>
-        <p:nvSpPr>
-          <p:cNvPr id="8" name="Rounded Rectangle 7"/>
-          <p:cNvSpPr/>
-          <p:nvPr/>
-        </p:nvSpPr>
-        <p:spPr>
-          <a:xfrm>
-            <a:off x="6108192" y="1234440"/>
-            <a:ext cx="5486400" cy="5029200"/>
-          </a:xfrm>
-          <a:prstGeom prst="roundRect">
-            <a:avLst/>
-          </a:prstGeom>
-          <a:solidFill>
-            <a:srgbClr val="FFFFFF"/>
-          </a:solidFill>
-          <a:ln w="19050">
-            <a:solidFill>
-              <a:srgbClr val="10559A"/>
-            </a:solidFill>
-          </a:ln>
-        </p:spPr>
-        <p:style>
-          <a:lnRef idx="1">
-            <a:schemeClr val="accent1"/>
-          </a:lnRef>
-          <a:fillRef idx="3">
-            <a:schemeClr val="accent1"/>
-          </a:fillRef>
-          <a:effectRef idx="2">
-            <a:schemeClr val="accent1"/>
-          </a:effectRef>
-          <a:fontRef idx="minor">
-            <a:schemeClr val="lt1"/>
-          </a:fontRef>
-        </p:style>
-        <p:txBody>
-          <a:bodyPr rtlCol="0" anchor="ctr"/>
-          <a:lstStyle/>
-          <a:p>
-            <a:pPr algn="ctr"/>
-          </a:p>
-        </p:txBody>
-      </p:sp>
-      <p:sp>
-        <p:nvSpPr>
-          <p:cNvPr id="9" name="TextBox 8"/>
+              <a:defRPr sz="1350">
+                <a:solidFill>
+                  <a:srgbClr val="141821"/>
+                </a:solidFill>
+              </a:defRPr>
+            </a:pPr>
+            <a:r>
+              <a:t>• Tên miền cục bộ: Dùng mDNS mở trang web bằng http://smartdoor.local.</a:t>
+            </a:r>
+          </a:p>
+        </p:txBody>
+      </p:sp>
+      <p:sp>
+        <p:nvSpPr>
+          <p:cNvPr id="6" name="TextBox 5"/>
           <p:cNvSpPr txBox="1"/>
           <p:nvPr/>
         </p:nvSpPr>
         <p:spPr>
           <a:xfrm>
-            <a:off x="6309360" y="1399032"/>
-            <a:ext cx="5084064" cy="4736592"/>
+            <a:off x="6309360" y="1371600"/>
+            <a:ext cx="5120640" cy="4572000"/>
           </a:xfrm>
           <a:prstGeom prst="rect">
             <a:avLst/>
@@ -7116,143 +5389,116 @@
           <a:noFill/>
         </p:spPr>
         <p:txBody>
-          <a:bodyPr wrap="square" lIns="0" tIns="0" rIns="0" bIns="0">
+          <a:bodyPr wrap="square">
             <a:spAutoFit/>
           </a:bodyPr>
           <a:lstStyle/>
           <a:p>
             <a:pPr>
               <a:spcAft>
-                <a:spcPts val="300"/>
+                <a:spcPts val="1200"/>
               </a:spcAft>
-              <a:defRPr sz="1450" b="1">
-                <a:solidFill>
-                  <a:srgbClr val="10559A"/>
-                </a:solidFill>
-              </a:defRPr>
-            </a:pPr>
-            <a:r>
-              <a:t>Cơ chế Bảo mật Đa cấp độ (1 Lớp &amp; 2FA) mới phát triển</a:t>
+              <a:defRPr b="1" sz="1600">
+                <a:solidFill>
+                  <a:srgbClr val="0E52A0"/>
+                </a:solidFill>
+              </a:defRPr>
+            </a:pPr>
+            <a:r>
+              <a:t>Chế độ Bảo mật 1 lớp &amp; 2 lớp (2FA):</a:t>
+            </a:r>
+          </a:p>
+          <a:p>
+            <a:pPr>
+              <a:defRPr b="1" sz="1400">
+                <a:solidFill>
+                  <a:srgbClr val="141821"/>
+                </a:solidFill>
+              </a:defRPr>
+            </a:pPr>
+            <a:r>
+              <a:t>• Chế độ 1 Lớp (Mở nhanh):</a:t>
             </a:r>
           </a:p>
           <a:p>
             <a:pPr>
               <a:spcAft>
-                <a:spcPts val="700"/>
+                <a:spcPts val="800"/>
               </a:spcAft>
-              <a:defRPr sz="1050">
-                <a:solidFill>
-                  <a:srgbClr val="5F6C7D"/>
-                </a:solidFill>
-              </a:defRPr>
-            </a:pPr>
-            <a:r>
-              <a:t>Nâng cao tính bảo mật cho phòng thí nghiệm &amp; khu vực quan trọng</a:t>
+              <a:defRPr sz="1300">
+                <a:solidFill>
+                  <a:srgbClr val="646E7D"/>
+                </a:solidFill>
+              </a:defRPr>
+            </a:pPr>
+            <a:r>
+              <a:t>   Dùng 1 trong 3 cách: quét Vân tay HOẶC Thẻ RFID HOẶC nhập mã PIN là mở cửa ngay.</a:t>
+            </a:r>
+          </a:p>
+          <a:p>
+            <a:pPr>
+              <a:defRPr b="1" sz="1400">
+                <a:solidFill>
+                  <a:srgbClr val="141821"/>
+                </a:solidFill>
+              </a:defRPr>
+            </a:pPr>
+            <a:r>
+              <a:t>• Chế độ 2 Lớp (Bảo mật cao):</a:t>
             </a:r>
           </a:p>
           <a:p>
             <a:pPr>
               <a:spcAft>
-                <a:spcPts val="450"/>
+                <a:spcPts val="800"/>
               </a:spcAft>
-              <a:defRPr sz="1150">
-                <a:solidFill>
-                  <a:srgbClr val="141C28"/>
-                </a:solidFill>
-              </a:defRPr>
-            </a:pPr>
-            <a:r>
-              <a:t>•  Chế độ 1 Lớp (Single-Factor): Quét Vân tay đúng HOẶC Thẻ RFID đúng HOẶC nhập đúng PIN Keypad 4x4 là mở cửa ngay.</a:t>
+              <a:defRPr sz="1300">
+                <a:solidFill>
+                  <a:srgbClr val="646E7D"/>
+                </a:solidFill>
+              </a:defRPr>
+            </a:pPr>
+            <a:r>
+              <a:t>   Cần xác thực 2 bước liên tiếp:</a:t>
+            </a:r>
+            <a:br/>
+            <a:r>
+              <a:t>  1. Vân tay AS608 + Mã PIN Keypad 4x4</a:t>
+            </a:r>
+            <a:br/>
+            <a:r>
+              <a:t>  2. Thẻ từ RFID + Mã PIN Keypad 4x4</a:t>
+            </a:r>
+            <a:br/>
+            <a:r>
+              <a:t>  3. Vân tay AS608 + Thẻ từ RFID</a:t>
+            </a:r>
+          </a:p>
+          <a:p>
+            <a:pPr>
+              <a:defRPr b="1" sz="1400">
+                <a:solidFill>
+                  <a:srgbClr val="141821"/>
+                </a:solidFill>
+              </a:defRPr>
+            </a:pPr>
+            <a:r>
+              <a:t>• Tự hủy phiên sau 15 giây:</a:t>
             </a:r>
           </a:p>
           <a:p>
             <a:pPr>
               <a:spcAft>
-                <a:spcPts val="450"/>
+                <a:spcPts val="800"/>
               </a:spcAft>
-              <a:defRPr sz="1150">
-                <a:solidFill>
-                  <a:srgbClr val="141C28"/>
-                </a:solidFill>
-              </a:defRPr>
-            </a:pPr>
-            <a:r>
-              <a:t>•  Chế độ 2 Lớp (Two-Factor Authentication - 2FA): Yêu cầu xác thực thành công 2 bước liên tiếp trong thời gian quy định:</a:t>
-            </a:r>
-          </a:p>
-          <a:p>
-            <a:pPr>
-              <a:spcAft>
-                <a:spcPts val="450"/>
-              </a:spcAft>
-              <a:defRPr sz="1150">
-                <a:solidFill>
-                  <a:srgbClr val="141C28"/>
-                </a:solidFill>
-              </a:defRPr>
-            </a:pPr>
-            <a:r>
-              <a:t>•      • Chế độ 2: Vân tay AS608  +  Mã PIN Keypad 4x4</a:t>
-            </a:r>
-          </a:p>
-          <a:p>
-            <a:pPr>
-              <a:spcAft>
-                <a:spcPts val="450"/>
-              </a:spcAft>
-              <a:defRPr sz="1150">
-                <a:solidFill>
-                  <a:srgbClr val="141C28"/>
-                </a:solidFill>
-              </a:defRPr>
-            </a:pPr>
-            <a:r>
-              <a:t>•      • Chế độ 3: Thẻ từ RFID RC522  +  Mã PIN Keypad 4x4</a:t>
-            </a:r>
-          </a:p>
-          <a:p>
-            <a:pPr>
-              <a:spcAft>
-                <a:spcPts val="450"/>
-              </a:spcAft>
-              <a:defRPr sz="1150">
-                <a:solidFill>
-                  <a:srgbClr val="141C28"/>
-                </a:solidFill>
-              </a:defRPr>
-            </a:pPr>
-            <a:r>
-              <a:t>•      • Chế độ 4: Vân tay AS608  +  Thẻ từ RFID RC522</a:t>
-            </a:r>
-          </a:p>
-          <a:p>
-            <a:pPr>
-              <a:spcAft>
-                <a:spcPts val="450"/>
-              </a:spcAft>
-              <a:defRPr sz="1150">
-                <a:solidFill>
-                  <a:srgbClr val="141C28"/>
-                </a:solidFill>
-              </a:defRPr>
-            </a:pPr>
-            <a:r>
-              <a:t>•  Cơ chế chống treo phiên (Session Timeout 15 giây):</a:t>
-            </a:r>
-          </a:p>
-          <a:p>
-            <a:pPr>
-              <a:spcAft>
-                <a:spcPts val="450"/>
-              </a:spcAft>
-              <a:defRPr sz="1150">
-                <a:solidFill>
-                  <a:srgbClr val="141C28"/>
-                </a:solidFill>
-              </a:defRPr>
-            </a:pPr>
-            <a:r>
-              <a:t>•      • Khi qua Lớp 1, màn hình LCD hiển thị 'XAC THUC LOP 1 OK - NHAP PIN + #'. Nếu quá 15 giây không hoàn thành Lớp 2 hoặc nhập sai, hệ thống tự hủy phiên và khóa an toàn.</a:t>
+              <a:defRPr sz="1300">
+                <a:solidFill>
+                  <a:srgbClr val="646E7D"/>
+                </a:solidFill>
+              </a:defRPr>
+            </a:pPr>
+            <a:r>
+              <a:t>   Xác thực bước 1 thành công -&gt; LCD hiện thông báo chờ bước 2. Nếu quá 15 giây không hoàn thành hoặc nhập sai, hệ thống tự khóa lại để bảo vệ.</a:t>
             </a:r>
           </a:p>
         </p:txBody>
@@ -7277,23 +5523,133 @@
       <p:grpSpPr/>
       <p:sp>
         <p:nvSpPr>
-          <p:cNvPr id="2" name="Rectangle 1"/>
+          <p:cNvPr id="2" name="TextBox 1"/>
+          <p:cNvSpPr txBox="1"/>
+          <p:nvPr/>
+        </p:nvSpPr>
+        <p:spPr>
+          <a:xfrm>
+            <a:off x="731520" y="365760"/>
+            <a:ext cx="9144000" cy="274320"/>
+          </a:xfrm>
+          <a:prstGeom prst="rect">
+            <a:avLst/>
+          </a:prstGeom>
+          <a:noFill/>
+        </p:spPr>
+        <p:txBody>
+          <a:bodyPr wrap="none" lIns="0" tIns="0" rIns="0" bIns="0">
+            <a:spAutoFit/>
+          </a:bodyPr>
+          <a:lstStyle/>
+          <a:p>
+            <a:pPr>
+              <a:defRPr sz="1100" b="1">
+                <a:solidFill>
+                  <a:srgbClr val="0E52A0"/>
+                </a:solidFill>
+                <a:latin typeface="Arial"/>
+              </a:defRPr>
+            </a:pPr>
+            <a:r>
+              <a:t>BÁO CÁO GIỮA KỲ — ĐỒ ÁN CƠ ĐIỆN TỬ (NHÓM 13)</a:t>
+            </a:r>
+          </a:p>
+        </p:txBody>
+      </p:sp>
+      <p:sp>
+        <p:nvSpPr>
+          <p:cNvPr id="3" name="TextBox 2"/>
+          <p:cNvSpPr txBox="1"/>
+          <p:nvPr/>
+        </p:nvSpPr>
+        <p:spPr>
+          <a:xfrm>
+            <a:off x="731520" y="658368"/>
+            <a:ext cx="10515600" cy="548640"/>
+          </a:xfrm>
+          <a:prstGeom prst="rect">
+            <a:avLst/>
+          </a:prstGeom>
+          <a:noFill/>
+        </p:spPr>
+        <p:txBody>
+          <a:bodyPr wrap="none" lIns="0" tIns="0" rIns="0" bIns="0">
+            <a:spAutoFit/>
+          </a:bodyPr>
+          <a:lstStyle/>
+          <a:p>
+            <a:pPr>
+              <a:defRPr sz="2200" b="1">
+                <a:solidFill>
+                  <a:srgbClr val="141821"/>
+                </a:solidFill>
+                <a:latin typeface="Arial"/>
+              </a:defRPr>
+            </a:pPr>
+            <a:r>
+              <a:t>6. Giao diện Web App Quản lý &amp; Triển khai Vercel</a:t>
+            </a:r>
+          </a:p>
+        </p:txBody>
+      </p:sp>
+      <p:sp>
+        <p:nvSpPr>
+          <p:cNvPr id="4" name="TextBox 3"/>
+          <p:cNvSpPr txBox="1"/>
+          <p:nvPr/>
+        </p:nvSpPr>
+        <p:spPr>
+          <a:xfrm>
+            <a:off x="731520" y="6309360"/>
+            <a:ext cx="10698480" cy="274320"/>
+          </a:xfrm>
+          <a:prstGeom prst="rect">
+            <a:avLst/>
+          </a:prstGeom>
+          <a:noFill/>
+        </p:spPr>
+        <p:txBody>
+          <a:bodyPr wrap="none" lIns="0" tIns="0" rIns="0" bIns="0">
+            <a:spAutoFit/>
+          </a:bodyPr>
+          <a:lstStyle/>
+          <a:p>
+            <a:pPr>
+              <a:defRPr sz="1000">
+                <a:solidFill>
+                  <a:srgbClr val="646E7D"/>
+                </a:solidFill>
+                <a:latin typeface="Arial"/>
+              </a:defRPr>
+            </a:pPr>
+            <a:r>
+              <a:t>Đề tài Cửa bảo mật — Nguyễn Tuấn Sơn, Vũ Hữu Hoạt (UET)                                                                     Trang 7 / 8</a:t>
+            </a:r>
+          </a:p>
+        </p:txBody>
+      </p:sp>
+      <p:sp>
+        <p:nvSpPr>
+          <p:cNvPr id="5" name="Rectangle 4"/>
           <p:cNvSpPr/>
           <p:nvPr/>
         </p:nvSpPr>
         <p:spPr>
           <a:xfrm>
-            <a:off x="0" y="0"/>
-            <a:ext cx="12191695" cy="100584"/>
+            <a:off x="731520" y="1371600"/>
+            <a:ext cx="6858000" cy="4572000"/>
           </a:xfrm>
           <a:prstGeom prst="rect">
             <a:avLst/>
           </a:prstGeom>
           <a:solidFill>
-            <a:srgbClr val="10559A"/>
+            <a:srgbClr val="FFFFFF"/>
           </a:solidFill>
-          <a:ln>
-            <a:noFill/>
+          <a:ln w="12700">
+            <a:solidFill>
+              <a:srgbClr val="E2E8F0"/>
+            </a:solidFill>
           </a:ln>
         </p:spPr>
         <p:style>
@@ -7318,159 +5674,9 @@
           </a:p>
         </p:txBody>
       </p:sp>
-      <p:sp>
-        <p:nvSpPr>
-          <p:cNvPr id="3" name="TextBox 2"/>
-          <p:cNvSpPr txBox="1"/>
-          <p:nvPr/>
-        </p:nvSpPr>
-        <p:spPr>
-          <a:xfrm>
-            <a:off x="594360" y="292608"/>
-            <a:ext cx="9601200" cy="274320"/>
-          </a:xfrm>
-          <a:prstGeom prst="rect">
-            <a:avLst/>
-          </a:prstGeom>
-          <a:noFill/>
-        </p:spPr>
-        <p:txBody>
-          <a:bodyPr wrap="none" lIns="0" tIns="0" rIns="0" bIns="0">
-            <a:spAutoFit/>
-          </a:bodyPr>
-          <a:lstStyle/>
-          <a:p>
-            <a:pPr>
-              <a:defRPr sz="1050" b="1">
-                <a:solidFill>
-                  <a:srgbClr val="10559A"/>
-                </a:solidFill>
-              </a:defRPr>
-            </a:pPr>
-            <a:r>
-              <a:t>BÁO CÁO TIẾN ĐỘ GIỮA KỲ — ĐỒ ÁN CƠ ĐIỆN TỬ (NHÓM 13)</a:t>
-            </a:r>
-          </a:p>
-        </p:txBody>
-      </p:sp>
-      <p:sp>
-        <p:nvSpPr>
-          <p:cNvPr id="4" name="TextBox 3"/>
-          <p:cNvSpPr txBox="1"/>
-          <p:nvPr/>
-        </p:nvSpPr>
-        <p:spPr>
-          <a:xfrm>
-            <a:off x="594360" y="566928"/>
-            <a:ext cx="10515600" cy="502920"/>
-          </a:xfrm>
-          <a:prstGeom prst="rect">
-            <a:avLst/>
-          </a:prstGeom>
-          <a:noFill/>
-        </p:spPr>
-        <p:txBody>
-          <a:bodyPr wrap="none" lIns="0" tIns="0" rIns="0" bIns="0">
-            <a:spAutoFit/>
-          </a:bodyPr>
-          <a:lstStyle/>
-          <a:p>
-            <a:pPr>
-              <a:defRPr sz="2100" b="1">
-                <a:solidFill>
-                  <a:srgbClr val="0B2347"/>
-                </a:solidFill>
-              </a:defRPr>
-            </a:pPr>
-            <a:r>
-              <a:t>6. Kết quả xây dựng Giao diện Web App Quản lý (Nguyễn Tuấn Sơn)</a:t>
-            </a:r>
-          </a:p>
-        </p:txBody>
-      </p:sp>
-      <p:sp>
-        <p:nvSpPr>
-          <p:cNvPr id="5" name="TextBox 4"/>
-          <p:cNvSpPr txBox="1"/>
-          <p:nvPr/>
-        </p:nvSpPr>
-        <p:spPr>
-          <a:xfrm>
-            <a:off x="594360" y="6446520"/>
-            <a:ext cx="10972800" cy="274320"/>
-          </a:xfrm>
-          <a:prstGeom prst="rect">
-            <a:avLst/>
-          </a:prstGeom>
-          <a:noFill/>
-        </p:spPr>
-        <p:txBody>
-          <a:bodyPr wrap="none">
-            <a:spAutoFit/>
-          </a:bodyPr>
-          <a:lstStyle/>
-          <a:p>
-            <a:pPr>
-              <a:defRPr sz="950">
-                <a:solidFill>
-                  <a:srgbClr val="5F6C7D"/>
-                </a:solidFill>
-              </a:defRPr>
-            </a:pPr>
-            <a:r>
-              <a:t>Trường Đại học Công nghệ – ĐHQGHN  |  Nhóm 13: Nguyễn Tuấn Sơn – Vũ Hữu Hoạt                                                                                     Slide 7 / 10</a:t>
-            </a:r>
-          </a:p>
-        </p:txBody>
-      </p:sp>
-      <p:sp>
-        <p:nvSpPr>
-          <p:cNvPr id="6" name="Rounded Rectangle 5"/>
-          <p:cNvSpPr/>
-          <p:nvPr/>
-        </p:nvSpPr>
-        <p:spPr>
-          <a:xfrm>
-            <a:off x="594360" y="1234440"/>
-            <a:ext cx="6720840" cy="5029200"/>
-          </a:xfrm>
-          <a:prstGeom prst="roundRect">
-            <a:avLst/>
-          </a:prstGeom>
-          <a:solidFill>
-            <a:srgbClr val="FFFFFF"/>
-          </a:solidFill>
-          <a:ln w="15240">
-            <a:solidFill>
-              <a:srgbClr val="DAE1EB"/>
-            </a:solidFill>
-          </a:ln>
-        </p:spPr>
-        <p:style>
-          <a:lnRef idx="1">
-            <a:schemeClr val="accent1"/>
-          </a:lnRef>
-          <a:fillRef idx="3">
-            <a:schemeClr val="accent1"/>
-          </a:fillRef>
-          <a:effectRef idx="2">
-            <a:schemeClr val="accent1"/>
-          </a:effectRef>
-          <a:fontRef idx="minor">
-            <a:schemeClr val="lt1"/>
-          </a:fontRef>
-        </p:style>
-        <p:txBody>
-          <a:bodyPr rtlCol="0" anchor="ctr"/>
-          <a:lstStyle/>
-          <a:p>
-            <a:pPr algn="ctr"/>
-          </a:p>
-        </p:txBody>
-      </p:sp>
       <p:pic>
         <p:nvPicPr>
-          <p:cNvPr id="7" name="Picture 6" descr="web_dashboard.png"/>
+          <p:cNvPr id="6" name="Picture 5" descr="web_dashboard.png"/>
           <p:cNvPicPr>
             <a:picLocks noChangeAspect="1"/>
           </p:cNvPicPr>
@@ -7484,8 +5690,8 @@
         </p:blipFill>
         <p:spPr>
           <a:xfrm>
-            <a:off x="704088" y="1532012"/>
-            <a:ext cx="6501384" cy="4086584"/>
+            <a:off x="894657" y="1444752"/>
+            <a:ext cx="6531725" cy="4105656"/>
           </a:xfrm>
           <a:prstGeom prst="rect">
             <a:avLst/>
@@ -7494,14 +5700,14 @@
       </p:pic>
       <p:sp>
         <p:nvSpPr>
-          <p:cNvPr id="8" name="TextBox 7"/>
+          <p:cNvPr id="7" name="TextBox 6"/>
           <p:cNvSpPr txBox="1"/>
           <p:nvPr/>
         </p:nvSpPr>
         <p:spPr>
           <a:xfrm>
-            <a:off x="704088" y="5879592"/>
-            <a:ext cx="6501384" cy="347472"/>
+            <a:off x="731520" y="5623560"/>
+            <a:ext cx="6858000" cy="320040"/>
           </a:xfrm>
           <a:prstGeom prst="rect">
             <a:avLst/>
@@ -7509,79 +5715,35 @@
           <a:noFill/>
         </p:spPr>
         <p:txBody>
-          <a:bodyPr wrap="square">
+          <a:bodyPr wrap="none" lIns="0" tIns="0" rIns="0" bIns="0">
             <a:spAutoFit/>
           </a:bodyPr>
           <a:lstStyle/>
           <a:p>
             <a:pPr algn="ctr">
-              <a:defRPr sz="1000" b="1">
-                <a:solidFill>
-                  <a:srgbClr val="0B2347"/>
-                </a:solidFill>
-              </a:defRPr>
-            </a:pPr>
-            <a:r>
-              <a:t>Hình 6.1: Giao diện Web App thực tế (Thiết kế tối giản Shadcn UI, rõ ràng, dễ thao tác)</a:t>
-            </a:r>
-          </a:p>
-        </p:txBody>
-      </p:sp>
-      <p:sp>
-        <p:nvSpPr>
-          <p:cNvPr id="9" name="Rounded Rectangle 8"/>
-          <p:cNvSpPr/>
-          <p:nvPr/>
-        </p:nvSpPr>
-        <p:spPr>
-          <a:xfrm>
-            <a:off x="7498079" y="1234440"/>
-            <a:ext cx="4096512" cy="5029200"/>
-          </a:xfrm>
-          <a:prstGeom prst="roundRect">
-            <a:avLst/>
-          </a:prstGeom>
-          <a:solidFill>
-            <a:srgbClr val="FFFFFF"/>
-          </a:solidFill>
-          <a:ln w="19050">
-            <a:solidFill>
-              <a:srgbClr val="10559A"/>
-            </a:solidFill>
-          </a:ln>
-        </p:spPr>
-        <p:style>
-          <a:lnRef idx="1">
-            <a:schemeClr val="accent1"/>
-          </a:lnRef>
-          <a:fillRef idx="3">
-            <a:schemeClr val="accent1"/>
-          </a:fillRef>
-          <a:effectRef idx="2">
-            <a:schemeClr val="accent1"/>
-          </a:effectRef>
-          <a:fontRef idx="minor">
-            <a:schemeClr val="lt1"/>
-          </a:fontRef>
-        </p:style>
-        <p:txBody>
-          <a:bodyPr rtlCol="0" anchor="ctr"/>
-          <a:lstStyle/>
-          <a:p>
-            <a:pPr algn="ctr"/>
-          </a:p>
-        </p:txBody>
-      </p:sp>
-      <p:sp>
-        <p:nvSpPr>
-          <p:cNvPr id="10" name="TextBox 9"/>
+              <a:defRPr sz="1100" b="1">
+                <a:solidFill>
+                  <a:srgbClr val="646E7D"/>
+                </a:solidFill>
+                <a:latin typeface="Arial"/>
+              </a:defRPr>
+            </a:pPr>
+            <a:r>
+              <a:t>Hình 3: Giao diện Web App thực tế (Đang chạy tại smartdoor-nhom13-data.vercel.app)</a:t>
+            </a:r>
+          </a:p>
+        </p:txBody>
+      </p:sp>
+      <p:sp>
+        <p:nvSpPr>
+          <p:cNvPr id="8" name="TextBox 7"/>
           <p:cNvSpPr txBox="1"/>
           <p:nvPr/>
         </p:nvSpPr>
         <p:spPr>
           <a:xfrm>
-            <a:off x="7699247" y="1399032"/>
-            <a:ext cx="3694176" cy="4736592"/>
+            <a:off x="7863840" y="1371600"/>
+            <a:ext cx="3657600" cy="4572000"/>
           </a:xfrm>
           <a:prstGeom prst="rect">
             <a:avLst/>
@@ -7589,173 +5751,98 @@
           <a:noFill/>
         </p:spPr>
         <p:txBody>
-          <a:bodyPr wrap="square" lIns="0" tIns="0" rIns="0" bIns="0">
+          <a:bodyPr wrap="square">
             <a:spAutoFit/>
           </a:bodyPr>
           <a:lstStyle/>
           <a:p>
             <a:pPr>
               <a:spcAft>
-                <a:spcPts val="300"/>
+                <a:spcPts val="1000"/>
               </a:spcAft>
-              <a:defRPr sz="1450" b="1">
-                <a:solidFill>
-                  <a:srgbClr val="10559A"/>
-                </a:solidFill>
-              </a:defRPr>
-            </a:pPr>
-            <a:r>
-              <a:t>Các tính năng đã hoàn thiện trên Web</a:t>
+              <a:defRPr b="1" sz="1600">
+                <a:solidFill>
+                  <a:srgbClr val="0E52A0"/>
+                </a:solidFill>
+              </a:defRPr>
+            </a:pPr>
+            <a:r>
+              <a:t>Tính năng trên Web App:</a:t>
             </a:r>
           </a:p>
           <a:p>
             <a:pPr>
               <a:spcAft>
-                <a:spcPts val="700"/>
+                <a:spcPts val="800"/>
               </a:spcAft>
-              <a:defRPr sz="1050">
-                <a:solidFill>
-                  <a:srgbClr val="5F6C7D"/>
-                </a:solidFill>
-              </a:defRPr>
-            </a:pPr>
-            <a:r>
-              <a:t>Hoạt động trên cả Điện thoại &amp; Máy tính</a:t>
+              <a:defRPr sz="1300">
+                <a:solidFill>
+                  <a:srgbClr val="141821"/>
+                </a:solidFill>
+              </a:defRPr>
+            </a:pPr>
+            <a:r>
+              <a:t>• Giao diện tối giản: Nền sáng, font chữ Inter rõ ràng, dùng tốt trên cả điện thoại và máy tính.</a:t>
             </a:r>
           </a:p>
           <a:p>
             <a:pPr>
               <a:spcAft>
-                <a:spcPts val="450"/>
+                <a:spcPts val="800"/>
               </a:spcAft>
-              <a:defRPr sz="1080">
-                <a:solidFill>
-                  <a:srgbClr val="141C28"/>
-                </a:solidFill>
-              </a:defRPr>
-            </a:pPr>
-            <a:r>
-              <a:t>•  1. Bảng điều khiển (Dashboard):</a:t>
+              <a:defRPr sz="1300">
+                <a:solidFill>
+                  <a:srgbClr val="141821"/>
+                </a:solidFill>
+              </a:defRPr>
+            </a:pPr>
+            <a:r>
+              <a:t>• Bảng điều khiển: Bấm nút mở khóa từ xa, xem trạng thái cửa và màn hình LCD 16x2 ảo theo thời gian thực.</a:t>
             </a:r>
           </a:p>
           <a:p>
             <a:pPr>
               <a:spcAft>
-                <a:spcPts val="450"/>
+                <a:spcPts val="800"/>
               </a:spcAft>
-              <a:defRPr sz="1080">
-                <a:solidFill>
-                  <a:srgbClr val="141C28"/>
-                </a:solidFill>
-              </a:defRPr>
-            </a:pPr>
-            <a:r>
-              <a:t>•      • Hiển thị trạng thái khóa 12V trực quan &amp; đếm ngược thời gian tự đóng.</a:t>
+              <a:defRPr sz="1300">
+                <a:solidFill>
+                  <a:srgbClr val="141821"/>
+                </a:solidFill>
+              </a:defRPr>
+            </a:pPr>
+            <a:r>
+              <a:t>• Nhật ký ra vào: Ghi nhận giờ, phương thức (Vân tay/RFID/PIN) và kết quả mở cửa; hỗ trợ xuất file CSV.</a:t>
             </a:r>
           </a:p>
           <a:p>
             <a:pPr>
               <a:spcAft>
-                <a:spcPts val="450"/>
+                <a:spcPts val="800"/>
               </a:spcAft>
-              <a:defRPr sz="1080">
-                <a:solidFill>
-                  <a:srgbClr val="141C28"/>
-                </a:solidFill>
-              </a:defRPr>
-            </a:pPr>
-            <a:r>
-              <a:t>•      • Nút nhấn Mở khóa từ xa &amp; Khóa khẩn cấp qua Wi-Fi.</a:t>
+              <a:defRPr sz="1300">
+                <a:solidFill>
+                  <a:srgbClr val="141821"/>
+                </a:solidFill>
+              </a:defRPr>
+            </a:pPr>
+            <a:r>
+              <a:t>• Cấu hình hệ thống: Đổi mật khẩu Keypad, chỉnh chế độ 1 lớp / 2 lớp.</a:t>
             </a:r>
           </a:p>
           <a:p>
             <a:pPr>
               <a:spcAft>
-                <a:spcPts val="450"/>
+                <a:spcPts val="800"/>
               </a:spcAft>
-              <a:defRPr sz="1080">
-                <a:solidFill>
-                  <a:srgbClr val="141C28"/>
-                </a:solidFill>
-              </a:defRPr>
-            </a:pPr>
-            <a:r>
-              <a:t>•      • Màn hình LCD 16x2 Live Mirror phản chiếu chính xác từng dòng chữ tại cửa.</a:t>
-            </a:r>
-          </a:p>
-          <a:p>
-            <a:pPr>
-              <a:spcAft>
-                <a:spcPts val="450"/>
-              </a:spcAft>
-              <a:defRPr sz="1080">
-                <a:solidFill>
-                  <a:srgbClr val="141C28"/>
-                </a:solidFill>
-              </a:defRPr>
-            </a:pPr>
-            <a:r>
-              <a:t>•  2. Nhật ký lịch sử ra vào:</a:t>
-            </a:r>
-          </a:p>
-          <a:p>
-            <a:pPr>
-              <a:spcAft>
-                <a:spcPts val="450"/>
-              </a:spcAft>
-              <a:defRPr sz="1080">
-                <a:solidFill>
-                  <a:srgbClr val="141C28"/>
-                </a:solidFill>
-              </a:defRPr>
-            </a:pPr>
-            <a:r>
-              <a:t>•      • Ghi nhận Thời gian thực, Phương thức, Tên người dùng, Trạng thái Hợp lệ/Từ chối.</a:t>
-            </a:r>
-          </a:p>
-          <a:p>
-            <a:pPr>
-              <a:spcAft>
-                <a:spcPts val="450"/>
-              </a:spcAft>
-              <a:defRPr sz="1080">
-                <a:solidFill>
-                  <a:srgbClr val="141C28"/>
-                </a:solidFill>
-              </a:defRPr>
-            </a:pPr>
-            <a:r>
-              <a:t>•      • Hỗ trợ lọc theo phương thức và Xuất file .CSV phục vụ báo cáo.</a:t>
-            </a:r>
-          </a:p>
-          <a:p>
-            <a:pPr>
-              <a:spcAft>
-                <a:spcPts val="450"/>
-              </a:spcAft>
-              <a:defRPr sz="1080">
-                <a:solidFill>
-                  <a:srgbClr val="141C28"/>
-                </a:solidFill>
-              </a:defRPr>
-            </a:pPr>
-            <a:r>
-              <a:t>•  3. Quản lý Vân tay &amp; Thẻ RFID:</a:t>
-            </a:r>
-          </a:p>
-          <a:p>
-            <a:pPr>
-              <a:spcAft>
-                <a:spcPts val="450"/>
-              </a:spcAft>
-              <a:defRPr sz="1080">
-                <a:solidFill>
-                  <a:srgbClr val="141C28"/>
-                </a:solidFill>
-              </a:defRPr>
-            </a:pPr>
-            <a:r>
-              <a:t>•      • Đăng ký mẫu vân tay mới và Quét thêm thẻ RFID trực tiếp từ giao diện Web.</a:t>
+              <a:defRPr sz="1300">
+                <a:solidFill>
+                  <a:srgbClr val="141821"/>
+                </a:solidFill>
+              </a:defRPr>
+            </a:pPr>
+            <a:r>
+              <a:t>• Đã deploy Vercel: Có đường link online để thầy cô và nhóm test thử mọi lúc.</a:t>
             </a:r>
           </a:p>
         </p:txBody>
@@ -7780,57 +5867,14 @@
       <p:grpSpPr/>
       <p:sp>
         <p:nvSpPr>
-          <p:cNvPr id="2" name="Rectangle 1"/>
-          <p:cNvSpPr/>
-          <p:nvPr/>
-        </p:nvSpPr>
-        <p:spPr>
-          <a:xfrm>
-            <a:off x="0" y="0"/>
-            <a:ext cx="12191695" cy="100584"/>
-          </a:xfrm>
-          <a:prstGeom prst="rect">
-            <a:avLst/>
-          </a:prstGeom>
-          <a:solidFill>
-            <a:srgbClr val="10559A"/>
-          </a:solidFill>
-          <a:ln>
-            <a:noFill/>
-          </a:ln>
-        </p:spPr>
-        <p:style>
-          <a:lnRef idx="1">
-            <a:schemeClr val="accent1"/>
-          </a:lnRef>
-          <a:fillRef idx="3">
-            <a:schemeClr val="accent1"/>
-          </a:fillRef>
-          <a:effectRef idx="2">
-            <a:schemeClr val="accent1"/>
-          </a:effectRef>
-          <a:fontRef idx="minor">
-            <a:schemeClr val="lt1"/>
-          </a:fontRef>
-        </p:style>
-        <p:txBody>
-          <a:bodyPr rtlCol="0" anchor="ctr"/>
-          <a:lstStyle/>
-          <a:p>
-            <a:pPr algn="ctr"/>
-          </a:p>
-        </p:txBody>
-      </p:sp>
-      <p:sp>
-        <p:nvSpPr>
-          <p:cNvPr id="3" name="TextBox 2"/>
+          <p:cNvPr id="2" name="TextBox 1"/>
           <p:cNvSpPr txBox="1"/>
           <p:nvPr/>
         </p:nvSpPr>
         <p:spPr>
           <a:xfrm>
-            <a:off x="594360" y="292608"/>
-            <a:ext cx="9601200" cy="274320"/>
+            <a:off x="731520" y="365760"/>
+            <a:ext cx="9144000" cy="274320"/>
           </a:xfrm>
           <a:prstGeom prst="rect">
             <a:avLst/>
@@ -7844,28 +5888,29 @@
           <a:lstStyle/>
           <a:p>
             <a:pPr>
-              <a:defRPr sz="1050" b="1">
-                <a:solidFill>
-                  <a:srgbClr val="10559A"/>
-                </a:solidFill>
-              </a:defRPr>
-            </a:pPr>
-            <a:r>
-              <a:t>BÁO CÁO TIẾN ĐỘ GIỮA KỲ — ĐỒ ÁN CƠ ĐIỆN TỬ (NHÓM 13)</a:t>
-            </a:r>
-          </a:p>
-        </p:txBody>
-      </p:sp>
-      <p:sp>
-        <p:nvSpPr>
-          <p:cNvPr id="4" name="TextBox 3"/>
+              <a:defRPr sz="1100" b="1">
+                <a:solidFill>
+                  <a:srgbClr val="0E52A0"/>
+                </a:solidFill>
+                <a:latin typeface="Arial"/>
+              </a:defRPr>
+            </a:pPr>
+            <a:r>
+              <a:t>BÁO CÁO GIỮA KỲ — ĐỒ ÁN CƠ ĐIỆN TỬ (NHÓM 13)</a:t>
+            </a:r>
+          </a:p>
+        </p:txBody>
+      </p:sp>
+      <p:sp>
+        <p:nvSpPr>
+          <p:cNvPr id="3" name="TextBox 2"/>
           <p:cNvSpPr txBox="1"/>
           <p:nvPr/>
         </p:nvSpPr>
         <p:spPr>
           <a:xfrm>
-            <a:off x="594360" y="566928"/>
-            <a:ext cx="10515600" cy="502920"/>
+            <a:off x="731520" y="658368"/>
+            <a:ext cx="10515600" cy="548640"/>
           </a:xfrm>
           <a:prstGeom prst="rect">
             <a:avLst/>
@@ -7879,28 +5924,29 @@
           <a:lstStyle/>
           <a:p>
             <a:pPr>
-              <a:defRPr sz="2100" b="1">
-                <a:solidFill>
-                  <a:srgbClr val="0B2347"/>
-                </a:solidFill>
-              </a:defRPr>
-            </a:pPr>
-            <a:r>
-              <a:t>7. Triển khai Cloud Vercel &amp; Bộ giả lập phần cứng kiểm thử</a:t>
-            </a:r>
-          </a:p>
-        </p:txBody>
-      </p:sp>
-      <p:sp>
-        <p:nvSpPr>
-          <p:cNvPr id="5" name="TextBox 4"/>
+              <a:defRPr sz="2200" b="1">
+                <a:solidFill>
+                  <a:srgbClr val="141821"/>
+                </a:solidFill>
+                <a:latin typeface="Arial"/>
+              </a:defRPr>
+            </a:pPr>
+            <a:r>
+              <a:t>7. Tổng kết tiến độ giữa kỳ &amp; Kế hoạch tiếp theo</a:t>
+            </a:r>
+          </a:p>
+        </p:txBody>
+      </p:sp>
+      <p:sp>
+        <p:nvSpPr>
+          <p:cNvPr id="4" name="TextBox 3"/>
           <p:cNvSpPr txBox="1"/>
           <p:nvPr/>
         </p:nvSpPr>
         <p:spPr>
           <a:xfrm>
-            <a:off x="594360" y="6446520"/>
-            <a:ext cx="10972800" cy="274320"/>
+            <a:off x="731520" y="6309360"/>
+            <a:ext cx="10698480" cy="274320"/>
           </a:xfrm>
           <a:prstGeom prst="rect">
             <a:avLst/>
@@ -7908,103 +5954,35 @@
           <a:noFill/>
         </p:spPr>
         <p:txBody>
-          <a:bodyPr wrap="none">
+          <a:bodyPr wrap="none" lIns="0" tIns="0" rIns="0" bIns="0">
             <a:spAutoFit/>
           </a:bodyPr>
           <a:lstStyle/>
           <a:p>
             <a:pPr>
-              <a:defRPr sz="950">
-                <a:solidFill>
-                  <a:srgbClr val="5F6C7D"/>
-                </a:solidFill>
-              </a:defRPr>
-            </a:pPr>
-            <a:r>
-              <a:t>Trường Đại học Công nghệ – ĐHQGHN  |  Nhóm 13: Nguyễn Tuấn Sơn – Vũ Hữu Hoạt                                                                                     Slide 8 / 10</a:t>
-            </a:r>
-          </a:p>
-        </p:txBody>
-      </p:sp>
-      <p:sp>
-        <p:nvSpPr>
-          <p:cNvPr id="6" name="Rounded Rectangle 5"/>
-          <p:cNvSpPr/>
-          <p:nvPr/>
-        </p:nvSpPr>
-        <p:spPr>
-          <a:xfrm>
-            <a:off x="594360" y="1234440"/>
-            <a:ext cx="6720840" cy="5029200"/>
-          </a:xfrm>
-          <a:prstGeom prst="roundRect">
-            <a:avLst/>
-          </a:prstGeom>
-          <a:solidFill>
-            <a:srgbClr val="FFFFFF"/>
-          </a:solidFill>
-          <a:ln w="15240">
-            <a:solidFill>
-              <a:srgbClr val="DAE1EB"/>
-            </a:solidFill>
-          </a:ln>
-        </p:spPr>
-        <p:style>
-          <a:lnRef idx="1">
-            <a:schemeClr val="accent1"/>
-          </a:lnRef>
-          <a:fillRef idx="3">
-            <a:schemeClr val="accent1"/>
-          </a:fillRef>
-          <a:effectRef idx="2">
-            <a:schemeClr val="accent1"/>
-          </a:effectRef>
-          <a:fontRef idx="minor">
-            <a:schemeClr val="lt1"/>
-          </a:fontRef>
-        </p:style>
-        <p:txBody>
-          <a:bodyPr rtlCol="0" anchor="ctr"/>
-          <a:lstStyle/>
-          <a:p>
-            <a:pPr algn="ctr"/>
-          </a:p>
-        </p:txBody>
-      </p:sp>
-      <p:pic>
-        <p:nvPicPr>
-          <p:cNvPr id="7" name="Picture 6" descr="vercel_deploy.png"/>
-          <p:cNvPicPr>
-            <a:picLocks noChangeAspect="1"/>
-          </p:cNvPicPr>
-          <p:nvPr/>
-        </p:nvPicPr>
-        <p:blipFill>
-          <a:blip r:embed="rId2"/>
-          <a:stretch>
-            <a:fillRect/>
-          </a:stretch>
-        </p:blipFill>
-        <p:spPr>
-          <a:xfrm>
-            <a:off x="704088" y="1749964"/>
-            <a:ext cx="6501384" cy="3650679"/>
-          </a:xfrm>
-          <a:prstGeom prst="rect">
-            <a:avLst/>
-          </a:prstGeom>
-        </p:spPr>
-      </p:pic>
-      <p:sp>
-        <p:nvSpPr>
-          <p:cNvPr id="8" name="TextBox 7"/>
+              <a:defRPr sz="1000">
+                <a:solidFill>
+                  <a:srgbClr val="646E7D"/>
+                </a:solidFill>
+                <a:latin typeface="Arial"/>
+              </a:defRPr>
+            </a:pPr>
+            <a:r>
+              <a:t>Đề tài Cửa bảo mật — Nguyễn Tuấn Sơn, Vũ Hữu Hoạt (UET)                                                                     Trang 8 / 8</a:t>
+            </a:r>
+          </a:p>
+        </p:txBody>
+      </p:sp>
+      <p:sp>
+        <p:nvSpPr>
+          <p:cNvPr id="5" name="TextBox 4"/>
           <p:cNvSpPr txBox="1"/>
           <p:nvPr/>
         </p:nvSpPr>
         <p:spPr>
           <a:xfrm>
-            <a:off x="704088" y="5879592"/>
-            <a:ext cx="6501384" cy="347472"/>
+            <a:off x="731520" y="1371600"/>
+            <a:ext cx="5120640" cy="4572000"/>
           </a:xfrm>
           <a:prstGeom prst="rect">
             <a:avLst/>
@@ -8017,74 +5995,92 @@
           </a:bodyPr>
           <a:lstStyle/>
           <a:p>
-            <a:pPr algn="ctr">
-              <a:defRPr sz="1000" b="1">
-                <a:solidFill>
-                  <a:srgbClr val="0B2347"/>
-                </a:solidFill>
-              </a:defRPr>
-            </a:pPr>
-            <a:r>
-              <a:t>Hình 7.1: Hệ thống mã nguồn trên GitHub đã được triển khai thành công lên tên miền Vercel</a:t>
-            </a:r>
-          </a:p>
-        </p:txBody>
-      </p:sp>
-      <p:sp>
-        <p:nvSpPr>
-          <p:cNvPr id="9" name="Rounded Rectangle 8"/>
-          <p:cNvSpPr/>
-          <p:nvPr/>
-        </p:nvSpPr>
-        <p:spPr>
-          <a:xfrm>
-            <a:off x="7498079" y="1234440"/>
-            <a:ext cx="4096512" cy="5029200"/>
-          </a:xfrm>
-          <a:prstGeom prst="roundRect">
-            <a:avLst/>
-          </a:prstGeom>
-          <a:solidFill>
-            <a:srgbClr val="FFFFFF"/>
-          </a:solidFill>
-          <a:ln w="19050">
-            <a:solidFill>
-              <a:srgbClr val="10559A"/>
-            </a:solidFill>
-          </a:ln>
-        </p:spPr>
-        <p:style>
-          <a:lnRef idx="1">
-            <a:schemeClr val="accent1"/>
-          </a:lnRef>
-          <a:fillRef idx="3">
-            <a:schemeClr val="accent1"/>
-          </a:fillRef>
-          <a:effectRef idx="2">
-            <a:schemeClr val="accent1"/>
-          </a:effectRef>
-          <a:fontRef idx="minor">
-            <a:schemeClr val="lt1"/>
-          </a:fontRef>
-        </p:style>
-        <p:txBody>
-          <a:bodyPr rtlCol="0" anchor="ctr"/>
-          <a:lstStyle/>
-          <a:p>
-            <a:pPr algn="ctr"/>
-          </a:p>
-        </p:txBody>
-      </p:sp>
-      <p:sp>
-        <p:nvSpPr>
-          <p:cNvPr id="10" name="TextBox 9"/>
+            <a:pPr>
+              <a:spcAft>
+                <a:spcPts val="1200"/>
+              </a:spcAft>
+              <a:defRPr b="1" sz="1600">
+                <a:solidFill>
+                  <a:srgbClr val="0E52A0"/>
+                </a:solidFill>
+              </a:defRPr>
+            </a:pPr>
+            <a:r>
+              <a:t>Kết quả đạt được (Giai đoạn 1 &amp; 2):</a:t>
+            </a:r>
+          </a:p>
+          <a:p>
+            <a:pPr>
+              <a:spcAft>
+                <a:spcPts val="1000"/>
+              </a:spcAft>
+              <a:defRPr sz="1350">
+                <a:solidFill>
+                  <a:srgbClr val="141821"/>
+                </a:solidFill>
+              </a:defRPr>
+            </a:pPr>
+            <a:r>
+              <a:t>✔ Linh kiện: Đã mua đủ 100% linh kiện chính và phụ kiện (AS608, RC522, Keypad 4x4, LCD I2C, ESP32, Khóa 12V).</a:t>
+            </a:r>
+          </a:p>
+          <a:p>
+            <a:pPr>
+              <a:spcAft>
+                <a:spcPts val="1000"/>
+              </a:spcAft>
+              <a:defRPr sz="1350">
+                <a:solidFill>
+                  <a:srgbClr val="141821"/>
+                </a:solidFill>
+              </a:defRPr>
+            </a:pPr>
+            <a:r>
+              <a:t>✔ Nghiên cứu kỹ thuật: Hiểu rõ datasheet các module, giao thức UART/SPI/I2C và cách quét phím ma trận.</a:t>
+            </a:r>
+          </a:p>
+          <a:p>
+            <a:pPr>
+              <a:spcAft>
+                <a:spcPts val="1000"/>
+              </a:spcAft>
+              <a:defRPr sz="1350">
+                <a:solidFill>
+                  <a:srgbClr val="141821"/>
+                </a:solidFill>
+              </a:defRPr>
+            </a:pPr>
+            <a:r>
+              <a:t>✔ Phần cứng: Hoàn thành sơ đồ nguyên lý và layout PCB 2 lớp, đã đo chuẩn chân cắm linh kiện.</a:t>
+            </a:r>
+          </a:p>
+          <a:p>
+            <a:pPr>
+              <a:spcAft>
+                <a:spcPts val="1000"/>
+              </a:spcAft>
+              <a:defRPr sz="1350">
+                <a:solidFill>
+                  <a:srgbClr val="141821"/>
+                </a:solidFill>
+              </a:defRPr>
+            </a:pPr>
+            <a:r>
+              <a:t>✔ Phần mềm: Hoàn thành code ESP32 Non-blocking, làm xong Web App quản lý có bảo mật 2 lớp và đưa lên Vercel.</a:t>
+            </a:r>
+          </a:p>
+        </p:txBody>
+      </p:sp>
+      <p:sp>
+        <p:nvSpPr>
+          <p:cNvPr id="6" name="TextBox 5"/>
           <p:cNvSpPr txBox="1"/>
           <p:nvPr/>
         </p:nvSpPr>
         <p:spPr>
           <a:xfrm>
-            <a:off x="7699247" y="1399032"/>
-            <a:ext cx="3694176" cy="4736592"/>
+            <a:off x="6309360" y="1371600"/>
+            <a:ext cx="5120640" cy="4572000"/>
           </a:xfrm>
           <a:prstGeom prst="rect">
             <a:avLst/>
@@ -8092,791 +6088,83 @@
           <a:noFill/>
         </p:spPr>
         <p:txBody>
-          <a:bodyPr wrap="square" lIns="0" tIns="0" rIns="0" bIns="0">
+          <a:bodyPr wrap="square">
             <a:spAutoFit/>
           </a:bodyPr>
           <a:lstStyle/>
           <a:p>
             <a:pPr>
               <a:spcAft>
-                <a:spcPts val="300"/>
+                <a:spcPts val="1200"/>
               </a:spcAft>
-              <a:defRPr sz="1450" b="1">
-                <a:solidFill>
-                  <a:srgbClr val="10559A"/>
-                </a:solidFill>
-              </a:defRPr>
-            </a:pPr>
-            <a:r>
-              <a:t>Kiểm thử độc lập &amp; Tên miền truy cập</a:t>
+              <a:defRPr b="1" sz="1600">
+                <a:solidFill>
+                  <a:srgbClr val="0E52A0"/>
+                </a:solidFill>
+              </a:defRPr>
+            </a:pPr>
+            <a:r>
+              <a:t>Kế hoạch nửa cuối học kỳ (Giai đoạn 3 &amp; 4):</a:t>
             </a:r>
           </a:p>
           <a:p>
             <a:pPr>
               <a:spcAft>
-                <a:spcPts val="700"/>
+                <a:spcPts val="1000"/>
               </a:spcAft>
-              <a:defRPr sz="1050">
-                <a:solidFill>
-                  <a:srgbClr val="5F6C7D"/>
-                </a:solidFill>
-              </a:defRPr>
-            </a:pPr>
-            <a:r>
-              <a:t>Sẵn sàng chạy Demo trực tiếp ngay trong buổi báo cáo</a:t>
+              <a:defRPr sz="1350">
+                <a:solidFill>
+                  <a:srgbClr val="141821"/>
+                </a:solidFill>
+              </a:defRPr>
+            </a:pPr>
+            <a:r>
+              <a:t>➔ Gia công mạch in: Nhận bo mạch PCB, hàn linh kiện và đo kiểm tra các mức điện áp nguồn (12V, 5V, 3.3V).</a:t>
             </a:r>
           </a:p>
           <a:p>
             <a:pPr>
               <a:spcAft>
-                <a:spcPts val="450"/>
+                <a:spcPts val="1000"/>
               </a:spcAft>
-              <a:defRPr sz="1100">
-                <a:solidFill>
-                  <a:srgbClr val="141C28"/>
-                </a:solidFill>
-              </a:defRPr>
-            </a:pPr>
-            <a:r>
-              <a:t>•  Kho mã nguồn GitHub của nhóm:</a:t>
+              <a:defRPr sz="1350">
+                <a:solidFill>
+                  <a:srgbClr val="141821"/>
+                </a:solidFill>
+              </a:defRPr>
+            </a:pPr>
+            <a:r>
+              <a:t>➔ Lắp ráp cơ khí: Làm khung mô hình cửa gỗ/mica, gắn khóa chốt 12V, cảm biến vân tay, thẻ từ và bàn phím.</a:t>
             </a:r>
           </a:p>
           <a:p>
             <a:pPr>
               <a:spcAft>
-                <a:spcPts val="450"/>
+                <a:spcPts val="1000"/>
               </a:spcAft>
-              <a:defRPr sz="1100">
-                <a:solidFill>
-                  <a:srgbClr val="141C28"/>
-                </a:solidFill>
-              </a:defRPr>
-            </a:pPr>
-            <a:r>
-              <a:t>•      • github.com/tuansonuet197/smartdoor-nhom13</a:t>
+              <a:defRPr sz="1350">
+                <a:solidFill>
+                  <a:srgbClr val="141821"/>
+                </a:solidFill>
+              </a:defRPr>
+            </a:pPr>
+            <a:r>
+              <a:t>➔ Ghép nối &amp; Thử nghiệm: Nạp code lên mạch thật, kiểm tra độ nhạy quét thẻ/vân tay và thời gian đáp ứng mở cửa.</a:t>
             </a:r>
           </a:p>
           <a:p>
             <a:pPr>
               <a:spcAft>
-                <a:spcPts val="450"/>
+                <a:spcPts val="1000"/>
               </a:spcAft>
-              <a:defRPr sz="1100">
-                <a:solidFill>
-                  <a:srgbClr val="141C28"/>
-                </a:solidFill>
-              </a:defRPr>
-            </a:pPr>
-            <a:r>
-              <a:t>•  Tên miền Web App trực tuyến (Vercel):</a:t>
-            </a:r>
-          </a:p>
-          <a:p>
-            <a:pPr>
-              <a:spcAft>
-                <a:spcPts val="450"/>
-              </a:spcAft>
-              <a:defRPr sz="1100">
-                <a:solidFill>
-                  <a:srgbClr val="141C28"/>
-                </a:solidFill>
-              </a:defRPr>
-            </a:pPr>
-            <a:r>
-              <a:t>•      • smartdoor-nhom13-data.vercel.app</a:t>
-            </a:r>
-          </a:p>
-          <a:p>
-            <a:pPr>
-              <a:spcAft>
-                <a:spcPts val="450"/>
-              </a:spcAft>
-              <a:defRPr sz="1100">
-                <a:solidFill>
-                  <a:srgbClr val="141C28"/>
-                </a:solidFill>
-              </a:defRPr>
-            </a:pPr>
-            <a:r>
-              <a:t>•  Tên miền cục bộ khi chạy trên ESP32:</a:t>
-            </a:r>
-          </a:p>
-          <a:p>
-            <a:pPr>
-              <a:spcAft>
-                <a:spcPts val="450"/>
-              </a:spcAft>
-              <a:defRPr sz="1100">
-                <a:solidFill>
-                  <a:srgbClr val="141C28"/>
-                </a:solidFill>
-              </a:defRPr>
-            </a:pPr>
-            <a:r>
-              <a:t>•      • http://smartdoor.local (mDNS)</a:t>
-            </a:r>
-          </a:p>
-          <a:p>
-            <a:pPr>
-              <a:spcAft>
-                <a:spcPts val="450"/>
-              </a:spcAft>
-              <a:defRPr sz="1100">
-                <a:solidFill>
-                  <a:srgbClr val="141C28"/>
-                </a:solidFill>
-              </a:defRPr>
-            </a:pPr>
-            <a:r>
-              <a:t>•  Bộ giả lập phần cứng (Draggable Simulator):</a:t>
-            </a:r>
-          </a:p>
-          <a:p>
-            <a:pPr>
-              <a:spcAft>
-                <a:spcPts val="450"/>
-              </a:spcAft>
-              <a:defRPr sz="1100">
-                <a:solidFill>
-                  <a:srgbClr val="141C28"/>
-                </a:solidFill>
-              </a:defRPr>
-            </a:pPr>
-            <a:r>
-              <a:t>•      • Tích hợp sẵn bảng giả lập kéo-thả tự do trên góc màn hình Web.</a:t>
-            </a:r>
-          </a:p>
-          <a:p>
-            <a:pPr>
-              <a:spcAft>
-                <a:spcPts val="450"/>
-              </a:spcAft>
-              <a:defRPr sz="1100">
-                <a:solidFill>
-                  <a:srgbClr val="141C28"/>
-                </a:solidFill>
-              </a:defRPr>
-            </a:pPr>
-            <a:r>
-              <a:t>•      • Cho phép bấm thử Bàn phím 4x4 ảo, giả lập quét Vân tay đúng/sai, quẹt Thẻ RFID đúng/lạ để kiểm chứng toàn bộ luồng logic 1 lớp &amp; 2FA trước khi hàn mạch.</a:t>
-            </a:r>
-          </a:p>
-        </p:txBody>
-      </p:sp>
-    </p:spTree>
-  </p:cSld>
-  <p:clrMapOvr>
-    <a:masterClrMapping/>
-  </p:clrMapOvr>
-</p:sld>
-</file>
-
-<file path=ppt/slides/slide9.xml><?xml version="1.0" encoding="utf-8"?>
-<p:sld xmlns:a="http://schemas.openxmlformats.org/drawingml/2006/main" xmlns:p="http://schemas.openxmlformats.org/presentationml/2006/main" xmlns:r="http://schemas.openxmlformats.org/officeDocument/2006/relationships">
-  <p:cSld>
-    <p:spTree>
-      <p:nvGrpSpPr>
-        <p:cNvPr id="1" name=""/>
-        <p:cNvGrpSpPr/>
-        <p:nvPr/>
-      </p:nvGrpSpPr>
-      <p:grpSpPr/>
-      <p:sp>
-        <p:nvSpPr>
-          <p:cNvPr id="2" name="Rectangle 1"/>
-          <p:cNvSpPr/>
-          <p:nvPr/>
-        </p:nvSpPr>
-        <p:spPr>
-          <a:xfrm>
-            <a:off x="0" y="0"/>
-            <a:ext cx="12191695" cy="100584"/>
-          </a:xfrm>
-          <a:prstGeom prst="rect">
-            <a:avLst/>
-          </a:prstGeom>
-          <a:solidFill>
-            <a:srgbClr val="10559A"/>
-          </a:solidFill>
-          <a:ln>
-            <a:noFill/>
-          </a:ln>
-        </p:spPr>
-        <p:style>
-          <a:lnRef idx="1">
-            <a:schemeClr val="accent1"/>
-          </a:lnRef>
-          <a:fillRef idx="3">
-            <a:schemeClr val="accent1"/>
-          </a:fillRef>
-          <a:effectRef idx="2">
-            <a:schemeClr val="accent1"/>
-          </a:effectRef>
-          <a:fontRef idx="minor">
-            <a:schemeClr val="lt1"/>
-          </a:fontRef>
-        </p:style>
-        <p:txBody>
-          <a:bodyPr rtlCol="0" anchor="ctr"/>
-          <a:lstStyle/>
-          <a:p>
-            <a:pPr algn="ctr"/>
-          </a:p>
-        </p:txBody>
-      </p:sp>
-      <p:sp>
-        <p:nvSpPr>
-          <p:cNvPr id="3" name="TextBox 2"/>
-          <p:cNvSpPr txBox="1"/>
-          <p:nvPr/>
-        </p:nvSpPr>
-        <p:spPr>
-          <a:xfrm>
-            <a:off x="594360" y="292608"/>
-            <a:ext cx="9601200" cy="274320"/>
-          </a:xfrm>
-          <a:prstGeom prst="rect">
-            <a:avLst/>
-          </a:prstGeom>
-          <a:noFill/>
-        </p:spPr>
-        <p:txBody>
-          <a:bodyPr wrap="none" lIns="0" tIns="0" rIns="0" bIns="0">
-            <a:spAutoFit/>
-          </a:bodyPr>
-          <a:lstStyle/>
-          <a:p>
-            <a:pPr>
-              <a:defRPr sz="1050" b="1">
-                <a:solidFill>
-                  <a:srgbClr val="10559A"/>
-                </a:solidFill>
-              </a:defRPr>
-            </a:pPr>
-            <a:r>
-              <a:t>BÁO CÁO TIẾN ĐỘ GIỮA KỲ — ĐỒ ÁN CƠ ĐIỆN TỬ (NHÓM 13)</a:t>
-            </a:r>
-          </a:p>
-        </p:txBody>
-      </p:sp>
-      <p:sp>
-        <p:nvSpPr>
-          <p:cNvPr id="4" name="TextBox 3"/>
-          <p:cNvSpPr txBox="1"/>
-          <p:nvPr/>
-        </p:nvSpPr>
-        <p:spPr>
-          <a:xfrm>
-            <a:off x="594360" y="566928"/>
-            <a:ext cx="10515600" cy="502920"/>
-          </a:xfrm>
-          <a:prstGeom prst="rect">
-            <a:avLst/>
-          </a:prstGeom>
-          <a:noFill/>
-        </p:spPr>
-        <p:txBody>
-          <a:bodyPr wrap="none" lIns="0" tIns="0" rIns="0" bIns="0">
-            <a:spAutoFit/>
-          </a:bodyPr>
-          <a:lstStyle/>
-          <a:p>
-            <a:pPr>
-              <a:defRPr sz="2100" b="1">
-                <a:solidFill>
-                  <a:srgbClr val="0B2347"/>
-                </a:solidFill>
-              </a:defRPr>
-            </a:pPr>
-            <a:r>
-              <a:t>8. Đánh giá tiến độ thực hiện so với kế hoạch đề ra</a:t>
-            </a:r>
-          </a:p>
-        </p:txBody>
-      </p:sp>
-      <p:sp>
-        <p:nvSpPr>
-          <p:cNvPr id="5" name="TextBox 4"/>
-          <p:cNvSpPr txBox="1"/>
-          <p:nvPr/>
-        </p:nvSpPr>
-        <p:spPr>
-          <a:xfrm>
-            <a:off x="594360" y="6446520"/>
-            <a:ext cx="10972800" cy="274320"/>
-          </a:xfrm>
-          <a:prstGeom prst="rect">
-            <a:avLst/>
-          </a:prstGeom>
-          <a:noFill/>
-        </p:spPr>
-        <p:txBody>
-          <a:bodyPr wrap="none">
-            <a:spAutoFit/>
-          </a:bodyPr>
-          <a:lstStyle/>
-          <a:p>
-            <a:pPr>
-              <a:defRPr sz="950">
-                <a:solidFill>
-                  <a:srgbClr val="5F6C7D"/>
-                </a:solidFill>
-              </a:defRPr>
-            </a:pPr>
-            <a:r>
-              <a:t>Trường Đại học Công nghệ – ĐHQGHN  |  Nhóm 13: Nguyễn Tuấn Sơn – Vũ Hữu Hoạt                                                                                     Slide 9 / 10</a:t>
-            </a:r>
-          </a:p>
-        </p:txBody>
-      </p:sp>
-      <p:sp>
-        <p:nvSpPr>
-          <p:cNvPr id="6" name="Rounded Rectangle 5"/>
-          <p:cNvSpPr/>
-          <p:nvPr/>
-        </p:nvSpPr>
-        <p:spPr>
-          <a:xfrm>
-            <a:off x="594360" y="1234440"/>
-            <a:ext cx="5394960" cy="2377440"/>
-          </a:xfrm>
-          <a:prstGeom prst="roundRect">
-            <a:avLst/>
-          </a:prstGeom>
-          <a:solidFill>
-            <a:srgbClr val="FFFFFF"/>
-          </a:solidFill>
-          <a:ln w="19050">
-            <a:solidFill>
-              <a:srgbClr val="10559A"/>
-            </a:solidFill>
-          </a:ln>
-        </p:spPr>
-        <p:style>
-          <a:lnRef idx="1">
-            <a:schemeClr val="accent1"/>
-          </a:lnRef>
-          <a:fillRef idx="3">
-            <a:schemeClr val="accent1"/>
-          </a:fillRef>
-          <a:effectRef idx="2">
-            <a:schemeClr val="accent1"/>
-          </a:effectRef>
-          <a:fontRef idx="minor">
-            <a:schemeClr val="lt1"/>
-          </a:fontRef>
-        </p:style>
-        <p:txBody>
-          <a:bodyPr rtlCol="0" anchor="ctr"/>
-          <a:lstStyle/>
-          <a:p>
-            <a:pPr algn="ctr"/>
-          </a:p>
-        </p:txBody>
-      </p:sp>
-      <p:sp>
-        <p:nvSpPr>
-          <p:cNvPr id="7" name="TextBox 6"/>
-          <p:cNvSpPr txBox="1"/>
-          <p:nvPr/>
-        </p:nvSpPr>
-        <p:spPr>
-          <a:xfrm>
-            <a:off x="795528" y="1399032"/>
-            <a:ext cx="4992624" cy="2084832"/>
-          </a:xfrm>
-          <a:prstGeom prst="rect">
-            <a:avLst/>
-          </a:prstGeom>
-          <a:noFill/>
-        </p:spPr>
-        <p:txBody>
-          <a:bodyPr wrap="square" lIns="0" tIns="0" rIns="0" bIns="0">
-            <a:spAutoFit/>
-          </a:bodyPr>
-          <a:lstStyle/>
-          <a:p>
-            <a:pPr>
-              <a:spcAft>
-                <a:spcPts val="300"/>
-              </a:spcAft>
-              <a:defRPr sz="1450" b="1">
-                <a:solidFill>
-                  <a:srgbClr val="10559A"/>
-                </a:solidFill>
-              </a:defRPr>
-            </a:pPr>
-            <a:r>
-              <a:t>Giai đoạn 1 (Tuần 1 – 2): Khảo sát &amp; Mua linh kiện  [ĐÃ HOÀN THÀNH 100%]</a:t>
-            </a:r>
-          </a:p>
-          <a:p>
-            <a:pPr>
-              <a:spcAft>
-                <a:spcPts val="450"/>
-              </a:spcAft>
-              <a:defRPr sz="1100">
-                <a:solidFill>
-                  <a:srgbClr val="141C28"/>
-                </a:solidFill>
-              </a:defRPr>
-            </a:pPr>
-            <a:r>
-              <a:t>•  Chốt sơ đồ tổng thể hệ thống cửa bảo mật 3 phương thức xác thực + Web App.</a:t>
-            </a:r>
-          </a:p>
-          <a:p>
-            <a:pPr>
-              <a:spcAft>
-                <a:spcPts val="450"/>
-              </a:spcAft>
-              <a:defRPr sz="1100">
-                <a:solidFill>
-                  <a:srgbClr val="141C28"/>
-                </a:solidFill>
-              </a:defRPr>
-            </a:pPr>
-            <a:r>
-              <a:t>•  Mua đầy đủ 100% linh kiện: Cảm biến vân tay AS608, RFID RC522 + thẻ S50/NFC, Keypad 4x4 có nắp đậy, màn hình LCD I2C, ESP32, Khóa chốt 12V và linh kiện nguồn.</a:t>
-            </a:r>
-          </a:p>
-        </p:txBody>
-      </p:sp>
-      <p:sp>
-        <p:nvSpPr>
-          <p:cNvPr id="8" name="Rounded Rectangle 7"/>
-          <p:cNvSpPr/>
-          <p:nvPr/>
-        </p:nvSpPr>
-        <p:spPr>
-          <a:xfrm>
-            <a:off x="6199632" y="1234440"/>
-            <a:ext cx="5394960" cy="2377440"/>
-          </a:xfrm>
-          <a:prstGeom prst="roundRect">
-            <a:avLst/>
-          </a:prstGeom>
-          <a:solidFill>
-            <a:srgbClr val="FFFFFF"/>
-          </a:solidFill>
-          <a:ln w="19050">
-            <a:solidFill>
-              <a:srgbClr val="10559A"/>
-            </a:solidFill>
-          </a:ln>
-        </p:spPr>
-        <p:style>
-          <a:lnRef idx="1">
-            <a:schemeClr val="accent1"/>
-          </a:lnRef>
-          <a:fillRef idx="3">
-            <a:schemeClr val="accent1"/>
-          </a:fillRef>
-          <a:effectRef idx="2">
-            <a:schemeClr val="accent1"/>
-          </a:effectRef>
-          <a:fontRef idx="minor">
-            <a:schemeClr val="lt1"/>
-          </a:fontRef>
-        </p:style>
-        <p:txBody>
-          <a:bodyPr rtlCol="0" anchor="ctr"/>
-          <a:lstStyle/>
-          <a:p>
-            <a:pPr algn="ctr"/>
-          </a:p>
-        </p:txBody>
-      </p:sp>
-      <p:sp>
-        <p:nvSpPr>
-          <p:cNvPr id="9" name="TextBox 8"/>
-          <p:cNvSpPr txBox="1"/>
-          <p:nvPr/>
-        </p:nvSpPr>
-        <p:spPr>
-          <a:xfrm>
-            <a:off x="6400800" y="1399032"/>
-            <a:ext cx="4992624" cy="2084832"/>
-          </a:xfrm>
-          <a:prstGeom prst="rect">
-            <a:avLst/>
-          </a:prstGeom>
-          <a:noFill/>
-        </p:spPr>
-        <p:txBody>
-          <a:bodyPr wrap="square" lIns="0" tIns="0" rIns="0" bIns="0">
-            <a:spAutoFit/>
-          </a:bodyPr>
-          <a:lstStyle/>
-          <a:p>
-            <a:pPr>
-              <a:spcAft>
-                <a:spcPts val="300"/>
-              </a:spcAft>
-              <a:defRPr sz="1450" b="1">
-                <a:solidFill>
-                  <a:srgbClr val="10559A"/>
-                </a:solidFill>
-              </a:defRPr>
-            </a:pPr>
-            <a:r>
-              <a:t>Giai đoạn 2 (Tuần 3 – 4): Thiết kế PCB &amp; Web App  [ĐÃ HOÀN THÀNH 100%]</a:t>
-            </a:r>
-          </a:p>
-          <a:p>
-            <a:pPr>
-              <a:spcAft>
-                <a:spcPts val="450"/>
-              </a:spcAft>
-              <a:defRPr sz="1100">
-                <a:solidFill>
-                  <a:srgbClr val="141C28"/>
-                </a:solidFill>
-              </a:defRPr>
-            </a:pPr>
-            <a:r>
-              <a:t>•  Vũ Hữu Hoạt: Đã nghiên cứu datasheet, đo chân linh kiện, hoàn thành vẽ sơ đồ nguyên lý (Schematic) và Layout mạch in PCB 2 lớp.</a:t>
-            </a:r>
-          </a:p>
-          <a:p>
-            <a:pPr>
-              <a:spcAft>
-                <a:spcPts val="450"/>
-              </a:spcAft>
-              <a:defRPr sz="1100">
-                <a:solidFill>
-                  <a:srgbClr val="141C28"/>
-                </a:solidFill>
-              </a:defRPr>
-            </a:pPr>
-            <a:r>
-              <a:t>•  Nguyễn Tuấn Sơn: Đã lập trình xong bộ mã nguồn ESP32 (PlatformIO), hoàn thiện giao diện Web App tích hợp bảo mật 2 lớp (2FA) và đưa lên tên miền Vercel.</a:t>
-            </a:r>
-          </a:p>
-        </p:txBody>
-      </p:sp>
-      <p:sp>
-        <p:nvSpPr>
-          <p:cNvPr id="10" name="Rounded Rectangle 9"/>
-          <p:cNvSpPr/>
-          <p:nvPr/>
-        </p:nvSpPr>
-        <p:spPr>
-          <a:xfrm>
-            <a:off x="594360" y="3840480"/>
-            <a:ext cx="5394960" cy="2423160"/>
-          </a:xfrm>
-          <a:prstGeom prst="roundRect">
-            <a:avLst/>
-          </a:prstGeom>
-          <a:solidFill>
-            <a:srgbClr val="F6F8FB"/>
-          </a:solidFill>
-          <a:ln w="12700">
-            <a:solidFill>
-              <a:srgbClr val="DAE1EB"/>
-            </a:solidFill>
-          </a:ln>
-        </p:spPr>
-        <p:style>
-          <a:lnRef idx="1">
-            <a:schemeClr val="accent1"/>
-          </a:lnRef>
-          <a:fillRef idx="3">
-            <a:schemeClr val="accent1"/>
-          </a:fillRef>
-          <a:effectRef idx="2">
-            <a:schemeClr val="accent1"/>
-          </a:effectRef>
-          <a:fontRef idx="minor">
-            <a:schemeClr val="lt1"/>
-          </a:fontRef>
-        </p:style>
-        <p:txBody>
-          <a:bodyPr rtlCol="0" anchor="ctr"/>
-          <a:lstStyle/>
-          <a:p>
-            <a:pPr algn="ctr"/>
-          </a:p>
-        </p:txBody>
-      </p:sp>
-      <p:sp>
-        <p:nvSpPr>
-          <p:cNvPr id="11" name="TextBox 10"/>
-          <p:cNvSpPr txBox="1"/>
-          <p:nvPr/>
-        </p:nvSpPr>
-        <p:spPr>
-          <a:xfrm>
-            <a:off x="795528" y="4005072"/>
-            <a:ext cx="4992624" cy="2130552"/>
-          </a:xfrm>
-          <a:prstGeom prst="rect">
-            <a:avLst/>
-          </a:prstGeom>
-          <a:noFill/>
-        </p:spPr>
-        <p:txBody>
-          <a:bodyPr wrap="square" lIns="0" tIns="0" rIns="0" bIns="0">
-            <a:spAutoFit/>
-          </a:bodyPr>
-          <a:lstStyle/>
-          <a:p>
-            <a:pPr>
-              <a:spcAft>
-                <a:spcPts val="300"/>
-              </a:spcAft>
-              <a:defRPr sz="1450" b="1">
-                <a:solidFill>
-                  <a:srgbClr val="0B2347"/>
-                </a:solidFill>
-              </a:defRPr>
-            </a:pPr>
-            <a:r>
-              <a:t>Giai đoạn 3 (Tuần 5 – 6): Gia công mạch &amp; Tích hợp  [DỰ KIẾN TIẾP THEO]</a:t>
-            </a:r>
-          </a:p>
-          <a:p>
-            <a:pPr>
-              <a:spcAft>
-                <a:spcPts val="450"/>
-              </a:spcAft>
-              <a:defRPr sz="1100">
-                <a:solidFill>
-                  <a:srgbClr val="141C28"/>
-                </a:solidFill>
-              </a:defRPr>
-            </a:pPr>
-            <a:r>
-              <a:t>•  Vũ Hữu Hoạt: Gia công ăn mòn/đặt in mạch PCB, hàn linh kiện, đo kiểm tra khối nguồn hạ áp 12V -&gt; 5V/3.3V và dựng khung mô hình cửa cơ khí.</a:t>
-            </a:r>
-          </a:p>
-          <a:p>
-            <a:pPr>
-              <a:spcAft>
-                <a:spcPts val="450"/>
-              </a:spcAft>
-              <a:defRPr sz="1100">
-                <a:solidFill>
-                  <a:srgbClr val="141C28"/>
-                </a:solidFill>
-              </a:defRPr>
-            </a:pPr>
-            <a:r>
-              <a:t>•  Nguyễn Tuấn Sơn: Nạp code và hệ thống file LittleFS lên mạch ESP32 thực tế, hiệu chỉnh độ nhạy cảm biến AS608 và RC522 trên bo mạch.</a:t>
-            </a:r>
-          </a:p>
-        </p:txBody>
-      </p:sp>
-      <p:sp>
-        <p:nvSpPr>
-          <p:cNvPr id="12" name="Rounded Rectangle 11"/>
-          <p:cNvSpPr/>
-          <p:nvPr/>
-        </p:nvSpPr>
-        <p:spPr>
-          <a:xfrm>
-            <a:off x="6199632" y="3840480"/>
-            <a:ext cx="5394960" cy="2423160"/>
-          </a:xfrm>
-          <a:prstGeom prst="roundRect">
-            <a:avLst/>
-          </a:prstGeom>
-          <a:solidFill>
-            <a:srgbClr val="F6F8FB"/>
-          </a:solidFill>
-          <a:ln w="12700">
-            <a:solidFill>
-              <a:srgbClr val="DAE1EB"/>
-            </a:solidFill>
-          </a:ln>
-        </p:spPr>
-        <p:style>
-          <a:lnRef idx="1">
-            <a:schemeClr val="accent1"/>
-          </a:lnRef>
-          <a:fillRef idx="3">
-            <a:schemeClr val="accent1"/>
-          </a:fillRef>
-          <a:effectRef idx="2">
-            <a:schemeClr val="accent1"/>
-          </a:effectRef>
-          <a:fontRef idx="minor">
-            <a:schemeClr val="lt1"/>
-          </a:fontRef>
-        </p:style>
-        <p:txBody>
-          <a:bodyPr rtlCol="0" anchor="ctr"/>
-          <a:lstStyle/>
-          <a:p>
-            <a:pPr algn="ctr"/>
-          </a:p>
-        </p:txBody>
-      </p:sp>
-      <p:sp>
-        <p:nvSpPr>
-          <p:cNvPr id="13" name="TextBox 12"/>
-          <p:cNvSpPr txBox="1"/>
-          <p:nvPr/>
-        </p:nvSpPr>
-        <p:spPr>
-          <a:xfrm>
-            <a:off x="6400800" y="4005072"/>
-            <a:ext cx="4992624" cy="2130552"/>
-          </a:xfrm>
-          <a:prstGeom prst="rect">
-            <a:avLst/>
-          </a:prstGeom>
-          <a:noFill/>
-        </p:spPr>
-        <p:txBody>
-          <a:bodyPr wrap="square" lIns="0" tIns="0" rIns="0" bIns="0">
-            <a:spAutoFit/>
-          </a:bodyPr>
-          <a:lstStyle/>
-          <a:p>
-            <a:pPr>
-              <a:spcAft>
-                <a:spcPts val="300"/>
-              </a:spcAft>
-              <a:defRPr sz="1450" b="1">
-                <a:solidFill>
-                  <a:srgbClr val="0B2347"/>
-                </a:solidFill>
-              </a:defRPr>
-            </a:pPr>
-            <a:r>
-              <a:t>Giai đoạn 4 (Tuần 7 – 8): Lắp đặt hoàn thiện &amp; Báo cáo  [DỰ KIẾN]</a:t>
-            </a:r>
-          </a:p>
-          <a:p>
-            <a:pPr>
-              <a:spcAft>
-                <a:spcPts val="450"/>
-              </a:spcAft>
-              <a:defRPr sz="1100">
-                <a:solidFill>
-                  <a:srgbClr val="141C28"/>
-                </a:solidFill>
-              </a:defRPr>
-            </a:pPr>
-            <a:r>
-              <a:t>•  Lắp đặt toàn bộ bo mạch PCB, khóa chốt 12V, LCD, Keypad 4x4, AS608, RC522 lên khung mô hình cửa hoàn chỉnh.</a:t>
-            </a:r>
-          </a:p>
-          <a:p>
-            <a:pPr>
-              <a:spcAft>
-                <a:spcPts val="450"/>
-              </a:spcAft>
-              <a:defRPr sz="1100">
-                <a:solidFill>
-                  <a:srgbClr val="141C28"/>
-                </a:solidFill>
-              </a:defRPr>
-            </a:pPr>
-            <a:r>
-              <a:t>•  Kiểm thử thực nghiệm các kịch bản bảo mật 1 lớp / 2 lớp, trích xuất file CSV lịch sử ra vào và hoàn thiện cuốn Báo cáo đồ án Cơ Điện Tử.</a:t>
+              <a:defRPr sz="1350">
+                <a:solidFill>
+                  <a:srgbClr val="141821"/>
+                </a:solidFill>
+              </a:defRPr>
+            </a:pPr>
+            <a:r>
+              <a:t>➔ Hoàn thiện báo cáo: Thu thập số liệu thực nghiệm và viết cuốn báo cáo đồ án Cơ Điện Tử hoàn chỉnh.</a:t>
             </a:r>
           </a:p>
         </p:txBody>
